--- a/figure/cp4/sae_diagram/fig4-1_sae_module.pptx
+++ b/figure/cp4/sae_diagram/fig4-1_sae_module.pptx
@@ -1,11 +1,12 @@
 
 <file path=ppt/presentation.xml><?xml version="1.0" encoding="utf-8"?>
-<p:presentation xmlns:a="http://schemas.openxmlformats.org/drawingml/2006/main" xmlns:r="http://schemas.openxmlformats.org/officeDocument/2006/relationships" xmlns:p="http://schemas.openxmlformats.org/presentationml/2006/main" saveSubsetFonts="1" autoCompressPictures="0">
+<p:presentation xmlns:a="http://schemas.openxmlformats.org/drawingml/2006/main" xmlns:r="http://schemas.openxmlformats.org/officeDocument/2006/relationships" xmlns:p="http://schemas.openxmlformats.org/presentationml/2006/main" firstSlideNum="1">
   <p:sldMasterIdLst>
-    <p:sldMasterId id="2147483648" r:id="rId1"/>
+    <p:sldMasterId id="2147483648" r:id="rId0"/>
   </p:sldMasterIdLst>
   <p:sldIdLst>
-    <p:sldId id="256" r:id="rId7"/>
+    <p:sldId id="256" r:id="rId1"/>
+    <p:sldId id="257" r:id="rId2"/>
   </p:sldIdLst>
   <p:sldSz cx="9144000" cy="6858000" type="screen4x3"/>
   <p:notesSz cx="6858000" cy="9144000"/>
@@ -13,7 +14,7 @@
     <a:defPPr>
       <a:defRPr lang="en-US"/>
     </a:defPPr>
-    <a:lvl1pPr marL="0" algn="l" defTabSz="457200" rtl="0" eaLnBrk="1" latinLnBrk="0" hangingPunct="1">
+    <a:lvl1pPr marL="0" algn="l" defTabSz="457200" rtl="false" eaLnBrk="true" latinLnBrk="false" hangingPunct="true">
       <a:defRPr sz="1800" kern="1200">
         <a:solidFill>
           <a:schemeClr val="tx1"/>
@@ -23,7 +24,7 @@
         <a:cs typeface="+mn-cs"/>
       </a:defRPr>
     </a:lvl1pPr>
-    <a:lvl2pPr marL="457200" algn="l" defTabSz="457200" rtl="0" eaLnBrk="1" latinLnBrk="0" hangingPunct="1">
+    <a:lvl2pPr marL="457200" algn="l" defTabSz="457200" rtl="false" eaLnBrk="true" latinLnBrk="false" hangingPunct="true">
       <a:defRPr sz="1800" kern="1200">
         <a:solidFill>
           <a:schemeClr val="tx1"/>
@@ -33,7 +34,7 @@
         <a:cs typeface="+mn-cs"/>
       </a:defRPr>
     </a:lvl2pPr>
-    <a:lvl3pPr marL="914400" algn="l" defTabSz="457200" rtl="0" eaLnBrk="1" latinLnBrk="0" hangingPunct="1">
+    <a:lvl3pPr marL="914400" algn="l" defTabSz="457200" rtl="false" eaLnBrk="true" latinLnBrk="false" hangingPunct="true">
       <a:defRPr sz="1800" kern="1200">
         <a:solidFill>
           <a:schemeClr val="tx1"/>
@@ -43,7 +44,7 @@
         <a:cs typeface="+mn-cs"/>
       </a:defRPr>
     </a:lvl3pPr>
-    <a:lvl4pPr marL="1371600" algn="l" defTabSz="457200" rtl="0" eaLnBrk="1" latinLnBrk="0" hangingPunct="1">
+    <a:lvl4pPr marL="1371600" algn="l" defTabSz="457200" rtl="false" eaLnBrk="true" latinLnBrk="false" hangingPunct="true">
       <a:defRPr sz="1800" kern="1200">
         <a:solidFill>
           <a:schemeClr val="tx1"/>
@@ -53,7 +54,7 @@
         <a:cs typeface="+mn-cs"/>
       </a:defRPr>
     </a:lvl4pPr>
-    <a:lvl5pPr marL="1828800" algn="l" defTabSz="457200" rtl="0" eaLnBrk="1" latinLnBrk="0" hangingPunct="1">
+    <a:lvl5pPr marL="1828800" algn="l" defTabSz="457200" rtl="false" eaLnBrk="true" latinLnBrk="false" hangingPunct="true">
       <a:defRPr sz="1800" kern="1200">
         <a:solidFill>
           <a:schemeClr val="tx1"/>
@@ -63,7 +64,7 @@
         <a:cs typeface="+mn-cs"/>
       </a:defRPr>
     </a:lvl5pPr>
-    <a:lvl6pPr marL="2286000" algn="l" defTabSz="457200" rtl="0" eaLnBrk="1" latinLnBrk="0" hangingPunct="1">
+    <a:lvl6pPr marL="2286000" algn="l" defTabSz="457200" rtl="false" eaLnBrk="true" latinLnBrk="false" hangingPunct="true">
       <a:defRPr sz="1800" kern="1200">
         <a:solidFill>
           <a:schemeClr val="tx1"/>
@@ -73,7 +74,7 @@
         <a:cs typeface="+mn-cs"/>
       </a:defRPr>
     </a:lvl6pPr>
-    <a:lvl7pPr marL="2743200" algn="l" defTabSz="457200" rtl="0" eaLnBrk="1" latinLnBrk="0" hangingPunct="1">
+    <a:lvl7pPr marL="2743200" algn="l" defTabSz="457200" rtl="false" eaLnBrk="true" latinLnBrk="false" hangingPunct="true">
       <a:defRPr sz="1800" kern="1200">
         <a:solidFill>
           <a:schemeClr val="tx1"/>
@@ -83,7 +84,7 @@
         <a:cs typeface="+mn-cs"/>
       </a:defRPr>
     </a:lvl7pPr>
-    <a:lvl8pPr marL="3200400" algn="l" defTabSz="457200" rtl="0" eaLnBrk="1" latinLnBrk="0" hangingPunct="1">
+    <a:lvl8pPr marL="3200400" algn="l" defTabSz="457200" rtl="false" eaLnBrk="true" latinLnBrk="false" hangingPunct="true">
       <a:defRPr sz="1800" kern="1200">
         <a:solidFill>
           <a:schemeClr val="tx1"/>
@@ -93,7 +94,7 @@
         <a:cs typeface="+mn-cs"/>
       </a:defRPr>
     </a:lvl8pPr>
-    <a:lvl9pPr marL="3657600" algn="l" defTabSz="457200" rtl="0" eaLnBrk="1" latinLnBrk="0" hangingPunct="1">
+    <a:lvl9pPr marL="3657600" algn="l" defTabSz="457200" rtl="false" eaLnBrk="true" latinLnBrk="false" hangingPunct="true">
       <a:defRPr sz="1800" kern="1200">
         <a:solidFill>
           <a:schemeClr val="tx1"/>
@@ -108,7 +109,7 @@
 </file>
 
 <file path=ppt/slideLayouts/slideLayout1.xml><?xml version="1.0" encoding="utf-8"?>
-<p:sldLayout xmlns:a="http://schemas.openxmlformats.org/drawingml/2006/main" xmlns:r="http://schemas.openxmlformats.org/officeDocument/2006/relationships" xmlns:p="http://schemas.openxmlformats.org/presentationml/2006/main" type="title" preserve="1">
+<p:sldLayout xmlns:a="http://schemas.openxmlformats.org/drawingml/2006/main" xmlns:p="http://schemas.openxmlformats.org/presentationml/2006/main" type="title">
   <p:cSld name="Title Slide">
     <p:spTree>
       <p:nvGrpSpPr>
@@ -128,7 +129,7 @@
         <p:nvSpPr>
           <p:cNvPr id="2" name="Title 1"/>
           <p:cNvSpPr>
-            <a:spLocks noGrp="1"/>
+            <a:spLocks noGrp="true"/>
           </p:cNvSpPr>
           <p:nvPr>
             <p:ph type="ctrTitle"/>
@@ -144,8 +145,9 @@
           <a:bodyPr/>
           <a:lstStyle/>
           <a:p>
+            <a:pPr/>
             <a:r>
-              <a:rPr lang="en-US" smtClean="0"/>
+              <a:rPr lang="en-US" smtClean="false"/>
               <a:t>Click to edit Master title style</a:t>
             </a:r>
             <a:endParaRPr lang="en-US"/>
@@ -156,7 +158,7 @@
         <p:nvSpPr>
           <p:cNvPr id="3" name="Subtitle 2"/>
           <p:cNvSpPr>
-            <a:spLocks noGrp="1"/>
+            <a:spLocks noGrp="true"/>
           </p:cNvSpPr>
           <p:nvPr>
             <p:ph type="subTitle" idx="1"/>
@@ -263,8 +265,9 @@
             </a:lvl9pPr>
           </a:lstStyle>
           <a:p>
+            <a:pPr/>
             <a:r>
-              <a:rPr lang="en-US" smtClean="0"/>
+              <a:rPr lang="en-US" smtClean="false"/>
               <a:t>Click to edit Master subtitle style</a:t>
             </a:r>
             <a:endParaRPr lang="en-US"/>
@@ -275,7 +278,7 @@
         <p:nvSpPr>
           <p:cNvPr id="4" name="Date Placeholder 3"/>
           <p:cNvSpPr>
-            <a:spLocks noGrp="1"/>
+            <a:spLocks noGrp="true"/>
           </p:cNvSpPr>
           <p:nvPr>
             <p:ph type="dt" sz="half" idx="10"/>
@@ -286,8 +289,9 @@
           <a:bodyPr/>
           <a:lstStyle/>
           <a:p>
+            <a:pPr/>
             <a:fld id="{5BCAD085-E8A6-8845-BD4E-CB4CCA059FC4}" type="datetimeFigureOut">
-              <a:rPr lang="en-US" smtClean="0"/>
+              <a:rPr lang="en-US" smtClean="false"/>
               <a:t>1/27/13</a:t>
             </a:fld>
             <a:endParaRPr lang="en-US"/>
@@ -298,7 +302,7 @@
         <p:nvSpPr>
           <p:cNvPr id="5" name="Footer Placeholder 4"/>
           <p:cNvSpPr>
-            <a:spLocks noGrp="1"/>
+            <a:spLocks noGrp="true"/>
           </p:cNvSpPr>
           <p:nvPr>
             <p:ph type="ftr" sz="quarter" idx="11"/>
@@ -309,6 +313,7 @@
           <a:bodyPr/>
           <a:lstStyle/>
           <a:p>
+            <a:pPr/>
             <a:endParaRPr lang="en-US"/>
           </a:p>
         </p:txBody>
@@ -317,7 +322,7 @@
         <p:nvSpPr>
           <p:cNvPr id="6" name="Slide Number Placeholder 5"/>
           <p:cNvSpPr>
-            <a:spLocks noGrp="1"/>
+            <a:spLocks noGrp="true"/>
           </p:cNvSpPr>
           <p:nvPr>
             <p:ph type="sldNum" sz="quarter" idx="12"/>
@@ -328,8 +333,9 @@
           <a:bodyPr/>
           <a:lstStyle/>
           <a:p>
+            <a:pPr/>
             <a:fld id="{C1FF6DA9-008F-8B48-92A6-B652298478BF}" type="slidenum">
-              <a:rPr lang="en-US" smtClean="0"/>
+              <a:rPr lang="en-US" smtClean="false"/>
               <a:t>‹#›</a:t>
             </a:fld>
             <a:endParaRPr lang="en-US"/>
@@ -337,11 +343,6 @@
         </p:txBody>
       </p:sp>
     </p:spTree>
-    <p:extLst>
-      <p:ext uri="{BB962C8B-B14F-4D97-AF65-F5344CB8AC3E}">
-        <p14:creationId xmlns:p14="http://schemas.microsoft.com/office/powerpoint/2010/main" val="3168075583"/>
-      </p:ext>
-    </p:extLst>
   </p:cSld>
   <p:clrMapOvr>
     <a:masterClrMapping/>
@@ -350,11 +351,11 @@
 </file>
 
 <file path=ppt/slideLayouts/slideLayout10.xml><?xml version="1.0" encoding="utf-8"?>
-<p:sldLayout xmlns:a="http://schemas.openxmlformats.org/drawingml/2006/main" xmlns:r="http://schemas.openxmlformats.org/officeDocument/2006/relationships" xmlns:p="http://schemas.openxmlformats.org/presentationml/2006/main" type="vertTx" preserve="1">
+<p:sldLayout xmlns:a="http://schemas.openxmlformats.org/drawingml/2006/main" xmlns:p="http://schemas.openxmlformats.org/presentationml/2006/main" type="vertTx">
   <p:cSld name="Title and Vertical Text">
     <p:spTree>
       <p:nvGrpSpPr>
-        <p:cNvPr id="1" name=""/>
+        <p:cNvPr id="64" name=""/>
         <p:cNvGrpSpPr/>
         <p:nvPr/>
       </p:nvGrpSpPr>
@@ -368,9 +369,9 @@
       </p:grpSpPr>
       <p:sp>
         <p:nvSpPr>
-          <p:cNvPr id="2" name="Title 1"/>
+          <p:cNvPr id="65" name="Title 1"/>
           <p:cNvSpPr>
-            <a:spLocks noGrp="1"/>
+            <a:spLocks noGrp="true"/>
           </p:cNvSpPr>
           <p:nvPr>
             <p:ph type="title"/>
@@ -381,8 +382,9 @@
           <a:bodyPr/>
           <a:lstStyle/>
           <a:p>
+            <a:pPr/>
             <a:r>
-              <a:rPr lang="en-US" smtClean="0"/>
+              <a:rPr lang="en-US" smtClean="false"/>
               <a:t>Click to edit Master title style</a:t>
             </a:r>
             <a:endParaRPr lang="en-US"/>
@@ -391,9 +393,9 @@
       </p:sp>
       <p:sp>
         <p:nvSpPr>
-          <p:cNvPr id="3" name="Vertical Text Placeholder 2"/>
+          <p:cNvPr id="66" name="Vertical Text Placeholder 2"/>
           <p:cNvSpPr>
-            <a:spLocks noGrp="1"/>
+            <a:spLocks noGrp="true"/>
           </p:cNvSpPr>
           <p:nvPr>
             <p:ph type="body" orient="vert" idx="1"/>
@@ -406,35 +408,39 @@
           <a:p>
             <a:pPr lvl="0"/>
             <a:r>
-              <a:rPr lang="en-US" smtClean="0"/>
+              <a:rPr lang="en-US" smtClean="false"/>
               <a:t>Click to edit Master text styles</a:t>
             </a:r>
+            <a:endParaRPr/>
           </a:p>
           <a:p>
             <a:pPr lvl="1"/>
             <a:r>
-              <a:rPr lang="en-US" smtClean="0"/>
+              <a:rPr lang="en-US" smtClean="false"/>
               <a:t>Second level</a:t>
             </a:r>
+            <a:endParaRPr/>
           </a:p>
           <a:p>
             <a:pPr lvl="2"/>
             <a:r>
-              <a:rPr lang="en-US" smtClean="0"/>
+              <a:rPr lang="en-US" smtClean="false"/>
               <a:t>Third level</a:t>
             </a:r>
+            <a:endParaRPr/>
           </a:p>
           <a:p>
             <a:pPr lvl="3"/>
             <a:r>
-              <a:rPr lang="en-US" smtClean="0"/>
+              <a:rPr lang="en-US" smtClean="false"/>
               <a:t>Fourth level</a:t>
             </a:r>
+            <a:endParaRPr/>
           </a:p>
           <a:p>
             <a:pPr lvl="4"/>
             <a:r>
-              <a:rPr lang="en-US" smtClean="0"/>
+              <a:rPr lang="en-US" smtClean="false"/>
               <a:t>Fifth level</a:t>
             </a:r>
             <a:endParaRPr lang="en-US"/>
@@ -443,9 +449,9 @@
       </p:sp>
       <p:sp>
         <p:nvSpPr>
-          <p:cNvPr id="4" name="Date Placeholder 3"/>
+          <p:cNvPr id="67" name="Date Placeholder 3"/>
           <p:cNvSpPr>
-            <a:spLocks noGrp="1"/>
+            <a:spLocks noGrp="true"/>
           </p:cNvSpPr>
           <p:nvPr>
             <p:ph type="dt" sz="half" idx="10"/>
@@ -456,8 +462,9 @@
           <a:bodyPr/>
           <a:lstStyle/>
           <a:p>
+            <a:pPr/>
             <a:fld id="{5BCAD085-E8A6-8845-BD4E-CB4CCA059FC4}" type="datetimeFigureOut">
-              <a:rPr lang="en-US" smtClean="0"/>
+              <a:rPr lang="en-US" smtClean="false"/>
               <a:t>1/27/13</a:t>
             </a:fld>
             <a:endParaRPr lang="en-US"/>
@@ -466,9 +473,9 @@
       </p:sp>
       <p:sp>
         <p:nvSpPr>
-          <p:cNvPr id="5" name="Footer Placeholder 4"/>
+          <p:cNvPr id="68" name="Footer Placeholder 4"/>
           <p:cNvSpPr>
-            <a:spLocks noGrp="1"/>
+            <a:spLocks noGrp="true"/>
           </p:cNvSpPr>
           <p:nvPr>
             <p:ph type="ftr" sz="quarter" idx="11"/>
@@ -479,15 +486,16 @@
           <a:bodyPr/>
           <a:lstStyle/>
           <a:p>
+            <a:pPr/>
             <a:endParaRPr lang="en-US"/>
           </a:p>
         </p:txBody>
       </p:sp>
       <p:sp>
         <p:nvSpPr>
-          <p:cNvPr id="6" name="Slide Number Placeholder 5"/>
+          <p:cNvPr id="69" name="Slide Number Placeholder 5"/>
           <p:cNvSpPr>
-            <a:spLocks noGrp="1"/>
+            <a:spLocks noGrp="true"/>
           </p:cNvSpPr>
           <p:nvPr>
             <p:ph type="sldNum" sz="quarter" idx="12"/>
@@ -498,8 +506,9 @@
           <a:bodyPr/>
           <a:lstStyle/>
           <a:p>
+            <a:pPr/>
             <a:fld id="{C1FF6DA9-008F-8B48-92A6-B652298478BF}" type="slidenum">
-              <a:rPr lang="en-US" smtClean="0"/>
+              <a:rPr lang="en-US" smtClean="false"/>
               <a:t>‹#›</a:t>
             </a:fld>
             <a:endParaRPr lang="en-US"/>
@@ -507,11 +516,6 @@
         </p:txBody>
       </p:sp>
     </p:spTree>
-    <p:extLst>
-      <p:ext uri="{BB962C8B-B14F-4D97-AF65-F5344CB8AC3E}">
-        <p14:creationId xmlns:p14="http://schemas.microsoft.com/office/powerpoint/2010/main" val="2910927964"/>
-      </p:ext>
-    </p:extLst>
   </p:cSld>
   <p:clrMapOvr>
     <a:masterClrMapping/>
@@ -520,11 +524,11 @@
 </file>
 
 <file path=ppt/slideLayouts/slideLayout11.xml><?xml version="1.0" encoding="utf-8"?>
-<p:sldLayout xmlns:a="http://schemas.openxmlformats.org/drawingml/2006/main" xmlns:r="http://schemas.openxmlformats.org/officeDocument/2006/relationships" xmlns:p="http://schemas.openxmlformats.org/presentationml/2006/main" type="vertTitleAndTx" preserve="1">
+<p:sldLayout xmlns:a="http://schemas.openxmlformats.org/drawingml/2006/main" xmlns:p="http://schemas.openxmlformats.org/presentationml/2006/main" type="vertTitleAndTx">
   <p:cSld name="Vertical Title and Text">
     <p:spTree>
       <p:nvGrpSpPr>
-        <p:cNvPr id="1" name=""/>
+        <p:cNvPr id="13" name=""/>
         <p:cNvGrpSpPr/>
         <p:nvPr/>
       </p:nvGrpSpPr>
@@ -538,9 +542,9 @@
       </p:grpSpPr>
       <p:sp>
         <p:nvSpPr>
-          <p:cNvPr id="2" name="Vertical Title 1"/>
+          <p:cNvPr id="14" name="Vertical Title 1"/>
           <p:cNvSpPr>
-            <a:spLocks noGrp="1"/>
+            <a:spLocks noGrp="true"/>
           </p:cNvSpPr>
           <p:nvPr>
             <p:ph type="title" orient="vert"/>
@@ -556,8 +560,9 @@
           <a:bodyPr vert="eaVert"/>
           <a:lstStyle/>
           <a:p>
+            <a:pPr/>
             <a:r>
-              <a:rPr lang="en-US" smtClean="0"/>
+              <a:rPr lang="en-US" smtClean="false"/>
               <a:t>Click to edit Master title style</a:t>
             </a:r>
             <a:endParaRPr lang="en-US"/>
@@ -566,9 +571,9 @@
       </p:sp>
       <p:sp>
         <p:nvSpPr>
-          <p:cNvPr id="3" name="Vertical Text Placeholder 2"/>
+          <p:cNvPr id="15" name="Vertical Text Placeholder 2"/>
           <p:cNvSpPr>
-            <a:spLocks noGrp="1"/>
+            <a:spLocks noGrp="true"/>
           </p:cNvSpPr>
           <p:nvPr>
             <p:ph type="body" orient="vert" idx="1"/>
@@ -586,35 +591,39 @@
           <a:p>
             <a:pPr lvl="0"/>
             <a:r>
-              <a:rPr lang="en-US" smtClean="0"/>
+              <a:rPr lang="en-US" smtClean="false"/>
               <a:t>Click to edit Master text styles</a:t>
             </a:r>
+            <a:endParaRPr/>
           </a:p>
           <a:p>
             <a:pPr lvl="1"/>
             <a:r>
-              <a:rPr lang="en-US" smtClean="0"/>
+              <a:rPr lang="en-US" smtClean="false"/>
               <a:t>Second level</a:t>
             </a:r>
+            <a:endParaRPr/>
           </a:p>
           <a:p>
             <a:pPr lvl="2"/>
             <a:r>
-              <a:rPr lang="en-US" smtClean="0"/>
+              <a:rPr lang="en-US" smtClean="false"/>
               <a:t>Third level</a:t>
             </a:r>
+            <a:endParaRPr/>
           </a:p>
           <a:p>
             <a:pPr lvl="3"/>
             <a:r>
-              <a:rPr lang="en-US" smtClean="0"/>
+              <a:rPr lang="en-US" smtClean="false"/>
               <a:t>Fourth level</a:t>
             </a:r>
+            <a:endParaRPr/>
           </a:p>
           <a:p>
             <a:pPr lvl="4"/>
             <a:r>
-              <a:rPr lang="en-US" smtClean="0"/>
+              <a:rPr lang="en-US" smtClean="false"/>
               <a:t>Fifth level</a:t>
             </a:r>
             <a:endParaRPr lang="en-US"/>
@@ -623,9 +632,9 @@
       </p:sp>
       <p:sp>
         <p:nvSpPr>
-          <p:cNvPr id="4" name="Date Placeholder 3"/>
+          <p:cNvPr id="16" name="Date Placeholder 3"/>
           <p:cNvSpPr>
-            <a:spLocks noGrp="1"/>
+            <a:spLocks noGrp="true"/>
           </p:cNvSpPr>
           <p:nvPr>
             <p:ph type="dt" sz="half" idx="10"/>
@@ -636,8 +645,9 @@
           <a:bodyPr/>
           <a:lstStyle/>
           <a:p>
+            <a:pPr/>
             <a:fld id="{5BCAD085-E8A6-8845-BD4E-CB4CCA059FC4}" type="datetimeFigureOut">
-              <a:rPr lang="en-US" smtClean="0"/>
+              <a:rPr lang="en-US" smtClean="false"/>
               <a:t>1/27/13</a:t>
             </a:fld>
             <a:endParaRPr lang="en-US"/>
@@ -646,9 +656,9 @@
       </p:sp>
       <p:sp>
         <p:nvSpPr>
-          <p:cNvPr id="5" name="Footer Placeholder 4"/>
+          <p:cNvPr id="17" name="Footer Placeholder 4"/>
           <p:cNvSpPr>
-            <a:spLocks noGrp="1"/>
+            <a:spLocks noGrp="true"/>
           </p:cNvSpPr>
           <p:nvPr>
             <p:ph type="ftr" sz="quarter" idx="11"/>
@@ -659,15 +669,16 @@
           <a:bodyPr/>
           <a:lstStyle/>
           <a:p>
+            <a:pPr/>
             <a:endParaRPr lang="en-US"/>
           </a:p>
         </p:txBody>
       </p:sp>
       <p:sp>
         <p:nvSpPr>
-          <p:cNvPr id="6" name="Slide Number Placeholder 5"/>
+          <p:cNvPr id="18" name="Slide Number Placeholder 5"/>
           <p:cNvSpPr>
-            <a:spLocks noGrp="1"/>
+            <a:spLocks noGrp="true"/>
           </p:cNvSpPr>
           <p:nvPr>
             <p:ph type="sldNum" sz="quarter" idx="12"/>
@@ -678,8 +689,9 @@
           <a:bodyPr/>
           <a:lstStyle/>
           <a:p>
+            <a:pPr/>
             <a:fld id="{C1FF6DA9-008F-8B48-92A6-B652298478BF}" type="slidenum">
-              <a:rPr lang="en-US" smtClean="0"/>
+              <a:rPr lang="en-US" smtClean="false"/>
               <a:t>‹#›</a:t>
             </a:fld>
             <a:endParaRPr lang="en-US"/>
@@ -687,11 +699,6 @@
         </p:txBody>
       </p:sp>
     </p:spTree>
-    <p:extLst>
-      <p:ext uri="{BB962C8B-B14F-4D97-AF65-F5344CB8AC3E}">
-        <p14:creationId xmlns:p14="http://schemas.microsoft.com/office/powerpoint/2010/main" val="3612223792"/>
-      </p:ext>
-    </p:extLst>
   </p:cSld>
   <p:clrMapOvr>
     <a:masterClrMapping/>
@@ -700,11 +707,11 @@
 </file>
 
 <file path=ppt/slideLayouts/slideLayout2.xml><?xml version="1.0" encoding="utf-8"?>
-<p:sldLayout xmlns:a="http://schemas.openxmlformats.org/drawingml/2006/main" xmlns:r="http://schemas.openxmlformats.org/officeDocument/2006/relationships" xmlns:p="http://schemas.openxmlformats.org/presentationml/2006/main" type="obj" preserve="1">
+<p:sldLayout xmlns:a="http://schemas.openxmlformats.org/drawingml/2006/main" xmlns:p="http://schemas.openxmlformats.org/presentationml/2006/main" type="obj">
   <p:cSld name="Title and Content">
     <p:spTree>
       <p:nvGrpSpPr>
-        <p:cNvPr id="1" name=""/>
+        <p:cNvPr id="7" name=""/>
         <p:cNvGrpSpPr/>
         <p:nvPr/>
       </p:nvGrpSpPr>
@@ -718,9 +725,9 @@
       </p:grpSpPr>
       <p:sp>
         <p:nvSpPr>
-          <p:cNvPr id="2" name="Title 1"/>
+          <p:cNvPr id="8" name="Title 1"/>
           <p:cNvSpPr>
-            <a:spLocks noGrp="1"/>
+            <a:spLocks noGrp="true"/>
           </p:cNvSpPr>
           <p:nvPr>
             <p:ph type="title"/>
@@ -731,8 +738,9 @@
           <a:bodyPr/>
           <a:lstStyle/>
           <a:p>
+            <a:pPr/>
             <a:r>
-              <a:rPr lang="en-US" smtClean="0"/>
+              <a:rPr lang="en-US" smtClean="false"/>
               <a:t>Click to edit Master title style</a:t>
             </a:r>
             <a:endParaRPr lang="en-US"/>
@@ -741,9 +749,9 @@
       </p:sp>
       <p:sp>
         <p:nvSpPr>
-          <p:cNvPr id="3" name="Content Placeholder 2"/>
+          <p:cNvPr id="9" name="Content Placeholder 2"/>
           <p:cNvSpPr>
-            <a:spLocks noGrp="1"/>
+            <a:spLocks noGrp="true"/>
           </p:cNvSpPr>
           <p:nvPr>
             <p:ph idx="1"/>
@@ -756,35 +764,39 @@
           <a:p>
             <a:pPr lvl="0"/>
             <a:r>
-              <a:rPr lang="en-US" smtClean="0"/>
+              <a:rPr lang="en-US" smtClean="false"/>
               <a:t>Click to edit Master text styles</a:t>
             </a:r>
+            <a:endParaRPr/>
           </a:p>
           <a:p>
             <a:pPr lvl="1"/>
             <a:r>
-              <a:rPr lang="en-US" smtClean="0"/>
+              <a:rPr lang="en-US" smtClean="false"/>
               <a:t>Second level</a:t>
             </a:r>
+            <a:endParaRPr/>
           </a:p>
           <a:p>
             <a:pPr lvl="2"/>
             <a:r>
-              <a:rPr lang="en-US" smtClean="0"/>
+              <a:rPr lang="en-US" smtClean="false"/>
               <a:t>Third level</a:t>
             </a:r>
+            <a:endParaRPr/>
           </a:p>
           <a:p>
             <a:pPr lvl="3"/>
             <a:r>
-              <a:rPr lang="en-US" smtClean="0"/>
+              <a:rPr lang="en-US" smtClean="false"/>
               <a:t>Fourth level</a:t>
             </a:r>
+            <a:endParaRPr/>
           </a:p>
           <a:p>
             <a:pPr lvl="4"/>
             <a:r>
-              <a:rPr lang="en-US" smtClean="0"/>
+              <a:rPr lang="en-US" smtClean="false"/>
               <a:t>Fifth level</a:t>
             </a:r>
             <a:endParaRPr lang="en-US"/>
@@ -793,9 +805,9 @@
       </p:sp>
       <p:sp>
         <p:nvSpPr>
-          <p:cNvPr id="4" name="Date Placeholder 3"/>
+          <p:cNvPr id="10" name="Date Placeholder 3"/>
           <p:cNvSpPr>
-            <a:spLocks noGrp="1"/>
+            <a:spLocks noGrp="true"/>
           </p:cNvSpPr>
           <p:nvPr>
             <p:ph type="dt" sz="half" idx="10"/>
@@ -806,8 +818,9 @@
           <a:bodyPr/>
           <a:lstStyle/>
           <a:p>
+            <a:pPr/>
             <a:fld id="{5BCAD085-E8A6-8845-BD4E-CB4CCA059FC4}" type="datetimeFigureOut">
-              <a:rPr lang="en-US" smtClean="0"/>
+              <a:rPr lang="en-US" smtClean="false"/>
               <a:t>1/27/13</a:t>
             </a:fld>
             <a:endParaRPr lang="en-US"/>
@@ -816,9 +829,9 @@
       </p:sp>
       <p:sp>
         <p:nvSpPr>
-          <p:cNvPr id="5" name="Footer Placeholder 4"/>
+          <p:cNvPr id="11" name="Footer Placeholder 4"/>
           <p:cNvSpPr>
-            <a:spLocks noGrp="1"/>
+            <a:spLocks noGrp="true"/>
           </p:cNvSpPr>
           <p:nvPr>
             <p:ph type="ftr" sz="quarter" idx="11"/>
@@ -829,15 +842,16 @@
           <a:bodyPr/>
           <a:lstStyle/>
           <a:p>
+            <a:pPr/>
             <a:endParaRPr lang="en-US"/>
           </a:p>
         </p:txBody>
       </p:sp>
       <p:sp>
         <p:nvSpPr>
-          <p:cNvPr id="6" name="Slide Number Placeholder 5"/>
+          <p:cNvPr id="12" name="Slide Number Placeholder 5"/>
           <p:cNvSpPr>
-            <a:spLocks noGrp="1"/>
+            <a:spLocks noGrp="true"/>
           </p:cNvSpPr>
           <p:nvPr>
             <p:ph type="sldNum" sz="quarter" idx="12"/>
@@ -848,8 +862,9 @@
           <a:bodyPr/>
           <a:lstStyle/>
           <a:p>
+            <a:pPr/>
             <a:fld id="{C1FF6DA9-008F-8B48-92A6-B652298478BF}" type="slidenum">
-              <a:rPr lang="en-US" smtClean="0"/>
+              <a:rPr lang="en-US" smtClean="false"/>
               <a:t>‹#›</a:t>
             </a:fld>
             <a:endParaRPr lang="en-US"/>
@@ -857,11 +872,6 @@
         </p:txBody>
       </p:sp>
     </p:spTree>
-    <p:extLst>
-      <p:ext uri="{BB962C8B-B14F-4D97-AF65-F5344CB8AC3E}">
-        <p14:creationId xmlns:p14="http://schemas.microsoft.com/office/powerpoint/2010/main" val="2614314258"/>
-      </p:ext>
-    </p:extLst>
   </p:cSld>
   <p:clrMapOvr>
     <a:masterClrMapping/>
@@ -870,11 +880,11 @@
 </file>
 
 <file path=ppt/slideLayouts/slideLayout3.xml><?xml version="1.0" encoding="utf-8"?>
-<p:sldLayout xmlns:a="http://schemas.openxmlformats.org/drawingml/2006/main" xmlns:r="http://schemas.openxmlformats.org/officeDocument/2006/relationships" xmlns:p="http://schemas.openxmlformats.org/presentationml/2006/main" type="secHead" preserve="1">
+<p:sldLayout xmlns:a="http://schemas.openxmlformats.org/drawingml/2006/main" xmlns:p="http://schemas.openxmlformats.org/presentationml/2006/main" type="secHead">
   <p:cSld name="Section Header">
     <p:spTree>
       <p:nvGrpSpPr>
-        <p:cNvPr id="1" name=""/>
+        <p:cNvPr id="19" name=""/>
         <p:cNvGrpSpPr/>
         <p:nvPr/>
       </p:nvGrpSpPr>
@@ -888,9 +898,9 @@
       </p:grpSpPr>
       <p:sp>
         <p:nvSpPr>
-          <p:cNvPr id="2" name="Title 1"/>
+          <p:cNvPr id="20" name="Title 1"/>
           <p:cNvSpPr>
-            <a:spLocks noGrp="1"/>
+            <a:spLocks noGrp="true"/>
           </p:cNvSpPr>
           <p:nvPr>
             <p:ph type="title"/>
@@ -906,12 +916,13 @@
           <a:bodyPr anchor="t"/>
           <a:lstStyle>
             <a:lvl1pPr algn="l">
-              <a:defRPr sz="4000" b="1" cap="all"/>
+              <a:defRPr sz="4000" b="true" cap="all"/>
             </a:lvl1pPr>
           </a:lstStyle>
           <a:p>
+            <a:pPr/>
             <a:r>
-              <a:rPr lang="en-US" smtClean="0"/>
+              <a:rPr lang="en-US" smtClean="false"/>
               <a:t>Click to edit Master title style</a:t>
             </a:r>
             <a:endParaRPr lang="en-US"/>
@@ -920,9 +931,9 @@
       </p:sp>
       <p:sp>
         <p:nvSpPr>
-          <p:cNvPr id="3" name="Text Placeholder 2"/>
+          <p:cNvPr id="21" name="Text Placeholder 2"/>
           <p:cNvSpPr>
-            <a:spLocks noGrp="1"/>
+            <a:spLocks noGrp="true"/>
           </p:cNvSpPr>
           <p:nvPr>
             <p:ph type="body" idx="1"/>
@@ -1031,17 +1042,18 @@
           <a:p>
             <a:pPr lvl="0"/>
             <a:r>
-              <a:rPr lang="en-US" smtClean="0"/>
+              <a:rPr lang="en-US" smtClean="false"/>
               <a:t>Click to edit Master text styles</a:t>
             </a:r>
+            <a:endParaRPr/>
           </a:p>
         </p:txBody>
       </p:sp>
       <p:sp>
         <p:nvSpPr>
-          <p:cNvPr id="4" name="Date Placeholder 3"/>
+          <p:cNvPr id="22" name="Date Placeholder 3"/>
           <p:cNvSpPr>
-            <a:spLocks noGrp="1"/>
+            <a:spLocks noGrp="true"/>
           </p:cNvSpPr>
           <p:nvPr>
             <p:ph type="dt" sz="half" idx="10"/>
@@ -1052,8 +1064,9 @@
           <a:bodyPr/>
           <a:lstStyle/>
           <a:p>
+            <a:pPr/>
             <a:fld id="{5BCAD085-E8A6-8845-BD4E-CB4CCA059FC4}" type="datetimeFigureOut">
-              <a:rPr lang="en-US" smtClean="0"/>
+              <a:rPr lang="en-US" smtClean="false"/>
               <a:t>1/27/13</a:t>
             </a:fld>
             <a:endParaRPr lang="en-US"/>
@@ -1062,9 +1075,9 @@
       </p:sp>
       <p:sp>
         <p:nvSpPr>
-          <p:cNvPr id="5" name="Footer Placeholder 4"/>
+          <p:cNvPr id="23" name="Footer Placeholder 4"/>
           <p:cNvSpPr>
-            <a:spLocks noGrp="1"/>
+            <a:spLocks noGrp="true"/>
           </p:cNvSpPr>
           <p:nvPr>
             <p:ph type="ftr" sz="quarter" idx="11"/>
@@ -1075,15 +1088,16 @@
           <a:bodyPr/>
           <a:lstStyle/>
           <a:p>
+            <a:pPr/>
             <a:endParaRPr lang="en-US"/>
           </a:p>
         </p:txBody>
       </p:sp>
       <p:sp>
         <p:nvSpPr>
-          <p:cNvPr id="6" name="Slide Number Placeholder 5"/>
+          <p:cNvPr id="24" name="Slide Number Placeholder 5"/>
           <p:cNvSpPr>
-            <a:spLocks noGrp="1"/>
+            <a:spLocks noGrp="true"/>
           </p:cNvSpPr>
           <p:nvPr>
             <p:ph type="sldNum" sz="quarter" idx="12"/>
@@ -1094,8 +1108,9 @@
           <a:bodyPr/>
           <a:lstStyle/>
           <a:p>
+            <a:pPr/>
             <a:fld id="{C1FF6DA9-008F-8B48-92A6-B652298478BF}" type="slidenum">
-              <a:rPr lang="en-US" smtClean="0"/>
+              <a:rPr lang="en-US" smtClean="false"/>
               <a:t>‹#›</a:t>
             </a:fld>
             <a:endParaRPr lang="en-US"/>
@@ -1103,11 +1118,6 @@
         </p:txBody>
       </p:sp>
     </p:spTree>
-    <p:extLst>
-      <p:ext uri="{BB962C8B-B14F-4D97-AF65-F5344CB8AC3E}">
-        <p14:creationId xmlns:p14="http://schemas.microsoft.com/office/powerpoint/2010/main" val="960648375"/>
-      </p:ext>
-    </p:extLst>
   </p:cSld>
   <p:clrMapOvr>
     <a:masterClrMapping/>
@@ -1116,11 +1126,11 @@
 </file>
 
 <file path=ppt/slideLayouts/slideLayout4.xml><?xml version="1.0" encoding="utf-8"?>
-<p:sldLayout xmlns:a="http://schemas.openxmlformats.org/drawingml/2006/main" xmlns:r="http://schemas.openxmlformats.org/officeDocument/2006/relationships" xmlns:p="http://schemas.openxmlformats.org/presentationml/2006/main" type="twoObj" preserve="1">
+<p:sldLayout xmlns:a="http://schemas.openxmlformats.org/drawingml/2006/main" xmlns:p="http://schemas.openxmlformats.org/presentationml/2006/main" type="twoObj">
   <p:cSld name="Two Content">
     <p:spTree>
       <p:nvGrpSpPr>
-        <p:cNvPr id="1" name=""/>
+        <p:cNvPr id="25" name=""/>
         <p:cNvGrpSpPr/>
         <p:nvPr/>
       </p:nvGrpSpPr>
@@ -1134,9 +1144,9 @@
       </p:grpSpPr>
       <p:sp>
         <p:nvSpPr>
-          <p:cNvPr id="2" name="Title 1"/>
+          <p:cNvPr id="26" name="Title 1"/>
           <p:cNvSpPr>
-            <a:spLocks noGrp="1"/>
+            <a:spLocks noGrp="true"/>
           </p:cNvSpPr>
           <p:nvPr>
             <p:ph type="title"/>
@@ -1147,8 +1157,9 @@
           <a:bodyPr/>
           <a:lstStyle/>
           <a:p>
+            <a:pPr/>
             <a:r>
-              <a:rPr lang="en-US" smtClean="0"/>
+              <a:rPr lang="en-US" smtClean="false"/>
               <a:t>Click to edit Master title style</a:t>
             </a:r>
             <a:endParaRPr lang="en-US"/>
@@ -1157,9 +1168,9 @@
       </p:sp>
       <p:sp>
         <p:nvSpPr>
-          <p:cNvPr id="3" name="Content Placeholder 2"/>
+          <p:cNvPr id="27" name="Content Placeholder 2"/>
           <p:cNvSpPr>
-            <a:spLocks noGrp="1"/>
+            <a:spLocks noGrp="true"/>
           </p:cNvSpPr>
           <p:nvPr>
             <p:ph sz="half" idx="1"/>
@@ -1205,35 +1216,39 @@
           <a:p>
             <a:pPr lvl="0"/>
             <a:r>
-              <a:rPr lang="en-US" smtClean="0"/>
+              <a:rPr lang="en-US" smtClean="false"/>
               <a:t>Click to edit Master text styles</a:t>
             </a:r>
+            <a:endParaRPr/>
           </a:p>
           <a:p>
             <a:pPr lvl="1"/>
             <a:r>
-              <a:rPr lang="en-US" smtClean="0"/>
+              <a:rPr lang="en-US" smtClean="false"/>
               <a:t>Second level</a:t>
             </a:r>
+            <a:endParaRPr/>
           </a:p>
           <a:p>
             <a:pPr lvl="2"/>
             <a:r>
-              <a:rPr lang="en-US" smtClean="0"/>
+              <a:rPr lang="en-US" smtClean="false"/>
               <a:t>Third level</a:t>
             </a:r>
+            <a:endParaRPr/>
           </a:p>
           <a:p>
             <a:pPr lvl="3"/>
             <a:r>
-              <a:rPr lang="en-US" smtClean="0"/>
+              <a:rPr lang="en-US" smtClean="false"/>
               <a:t>Fourth level</a:t>
             </a:r>
+            <a:endParaRPr/>
           </a:p>
           <a:p>
             <a:pPr lvl="4"/>
             <a:r>
-              <a:rPr lang="en-US" smtClean="0"/>
+              <a:rPr lang="en-US" smtClean="false"/>
               <a:t>Fifth level</a:t>
             </a:r>
             <a:endParaRPr lang="en-US"/>
@@ -1242,9 +1257,9 @@
       </p:sp>
       <p:sp>
         <p:nvSpPr>
-          <p:cNvPr id="4" name="Content Placeholder 3"/>
+          <p:cNvPr id="28" name="Content Placeholder 3"/>
           <p:cNvSpPr>
-            <a:spLocks noGrp="1"/>
+            <a:spLocks noGrp="true"/>
           </p:cNvSpPr>
           <p:nvPr>
             <p:ph sz="half" idx="2"/>
@@ -1290,35 +1305,39 @@
           <a:p>
             <a:pPr lvl="0"/>
             <a:r>
-              <a:rPr lang="en-US" smtClean="0"/>
+              <a:rPr lang="en-US" smtClean="false"/>
               <a:t>Click to edit Master text styles</a:t>
             </a:r>
+            <a:endParaRPr/>
           </a:p>
           <a:p>
             <a:pPr lvl="1"/>
             <a:r>
-              <a:rPr lang="en-US" smtClean="0"/>
+              <a:rPr lang="en-US" smtClean="false"/>
               <a:t>Second level</a:t>
             </a:r>
+            <a:endParaRPr/>
           </a:p>
           <a:p>
             <a:pPr lvl="2"/>
             <a:r>
-              <a:rPr lang="en-US" smtClean="0"/>
+              <a:rPr lang="en-US" smtClean="false"/>
               <a:t>Third level</a:t>
             </a:r>
+            <a:endParaRPr/>
           </a:p>
           <a:p>
             <a:pPr lvl="3"/>
             <a:r>
-              <a:rPr lang="en-US" smtClean="0"/>
+              <a:rPr lang="en-US" smtClean="false"/>
               <a:t>Fourth level</a:t>
             </a:r>
+            <a:endParaRPr/>
           </a:p>
           <a:p>
             <a:pPr lvl="4"/>
             <a:r>
-              <a:rPr lang="en-US" smtClean="0"/>
+              <a:rPr lang="en-US" smtClean="false"/>
               <a:t>Fifth level</a:t>
             </a:r>
             <a:endParaRPr lang="en-US"/>
@@ -1327,9 +1346,9 @@
       </p:sp>
       <p:sp>
         <p:nvSpPr>
-          <p:cNvPr id="5" name="Date Placeholder 4"/>
+          <p:cNvPr id="29" name="Date Placeholder 4"/>
           <p:cNvSpPr>
-            <a:spLocks noGrp="1"/>
+            <a:spLocks noGrp="true"/>
           </p:cNvSpPr>
           <p:nvPr>
             <p:ph type="dt" sz="half" idx="10"/>
@@ -1340,8 +1359,9 @@
           <a:bodyPr/>
           <a:lstStyle/>
           <a:p>
+            <a:pPr/>
             <a:fld id="{5BCAD085-E8A6-8845-BD4E-CB4CCA059FC4}" type="datetimeFigureOut">
-              <a:rPr lang="en-US" smtClean="0"/>
+              <a:rPr lang="en-US" smtClean="false"/>
               <a:t>1/27/13</a:t>
             </a:fld>
             <a:endParaRPr lang="en-US"/>
@@ -1350,9 +1370,9 @@
       </p:sp>
       <p:sp>
         <p:nvSpPr>
-          <p:cNvPr id="6" name="Footer Placeholder 5"/>
+          <p:cNvPr id="30" name="Footer Placeholder 5"/>
           <p:cNvSpPr>
-            <a:spLocks noGrp="1"/>
+            <a:spLocks noGrp="true"/>
           </p:cNvSpPr>
           <p:nvPr>
             <p:ph type="ftr" sz="quarter" idx="11"/>
@@ -1363,15 +1383,16 @@
           <a:bodyPr/>
           <a:lstStyle/>
           <a:p>
+            <a:pPr/>
             <a:endParaRPr lang="en-US"/>
           </a:p>
         </p:txBody>
       </p:sp>
       <p:sp>
         <p:nvSpPr>
-          <p:cNvPr id="7" name="Slide Number Placeholder 6"/>
+          <p:cNvPr id="31" name="Slide Number Placeholder 6"/>
           <p:cNvSpPr>
-            <a:spLocks noGrp="1"/>
+            <a:spLocks noGrp="true"/>
           </p:cNvSpPr>
           <p:nvPr>
             <p:ph type="sldNum" sz="quarter" idx="12"/>
@@ -1382,8 +1403,9 @@
           <a:bodyPr/>
           <a:lstStyle/>
           <a:p>
+            <a:pPr/>
             <a:fld id="{C1FF6DA9-008F-8B48-92A6-B652298478BF}" type="slidenum">
-              <a:rPr lang="en-US" smtClean="0"/>
+              <a:rPr lang="en-US" smtClean="false"/>
               <a:t>‹#›</a:t>
             </a:fld>
             <a:endParaRPr lang="en-US"/>
@@ -1391,11 +1413,6 @@
         </p:txBody>
       </p:sp>
     </p:spTree>
-    <p:extLst>
-      <p:ext uri="{BB962C8B-B14F-4D97-AF65-F5344CB8AC3E}">
-        <p14:creationId xmlns:p14="http://schemas.microsoft.com/office/powerpoint/2010/main" val="2782244947"/>
-      </p:ext>
-    </p:extLst>
   </p:cSld>
   <p:clrMapOvr>
     <a:masterClrMapping/>
@@ -1404,11 +1421,11 @@
 </file>
 
 <file path=ppt/slideLayouts/slideLayout5.xml><?xml version="1.0" encoding="utf-8"?>
-<p:sldLayout xmlns:a="http://schemas.openxmlformats.org/drawingml/2006/main" xmlns:r="http://schemas.openxmlformats.org/officeDocument/2006/relationships" xmlns:p="http://schemas.openxmlformats.org/presentationml/2006/main" type="twoTxTwoObj" preserve="1">
+<p:sldLayout xmlns:a="http://schemas.openxmlformats.org/drawingml/2006/main" xmlns:p="http://schemas.openxmlformats.org/presentationml/2006/main" type="twoTxTwoObj">
   <p:cSld name="Comparison">
     <p:spTree>
       <p:nvGrpSpPr>
-        <p:cNvPr id="1" name=""/>
+        <p:cNvPr id="32" name=""/>
         <p:cNvGrpSpPr/>
         <p:nvPr/>
       </p:nvGrpSpPr>
@@ -1422,9 +1439,9 @@
       </p:grpSpPr>
       <p:sp>
         <p:nvSpPr>
-          <p:cNvPr id="2" name="Title 1"/>
+          <p:cNvPr id="33" name="Title 1"/>
           <p:cNvSpPr>
-            <a:spLocks noGrp="1"/>
+            <a:spLocks noGrp="true"/>
           </p:cNvSpPr>
           <p:nvPr>
             <p:ph type="title"/>
@@ -1439,8 +1456,9 @@
             </a:lvl1pPr>
           </a:lstStyle>
           <a:p>
+            <a:pPr/>
             <a:r>
-              <a:rPr lang="en-US" smtClean="0"/>
+              <a:rPr lang="en-US" smtClean="false"/>
               <a:t>Click to edit Master title style</a:t>
             </a:r>
             <a:endParaRPr lang="en-US"/>
@@ -1449,9 +1467,9 @@
       </p:sp>
       <p:sp>
         <p:nvSpPr>
-          <p:cNvPr id="3" name="Text Placeholder 2"/>
+          <p:cNvPr id="34" name="Text Placeholder 2"/>
           <p:cNvSpPr>
-            <a:spLocks noGrp="1"/>
+            <a:spLocks noGrp="true"/>
           </p:cNvSpPr>
           <p:nvPr>
             <p:ph type="body" idx="1"/>
@@ -1468,55 +1486,56 @@
           <a:lstStyle>
             <a:lvl1pPr marL="0" indent="0">
               <a:buNone/>
-              <a:defRPr sz="2400" b="1"/>
+              <a:defRPr sz="2400" b="true"/>
             </a:lvl1pPr>
             <a:lvl2pPr marL="457200" indent="0">
               <a:buNone/>
-              <a:defRPr sz="2000" b="1"/>
+              <a:defRPr sz="2000" b="true"/>
             </a:lvl2pPr>
             <a:lvl3pPr marL="914400" indent="0">
               <a:buNone/>
-              <a:defRPr sz="1800" b="1"/>
+              <a:defRPr sz="1800" b="true"/>
             </a:lvl3pPr>
             <a:lvl4pPr marL="1371600" indent="0">
               <a:buNone/>
-              <a:defRPr sz="1600" b="1"/>
+              <a:defRPr sz="1600" b="true"/>
             </a:lvl4pPr>
             <a:lvl5pPr marL="1828800" indent="0">
               <a:buNone/>
-              <a:defRPr sz="1600" b="1"/>
+              <a:defRPr sz="1600" b="true"/>
             </a:lvl5pPr>
             <a:lvl6pPr marL="2286000" indent="0">
               <a:buNone/>
-              <a:defRPr sz="1600" b="1"/>
+              <a:defRPr sz="1600" b="true"/>
             </a:lvl6pPr>
             <a:lvl7pPr marL="2743200" indent="0">
               <a:buNone/>
-              <a:defRPr sz="1600" b="1"/>
+              <a:defRPr sz="1600" b="true"/>
             </a:lvl7pPr>
             <a:lvl8pPr marL="3200400" indent="0">
               <a:buNone/>
-              <a:defRPr sz="1600" b="1"/>
+              <a:defRPr sz="1600" b="true"/>
             </a:lvl8pPr>
             <a:lvl9pPr marL="3657600" indent="0">
               <a:buNone/>
-              <a:defRPr sz="1600" b="1"/>
+              <a:defRPr sz="1600" b="true"/>
             </a:lvl9pPr>
           </a:lstStyle>
           <a:p>
             <a:pPr lvl="0"/>
             <a:r>
-              <a:rPr lang="en-US" smtClean="0"/>
+              <a:rPr lang="en-US" smtClean="false"/>
               <a:t>Click to edit Master text styles</a:t>
             </a:r>
+            <a:endParaRPr/>
           </a:p>
         </p:txBody>
       </p:sp>
       <p:sp>
         <p:nvSpPr>
-          <p:cNvPr id="4" name="Content Placeholder 3"/>
+          <p:cNvPr id="35" name="Content Placeholder 3"/>
           <p:cNvSpPr>
-            <a:spLocks noGrp="1"/>
+            <a:spLocks noGrp="true"/>
           </p:cNvSpPr>
           <p:nvPr>
             <p:ph sz="half" idx="2"/>
@@ -1562,35 +1581,39 @@
           <a:p>
             <a:pPr lvl="0"/>
             <a:r>
-              <a:rPr lang="en-US" smtClean="0"/>
+              <a:rPr lang="en-US" smtClean="false"/>
               <a:t>Click to edit Master text styles</a:t>
             </a:r>
+            <a:endParaRPr/>
           </a:p>
           <a:p>
             <a:pPr lvl="1"/>
             <a:r>
-              <a:rPr lang="en-US" smtClean="0"/>
+              <a:rPr lang="en-US" smtClean="false"/>
               <a:t>Second level</a:t>
             </a:r>
+            <a:endParaRPr/>
           </a:p>
           <a:p>
             <a:pPr lvl="2"/>
             <a:r>
-              <a:rPr lang="en-US" smtClean="0"/>
+              <a:rPr lang="en-US" smtClean="false"/>
               <a:t>Third level</a:t>
             </a:r>
+            <a:endParaRPr/>
           </a:p>
           <a:p>
             <a:pPr lvl="3"/>
             <a:r>
-              <a:rPr lang="en-US" smtClean="0"/>
+              <a:rPr lang="en-US" smtClean="false"/>
               <a:t>Fourth level</a:t>
             </a:r>
+            <a:endParaRPr/>
           </a:p>
           <a:p>
             <a:pPr lvl="4"/>
             <a:r>
-              <a:rPr lang="en-US" smtClean="0"/>
+              <a:rPr lang="en-US" smtClean="false"/>
               <a:t>Fifth level</a:t>
             </a:r>
             <a:endParaRPr lang="en-US"/>
@@ -1599,9 +1622,9 @@
       </p:sp>
       <p:sp>
         <p:nvSpPr>
-          <p:cNvPr id="5" name="Text Placeholder 4"/>
+          <p:cNvPr id="36" name="Text Placeholder 4"/>
           <p:cNvSpPr>
-            <a:spLocks noGrp="1"/>
+            <a:spLocks noGrp="true"/>
           </p:cNvSpPr>
           <p:nvPr>
             <p:ph type="body" sz="quarter" idx="3"/>
@@ -1618,55 +1641,56 @@
           <a:lstStyle>
             <a:lvl1pPr marL="0" indent="0">
               <a:buNone/>
-              <a:defRPr sz="2400" b="1"/>
+              <a:defRPr sz="2400" b="true"/>
             </a:lvl1pPr>
             <a:lvl2pPr marL="457200" indent="0">
               <a:buNone/>
-              <a:defRPr sz="2000" b="1"/>
+              <a:defRPr sz="2000" b="true"/>
             </a:lvl2pPr>
             <a:lvl3pPr marL="914400" indent="0">
               <a:buNone/>
-              <a:defRPr sz="1800" b="1"/>
+              <a:defRPr sz="1800" b="true"/>
             </a:lvl3pPr>
             <a:lvl4pPr marL="1371600" indent="0">
               <a:buNone/>
-              <a:defRPr sz="1600" b="1"/>
+              <a:defRPr sz="1600" b="true"/>
             </a:lvl4pPr>
             <a:lvl5pPr marL="1828800" indent="0">
               <a:buNone/>
-              <a:defRPr sz="1600" b="1"/>
+              <a:defRPr sz="1600" b="true"/>
             </a:lvl5pPr>
             <a:lvl6pPr marL="2286000" indent="0">
               <a:buNone/>
-              <a:defRPr sz="1600" b="1"/>
+              <a:defRPr sz="1600" b="true"/>
             </a:lvl6pPr>
             <a:lvl7pPr marL="2743200" indent="0">
               <a:buNone/>
-              <a:defRPr sz="1600" b="1"/>
+              <a:defRPr sz="1600" b="true"/>
             </a:lvl7pPr>
             <a:lvl8pPr marL="3200400" indent="0">
               <a:buNone/>
-              <a:defRPr sz="1600" b="1"/>
+              <a:defRPr sz="1600" b="true"/>
             </a:lvl8pPr>
             <a:lvl9pPr marL="3657600" indent="0">
               <a:buNone/>
-              <a:defRPr sz="1600" b="1"/>
+              <a:defRPr sz="1600" b="true"/>
             </a:lvl9pPr>
           </a:lstStyle>
           <a:p>
             <a:pPr lvl="0"/>
             <a:r>
-              <a:rPr lang="en-US" smtClean="0"/>
+              <a:rPr lang="en-US" smtClean="false"/>
               <a:t>Click to edit Master text styles</a:t>
             </a:r>
+            <a:endParaRPr/>
           </a:p>
         </p:txBody>
       </p:sp>
       <p:sp>
         <p:nvSpPr>
-          <p:cNvPr id="6" name="Content Placeholder 5"/>
+          <p:cNvPr id="37" name="Content Placeholder 5"/>
           <p:cNvSpPr>
-            <a:spLocks noGrp="1"/>
+            <a:spLocks noGrp="true"/>
           </p:cNvSpPr>
           <p:nvPr>
             <p:ph sz="quarter" idx="4"/>
@@ -1712,35 +1736,39 @@
           <a:p>
             <a:pPr lvl="0"/>
             <a:r>
-              <a:rPr lang="en-US" smtClean="0"/>
+              <a:rPr lang="en-US" smtClean="false"/>
               <a:t>Click to edit Master text styles</a:t>
             </a:r>
+            <a:endParaRPr/>
           </a:p>
           <a:p>
             <a:pPr lvl="1"/>
             <a:r>
-              <a:rPr lang="en-US" smtClean="0"/>
+              <a:rPr lang="en-US" smtClean="false"/>
               <a:t>Second level</a:t>
             </a:r>
+            <a:endParaRPr/>
           </a:p>
           <a:p>
             <a:pPr lvl="2"/>
             <a:r>
-              <a:rPr lang="en-US" smtClean="0"/>
+              <a:rPr lang="en-US" smtClean="false"/>
               <a:t>Third level</a:t>
             </a:r>
+            <a:endParaRPr/>
           </a:p>
           <a:p>
             <a:pPr lvl="3"/>
             <a:r>
-              <a:rPr lang="en-US" smtClean="0"/>
+              <a:rPr lang="en-US" smtClean="false"/>
               <a:t>Fourth level</a:t>
             </a:r>
+            <a:endParaRPr/>
           </a:p>
           <a:p>
             <a:pPr lvl="4"/>
             <a:r>
-              <a:rPr lang="en-US" smtClean="0"/>
+              <a:rPr lang="en-US" smtClean="false"/>
               <a:t>Fifth level</a:t>
             </a:r>
             <a:endParaRPr lang="en-US"/>
@@ -1749,9 +1777,9 @@
       </p:sp>
       <p:sp>
         <p:nvSpPr>
-          <p:cNvPr id="7" name="Date Placeholder 6"/>
+          <p:cNvPr id="38" name="Date Placeholder 6"/>
           <p:cNvSpPr>
-            <a:spLocks noGrp="1"/>
+            <a:spLocks noGrp="true"/>
           </p:cNvSpPr>
           <p:nvPr>
             <p:ph type="dt" sz="half" idx="10"/>
@@ -1762,8 +1790,9 @@
           <a:bodyPr/>
           <a:lstStyle/>
           <a:p>
+            <a:pPr/>
             <a:fld id="{5BCAD085-E8A6-8845-BD4E-CB4CCA059FC4}" type="datetimeFigureOut">
-              <a:rPr lang="en-US" smtClean="0"/>
+              <a:rPr lang="en-US" smtClean="false"/>
               <a:t>1/27/13</a:t>
             </a:fld>
             <a:endParaRPr lang="en-US"/>
@@ -1772,9 +1801,9 @@
       </p:sp>
       <p:sp>
         <p:nvSpPr>
-          <p:cNvPr id="8" name="Footer Placeholder 7"/>
+          <p:cNvPr id="39" name="Footer Placeholder 7"/>
           <p:cNvSpPr>
-            <a:spLocks noGrp="1"/>
+            <a:spLocks noGrp="true"/>
           </p:cNvSpPr>
           <p:nvPr>
             <p:ph type="ftr" sz="quarter" idx="11"/>
@@ -1785,15 +1814,16 @@
           <a:bodyPr/>
           <a:lstStyle/>
           <a:p>
+            <a:pPr/>
             <a:endParaRPr lang="en-US"/>
           </a:p>
         </p:txBody>
       </p:sp>
       <p:sp>
         <p:nvSpPr>
-          <p:cNvPr id="9" name="Slide Number Placeholder 8"/>
+          <p:cNvPr id="40" name="Slide Number Placeholder 8"/>
           <p:cNvSpPr>
-            <a:spLocks noGrp="1"/>
+            <a:spLocks noGrp="true"/>
           </p:cNvSpPr>
           <p:nvPr>
             <p:ph type="sldNum" sz="quarter" idx="12"/>
@@ -1804,8 +1834,9 @@
           <a:bodyPr/>
           <a:lstStyle/>
           <a:p>
+            <a:pPr/>
             <a:fld id="{C1FF6DA9-008F-8B48-92A6-B652298478BF}" type="slidenum">
-              <a:rPr lang="en-US" smtClean="0"/>
+              <a:rPr lang="en-US" smtClean="false"/>
               <a:t>‹#›</a:t>
             </a:fld>
             <a:endParaRPr lang="en-US"/>
@@ -1813,11 +1844,6 @@
         </p:txBody>
       </p:sp>
     </p:spTree>
-    <p:extLst>
-      <p:ext uri="{BB962C8B-B14F-4D97-AF65-F5344CB8AC3E}">
-        <p14:creationId xmlns:p14="http://schemas.microsoft.com/office/powerpoint/2010/main" val="990158736"/>
-      </p:ext>
-    </p:extLst>
   </p:cSld>
   <p:clrMapOvr>
     <a:masterClrMapping/>
@@ -1826,11 +1852,11 @@
 </file>
 
 <file path=ppt/slideLayouts/slideLayout6.xml><?xml version="1.0" encoding="utf-8"?>
-<p:sldLayout xmlns:a="http://schemas.openxmlformats.org/drawingml/2006/main" xmlns:r="http://schemas.openxmlformats.org/officeDocument/2006/relationships" xmlns:p="http://schemas.openxmlformats.org/presentationml/2006/main" type="titleOnly" preserve="1">
+<p:sldLayout xmlns:a="http://schemas.openxmlformats.org/drawingml/2006/main" xmlns:p="http://schemas.openxmlformats.org/presentationml/2006/main" type="titleOnly">
   <p:cSld name="Title Only">
     <p:spTree>
       <p:nvGrpSpPr>
-        <p:cNvPr id="1" name=""/>
+        <p:cNvPr id="41" name=""/>
         <p:cNvGrpSpPr/>
         <p:nvPr/>
       </p:nvGrpSpPr>
@@ -1844,9 +1870,9 @@
       </p:grpSpPr>
       <p:sp>
         <p:nvSpPr>
-          <p:cNvPr id="2" name="Title 1"/>
+          <p:cNvPr id="42" name="Title 1"/>
           <p:cNvSpPr>
-            <a:spLocks noGrp="1"/>
+            <a:spLocks noGrp="true"/>
           </p:cNvSpPr>
           <p:nvPr>
             <p:ph type="title"/>
@@ -1857,8 +1883,9 @@
           <a:bodyPr/>
           <a:lstStyle/>
           <a:p>
+            <a:pPr/>
             <a:r>
-              <a:rPr lang="en-US" smtClean="0"/>
+              <a:rPr lang="en-US" smtClean="false"/>
               <a:t>Click to edit Master title style</a:t>
             </a:r>
             <a:endParaRPr lang="en-US"/>
@@ -1867,9 +1894,9 @@
       </p:sp>
       <p:sp>
         <p:nvSpPr>
-          <p:cNvPr id="3" name="Date Placeholder 2"/>
+          <p:cNvPr id="43" name="Date Placeholder 2"/>
           <p:cNvSpPr>
-            <a:spLocks noGrp="1"/>
+            <a:spLocks noGrp="true"/>
           </p:cNvSpPr>
           <p:nvPr>
             <p:ph type="dt" sz="half" idx="10"/>
@@ -1880,8 +1907,9 @@
           <a:bodyPr/>
           <a:lstStyle/>
           <a:p>
+            <a:pPr/>
             <a:fld id="{5BCAD085-E8A6-8845-BD4E-CB4CCA059FC4}" type="datetimeFigureOut">
-              <a:rPr lang="en-US" smtClean="0"/>
+              <a:rPr lang="en-US" smtClean="false"/>
               <a:t>1/27/13</a:t>
             </a:fld>
             <a:endParaRPr lang="en-US"/>
@@ -1890,9 +1918,9 @@
       </p:sp>
       <p:sp>
         <p:nvSpPr>
-          <p:cNvPr id="4" name="Footer Placeholder 3"/>
+          <p:cNvPr id="44" name="Footer Placeholder 3"/>
           <p:cNvSpPr>
-            <a:spLocks noGrp="1"/>
+            <a:spLocks noGrp="true"/>
           </p:cNvSpPr>
           <p:nvPr>
             <p:ph type="ftr" sz="quarter" idx="11"/>
@@ -1903,15 +1931,16 @@
           <a:bodyPr/>
           <a:lstStyle/>
           <a:p>
+            <a:pPr/>
             <a:endParaRPr lang="en-US"/>
           </a:p>
         </p:txBody>
       </p:sp>
       <p:sp>
         <p:nvSpPr>
-          <p:cNvPr id="5" name="Slide Number Placeholder 4"/>
+          <p:cNvPr id="45" name="Slide Number Placeholder 4"/>
           <p:cNvSpPr>
-            <a:spLocks noGrp="1"/>
+            <a:spLocks noGrp="true"/>
           </p:cNvSpPr>
           <p:nvPr>
             <p:ph type="sldNum" sz="quarter" idx="12"/>
@@ -1922,8 +1951,9 @@
           <a:bodyPr/>
           <a:lstStyle/>
           <a:p>
+            <a:pPr/>
             <a:fld id="{C1FF6DA9-008F-8B48-92A6-B652298478BF}" type="slidenum">
-              <a:rPr lang="en-US" smtClean="0"/>
+              <a:rPr lang="en-US" smtClean="false"/>
               <a:t>‹#›</a:t>
             </a:fld>
             <a:endParaRPr lang="en-US"/>
@@ -1931,11 +1961,6 @@
         </p:txBody>
       </p:sp>
     </p:spTree>
-    <p:extLst>
-      <p:ext uri="{BB962C8B-B14F-4D97-AF65-F5344CB8AC3E}">
-        <p14:creationId xmlns:p14="http://schemas.microsoft.com/office/powerpoint/2010/main" val="727027711"/>
-      </p:ext>
-    </p:extLst>
   </p:cSld>
   <p:clrMapOvr>
     <a:masterClrMapping/>
@@ -1944,11 +1969,11 @@
 </file>
 
 <file path=ppt/slideLayouts/slideLayout7.xml><?xml version="1.0" encoding="utf-8"?>
-<p:sldLayout xmlns:a="http://schemas.openxmlformats.org/drawingml/2006/main" xmlns:r="http://schemas.openxmlformats.org/officeDocument/2006/relationships" xmlns:p="http://schemas.openxmlformats.org/presentationml/2006/main" type="blank" preserve="1">
+<p:sldLayout xmlns:a="http://schemas.openxmlformats.org/drawingml/2006/main" xmlns:p="http://schemas.openxmlformats.org/presentationml/2006/main" type="blank">
   <p:cSld name="Blank">
     <p:spTree>
       <p:nvGrpSpPr>
-        <p:cNvPr id="1" name=""/>
+        <p:cNvPr id="46" name=""/>
         <p:cNvGrpSpPr/>
         <p:nvPr/>
       </p:nvGrpSpPr>
@@ -1962,9 +1987,9 @@
       </p:grpSpPr>
       <p:sp>
         <p:nvSpPr>
-          <p:cNvPr id="2" name="Date Placeholder 1"/>
+          <p:cNvPr id="47" name="Date Placeholder 1"/>
           <p:cNvSpPr>
-            <a:spLocks noGrp="1"/>
+            <a:spLocks noGrp="true"/>
           </p:cNvSpPr>
           <p:nvPr>
             <p:ph type="dt" sz="half" idx="10"/>
@@ -1975,8 +2000,9 @@
           <a:bodyPr/>
           <a:lstStyle/>
           <a:p>
+            <a:pPr/>
             <a:fld id="{5BCAD085-E8A6-8845-BD4E-CB4CCA059FC4}" type="datetimeFigureOut">
-              <a:rPr lang="en-US" smtClean="0"/>
+              <a:rPr lang="en-US" smtClean="false"/>
               <a:t>1/27/13</a:t>
             </a:fld>
             <a:endParaRPr lang="en-US"/>
@@ -1985,9 +2011,9 @@
       </p:sp>
       <p:sp>
         <p:nvSpPr>
-          <p:cNvPr id="3" name="Footer Placeholder 2"/>
+          <p:cNvPr id="48" name="Footer Placeholder 2"/>
           <p:cNvSpPr>
-            <a:spLocks noGrp="1"/>
+            <a:spLocks noGrp="true"/>
           </p:cNvSpPr>
           <p:nvPr>
             <p:ph type="ftr" sz="quarter" idx="11"/>
@@ -1998,15 +2024,16 @@
           <a:bodyPr/>
           <a:lstStyle/>
           <a:p>
+            <a:pPr/>
             <a:endParaRPr lang="en-US"/>
           </a:p>
         </p:txBody>
       </p:sp>
       <p:sp>
         <p:nvSpPr>
-          <p:cNvPr id="4" name="Slide Number Placeholder 3"/>
+          <p:cNvPr id="49" name="Slide Number Placeholder 3"/>
           <p:cNvSpPr>
-            <a:spLocks noGrp="1"/>
+            <a:spLocks noGrp="true"/>
           </p:cNvSpPr>
           <p:nvPr>
             <p:ph type="sldNum" sz="quarter" idx="12"/>
@@ -2017,8 +2044,9 @@
           <a:bodyPr/>
           <a:lstStyle/>
           <a:p>
+            <a:pPr/>
             <a:fld id="{C1FF6DA9-008F-8B48-92A6-B652298478BF}" type="slidenum">
-              <a:rPr lang="en-US" smtClean="0"/>
+              <a:rPr lang="en-US" smtClean="false"/>
               <a:t>‹#›</a:t>
             </a:fld>
             <a:endParaRPr lang="en-US"/>
@@ -2026,11 +2054,6 @@
         </p:txBody>
       </p:sp>
     </p:spTree>
-    <p:extLst>
-      <p:ext uri="{BB962C8B-B14F-4D97-AF65-F5344CB8AC3E}">
-        <p14:creationId xmlns:p14="http://schemas.microsoft.com/office/powerpoint/2010/main" val="1212999818"/>
-      </p:ext>
-    </p:extLst>
   </p:cSld>
   <p:clrMapOvr>
     <a:masterClrMapping/>
@@ -2039,11 +2062,11 @@
 </file>
 
 <file path=ppt/slideLayouts/slideLayout8.xml><?xml version="1.0" encoding="utf-8"?>
-<p:sldLayout xmlns:a="http://schemas.openxmlformats.org/drawingml/2006/main" xmlns:r="http://schemas.openxmlformats.org/officeDocument/2006/relationships" xmlns:p="http://schemas.openxmlformats.org/presentationml/2006/main" type="objTx" preserve="1">
+<p:sldLayout xmlns:a="http://schemas.openxmlformats.org/drawingml/2006/main" xmlns:p="http://schemas.openxmlformats.org/presentationml/2006/main" type="objTx">
   <p:cSld name="Content with Caption">
     <p:spTree>
       <p:nvGrpSpPr>
-        <p:cNvPr id="1" name=""/>
+        <p:cNvPr id="50" name=""/>
         <p:cNvGrpSpPr/>
         <p:nvPr/>
       </p:nvGrpSpPr>
@@ -2057,9 +2080,9 @@
       </p:grpSpPr>
       <p:sp>
         <p:nvSpPr>
-          <p:cNvPr id="2" name="Title 1"/>
+          <p:cNvPr id="51" name="Title 1"/>
           <p:cNvSpPr>
-            <a:spLocks noGrp="1"/>
+            <a:spLocks noGrp="true"/>
           </p:cNvSpPr>
           <p:nvPr>
             <p:ph type="title"/>
@@ -2075,12 +2098,13 @@
           <a:bodyPr anchor="b"/>
           <a:lstStyle>
             <a:lvl1pPr algn="l">
-              <a:defRPr sz="2000" b="1"/>
+              <a:defRPr sz="2000" b="true"/>
             </a:lvl1pPr>
           </a:lstStyle>
           <a:p>
+            <a:pPr/>
             <a:r>
-              <a:rPr lang="en-US" smtClean="0"/>
+              <a:rPr lang="en-US" smtClean="false"/>
               <a:t>Click to edit Master title style</a:t>
             </a:r>
             <a:endParaRPr lang="en-US"/>
@@ -2089,9 +2113,9 @@
       </p:sp>
       <p:sp>
         <p:nvSpPr>
-          <p:cNvPr id="3" name="Content Placeholder 2"/>
+          <p:cNvPr id="52" name="Content Placeholder 2"/>
           <p:cNvSpPr>
-            <a:spLocks noGrp="1"/>
+            <a:spLocks noGrp="true"/>
           </p:cNvSpPr>
           <p:nvPr>
             <p:ph idx="1"/>
@@ -2137,35 +2161,39 @@
           <a:p>
             <a:pPr lvl="0"/>
             <a:r>
-              <a:rPr lang="en-US" smtClean="0"/>
+              <a:rPr lang="en-US" smtClean="false"/>
               <a:t>Click to edit Master text styles</a:t>
             </a:r>
+            <a:endParaRPr/>
           </a:p>
           <a:p>
             <a:pPr lvl="1"/>
             <a:r>
-              <a:rPr lang="en-US" smtClean="0"/>
+              <a:rPr lang="en-US" smtClean="false"/>
               <a:t>Second level</a:t>
             </a:r>
+            <a:endParaRPr/>
           </a:p>
           <a:p>
             <a:pPr lvl="2"/>
             <a:r>
-              <a:rPr lang="en-US" smtClean="0"/>
+              <a:rPr lang="en-US" smtClean="false"/>
               <a:t>Third level</a:t>
             </a:r>
+            <a:endParaRPr/>
           </a:p>
           <a:p>
             <a:pPr lvl="3"/>
             <a:r>
-              <a:rPr lang="en-US" smtClean="0"/>
+              <a:rPr lang="en-US" smtClean="false"/>
               <a:t>Fourth level</a:t>
             </a:r>
+            <a:endParaRPr/>
           </a:p>
           <a:p>
             <a:pPr lvl="4"/>
             <a:r>
-              <a:rPr lang="en-US" smtClean="0"/>
+              <a:rPr lang="en-US" smtClean="false"/>
               <a:t>Fifth level</a:t>
             </a:r>
             <a:endParaRPr lang="en-US"/>
@@ -2174,9 +2202,9 @@
       </p:sp>
       <p:sp>
         <p:nvSpPr>
-          <p:cNvPr id="4" name="Text Placeholder 3"/>
+          <p:cNvPr id="53" name="Text Placeholder 3"/>
           <p:cNvSpPr>
-            <a:spLocks noGrp="1"/>
+            <a:spLocks noGrp="true"/>
           </p:cNvSpPr>
           <p:nvPr>
             <p:ph type="body" sz="half" idx="2"/>
@@ -2231,17 +2259,18 @@
           <a:p>
             <a:pPr lvl="0"/>
             <a:r>
-              <a:rPr lang="en-US" smtClean="0"/>
+              <a:rPr lang="en-US" smtClean="false"/>
               <a:t>Click to edit Master text styles</a:t>
             </a:r>
+            <a:endParaRPr/>
           </a:p>
         </p:txBody>
       </p:sp>
       <p:sp>
         <p:nvSpPr>
-          <p:cNvPr id="5" name="Date Placeholder 4"/>
+          <p:cNvPr id="54" name="Date Placeholder 4"/>
           <p:cNvSpPr>
-            <a:spLocks noGrp="1"/>
+            <a:spLocks noGrp="true"/>
           </p:cNvSpPr>
           <p:nvPr>
             <p:ph type="dt" sz="half" idx="10"/>
@@ -2252,8 +2281,9 @@
           <a:bodyPr/>
           <a:lstStyle/>
           <a:p>
+            <a:pPr/>
             <a:fld id="{5BCAD085-E8A6-8845-BD4E-CB4CCA059FC4}" type="datetimeFigureOut">
-              <a:rPr lang="en-US" smtClean="0"/>
+              <a:rPr lang="en-US" smtClean="false"/>
               <a:t>1/27/13</a:t>
             </a:fld>
             <a:endParaRPr lang="en-US"/>
@@ -2262,9 +2292,9 @@
       </p:sp>
       <p:sp>
         <p:nvSpPr>
-          <p:cNvPr id="6" name="Footer Placeholder 5"/>
+          <p:cNvPr id="55" name="Footer Placeholder 5"/>
           <p:cNvSpPr>
-            <a:spLocks noGrp="1"/>
+            <a:spLocks noGrp="true"/>
           </p:cNvSpPr>
           <p:nvPr>
             <p:ph type="ftr" sz="quarter" idx="11"/>
@@ -2275,15 +2305,16 @@
           <a:bodyPr/>
           <a:lstStyle/>
           <a:p>
+            <a:pPr/>
             <a:endParaRPr lang="en-US"/>
           </a:p>
         </p:txBody>
       </p:sp>
       <p:sp>
         <p:nvSpPr>
-          <p:cNvPr id="7" name="Slide Number Placeholder 6"/>
+          <p:cNvPr id="56" name="Slide Number Placeholder 6"/>
           <p:cNvSpPr>
-            <a:spLocks noGrp="1"/>
+            <a:spLocks noGrp="true"/>
           </p:cNvSpPr>
           <p:nvPr>
             <p:ph type="sldNum" sz="quarter" idx="12"/>
@@ -2294,8 +2325,9 @@
           <a:bodyPr/>
           <a:lstStyle/>
           <a:p>
+            <a:pPr/>
             <a:fld id="{C1FF6DA9-008F-8B48-92A6-B652298478BF}" type="slidenum">
-              <a:rPr lang="en-US" smtClean="0"/>
+              <a:rPr lang="en-US" smtClean="false"/>
               <a:t>‹#›</a:t>
             </a:fld>
             <a:endParaRPr lang="en-US"/>
@@ -2303,11 +2335,6 @@
         </p:txBody>
       </p:sp>
     </p:spTree>
-    <p:extLst>
-      <p:ext uri="{BB962C8B-B14F-4D97-AF65-F5344CB8AC3E}">
-        <p14:creationId xmlns:p14="http://schemas.microsoft.com/office/powerpoint/2010/main" val="1840726560"/>
-      </p:ext>
-    </p:extLst>
   </p:cSld>
   <p:clrMapOvr>
     <a:masterClrMapping/>
@@ -2316,11 +2343,11 @@
 </file>
 
 <file path=ppt/slideLayouts/slideLayout9.xml><?xml version="1.0" encoding="utf-8"?>
-<p:sldLayout xmlns:a="http://schemas.openxmlformats.org/drawingml/2006/main" xmlns:r="http://schemas.openxmlformats.org/officeDocument/2006/relationships" xmlns:p="http://schemas.openxmlformats.org/presentationml/2006/main" type="picTx" preserve="1">
+<p:sldLayout xmlns:a="http://schemas.openxmlformats.org/drawingml/2006/main" xmlns:p="http://schemas.openxmlformats.org/presentationml/2006/main" type="picTx">
   <p:cSld name="Picture with Caption">
     <p:spTree>
       <p:nvGrpSpPr>
-        <p:cNvPr id="1" name=""/>
+        <p:cNvPr id="57" name=""/>
         <p:cNvGrpSpPr/>
         <p:nvPr/>
       </p:nvGrpSpPr>
@@ -2334,9 +2361,9 @@
       </p:grpSpPr>
       <p:sp>
         <p:nvSpPr>
-          <p:cNvPr id="2" name="Title 1"/>
+          <p:cNvPr id="58" name="Title 1"/>
           <p:cNvSpPr>
-            <a:spLocks noGrp="1"/>
+            <a:spLocks noGrp="true"/>
           </p:cNvSpPr>
           <p:nvPr>
             <p:ph type="title"/>
@@ -2352,12 +2379,13 @@
           <a:bodyPr anchor="b"/>
           <a:lstStyle>
             <a:lvl1pPr algn="l">
-              <a:defRPr sz="2000" b="1"/>
+              <a:defRPr sz="2000" b="true"/>
             </a:lvl1pPr>
           </a:lstStyle>
           <a:p>
+            <a:pPr/>
             <a:r>
-              <a:rPr lang="en-US" smtClean="0"/>
+              <a:rPr lang="en-US" smtClean="false"/>
               <a:t>Click to edit Master title style</a:t>
             </a:r>
             <a:endParaRPr lang="en-US"/>
@@ -2366,9 +2394,9 @@
       </p:sp>
       <p:sp>
         <p:nvSpPr>
-          <p:cNvPr id="3" name="Picture Placeholder 2"/>
+          <p:cNvPr id="59" name="Picture Placeholder 2"/>
           <p:cNvSpPr>
-            <a:spLocks noGrp="1"/>
+            <a:spLocks noGrp="true"/>
           </p:cNvSpPr>
           <p:nvPr>
             <p:ph type="pic" idx="1"/>
@@ -2421,15 +2449,16 @@
             </a:lvl9pPr>
           </a:lstStyle>
           <a:p>
+            <a:pPr/>
             <a:endParaRPr lang="en-US"/>
           </a:p>
         </p:txBody>
       </p:sp>
       <p:sp>
         <p:nvSpPr>
-          <p:cNvPr id="4" name="Text Placeholder 3"/>
+          <p:cNvPr id="60" name="Text Placeholder 3"/>
           <p:cNvSpPr>
-            <a:spLocks noGrp="1"/>
+            <a:spLocks noGrp="true"/>
           </p:cNvSpPr>
           <p:nvPr>
             <p:ph type="body" sz="half" idx="2"/>
@@ -2484,17 +2513,18 @@
           <a:p>
             <a:pPr lvl="0"/>
             <a:r>
-              <a:rPr lang="en-US" smtClean="0"/>
+              <a:rPr lang="en-US" smtClean="false"/>
               <a:t>Click to edit Master text styles</a:t>
             </a:r>
+            <a:endParaRPr/>
           </a:p>
         </p:txBody>
       </p:sp>
       <p:sp>
         <p:nvSpPr>
-          <p:cNvPr id="5" name="Date Placeholder 4"/>
+          <p:cNvPr id="61" name="Date Placeholder 4"/>
           <p:cNvSpPr>
-            <a:spLocks noGrp="1"/>
+            <a:spLocks noGrp="true"/>
           </p:cNvSpPr>
           <p:nvPr>
             <p:ph type="dt" sz="half" idx="10"/>
@@ -2505,8 +2535,9 @@
           <a:bodyPr/>
           <a:lstStyle/>
           <a:p>
+            <a:pPr/>
             <a:fld id="{5BCAD085-E8A6-8845-BD4E-CB4CCA059FC4}" type="datetimeFigureOut">
-              <a:rPr lang="en-US" smtClean="0"/>
+              <a:rPr lang="en-US" smtClean="false"/>
               <a:t>1/27/13</a:t>
             </a:fld>
             <a:endParaRPr lang="en-US"/>
@@ -2515,9 +2546,9 @@
       </p:sp>
       <p:sp>
         <p:nvSpPr>
-          <p:cNvPr id="6" name="Footer Placeholder 5"/>
+          <p:cNvPr id="62" name="Footer Placeholder 5"/>
           <p:cNvSpPr>
-            <a:spLocks noGrp="1"/>
+            <a:spLocks noGrp="true"/>
           </p:cNvSpPr>
           <p:nvPr>
             <p:ph type="ftr" sz="quarter" idx="11"/>
@@ -2528,15 +2559,16 @@
           <a:bodyPr/>
           <a:lstStyle/>
           <a:p>
+            <a:pPr/>
             <a:endParaRPr lang="en-US"/>
           </a:p>
         </p:txBody>
       </p:sp>
       <p:sp>
         <p:nvSpPr>
-          <p:cNvPr id="7" name="Slide Number Placeholder 6"/>
+          <p:cNvPr id="63" name="Slide Number Placeholder 6"/>
           <p:cNvSpPr>
-            <a:spLocks noGrp="1"/>
+            <a:spLocks noGrp="true"/>
           </p:cNvSpPr>
           <p:nvPr>
             <p:ph type="sldNum" sz="quarter" idx="12"/>
@@ -2547,8 +2579,9 @@
           <a:bodyPr/>
           <a:lstStyle/>
           <a:p>
+            <a:pPr/>
             <a:fld id="{C1FF6DA9-008F-8B48-92A6-B652298478BF}" type="slidenum">
-              <a:rPr lang="en-US" smtClean="0"/>
+              <a:rPr lang="en-US" smtClean="false"/>
               <a:t>‹#›</a:t>
             </a:fld>
             <a:endParaRPr lang="en-US"/>
@@ -2556,11 +2589,6 @@
         </p:txBody>
       </p:sp>
     </p:spTree>
-    <p:extLst>
-      <p:ext uri="{BB962C8B-B14F-4D97-AF65-F5344CB8AC3E}">
-        <p14:creationId xmlns:p14="http://schemas.microsoft.com/office/powerpoint/2010/main" val="3889236939"/>
-      </p:ext>
-    </p:extLst>
   </p:cSld>
   <p:clrMapOvr>
     <a:masterClrMapping/>
@@ -2594,7 +2622,7 @@
         <p:nvSpPr>
           <p:cNvPr id="2" name="Title Placeholder 1"/>
           <p:cNvSpPr>
-            <a:spLocks noGrp="1"/>
+            <a:spLocks noGrp="true"/>
           </p:cNvSpPr>
           <p:nvPr>
             <p:ph type="title"/>
@@ -2610,13 +2638,14 @@
           </a:prstGeom>
         </p:spPr>
         <p:txBody>
-          <a:bodyPr vert="horz" lIns="91440" tIns="45720" rIns="91440" bIns="45720" rtlCol="0" anchor="ctr">
+          <a:bodyPr vert="horz" lIns="91440" tIns="45720" rIns="91440" bIns="45720" rtlCol="false" anchor="ctr">
             <a:normAutofit/>
           </a:bodyPr>
           <a:lstStyle/>
           <a:p>
+            <a:pPr/>
             <a:r>
-              <a:rPr lang="en-US" smtClean="0"/>
+              <a:rPr lang="en-US" smtClean="false"/>
               <a:t>Click to edit Master title style</a:t>
             </a:r>
             <a:endParaRPr lang="en-US"/>
@@ -2627,7 +2656,7 @@
         <p:nvSpPr>
           <p:cNvPr id="3" name="Text Placeholder 2"/>
           <p:cNvSpPr>
-            <a:spLocks noGrp="1"/>
+            <a:spLocks noGrp="true"/>
           </p:cNvSpPr>
           <p:nvPr>
             <p:ph type="body" idx="1"/>
@@ -2643,42 +2672,46 @@
           </a:prstGeom>
         </p:spPr>
         <p:txBody>
-          <a:bodyPr vert="horz" lIns="91440" tIns="45720" rIns="91440" bIns="45720" rtlCol="0">
+          <a:bodyPr vert="horz" lIns="91440" tIns="45720" rIns="91440" bIns="45720" rtlCol="false">
             <a:normAutofit/>
           </a:bodyPr>
           <a:lstStyle/>
           <a:p>
             <a:pPr lvl="0"/>
             <a:r>
-              <a:rPr lang="en-US" smtClean="0"/>
+              <a:rPr lang="en-US" smtClean="false"/>
               <a:t>Click to edit Master text styles</a:t>
             </a:r>
+            <a:endParaRPr/>
           </a:p>
           <a:p>
             <a:pPr lvl="1"/>
             <a:r>
-              <a:rPr lang="en-US" smtClean="0"/>
+              <a:rPr lang="en-US" smtClean="false"/>
               <a:t>Second level</a:t>
             </a:r>
+            <a:endParaRPr/>
           </a:p>
           <a:p>
             <a:pPr lvl="2"/>
             <a:r>
-              <a:rPr lang="en-US" smtClean="0"/>
+              <a:rPr lang="en-US" smtClean="false"/>
               <a:t>Third level</a:t>
             </a:r>
+            <a:endParaRPr/>
           </a:p>
           <a:p>
             <a:pPr lvl="3"/>
             <a:r>
-              <a:rPr lang="en-US" smtClean="0"/>
+              <a:rPr lang="en-US" smtClean="false"/>
               <a:t>Fourth level</a:t>
             </a:r>
+            <a:endParaRPr/>
           </a:p>
           <a:p>
             <a:pPr lvl="4"/>
             <a:r>
-              <a:rPr lang="en-US" smtClean="0"/>
+              <a:rPr lang="en-US" smtClean="false"/>
               <a:t>Fifth level</a:t>
             </a:r>
             <a:endParaRPr lang="en-US"/>
@@ -2689,7 +2722,7 @@
         <p:nvSpPr>
           <p:cNvPr id="4" name="Date Placeholder 3"/>
           <p:cNvSpPr>
-            <a:spLocks noGrp="1"/>
+            <a:spLocks noGrp="true"/>
           </p:cNvSpPr>
           <p:nvPr>
             <p:ph type="dt" sz="half" idx="2"/>
@@ -2705,7 +2738,7 @@
           </a:prstGeom>
         </p:spPr>
         <p:txBody>
-          <a:bodyPr vert="horz" lIns="91440" tIns="45720" rIns="91440" bIns="45720" rtlCol="0" anchor="ctr"/>
+          <a:bodyPr vert="horz" lIns="91440" tIns="45720" rIns="91440" bIns="45720" rtlCol="false" anchor="ctr"/>
           <a:lstStyle>
             <a:lvl1pPr algn="l">
               <a:defRPr sz="1200">
@@ -2718,8 +2751,9 @@
             </a:lvl1pPr>
           </a:lstStyle>
           <a:p>
+            <a:pPr/>
             <a:fld id="{5BCAD085-E8A6-8845-BD4E-CB4CCA059FC4}" type="datetimeFigureOut">
-              <a:rPr lang="en-US" smtClean="0"/>
+              <a:rPr lang="en-US" smtClean="false"/>
               <a:t>1/27/13</a:t>
             </a:fld>
             <a:endParaRPr lang="en-US"/>
@@ -2730,7 +2764,7 @@
         <p:nvSpPr>
           <p:cNvPr id="5" name="Footer Placeholder 4"/>
           <p:cNvSpPr>
-            <a:spLocks noGrp="1"/>
+            <a:spLocks noGrp="true"/>
           </p:cNvSpPr>
           <p:nvPr>
             <p:ph type="ftr" sz="quarter" idx="3"/>
@@ -2746,7 +2780,7 @@
           </a:prstGeom>
         </p:spPr>
         <p:txBody>
-          <a:bodyPr vert="horz" lIns="91440" tIns="45720" rIns="91440" bIns="45720" rtlCol="0" anchor="ctr"/>
+          <a:bodyPr vert="horz" lIns="91440" tIns="45720" rIns="91440" bIns="45720" rtlCol="false" anchor="ctr"/>
           <a:lstStyle>
             <a:lvl1pPr algn="ctr">
               <a:defRPr sz="1200">
@@ -2759,6 +2793,7 @@
             </a:lvl1pPr>
           </a:lstStyle>
           <a:p>
+            <a:pPr/>
             <a:endParaRPr lang="en-US"/>
           </a:p>
         </p:txBody>
@@ -2767,7 +2802,7 @@
         <p:nvSpPr>
           <p:cNvPr id="6" name="Slide Number Placeholder 5"/>
           <p:cNvSpPr>
-            <a:spLocks noGrp="1"/>
+            <a:spLocks noGrp="true"/>
           </p:cNvSpPr>
           <p:nvPr>
             <p:ph type="sldNum" sz="quarter" idx="4"/>
@@ -2783,7 +2818,7 @@
           </a:prstGeom>
         </p:spPr>
         <p:txBody>
-          <a:bodyPr vert="horz" lIns="91440" tIns="45720" rIns="91440" bIns="45720" rtlCol="0" anchor="ctr"/>
+          <a:bodyPr vert="horz" lIns="91440" tIns="45720" rIns="91440" bIns="45720" rtlCol="false" anchor="ctr"/>
           <a:lstStyle>
             <a:lvl1pPr algn="r">
               <a:defRPr sz="1200">
@@ -2796,8 +2831,9 @@
             </a:lvl1pPr>
           </a:lstStyle>
           <a:p>
+            <a:pPr/>
             <a:fld id="{C1FF6DA9-008F-8B48-92A6-B652298478BF}" type="slidenum">
-              <a:rPr lang="en-US" smtClean="0"/>
+              <a:rPr lang="en-US" smtClean="false"/>
               <a:t>‹#›</a:t>
             </a:fld>
             <a:endParaRPr lang="en-US"/>
@@ -2805,31 +2841,26 @@
         </p:txBody>
       </p:sp>
     </p:spTree>
-    <p:extLst>
-      <p:ext uri="{BB962C8B-B14F-4D97-AF65-F5344CB8AC3E}">
-        <p14:creationId xmlns:p14="http://schemas.microsoft.com/office/powerpoint/2010/main" val="2209977519"/>
-      </p:ext>
-    </p:extLst>
   </p:cSld>
   <p:clrMap bg1="lt1" tx1="dk1" bg2="lt2" tx2="dk2" accent1="accent1" accent2="accent2" accent3="accent3" accent4="accent4" accent5="accent5" accent6="accent6" hlink="hlink" folHlink="folHlink"/>
   <p:sldLayoutIdLst>
-    <p:sldLayoutId id="2147483649" r:id="rId1"/>
-    <p:sldLayoutId id="2147483650" r:id="rId2"/>
-    <p:sldLayoutId id="2147483651" r:id="rId3"/>
-    <p:sldLayoutId id="2147483652" r:id="rId4"/>
-    <p:sldLayoutId id="2147483653" r:id="rId5"/>
-    <p:sldLayoutId id="2147483654" r:id="rId6"/>
-    <p:sldLayoutId id="2147483655" r:id="rId7"/>
-    <p:sldLayoutId id="2147483656" r:id="rId8"/>
-    <p:sldLayoutId id="2147483657" r:id="rId9"/>
-    <p:sldLayoutId id="2147483658" r:id="rId10"/>
-    <p:sldLayoutId id="2147483659" r:id="rId11"/>
+    <p:sldLayoutId id="2147483649" r:id="rId0"/>
+    <p:sldLayoutId id="2147483650" r:id="rId1"/>
+    <p:sldLayoutId id="2147483651" r:id="rId2"/>
+    <p:sldLayoutId id="2147483652" r:id="rId3"/>
+    <p:sldLayoutId id="2147483653" r:id="rId4"/>
+    <p:sldLayoutId id="2147483654" r:id="rId5"/>
+    <p:sldLayoutId id="2147483655" r:id="rId6"/>
+    <p:sldLayoutId id="2147483656" r:id="rId7"/>
+    <p:sldLayoutId id="2147483657" r:id="rId8"/>
+    <p:sldLayoutId id="2147483658" r:id="rId9"/>
+    <p:sldLayoutId id="2147483659" r:id="rId10"/>
   </p:sldLayoutIdLst>
   <p:txStyles>
     <p:titleStyle>
-      <a:lvl1pPr algn="ctr" defTabSz="457200" rtl="0" eaLnBrk="1" latinLnBrk="0" hangingPunct="1">
+      <a:lvl1pPr algn="ctr" defTabSz="457200" rtl="false" eaLnBrk="true" latinLnBrk="false" hangingPunct="true">
         <a:spcBef>
-          <a:spcPct val="0"/>
+          <a:spcPct val="1"/>
         </a:spcBef>
         <a:buNone/>
         <a:defRPr sz="4400" kern="1200">
@@ -2843,7 +2874,7 @@
       </a:lvl1pPr>
     </p:titleStyle>
     <p:bodyStyle>
-      <a:lvl1pPr marL="342900" indent="-342900" algn="l" defTabSz="457200" rtl="0" eaLnBrk="1" latinLnBrk="0" hangingPunct="1">
+      <a:lvl1pPr marL="342900" indent="-342900" algn="l" defTabSz="457200" rtl="false" eaLnBrk="true" latinLnBrk="false" hangingPunct="true">
         <a:spcBef>
           <a:spcPct val="20000"/>
         </a:spcBef>
@@ -2858,7 +2889,7 @@
           <a:cs typeface="+mn-cs"/>
         </a:defRPr>
       </a:lvl1pPr>
-      <a:lvl2pPr marL="742950" indent="-285750" algn="l" defTabSz="457200" rtl="0" eaLnBrk="1" latinLnBrk="0" hangingPunct="1">
+      <a:lvl2pPr marL="742950" indent="-285750" algn="l" defTabSz="457200" rtl="false" eaLnBrk="true" latinLnBrk="false" hangingPunct="true">
         <a:spcBef>
           <a:spcPct val="20000"/>
         </a:spcBef>
@@ -2873,7 +2904,7 @@
           <a:cs typeface="+mn-cs"/>
         </a:defRPr>
       </a:lvl2pPr>
-      <a:lvl3pPr marL="1143000" indent="-228600" algn="l" defTabSz="457200" rtl="0" eaLnBrk="1" latinLnBrk="0" hangingPunct="1">
+      <a:lvl3pPr marL="1143000" indent="-228600" algn="l" defTabSz="457200" rtl="false" eaLnBrk="true" latinLnBrk="false" hangingPunct="true">
         <a:spcBef>
           <a:spcPct val="20000"/>
         </a:spcBef>
@@ -2888,7 +2919,7 @@
           <a:cs typeface="+mn-cs"/>
         </a:defRPr>
       </a:lvl3pPr>
-      <a:lvl4pPr marL="1600200" indent="-228600" algn="l" defTabSz="457200" rtl="0" eaLnBrk="1" latinLnBrk="0" hangingPunct="1">
+      <a:lvl4pPr marL="1600200" indent="-228600" algn="l" defTabSz="457200" rtl="false" eaLnBrk="true" latinLnBrk="false" hangingPunct="true">
         <a:spcBef>
           <a:spcPct val="20000"/>
         </a:spcBef>
@@ -2903,7 +2934,7 @@
           <a:cs typeface="+mn-cs"/>
         </a:defRPr>
       </a:lvl4pPr>
-      <a:lvl5pPr marL="2057400" indent="-228600" algn="l" defTabSz="457200" rtl="0" eaLnBrk="1" latinLnBrk="0" hangingPunct="1">
+      <a:lvl5pPr marL="2057400" indent="-228600" algn="l" defTabSz="457200" rtl="false" eaLnBrk="true" latinLnBrk="false" hangingPunct="true">
         <a:spcBef>
           <a:spcPct val="20000"/>
         </a:spcBef>
@@ -2918,7 +2949,7 @@
           <a:cs typeface="+mn-cs"/>
         </a:defRPr>
       </a:lvl5pPr>
-      <a:lvl6pPr marL="2514600" indent="-228600" algn="l" defTabSz="457200" rtl="0" eaLnBrk="1" latinLnBrk="0" hangingPunct="1">
+      <a:lvl6pPr marL="2514600" indent="-228600" algn="l" defTabSz="457200" rtl="false" eaLnBrk="true" latinLnBrk="false" hangingPunct="true">
         <a:spcBef>
           <a:spcPct val="20000"/>
         </a:spcBef>
@@ -2933,7 +2964,7 @@
           <a:cs typeface="+mn-cs"/>
         </a:defRPr>
       </a:lvl6pPr>
-      <a:lvl7pPr marL="2971800" indent="-228600" algn="l" defTabSz="457200" rtl="0" eaLnBrk="1" latinLnBrk="0" hangingPunct="1">
+      <a:lvl7pPr marL="2971800" indent="-228600" algn="l" defTabSz="457200" rtl="false" eaLnBrk="true" latinLnBrk="false" hangingPunct="true">
         <a:spcBef>
           <a:spcPct val="20000"/>
         </a:spcBef>
@@ -2948,7 +2979,7 @@
           <a:cs typeface="+mn-cs"/>
         </a:defRPr>
       </a:lvl7pPr>
-      <a:lvl8pPr marL="3429000" indent="-228600" algn="l" defTabSz="457200" rtl="0" eaLnBrk="1" latinLnBrk="0" hangingPunct="1">
+      <a:lvl8pPr marL="3429000" indent="-228600" algn="l" defTabSz="457200" rtl="false" eaLnBrk="true" latinLnBrk="false" hangingPunct="true">
         <a:spcBef>
           <a:spcPct val="20000"/>
         </a:spcBef>
@@ -2963,7 +2994,7 @@
           <a:cs typeface="+mn-cs"/>
         </a:defRPr>
       </a:lvl8pPr>
-      <a:lvl9pPr marL="3886200" indent="-228600" algn="l" defTabSz="457200" rtl="0" eaLnBrk="1" latinLnBrk="0" hangingPunct="1">
+      <a:lvl9pPr marL="3886200" indent="-228600" algn="l" defTabSz="457200" rtl="false" eaLnBrk="true" latinLnBrk="false" hangingPunct="true">
         <a:spcBef>
           <a:spcPct val="20000"/>
         </a:spcBef>
@@ -2983,7 +3014,7 @@
       <a:defPPr>
         <a:defRPr lang="en-US"/>
       </a:defPPr>
-      <a:lvl1pPr marL="0" algn="l" defTabSz="457200" rtl="0" eaLnBrk="1" latinLnBrk="0" hangingPunct="1">
+      <a:lvl1pPr marL="0" algn="l" defTabSz="457200" rtl="false" eaLnBrk="true" latinLnBrk="false" hangingPunct="true">
         <a:defRPr sz="1800" kern="1200">
           <a:solidFill>
             <a:schemeClr val="tx1"/>
@@ -2993,7 +3024,7 @@
           <a:cs typeface="+mn-cs"/>
         </a:defRPr>
       </a:lvl1pPr>
-      <a:lvl2pPr marL="457200" algn="l" defTabSz="457200" rtl="0" eaLnBrk="1" latinLnBrk="0" hangingPunct="1">
+      <a:lvl2pPr marL="457200" algn="l" defTabSz="457200" rtl="false" eaLnBrk="true" latinLnBrk="false" hangingPunct="true">
         <a:defRPr sz="1800" kern="1200">
           <a:solidFill>
             <a:schemeClr val="tx1"/>
@@ -3003,7 +3034,7 @@
           <a:cs typeface="+mn-cs"/>
         </a:defRPr>
       </a:lvl2pPr>
-      <a:lvl3pPr marL="914400" algn="l" defTabSz="457200" rtl="0" eaLnBrk="1" latinLnBrk="0" hangingPunct="1">
+      <a:lvl3pPr marL="914400" algn="l" defTabSz="457200" rtl="false" eaLnBrk="true" latinLnBrk="false" hangingPunct="true">
         <a:defRPr sz="1800" kern="1200">
           <a:solidFill>
             <a:schemeClr val="tx1"/>
@@ -3013,7 +3044,7 @@
           <a:cs typeface="+mn-cs"/>
         </a:defRPr>
       </a:lvl3pPr>
-      <a:lvl4pPr marL="1371600" algn="l" defTabSz="457200" rtl="0" eaLnBrk="1" latinLnBrk="0" hangingPunct="1">
+      <a:lvl4pPr marL="1371600" algn="l" defTabSz="457200" rtl="false" eaLnBrk="true" latinLnBrk="false" hangingPunct="true">
         <a:defRPr sz="1800" kern="1200">
           <a:solidFill>
             <a:schemeClr val="tx1"/>
@@ -3023,7 +3054,7 @@
           <a:cs typeface="+mn-cs"/>
         </a:defRPr>
       </a:lvl4pPr>
-      <a:lvl5pPr marL="1828800" algn="l" defTabSz="457200" rtl="0" eaLnBrk="1" latinLnBrk="0" hangingPunct="1">
+      <a:lvl5pPr marL="1828800" algn="l" defTabSz="457200" rtl="false" eaLnBrk="true" latinLnBrk="false" hangingPunct="true">
         <a:defRPr sz="1800" kern="1200">
           <a:solidFill>
             <a:schemeClr val="tx1"/>
@@ -3033,7 +3064,7 @@
           <a:cs typeface="+mn-cs"/>
         </a:defRPr>
       </a:lvl5pPr>
-      <a:lvl6pPr marL="2286000" algn="l" defTabSz="457200" rtl="0" eaLnBrk="1" latinLnBrk="0" hangingPunct="1">
+      <a:lvl6pPr marL="2286000" algn="l" defTabSz="457200" rtl="false" eaLnBrk="true" latinLnBrk="false" hangingPunct="true">
         <a:defRPr sz="1800" kern="1200">
           <a:solidFill>
             <a:schemeClr val="tx1"/>
@@ -3043,7 +3074,7 @@
           <a:cs typeface="+mn-cs"/>
         </a:defRPr>
       </a:lvl6pPr>
-      <a:lvl7pPr marL="2743200" algn="l" defTabSz="457200" rtl="0" eaLnBrk="1" latinLnBrk="0" hangingPunct="1">
+      <a:lvl7pPr marL="2743200" algn="l" defTabSz="457200" rtl="false" eaLnBrk="true" latinLnBrk="false" hangingPunct="true">
         <a:defRPr sz="1800" kern="1200">
           <a:solidFill>
             <a:schemeClr val="tx1"/>
@@ -3053,7 +3084,7 @@
           <a:cs typeface="+mn-cs"/>
         </a:defRPr>
       </a:lvl7pPr>
-      <a:lvl8pPr marL="3200400" algn="l" defTabSz="457200" rtl="0" eaLnBrk="1" latinLnBrk="0" hangingPunct="1">
+      <a:lvl8pPr marL="3200400" algn="l" defTabSz="457200" rtl="false" eaLnBrk="true" latinLnBrk="false" hangingPunct="true">
         <a:defRPr sz="1800" kern="1200">
           <a:solidFill>
             <a:schemeClr val="tx1"/>
@@ -3063,7 +3094,7 @@
           <a:cs typeface="+mn-cs"/>
         </a:defRPr>
       </a:lvl8pPr>
-      <a:lvl9pPr marL="3657600" algn="l" defTabSz="457200" rtl="0" eaLnBrk="1" latinLnBrk="0" hangingPunct="1">
+      <a:lvl9pPr marL="3657600" algn="l" defTabSz="457200" rtl="false" eaLnBrk="true" latinLnBrk="false" hangingPunct="true">
         <a:defRPr sz="1800" kern="1200">
           <a:solidFill>
             <a:schemeClr val="tx1"/>
@@ -3079,7 +3110,7 @@
 </file>
 
 <file path=ppt/slides/slide1.xml><?xml version="1.0" encoding="utf-8"?>
-<p:sld xmlns:a="http://schemas.openxmlformats.org/drawingml/2006/main" xmlns:p="http://schemas.openxmlformats.org/presentationml/2006/main" xmlns:r="http://schemas.openxmlformats.org/officeDocument/2006/relationships">
+<p:sld xmlns:a="http://schemas.openxmlformats.org/drawingml/2006/main" xmlns:p="http://schemas.openxmlformats.org/presentationml/2006/main">
   <p:cSld>
     <p:spTree>
       <p:nvGrpSpPr>
@@ -3087,11 +3118,18 @@
         <p:cNvGrpSpPr/>
         <p:nvPr/>
       </p:nvGrpSpPr>
-      <p:grpSpPr/>
+      <p:grpSpPr>
+        <a:xfrm>
+          <a:off x="0" y="0"/>
+          <a:ext cx="0" cy="0"/>
+          <a:chOff x="0" y="0"/>
+          <a:chExt cx="0" cy="0"/>
+        </a:xfrm>
+      </p:grpSpPr>
       <p:sp>
         <p:nvSpPr>
           <p:cNvPr id="2" name="TextBox 1"/>
-          <p:cNvSpPr txBox="1"/>
+          <p:cNvSpPr txBox="true"/>
           <p:nvPr/>
         </p:nvSpPr>
         <p:spPr>
@@ -3111,7 +3149,7 @@
           <a:lstStyle/>
           <a:p>
             <a:pPr>
-              <a:defRPr sz="1200" i="0">
+              <a:defRPr sz="1200" i="false">
                 <a:solidFill>
                   <a:srgbClr val="505050"/>
                 </a:solidFill>
@@ -3119,8 +3157,10 @@
               </a:defRPr>
             </a:pPr>
             <a:r>
+              <a:rPr/>
               <a:t>X</a:t>
             </a:r>
+            <a:endParaRPr/>
           </a:p>
         </p:txBody>
       </p:sp>
@@ -3442,7 +3482,7 @@
           </a:fontRef>
         </p:style>
         <p:txBody>
-          <a:bodyPr rtlCol="0" anchor="ctr"/>
+          <a:bodyPr rtlCol="false" anchor="ctr"/>
           <a:lstStyle/>
           <a:p>
             <a:pPr algn="ctr">
@@ -3454,8 +3494,10 @@
               </a:defRPr>
             </a:pPr>
             <a:r>
+              <a:rPr/>
               <a:t>X Avg Pool</a:t>
             </a:r>
+            <a:endParaRPr/>
           </a:p>
         </p:txBody>
       </p:sp>
@@ -3497,7 +3539,7 @@
           </a:fontRef>
         </p:style>
         <p:txBody>
-          <a:bodyPr rtlCol="0" anchor="ctr"/>
+          <a:bodyPr rtlCol="false" anchor="ctr"/>
           <a:lstStyle/>
           <a:p>
             <a:pPr algn="ctr">
@@ -3509,15 +3551,17 @@
               </a:defRPr>
             </a:pPr>
             <a:r>
+              <a:rPr/>
               <a:t>Y Avg Pool</a:t>
             </a:r>
+            <a:endParaRPr/>
           </a:p>
         </p:txBody>
       </p:sp>
       <p:sp>
         <p:nvSpPr>
           <p:cNvPr id="13" name="TextBox 12"/>
-          <p:cNvSpPr txBox="1"/>
+          <p:cNvSpPr txBox="true"/>
           <p:nvPr/>
         </p:nvSpPr>
         <p:spPr>
@@ -3537,7 +3581,7 @@
           <a:lstStyle/>
           <a:p>
             <a:pPr>
-              <a:defRPr sz="800" i="1">
+              <a:defRPr sz="800" i="true">
                 <a:solidFill>
                   <a:srgbClr val="505050"/>
                 </a:solidFill>
@@ -3545,15 +3589,17 @@
               </a:defRPr>
             </a:pPr>
             <a:r>
+              <a:rPr/>
               <a:t>C×H×1</a:t>
             </a:r>
+            <a:endParaRPr/>
           </a:p>
         </p:txBody>
       </p:sp>
       <p:sp>
         <p:nvSpPr>
           <p:cNvPr id="14" name="TextBox 13"/>
-          <p:cNvSpPr txBox="1"/>
+          <p:cNvSpPr txBox="true"/>
           <p:nvPr/>
         </p:nvSpPr>
         <p:spPr>
@@ -3573,7 +3619,7 @@
           <a:lstStyle/>
           <a:p>
             <a:pPr>
-              <a:defRPr sz="800" i="1">
+              <a:defRPr sz="800" i="true">
                 <a:solidFill>
                   <a:srgbClr val="505050"/>
                 </a:solidFill>
@@ -3581,8 +3627,10 @@
               </a:defRPr>
             </a:pPr>
             <a:r>
+              <a:rPr/>
               <a:t>C×1×W</a:t>
             </a:r>
+            <a:endParaRPr/>
           </a:p>
         </p:txBody>
       </p:sp>
@@ -3764,7 +3812,7 @@
           </a:fontRef>
         </p:style>
         <p:txBody>
-          <a:bodyPr rtlCol="0" anchor="ctr"/>
+          <a:bodyPr rtlCol="false" anchor="ctr"/>
           <a:lstStyle/>
           <a:p>
             <a:pPr algn="ctr">
@@ -3776,8 +3824,10 @@
               </a:defRPr>
             </a:pPr>
             <a:r>
+              <a:rPr/>
               <a:t>Concat + Conv2d</a:t>
             </a:r>
+            <a:endParaRPr/>
           </a:p>
         </p:txBody>
       </p:sp>
@@ -3854,7 +3904,7 @@
           </a:fontRef>
         </p:style>
         <p:txBody>
-          <a:bodyPr rtlCol="0" anchor="ctr"/>
+          <a:bodyPr rtlCol="false" anchor="ctr"/>
           <a:lstStyle/>
           <a:p>
             <a:pPr algn="ctr">
@@ -3866,8 +3916,10 @@
               </a:defRPr>
             </a:pPr>
             <a:r>
+              <a:rPr/>
               <a:t>BatchNorm + Non-linear</a:t>
             </a:r>
+            <a:endParaRPr/>
           </a:p>
         </p:txBody>
       </p:sp>
@@ -3909,7 +3961,7 @@
       <p:sp>
         <p:nvSpPr>
           <p:cNvPr id="23" name="TextBox 22"/>
-          <p:cNvSpPr txBox="1"/>
+          <p:cNvSpPr txBox="true"/>
           <p:nvPr/>
         </p:nvSpPr>
         <p:spPr>
@@ -3929,7 +3981,7 @@
           <a:lstStyle/>
           <a:p>
             <a:pPr>
-              <a:defRPr sz="800" i="1">
+              <a:defRPr sz="800" i="true">
                 <a:solidFill>
                   <a:srgbClr val="505050"/>
                 </a:solidFill>
@@ -3937,8 +3989,10 @@
               </a:defRPr>
             </a:pPr>
             <a:r>
+              <a:rPr/>
               <a:t>split</a:t>
             </a:r>
+            <a:endParaRPr/>
           </a:p>
         </p:txBody>
       </p:sp>
@@ -4085,7 +4139,7 @@
           </a:fontRef>
         </p:style>
         <p:txBody>
-          <a:bodyPr rtlCol="0" anchor="ctr"/>
+          <a:bodyPr rtlCol="false" anchor="ctr"/>
           <a:lstStyle/>
           <a:p>
             <a:pPr algn="ctr">
@@ -4097,8 +4151,10 @@
               </a:defRPr>
             </a:pPr>
             <a:r>
+              <a:rPr/>
               <a:t>Conv2d</a:t>
             </a:r>
+            <a:endParaRPr/>
           </a:p>
         </p:txBody>
       </p:sp>
@@ -4140,7 +4196,7 @@
           </a:fontRef>
         </p:style>
         <p:txBody>
-          <a:bodyPr rtlCol="0" anchor="ctr"/>
+          <a:bodyPr rtlCol="false" anchor="ctr"/>
           <a:lstStyle/>
           <a:p>
             <a:pPr algn="ctr">
@@ -4152,8 +4208,10 @@
               </a:defRPr>
             </a:pPr>
             <a:r>
+              <a:rPr/>
               <a:t>Conv2d</a:t>
             </a:r>
+            <a:endParaRPr/>
           </a:p>
         </p:txBody>
       </p:sp>
@@ -4265,7 +4323,7 @@
           </a:fontRef>
         </p:style>
         <p:txBody>
-          <a:bodyPr rtlCol="0" anchor="ctr"/>
+          <a:bodyPr rtlCol="false" anchor="ctr"/>
           <a:lstStyle/>
           <a:p>
             <a:pPr algn="ctr">
@@ -4277,8 +4335,10 @@
               </a:defRPr>
             </a:pPr>
             <a:r>
+              <a:rPr/>
               <a:t>Sigmoid</a:t>
             </a:r>
+            <a:endParaRPr/>
           </a:p>
         </p:txBody>
       </p:sp>
@@ -4320,7 +4380,7 @@
           </a:fontRef>
         </p:style>
         <p:txBody>
-          <a:bodyPr rtlCol="0" anchor="ctr"/>
+          <a:bodyPr rtlCol="false" anchor="ctr"/>
           <a:lstStyle/>
           <a:p>
             <a:pPr algn="ctr">
@@ -4332,8 +4392,10 @@
               </a:defRPr>
             </a:pPr>
             <a:r>
+              <a:rPr/>
               <a:t>Sigmoid</a:t>
             </a:r>
+            <a:endParaRPr/>
           </a:p>
         </p:txBody>
       </p:sp>
@@ -4414,7 +4476,7 @@
           <p:nvPr/>
         </p:nvCxnSpPr>
         <p:spPr>
-          <a:xfrm flipH="1">
+          <a:xfrm flipH="true">
             <a:off x="3794760" y="2807207"/>
             <a:ext cx="320040" cy="0"/>
           </a:xfrm>
@@ -4515,7 +4577,7 @@
           </a:fontRef>
         </p:style>
         <p:txBody>
-          <a:bodyPr rtlCol="0" anchor="ctr"/>
+          <a:bodyPr rtlCol="false" anchor="ctr"/>
           <a:lstStyle/>
           <a:p>
             <a:pPr algn="ctr">
@@ -4527,8 +4589,10 @@
               </a:defRPr>
             </a:pPr>
             <a:r>
+              <a:rPr/>
               <a:t>Re-weight</a:t>
             </a:r>
+            <a:endParaRPr/>
           </a:p>
         </p:txBody>
       </p:sp>
@@ -4675,19 +4739,21 @@
           </a:fontRef>
         </p:style>
         <p:txBody>
-          <a:bodyPr rtlCol="0" anchor="ctr"/>
+          <a:bodyPr rtlCol="false" anchor="ctr"/>
           <a:lstStyle/>
           <a:p>
             <a:pPr algn="ctr">
-              <a:defRPr sz="1200" b="1">
+              <a:defRPr sz="1200" b="true">
                 <a:solidFill>
                   <a:srgbClr val="000000"/>
                 </a:solidFill>
               </a:defRPr>
             </a:pPr>
             <a:r>
+              <a:rPr/>
               <a:t>+</a:t>
             </a:r>
+            <a:endParaRPr/>
           </a:p>
         </p:txBody>
       </p:sp>
@@ -4834,7 +4900,7 @@
           </a:fontRef>
         </p:style>
         <p:txBody>
-          <a:bodyPr rtlCol="0" anchor="ctr"/>
+          <a:bodyPr rtlCol="false" anchor="ctr"/>
           <a:lstStyle/>
           <a:p>
             <a:pPr algn="ctr">
@@ -4846,8 +4912,10 @@
               </a:defRPr>
             </a:pPr>
             <a:r>
+              <a:rPr/>
               <a:t>3×3 Conv+BN+ReLU ×2</a:t>
             </a:r>
+            <a:endParaRPr/>
           </a:p>
         </p:txBody>
       </p:sp>
@@ -4994,19 +5062,21 @@
           </a:fontRef>
         </p:style>
         <p:txBody>
-          <a:bodyPr rtlCol="0" anchor="ctr"/>
+          <a:bodyPr rtlCol="false" anchor="ctr"/>
           <a:lstStyle/>
           <a:p>
             <a:pPr algn="ctr">
-              <a:defRPr sz="1200" b="1">
+              <a:defRPr sz="1200" b="true">
                 <a:solidFill>
                   <a:srgbClr val="000000"/>
                 </a:solidFill>
               </a:defRPr>
             </a:pPr>
             <a:r>
+              <a:rPr/>
               <a:t>+</a:t>
             </a:r>
+            <a:endParaRPr/>
           </a:p>
         </p:txBody>
       </p:sp>
@@ -5153,7 +5223,7 @@
           </a:fontRef>
         </p:style>
         <p:txBody>
-          <a:bodyPr rtlCol="0" anchor="ctr"/>
+          <a:bodyPr rtlCol="false" anchor="ctr"/>
           <a:lstStyle/>
           <a:p>
             <a:pPr algn="ctr">
@@ -5165,15 +5235,17 @@
               </a:defRPr>
             </a:pPr>
             <a:r>
+              <a:rPr/>
               <a:t>Global Avg Pool</a:t>
             </a:r>
+            <a:endParaRPr/>
           </a:p>
         </p:txBody>
       </p:sp>
       <p:sp>
         <p:nvSpPr>
           <p:cNvPr id="54" name="TextBox 53"/>
-          <p:cNvSpPr txBox="1"/>
+          <p:cNvSpPr txBox="true"/>
           <p:nvPr/>
         </p:nvSpPr>
         <p:spPr>
@@ -5193,7 +5265,7 @@
           <a:lstStyle/>
           <a:p>
             <a:pPr>
-              <a:defRPr sz="900" i="1">
+              <a:defRPr sz="900" i="true">
                 <a:solidFill>
                   <a:srgbClr val="505050"/>
                 </a:solidFill>
@@ -5201,8 +5273,10 @@
               </a:defRPr>
             </a:pPr>
             <a:r>
+              <a:rPr/>
               <a:t>1×1×C</a:t>
             </a:r>
+            <a:endParaRPr/>
           </a:p>
         </p:txBody>
       </p:sp>
@@ -5349,7 +5423,7 @@
           </a:fontRef>
         </p:style>
         <p:txBody>
-          <a:bodyPr rtlCol="0" anchor="ctr"/>
+          <a:bodyPr rtlCol="false" anchor="ctr"/>
           <a:lstStyle/>
           <a:p>
             <a:pPr algn="ctr">
@@ -5361,8 +5435,10 @@
               </a:defRPr>
             </a:pPr>
             <a:r>
+              <a:rPr/>
               <a:t>FC+ReLU</a:t>
             </a:r>
+            <a:endParaRPr/>
           </a:p>
         </p:txBody>
       </p:sp>
@@ -5474,7 +5550,7 @@
           </a:fontRef>
         </p:style>
         <p:txBody>
-          <a:bodyPr rtlCol="0" anchor="ctr"/>
+          <a:bodyPr rtlCol="false" anchor="ctr"/>
           <a:lstStyle/>
           <a:p>
             <a:pPr algn="ctr">
@@ -5486,8 +5562,10 @@
               </a:defRPr>
             </a:pPr>
             <a:r>
+              <a:rPr/>
               <a:t>FC+ReLU</a:t>
             </a:r>
+            <a:endParaRPr/>
           </a:p>
         </p:txBody>
       </p:sp>
@@ -5599,7 +5677,7 @@
           </a:fontRef>
         </p:style>
         <p:txBody>
-          <a:bodyPr rtlCol="0" anchor="ctr"/>
+          <a:bodyPr rtlCol="false" anchor="ctr"/>
           <a:lstStyle/>
           <a:p>
             <a:pPr algn="ctr">
@@ -5611,8 +5689,10 @@
               </a:defRPr>
             </a:pPr>
             <a:r>
+              <a:rPr/>
               <a:t>FC+ReLU</a:t>
             </a:r>
+            <a:endParaRPr/>
           </a:p>
         </p:txBody>
       </p:sp>
@@ -5724,7 +5804,7 @@
           </a:fontRef>
         </p:style>
         <p:txBody>
-          <a:bodyPr rtlCol="0" anchor="ctr"/>
+          <a:bodyPr rtlCol="false" anchor="ctr"/>
           <a:lstStyle/>
           <a:p>
             <a:pPr algn="ctr">
@@ -5736,8 +5816,10 @@
               </a:defRPr>
             </a:pPr>
             <a:r>
+              <a:rPr/>
               <a:t>FC+ReLU</a:t>
             </a:r>
+            <a:endParaRPr/>
           </a:p>
         </p:txBody>
       </p:sp>
@@ -5779,7 +5861,7 @@
       <p:sp>
         <p:nvSpPr>
           <p:cNvPr id="69" name="TextBox 68"/>
-          <p:cNvSpPr txBox="1"/>
+          <p:cNvSpPr txBox="true"/>
           <p:nvPr/>
         </p:nvSpPr>
         <p:spPr>
@@ -5799,7 +5881,7 @@
           <a:lstStyle/>
           <a:p>
             <a:pPr>
-              <a:defRPr sz="800" i="1">
+              <a:defRPr sz="800" i="true">
                 <a:solidFill>
                   <a:srgbClr val="505050"/>
                 </a:solidFill>
@@ -5807,8 +5889,10 @@
               </a:defRPr>
             </a:pPr>
             <a:r>
+              <a:rPr/>
               <a:t>1×1×C/r ×4</a:t>
             </a:r>
+            <a:endParaRPr/>
           </a:p>
         </p:txBody>
       </p:sp>
@@ -5920,7 +6004,7 @@
           </a:fontRef>
         </p:style>
         <p:txBody>
-          <a:bodyPr rtlCol="0" anchor="ctr"/>
+          <a:bodyPr rtlCol="false" anchor="ctr"/>
           <a:lstStyle/>
           <a:p>
             <a:pPr algn="ctr">
@@ -5932,8 +6016,10 @@
               </a:defRPr>
             </a:pPr>
             <a:r>
+              <a:rPr/>
               <a:t>Concat</a:t>
             </a:r>
+            <a:endParaRPr/>
           </a:p>
         </p:txBody>
       </p:sp>
@@ -6010,7 +6096,7 @@
           </a:fontRef>
         </p:style>
         <p:txBody>
-          <a:bodyPr rtlCol="0" anchor="ctr"/>
+          <a:bodyPr rtlCol="false" anchor="ctr"/>
           <a:lstStyle/>
           <a:p>
             <a:pPr algn="ctr">
@@ -6022,15 +6108,17 @@
               </a:defRPr>
             </a:pPr>
             <a:r>
+              <a:rPr/>
               <a:t>FC + Sigmoid</a:t>
             </a:r>
+            <a:endParaRPr/>
           </a:p>
         </p:txBody>
       </p:sp>
       <p:sp>
         <p:nvSpPr>
           <p:cNvPr id="75" name="TextBox 74"/>
-          <p:cNvSpPr txBox="1"/>
+          <p:cNvSpPr txBox="true"/>
           <p:nvPr/>
         </p:nvSpPr>
         <p:spPr>
@@ -6050,7 +6138,7 @@
           <a:lstStyle/>
           <a:p>
             <a:pPr>
-              <a:defRPr sz="900" i="1">
+              <a:defRPr sz="900" i="true">
                 <a:solidFill>
                   <a:srgbClr val="505050"/>
                 </a:solidFill>
@@ -6058,8 +6146,10 @@
               </a:defRPr>
             </a:pPr>
             <a:r>
+              <a:rPr/>
               <a:t>1×1×C</a:t>
             </a:r>
+            <a:endParaRPr/>
           </a:p>
         </p:txBody>
       </p:sp>
@@ -6206,26 +6296,28 @@
           </a:fontRef>
         </p:style>
         <p:txBody>
-          <a:bodyPr rtlCol="0" anchor="ctr"/>
+          <a:bodyPr rtlCol="false" anchor="ctr"/>
           <a:lstStyle/>
           <a:p>
             <a:pPr algn="ctr">
-              <a:defRPr sz="1200" b="1">
+              <a:defRPr sz="1200" b="true">
                 <a:solidFill>
                   <a:srgbClr val="000000"/>
                 </a:solidFill>
               </a:defRPr>
             </a:pPr>
             <a:r>
+              <a:rPr/>
               <a:t>×</a:t>
             </a:r>
+            <a:endParaRPr/>
           </a:p>
         </p:txBody>
       </p:sp>
       <p:sp>
         <p:nvSpPr>
           <p:cNvPr id="80" name="TextBox 79"/>
-          <p:cNvSpPr txBox="1"/>
+          <p:cNvSpPr txBox="true"/>
           <p:nvPr/>
         </p:nvSpPr>
         <p:spPr>
@@ -6245,7 +6337,7 @@
           <a:lstStyle/>
           <a:p>
             <a:pPr>
-              <a:defRPr sz="1000" i="0">
+              <a:defRPr sz="1000" i="false">
                 <a:solidFill>
                   <a:srgbClr val="505050"/>
                 </a:solidFill>
@@ -6253,8 +6345,10 @@
               </a:defRPr>
             </a:pPr>
             <a:r>
+              <a:rPr/>
               <a:t>Scale</a:t>
             </a:r>
+            <a:endParaRPr/>
           </a:p>
         </p:txBody>
       </p:sp>
@@ -6296,7 +6390,7 @@
       <p:sp>
         <p:nvSpPr>
           <p:cNvPr id="82" name="TextBox 81"/>
-          <p:cNvSpPr txBox="1"/>
+          <p:cNvSpPr txBox="true"/>
           <p:nvPr/>
         </p:nvSpPr>
         <p:spPr>
@@ -6316,7 +6410,7 @@
           <a:lstStyle/>
           <a:p>
             <a:pPr>
-              <a:defRPr sz="1200" i="0">
+              <a:defRPr sz="1200" i="false">
                 <a:solidFill>
                   <a:srgbClr val="505050"/>
                 </a:solidFill>
@@ -6324,15 +6418,17 @@
               </a:defRPr>
             </a:pPr>
             <a:r>
+              <a:rPr/>
               <a:t>X̃</a:t>
             </a:r>
+            <a:endParaRPr/>
           </a:p>
         </p:txBody>
       </p:sp>
       <p:sp>
         <p:nvSpPr>
           <p:cNvPr id="83" name="TextBox 82"/>
-          <p:cNvSpPr txBox="1"/>
+          <p:cNvSpPr txBox="true"/>
           <p:nvPr/>
         </p:nvSpPr>
         <p:spPr>
@@ -6352,7 +6448,7 @@
           <a:lstStyle/>
           <a:p>
             <a:pPr>
-              <a:defRPr sz="1200" i="0">
+              <a:defRPr sz="1200" i="false">
                 <a:solidFill>
                   <a:srgbClr val="505050"/>
                 </a:solidFill>
@@ -6360,8 +6456,3435 @@
               </a:defRPr>
             </a:pPr>
             <a:r>
+              <a:rPr/>
               <a:t>SAE Module</a:t>
             </a:r>
+            <a:endParaRPr/>
+          </a:p>
+        </p:txBody>
+      </p:sp>
+    </p:spTree>
+  </p:cSld>
+  <p:clrMapOvr>
+    <a:masterClrMapping/>
+  </p:clrMapOvr>
+</p:sld>
+</file>
+
+<file path=ppt/slides/slide2.xml><?xml version="1.0" encoding="utf-8"?>
+<p:sld xmlns:a="http://schemas.openxmlformats.org/drawingml/2006/main" xmlns:p="http://schemas.openxmlformats.org/presentationml/2006/main">
+  <p:cSld>
+    <p:spTree>
+      <p:nvGrpSpPr>
+        <p:cNvPr id="84" name=""/>
+        <p:cNvGrpSpPr/>
+        <p:nvPr/>
+      </p:nvGrpSpPr>
+      <p:grpSpPr>
+        <a:xfrm>
+          <a:off x="0" y="0"/>
+          <a:ext cx="0" cy="0"/>
+          <a:chOff x="0" y="0"/>
+          <a:chExt cx="0" cy="0"/>
+        </a:xfrm>
+      </p:grpSpPr>
+      <p:grpSp>
+        <p:nvGrpSpPr>
+          <p:cNvPr id="85" name=""/>
+          <p:cNvGrpSpPr/>
+          <p:nvPr/>
+        </p:nvGrpSpPr>
+        <p:grpSpPr>
+          <a:xfrm rot="0" flipH="false" flipV="false">
+            <a:off x="2878667" y="127625"/>
+            <a:ext cx="4213456" cy="6531108"/>
+            <a:chOff x="2982872" y="240974"/>
+            <a:chExt cx="4213456" cy="6531108"/>
+          </a:xfrm>
+        </p:grpSpPr>
+        <p:sp>
+          <p:nvSpPr>
+            <p:cNvPr id="86" name="TextBox 1"/>
+            <p:cNvSpPr txBox="true"/>
+            <p:nvPr/>
+          </p:nvSpPr>
+          <p:spPr>
+            <a:xfrm>
+              <a:off x="4434840" y="274320"/>
+              <a:ext cx="1371600" cy="228600"/>
+            </a:xfrm>
+            <a:prstGeom prst="rect">
+              <a:avLst/>
+            </a:prstGeom>
+            <a:noFill/>
+          </p:spPr>
+          <p:txBody>
+            <a:bodyPr wrap="none">
+              <a:spAutoFit/>
+            </a:bodyPr>
+            <a:lstStyle/>
+            <a:p>
+              <a:pPr>
+                <a:defRPr sz="1200" i="false">
+                  <a:solidFill>
+                    <a:srgbClr val="505050"/>
+                  </a:solidFill>
+                  <a:latin typeface="Times New Roman"/>
+                </a:defRPr>
+              </a:pPr>
+              <a:r>
+                <a:rPr/>
+                <a:t>X</a:t>
+              </a:r>
+              <a:endParaRPr/>
+            </a:p>
+          </p:txBody>
+        </p:sp>
+        <p:cxnSp>
+          <p:nvCxnSpPr>
+            <p:cNvPr id="87" name="Connector 2"/>
+            <p:cNvCxnSpPr/>
+            <p:nvPr/>
+          </p:nvCxnSpPr>
+          <p:spPr>
+            <a:xfrm>
+              <a:off x="4572000" y="530352"/>
+              <a:ext cx="0" cy="109728"/>
+            </a:xfrm>
+            <a:prstGeom prst="line">
+              <a:avLst/>
+            </a:prstGeom>
+            <a:ln w="19050">
+              <a:solidFill>
+                <a:srgbClr val="000000"/>
+              </a:solidFill>
+            </a:ln>
+          </p:spPr>
+          <p:style>
+            <a:lnRef idx="2">
+              <a:schemeClr val="accent1"/>
+            </a:lnRef>
+            <a:fillRef idx="0">
+              <a:schemeClr val="accent1"/>
+            </a:fillRef>
+            <a:effectRef idx="1">
+              <a:schemeClr val="accent1"/>
+            </a:effectRef>
+            <a:fontRef idx="minor">
+              <a:schemeClr val="tx1"/>
+            </a:fontRef>
+          </p:style>
+        </p:cxnSp>
+        <p:cxnSp>
+          <p:nvCxnSpPr>
+            <p:cNvPr id="88" name="Connector 3"/>
+            <p:cNvCxnSpPr/>
+            <p:nvPr/>
+          </p:nvCxnSpPr>
+          <p:spPr>
+            <a:xfrm>
+              <a:off x="3291840" y="640080"/>
+              <a:ext cx="1280160" cy="0"/>
+            </a:xfrm>
+            <a:prstGeom prst="line">
+              <a:avLst/>
+            </a:prstGeom>
+            <a:ln w="19050">
+              <a:solidFill>
+                <a:srgbClr val="000000"/>
+              </a:solidFill>
+            </a:ln>
+          </p:spPr>
+          <p:style>
+            <a:lnRef idx="2">
+              <a:schemeClr val="accent1"/>
+            </a:lnRef>
+            <a:fillRef idx="0">
+              <a:schemeClr val="accent1"/>
+            </a:fillRef>
+            <a:effectRef idx="1">
+              <a:schemeClr val="accent1"/>
+            </a:effectRef>
+            <a:fontRef idx="minor">
+              <a:schemeClr val="tx1"/>
+            </a:fontRef>
+          </p:style>
+        </p:cxnSp>
+        <p:cxnSp>
+          <p:nvCxnSpPr>
+            <p:cNvPr id="89" name="Connector 4"/>
+            <p:cNvCxnSpPr/>
+            <p:nvPr/>
+          </p:nvCxnSpPr>
+          <p:spPr>
+            <a:xfrm>
+              <a:off x="3291840" y="640080"/>
+              <a:ext cx="0" cy="0"/>
+            </a:xfrm>
+            <a:prstGeom prst="line">
+              <a:avLst/>
+            </a:prstGeom>
+            <a:ln w="19050">
+              <a:solidFill>
+                <a:srgbClr val="000000"/>
+              </a:solidFill>
+            </a:ln>
+          </p:spPr>
+          <p:style>
+            <a:lnRef idx="2">
+              <a:schemeClr val="accent1"/>
+            </a:lnRef>
+            <a:fillRef idx="0">
+              <a:schemeClr val="accent1"/>
+            </a:fillRef>
+            <a:effectRef idx="1">
+              <a:schemeClr val="accent1"/>
+            </a:effectRef>
+            <a:fontRef idx="minor">
+              <a:schemeClr val="tx1"/>
+            </a:fontRef>
+          </p:style>
+        </p:cxnSp>
+        <p:cxnSp>
+          <p:nvCxnSpPr>
+            <p:cNvPr id="90" name="Connector 5"/>
+            <p:cNvCxnSpPr/>
+            <p:nvPr/>
+          </p:nvCxnSpPr>
+          <p:spPr>
+            <a:xfrm>
+              <a:off x="4572000" y="640080"/>
+              <a:ext cx="0" cy="109728"/>
+            </a:xfrm>
+            <a:prstGeom prst="line">
+              <a:avLst/>
+            </a:prstGeom>
+            <a:ln w="19050">
+              <a:solidFill>
+                <a:srgbClr val="000000"/>
+              </a:solidFill>
+            </a:ln>
+          </p:spPr>
+          <p:style>
+            <a:lnRef idx="2">
+              <a:schemeClr val="accent1"/>
+            </a:lnRef>
+            <a:fillRef idx="0">
+              <a:schemeClr val="accent1"/>
+            </a:fillRef>
+            <a:effectRef idx="1">
+              <a:schemeClr val="accent1"/>
+            </a:effectRef>
+            <a:fontRef idx="minor">
+              <a:schemeClr val="tx1"/>
+            </a:fontRef>
+          </p:style>
+        </p:cxnSp>
+        <p:cxnSp>
+          <p:nvCxnSpPr>
+            <p:cNvPr id="91" name="Connector 6"/>
+            <p:cNvCxnSpPr/>
+            <p:nvPr/>
+          </p:nvCxnSpPr>
+          <p:spPr>
+            <a:xfrm>
+              <a:off x="4572000" y="722376"/>
+              <a:ext cx="0" cy="27432"/>
+            </a:xfrm>
+            <a:prstGeom prst="line">
+              <a:avLst/>
+            </a:prstGeom>
+            <a:ln w="19050">
+              <a:solidFill>
+                <a:srgbClr val="000000"/>
+              </a:solidFill>
+            </a:ln>
+          </p:spPr>
+          <p:style>
+            <a:lnRef idx="2">
+              <a:schemeClr val="accent1"/>
+            </a:lnRef>
+            <a:fillRef idx="0">
+              <a:schemeClr val="accent1"/>
+            </a:fillRef>
+            <a:effectRef idx="1">
+              <a:schemeClr val="accent1"/>
+            </a:effectRef>
+            <a:fontRef idx="minor">
+              <a:schemeClr val="tx1"/>
+            </a:fontRef>
+          </p:style>
+        </p:cxnSp>
+        <p:cxnSp>
+          <p:nvCxnSpPr>
+            <p:cNvPr id="92" name="Connector 7"/>
+            <p:cNvCxnSpPr/>
+            <p:nvPr/>
+          </p:nvCxnSpPr>
+          <p:spPr>
+            <a:xfrm>
+              <a:off x="4114800" y="722376"/>
+              <a:ext cx="914400" cy="0"/>
+            </a:xfrm>
+            <a:prstGeom prst="line">
+              <a:avLst/>
+            </a:prstGeom>
+            <a:ln w="19050">
+              <a:solidFill>
+                <a:srgbClr val="000000"/>
+              </a:solidFill>
+            </a:ln>
+          </p:spPr>
+          <p:style>
+            <a:lnRef idx="2">
+              <a:schemeClr val="accent1"/>
+            </a:lnRef>
+            <a:fillRef idx="0">
+              <a:schemeClr val="accent1"/>
+            </a:fillRef>
+            <a:effectRef idx="1">
+              <a:schemeClr val="accent1"/>
+            </a:effectRef>
+            <a:fontRef idx="minor">
+              <a:schemeClr val="tx1"/>
+            </a:fontRef>
+          </p:style>
+        </p:cxnSp>
+        <p:cxnSp>
+          <p:nvCxnSpPr>
+            <p:cNvPr id="93" name="Connector 8"/>
+            <p:cNvCxnSpPr/>
+            <p:nvPr/>
+          </p:nvCxnSpPr>
+          <p:spPr>
+            <a:xfrm>
+              <a:off x="4114800" y="722376"/>
+              <a:ext cx="0" cy="27432"/>
+            </a:xfrm>
+            <a:prstGeom prst="line">
+              <a:avLst/>
+            </a:prstGeom>
+            <a:ln w="19050">
+              <a:solidFill>
+                <a:srgbClr val="000000"/>
+              </a:solidFill>
+            </a:ln>
+          </p:spPr>
+          <p:style>
+            <a:lnRef idx="2">
+              <a:schemeClr val="accent1"/>
+            </a:lnRef>
+            <a:fillRef idx="0">
+              <a:schemeClr val="accent1"/>
+            </a:fillRef>
+            <a:effectRef idx="1">
+              <a:schemeClr val="accent1"/>
+            </a:effectRef>
+            <a:fontRef idx="minor">
+              <a:schemeClr val="tx1"/>
+            </a:fontRef>
+          </p:style>
+        </p:cxnSp>
+        <p:cxnSp>
+          <p:nvCxnSpPr>
+            <p:cNvPr id="94" name="Connector 9"/>
+            <p:cNvCxnSpPr/>
+            <p:nvPr/>
+          </p:nvCxnSpPr>
+          <p:spPr>
+            <a:xfrm>
+              <a:off x="5029200" y="722376"/>
+              <a:ext cx="0" cy="27432"/>
+            </a:xfrm>
+            <a:prstGeom prst="line">
+              <a:avLst/>
+            </a:prstGeom>
+            <a:ln w="19050">
+              <a:solidFill>
+                <a:srgbClr val="000000"/>
+              </a:solidFill>
+            </a:ln>
+          </p:spPr>
+          <p:style>
+            <a:lnRef idx="2">
+              <a:schemeClr val="accent1"/>
+            </a:lnRef>
+            <a:fillRef idx="0">
+              <a:schemeClr val="accent1"/>
+            </a:fillRef>
+            <a:effectRef idx="1">
+              <a:schemeClr val="accent1"/>
+            </a:effectRef>
+            <a:fontRef idx="minor">
+              <a:schemeClr val="tx1"/>
+            </a:fontRef>
+          </p:style>
+        </p:cxnSp>
+        <p:sp>
+          <p:nvSpPr>
+            <p:cNvPr id="95" name="Rectangle 10"/>
+            <p:cNvSpPr/>
+            <p:nvPr/>
+          </p:nvSpPr>
+          <p:spPr>
+            <a:xfrm>
+              <a:off x="3771900" y="749808"/>
+              <a:ext cx="685800" cy="274320"/>
+            </a:xfrm>
+            <a:prstGeom prst="rect">
+              <a:avLst/>
+            </a:prstGeom>
+            <a:solidFill>
+              <a:srgbClr val="FFFFFF"/>
+            </a:solidFill>
+            <a:ln w="19050">
+              <a:solidFill>
+                <a:srgbClr val="000000"/>
+              </a:solidFill>
+            </a:ln>
+          </p:spPr>
+          <p:style>
+            <a:lnRef idx="1">
+              <a:schemeClr val="accent1"/>
+            </a:lnRef>
+            <a:fillRef idx="3">
+              <a:schemeClr val="accent1"/>
+            </a:fillRef>
+            <a:effectRef idx="2">
+              <a:schemeClr val="accent1"/>
+            </a:effectRef>
+            <a:fontRef idx="minor">
+              <a:schemeClr val="lt1"/>
+            </a:fontRef>
+          </p:style>
+          <p:txBody>
+            <a:bodyPr rtlCol="false" anchor="ctr"/>
+            <a:lstStyle/>
+            <a:p>
+              <a:pPr algn="ctr">
+                <a:defRPr sz="800">
+                  <a:solidFill>
+                    <a:srgbClr val="000000"/>
+                  </a:solidFill>
+                  <a:latin typeface="Times New Roman"/>
+                </a:defRPr>
+              </a:pPr>
+              <a:r>
+                <a:rPr/>
+                <a:t>X Avg Pool</a:t>
+              </a:r>
+              <a:endParaRPr/>
+            </a:p>
+          </p:txBody>
+        </p:sp>
+        <p:sp>
+          <p:nvSpPr>
+            <p:cNvPr id="96" name="Rectangle 11"/>
+            <p:cNvSpPr/>
+            <p:nvPr/>
+          </p:nvSpPr>
+          <p:spPr>
+            <a:xfrm>
+              <a:off x="4686300" y="749808"/>
+              <a:ext cx="685800" cy="274320"/>
+            </a:xfrm>
+            <a:prstGeom prst="rect">
+              <a:avLst/>
+            </a:prstGeom>
+            <a:solidFill>
+              <a:srgbClr val="FFFFFF"/>
+            </a:solidFill>
+            <a:ln w="19050">
+              <a:solidFill>
+                <a:srgbClr val="000000"/>
+              </a:solidFill>
+            </a:ln>
+          </p:spPr>
+          <p:style>
+            <a:lnRef idx="1">
+              <a:schemeClr val="accent1"/>
+            </a:lnRef>
+            <a:fillRef idx="3">
+              <a:schemeClr val="accent1"/>
+            </a:fillRef>
+            <a:effectRef idx="2">
+              <a:schemeClr val="accent1"/>
+            </a:effectRef>
+            <a:fontRef idx="minor">
+              <a:schemeClr val="lt1"/>
+            </a:fontRef>
+          </p:style>
+          <p:txBody>
+            <a:bodyPr rtlCol="false" anchor="ctr"/>
+            <a:lstStyle/>
+            <a:p>
+              <a:pPr algn="ctr">
+                <a:defRPr sz="800">
+                  <a:solidFill>
+                    <a:srgbClr val="000000"/>
+                  </a:solidFill>
+                  <a:latin typeface="Times New Roman"/>
+                </a:defRPr>
+              </a:pPr>
+              <a:r>
+                <a:rPr/>
+                <a:t>Y Avg Pool</a:t>
+              </a:r>
+              <a:endParaRPr/>
+            </a:p>
+          </p:txBody>
+        </p:sp>
+        <p:sp>
+          <p:nvSpPr>
+            <p:cNvPr id="97" name="TextBox 12"/>
+            <p:cNvSpPr txBox="true"/>
+            <p:nvPr/>
+          </p:nvSpPr>
+          <p:spPr>
+            <a:xfrm>
+              <a:off x="3086100" y="768096"/>
+              <a:ext cx="1371600" cy="228600"/>
+            </a:xfrm>
+            <a:prstGeom prst="rect">
+              <a:avLst/>
+            </a:prstGeom>
+            <a:noFill/>
+          </p:spPr>
+          <p:txBody>
+            <a:bodyPr wrap="none">
+              <a:spAutoFit/>
+            </a:bodyPr>
+            <a:lstStyle/>
+            <a:p>
+              <a:pPr>
+                <a:defRPr sz="800" i="true">
+                  <a:solidFill>
+                    <a:srgbClr val="505050"/>
+                  </a:solidFill>
+                  <a:latin typeface="Times New Roman"/>
+                </a:defRPr>
+              </a:pPr>
+              <a:r>
+                <a:rPr/>
+                <a:t>C×H×1</a:t>
+              </a:r>
+              <a:endParaRPr/>
+            </a:p>
+          </p:txBody>
+        </p:sp>
+        <p:sp>
+          <p:nvSpPr>
+            <p:cNvPr id="98" name="TextBox 13"/>
+            <p:cNvSpPr txBox="true"/>
+            <p:nvPr/>
+          </p:nvSpPr>
+          <p:spPr>
+            <a:xfrm>
+              <a:off x="5417820" y="768096"/>
+              <a:ext cx="1371600" cy="228600"/>
+            </a:xfrm>
+            <a:prstGeom prst="rect">
+              <a:avLst/>
+            </a:prstGeom>
+            <a:noFill/>
+          </p:spPr>
+          <p:txBody>
+            <a:bodyPr wrap="none">
+              <a:spAutoFit/>
+            </a:bodyPr>
+            <a:lstStyle/>
+            <a:p>
+              <a:pPr>
+                <a:defRPr sz="800" i="true">
+                  <a:solidFill>
+                    <a:srgbClr val="505050"/>
+                  </a:solidFill>
+                  <a:latin typeface="Times New Roman"/>
+                </a:defRPr>
+              </a:pPr>
+              <a:r>
+                <a:rPr/>
+                <a:t>C×1×W</a:t>
+              </a:r>
+              <a:endParaRPr/>
+            </a:p>
+          </p:txBody>
+        </p:sp>
+        <p:cxnSp>
+          <p:nvCxnSpPr>
+            <p:cNvPr id="99" name="Connector 14"/>
+            <p:cNvCxnSpPr/>
+            <p:nvPr/>
+          </p:nvCxnSpPr>
+          <p:spPr>
+            <a:xfrm>
+              <a:off x="4114800" y="1024128"/>
+              <a:ext cx="0" cy="82296"/>
+            </a:xfrm>
+            <a:prstGeom prst="line">
+              <a:avLst/>
+            </a:prstGeom>
+            <a:ln w="19050">
+              <a:solidFill>
+                <a:srgbClr val="000000"/>
+              </a:solidFill>
+            </a:ln>
+          </p:spPr>
+          <p:style>
+            <a:lnRef idx="2">
+              <a:schemeClr val="accent1"/>
+            </a:lnRef>
+            <a:fillRef idx="0">
+              <a:schemeClr val="accent1"/>
+            </a:fillRef>
+            <a:effectRef idx="1">
+              <a:schemeClr val="accent1"/>
+            </a:effectRef>
+            <a:fontRef idx="minor">
+              <a:schemeClr val="tx1"/>
+            </a:fontRef>
+          </p:style>
+        </p:cxnSp>
+        <p:cxnSp>
+          <p:nvCxnSpPr>
+            <p:cNvPr id="100" name="Connector 15"/>
+            <p:cNvCxnSpPr/>
+            <p:nvPr/>
+          </p:nvCxnSpPr>
+          <p:spPr>
+            <a:xfrm>
+              <a:off x="5029200" y="1024128"/>
+              <a:ext cx="0" cy="82296"/>
+            </a:xfrm>
+            <a:prstGeom prst="line">
+              <a:avLst/>
+            </a:prstGeom>
+            <a:ln w="19050">
+              <a:solidFill>
+                <a:srgbClr val="000000"/>
+              </a:solidFill>
+            </a:ln>
+          </p:spPr>
+          <p:style>
+            <a:lnRef idx="2">
+              <a:schemeClr val="accent1"/>
+            </a:lnRef>
+            <a:fillRef idx="0">
+              <a:schemeClr val="accent1"/>
+            </a:fillRef>
+            <a:effectRef idx="1">
+              <a:schemeClr val="accent1"/>
+            </a:effectRef>
+            <a:fontRef idx="minor">
+              <a:schemeClr val="tx1"/>
+            </a:fontRef>
+          </p:style>
+        </p:cxnSp>
+        <p:cxnSp>
+          <p:nvCxnSpPr>
+            <p:cNvPr id="101" name="Connector 16"/>
+            <p:cNvCxnSpPr/>
+            <p:nvPr/>
+          </p:nvCxnSpPr>
+          <p:spPr>
+            <a:xfrm>
+              <a:off x="4114800" y="1106424"/>
+              <a:ext cx="914400" cy="0"/>
+            </a:xfrm>
+            <a:prstGeom prst="line">
+              <a:avLst/>
+            </a:prstGeom>
+            <a:ln w="19050">
+              <a:solidFill>
+                <a:srgbClr val="000000"/>
+              </a:solidFill>
+            </a:ln>
+          </p:spPr>
+          <p:style>
+            <a:lnRef idx="2">
+              <a:schemeClr val="accent1"/>
+            </a:lnRef>
+            <a:fillRef idx="0">
+              <a:schemeClr val="accent1"/>
+            </a:fillRef>
+            <a:effectRef idx="1">
+              <a:schemeClr val="accent1"/>
+            </a:effectRef>
+            <a:fontRef idx="minor">
+              <a:schemeClr val="tx1"/>
+            </a:fontRef>
+          </p:style>
+        </p:cxnSp>
+        <p:cxnSp>
+          <p:nvCxnSpPr>
+            <p:cNvPr id="102" name="Connector 17"/>
+            <p:cNvCxnSpPr/>
+            <p:nvPr/>
+          </p:nvCxnSpPr>
+          <p:spPr>
+            <a:xfrm>
+              <a:off x="4572000" y="1106424"/>
+              <a:ext cx="0" cy="27432"/>
+            </a:xfrm>
+            <a:prstGeom prst="line">
+              <a:avLst/>
+            </a:prstGeom>
+            <a:ln w="19050">
+              <a:solidFill>
+                <a:srgbClr val="000000"/>
+              </a:solidFill>
+            </a:ln>
+          </p:spPr>
+          <p:style>
+            <a:lnRef idx="2">
+              <a:schemeClr val="accent1"/>
+            </a:lnRef>
+            <a:fillRef idx="0">
+              <a:schemeClr val="accent1"/>
+            </a:fillRef>
+            <a:effectRef idx="1">
+              <a:schemeClr val="accent1"/>
+            </a:effectRef>
+            <a:fontRef idx="minor">
+              <a:schemeClr val="tx1"/>
+            </a:fontRef>
+          </p:style>
+        </p:cxnSp>
+        <p:sp>
+          <p:nvSpPr>
+            <p:cNvPr id="103" name="Rectangle 18"/>
+            <p:cNvSpPr/>
+            <p:nvPr/>
+          </p:nvSpPr>
+          <p:spPr>
+            <a:xfrm>
+              <a:off x="3794760" y="1133856"/>
+              <a:ext cx="1554480" cy="320040"/>
+            </a:xfrm>
+            <a:prstGeom prst="rect">
+              <a:avLst/>
+            </a:prstGeom>
+            <a:solidFill>
+              <a:srgbClr val="FFFFFF"/>
+            </a:solidFill>
+            <a:ln w="19050">
+              <a:solidFill>
+                <a:srgbClr val="000000"/>
+              </a:solidFill>
+            </a:ln>
+          </p:spPr>
+          <p:style>
+            <a:lnRef idx="1">
+              <a:schemeClr val="accent1"/>
+            </a:lnRef>
+            <a:fillRef idx="3">
+              <a:schemeClr val="accent1"/>
+            </a:fillRef>
+            <a:effectRef idx="2">
+              <a:schemeClr val="accent1"/>
+            </a:effectRef>
+            <a:fontRef idx="minor">
+              <a:schemeClr val="lt1"/>
+            </a:fontRef>
+          </p:style>
+          <p:txBody>
+            <a:bodyPr rtlCol="false" anchor="ctr"/>
+            <a:lstStyle/>
+            <a:p>
+              <a:pPr algn="ctr">
+                <a:defRPr sz="1000">
+                  <a:solidFill>
+                    <a:srgbClr val="000000"/>
+                  </a:solidFill>
+                  <a:latin typeface="Times New Roman"/>
+                </a:defRPr>
+              </a:pPr>
+              <a:r>
+                <a:rPr/>
+                <a:t>Concat + Conv2d</a:t>
+              </a:r>
+              <a:endParaRPr/>
+            </a:p>
+          </p:txBody>
+        </p:sp>
+        <p:cxnSp>
+          <p:nvCxnSpPr>
+            <p:cNvPr id="104" name="Connector 19"/>
+            <p:cNvCxnSpPr/>
+            <p:nvPr/>
+          </p:nvCxnSpPr>
+          <p:spPr>
+            <a:xfrm>
+              <a:off x="4572000" y="1453895"/>
+              <a:ext cx="0" cy="109729"/>
+            </a:xfrm>
+            <a:prstGeom prst="line">
+              <a:avLst/>
+            </a:prstGeom>
+            <a:ln w="19050">
+              <a:solidFill>
+                <a:srgbClr val="000000"/>
+              </a:solidFill>
+            </a:ln>
+          </p:spPr>
+          <p:style>
+            <a:lnRef idx="2">
+              <a:schemeClr val="accent1"/>
+            </a:lnRef>
+            <a:fillRef idx="0">
+              <a:schemeClr val="accent1"/>
+            </a:fillRef>
+            <a:effectRef idx="1">
+              <a:schemeClr val="accent1"/>
+            </a:effectRef>
+            <a:fontRef idx="minor">
+              <a:schemeClr val="tx1"/>
+            </a:fontRef>
+          </p:style>
+        </p:cxnSp>
+        <p:sp>
+          <p:nvSpPr>
+            <p:cNvPr id="105" name="Rectangle 20"/>
+            <p:cNvSpPr/>
+            <p:nvPr/>
+          </p:nvSpPr>
+          <p:spPr>
+            <a:xfrm>
+              <a:off x="3794760" y="1563624"/>
+              <a:ext cx="1554480" cy="320040"/>
+            </a:xfrm>
+            <a:prstGeom prst="rect">
+              <a:avLst/>
+            </a:prstGeom>
+            <a:solidFill>
+              <a:srgbClr val="FFFFFF"/>
+            </a:solidFill>
+            <a:ln w="19050">
+              <a:solidFill>
+                <a:srgbClr val="000000"/>
+              </a:solidFill>
+            </a:ln>
+          </p:spPr>
+          <p:style>
+            <a:lnRef idx="1">
+              <a:schemeClr val="accent1"/>
+            </a:lnRef>
+            <a:fillRef idx="3">
+              <a:schemeClr val="accent1"/>
+            </a:fillRef>
+            <a:effectRef idx="2">
+              <a:schemeClr val="accent1"/>
+            </a:effectRef>
+            <a:fontRef idx="minor">
+              <a:schemeClr val="lt1"/>
+            </a:fontRef>
+          </p:style>
+          <p:txBody>
+            <a:bodyPr rtlCol="false" anchor="ctr"/>
+            <a:lstStyle/>
+            <a:p>
+              <a:pPr algn="ctr">
+                <a:defRPr sz="1000">
+                  <a:solidFill>
+                    <a:srgbClr val="000000"/>
+                  </a:solidFill>
+                  <a:latin typeface="Times New Roman"/>
+                </a:defRPr>
+              </a:pPr>
+              <a:r>
+                <a:rPr/>
+                <a:t>BatchNorm + Non-linear</a:t>
+              </a:r>
+              <a:endParaRPr/>
+            </a:p>
+          </p:txBody>
+        </p:sp>
+        <p:cxnSp>
+          <p:nvCxnSpPr>
+            <p:cNvPr id="106" name="Connector 21"/>
+            <p:cNvCxnSpPr/>
+            <p:nvPr/>
+          </p:nvCxnSpPr>
+          <p:spPr>
+            <a:xfrm>
+              <a:off x="4572000" y="1883663"/>
+              <a:ext cx="0" cy="82297"/>
+            </a:xfrm>
+            <a:prstGeom prst="line">
+              <a:avLst/>
+            </a:prstGeom>
+            <a:ln w="19050">
+              <a:solidFill>
+                <a:srgbClr val="000000"/>
+              </a:solidFill>
+            </a:ln>
+          </p:spPr>
+          <p:style>
+            <a:lnRef idx="2">
+              <a:schemeClr val="accent1"/>
+            </a:lnRef>
+            <a:fillRef idx="0">
+              <a:schemeClr val="accent1"/>
+            </a:fillRef>
+            <a:effectRef idx="1">
+              <a:schemeClr val="accent1"/>
+            </a:effectRef>
+            <a:fontRef idx="minor">
+              <a:schemeClr val="tx1"/>
+            </a:fontRef>
+          </p:style>
+        </p:cxnSp>
+        <p:sp>
+          <p:nvSpPr>
+            <p:cNvPr id="107" name="TextBox 22"/>
+            <p:cNvSpPr txBox="true"/>
+            <p:nvPr/>
+          </p:nvSpPr>
+          <p:spPr>
+            <a:xfrm rot="0" flipH="false" flipV="false">
+              <a:off x="4407408" y="1947672"/>
+              <a:ext cx="1371600" cy="228600"/>
+            </a:xfrm>
+            <a:prstGeom prst="rect">
+              <a:avLst/>
+            </a:prstGeom>
+            <a:noFill/>
+          </p:spPr>
+          <p:txBody>
+            <a:bodyPr wrap="none">
+              <a:spAutoFit/>
+            </a:bodyPr>
+            <a:lstStyle/>
+            <a:p>
+              <a:pPr>
+                <a:defRPr sz="800" i="true">
+                  <a:solidFill>
+                    <a:srgbClr val="505050"/>
+                  </a:solidFill>
+                  <a:latin typeface="Times New Roman"/>
+                </a:defRPr>
+              </a:pPr>
+              <a:r>
+                <a:rPr/>
+                <a:t>split</a:t>
+              </a:r>
+              <a:endParaRPr/>
+            </a:p>
+          </p:txBody>
+        </p:sp>
+        <p:cxnSp>
+          <p:nvCxnSpPr>
+            <p:cNvPr id="108" name="Connector 23"/>
+            <p:cNvCxnSpPr/>
+            <p:nvPr/>
+          </p:nvCxnSpPr>
+          <p:spPr>
+            <a:xfrm>
+              <a:off x="4114800" y="1965960"/>
+              <a:ext cx="914400" cy="0"/>
+            </a:xfrm>
+            <a:prstGeom prst="line">
+              <a:avLst/>
+            </a:prstGeom>
+            <a:ln w="19050">
+              <a:solidFill>
+                <a:srgbClr val="000000"/>
+              </a:solidFill>
+            </a:ln>
+          </p:spPr>
+          <p:style>
+            <a:lnRef idx="2">
+              <a:schemeClr val="accent1"/>
+            </a:lnRef>
+            <a:fillRef idx="0">
+              <a:schemeClr val="accent1"/>
+            </a:fillRef>
+            <a:effectRef idx="1">
+              <a:schemeClr val="accent1"/>
+            </a:effectRef>
+            <a:fontRef idx="minor">
+              <a:schemeClr val="tx1"/>
+            </a:fontRef>
+          </p:style>
+        </p:cxnSp>
+        <p:cxnSp>
+          <p:nvCxnSpPr>
+            <p:cNvPr id="109" name="Connector 24"/>
+            <p:cNvCxnSpPr/>
+            <p:nvPr/>
+          </p:nvCxnSpPr>
+          <p:spPr>
+            <a:xfrm>
+              <a:off x="4114800" y="1965960"/>
+              <a:ext cx="0" cy="27431"/>
+            </a:xfrm>
+            <a:prstGeom prst="line">
+              <a:avLst/>
+            </a:prstGeom>
+            <a:ln w="19050">
+              <a:solidFill>
+                <a:srgbClr val="000000"/>
+              </a:solidFill>
+            </a:ln>
+          </p:spPr>
+          <p:style>
+            <a:lnRef idx="2">
+              <a:schemeClr val="accent1"/>
+            </a:lnRef>
+            <a:fillRef idx="0">
+              <a:schemeClr val="accent1"/>
+            </a:fillRef>
+            <a:effectRef idx="1">
+              <a:schemeClr val="accent1"/>
+            </a:effectRef>
+            <a:fontRef idx="minor">
+              <a:schemeClr val="tx1"/>
+            </a:fontRef>
+          </p:style>
+        </p:cxnSp>
+        <p:cxnSp>
+          <p:nvCxnSpPr>
+            <p:cNvPr id="110" name="Connector 25"/>
+            <p:cNvCxnSpPr/>
+            <p:nvPr/>
+          </p:nvCxnSpPr>
+          <p:spPr>
+            <a:xfrm>
+              <a:off x="5029200" y="1965960"/>
+              <a:ext cx="0" cy="27431"/>
+            </a:xfrm>
+            <a:prstGeom prst="line">
+              <a:avLst/>
+            </a:prstGeom>
+            <a:ln w="19050">
+              <a:solidFill>
+                <a:srgbClr val="000000"/>
+              </a:solidFill>
+            </a:ln>
+          </p:spPr>
+          <p:style>
+            <a:lnRef idx="2">
+              <a:schemeClr val="accent1"/>
+            </a:lnRef>
+            <a:fillRef idx="0">
+              <a:schemeClr val="accent1"/>
+            </a:fillRef>
+            <a:effectRef idx="1">
+              <a:schemeClr val="accent1"/>
+            </a:effectRef>
+            <a:fontRef idx="minor">
+              <a:schemeClr val="tx1"/>
+            </a:fontRef>
+          </p:style>
+        </p:cxnSp>
+        <p:sp>
+          <p:nvSpPr>
+            <p:cNvPr id="111" name="Rectangle 26"/>
+            <p:cNvSpPr/>
+            <p:nvPr/>
+          </p:nvSpPr>
+          <p:spPr>
+            <a:xfrm>
+              <a:off x="3771900" y="1993391"/>
+              <a:ext cx="685800" cy="274320"/>
+            </a:xfrm>
+            <a:prstGeom prst="rect">
+              <a:avLst/>
+            </a:prstGeom>
+            <a:solidFill>
+              <a:srgbClr val="FFFFFF"/>
+            </a:solidFill>
+            <a:ln w="19050">
+              <a:solidFill>
+                <a:srgbClr val="000000"/>
+              </a:solidFill>
+            </a:ln>
+          </p:spPr>
+          <p:style>
+            <a:lnRef idx="1">
+              <a:schemeClr val="accent1"/>
+            </a:lnRef>
+            <a:fillRef idx="3">
+              <a:schemeClr val="accent1"/>
+            </a:fillRef>
+            <a:effectRef idx="2">
+              <a:schemeClr val="accent1"/>
+            </a:effectRef>
+            <a:fontRef idx="minor">
+              <a:schemeClr val="lt1"/>
+            </a:fontRef>
+          </p:style>
+          <p:txBody>
+            <a:bodyPr rtlCol="false" anchor="ctr"/>
+            <a:lstStyle/>
+            <a:p>
+              <a:pPr algn="ctr">
+                <a:defRPr sz="900">
+                  <a:solidFill>
+                    <a:srgbClr val="000000"/>
+                  </a:solidFill>
+                  <a:latin typeface="Times New Roman"/>
+                </a:defRPr>
+              </a:pPr>
+              <a:r>
+                <a:rPr/>
+                <a:t>Conv2d</a:t>
+              </a:r>
+              <a:endParaRPr/>
+            </a:p>
+          </p:txBody>
+        </p:sp>
+        <p:sp>
+          <p:nvSpPr>
+            <p:cNvPr id="112" name="Rectangle 27"/>
+            <p:cNvSpPr/>
+            <p:nvPr/>
+          </p:nvSpPr>
+          <p:spPr>
+            <a:xfrm>
+              <a:off x="4686300" y="1993391"/>
+              <a:ext cx="685800" cy="274320"/>
+            </a:xfrm>
+            <a:prstGeom prst="rect">
+              <a:avLst/>
+            </a:prstGeom>
+            <a:solidFill>
+              <a:srgbClr val="FFFFFF"/>
+            </a:solidFill>
+            <a:ln w="19050">
+              <a:solidFill>
+                <a:srgbClr val="000000"/>
+              </a:solidFill>
+            </a:ln>
+          </p:spPr>
+          <p:style>
+            <a:lnRef idx="1">
+              <a:schemeClr val="accent1"/>
+            </a:lnRef>
+            <a:fillRef idx="3">
+              <a:schemeClr val="accent1"/>
+            </a:fillRef>
+            <a:effectRef idx="2">
+              <a:schemeClr val="accent1"/>
+            </a:effectRef>
+            <a:fontRef idx="minor">
+              <a:schemeClr val="lt1"/>
+            </a:fontRef>
+          </p:style>
+          <p:txBody>
+            <a:bodyPr rtlCol="false" anchor="ctr"/>
+            <a:lstStyle/>
+            <a:p>
+              <a:pPr algn="ctr">
+                <a:defRPr sz="900">
+                  <a:solidFill>
+                    <a:srgbClr val="000000"/>
+                  </a:solidFill>
+                  <a:latin typeface="Times New Roman"/>
+                </a:defRPr>
+              </a:pPr>
+              <a:r>
+                <a:rPr/>
+                <a:t>Conv2d</a:t>
+              </a:r>
+              <a:endParaRPr/>
+            </a:p>
+          </p:txBody>
+        </p:sp>
+        <p:cxnSp>
+          <p:nvCxnSpPr>
+            <p:cNvPr id="113" name="Connector 28"/>
+            <p:cNvCxnSpPr/>
+            <p:nvPr/>
+          </p:nvCxnSpPr>
+          <p:spPr>
+            <a:xfrm>
+              <a:off x="4114800" y="2267711"/>
+              <a:ext cx="0" cy="109728"/>
+            </a:xfrm>
+            <a:prstGeom prst="line">
+              <a:avLst/>
+            </a:prstGeom>
+            <a:ln w="19050">
+              <a:solidFill>
+                <a:srgbClr val="000000"/>
+              </a:solidFill>
+            </a:ln>
+          </p:spPr>
+          <p:style>
+            <a:lnRef idx="2">
+              <a:schemeClr val="accent1"/>
+            </a:lnRef>
+            <a:fillRef idx="0">
+              <a:schemeClr val="accent1"/>
+            </a:fillRef>
+            <a:effectRef idx="1">
+              <a:schemeClr val="accent1"/>
+            </a:effectRef>
+            <a:fontRef idx="minor">
+              <a:schemeClr val="tx1"/>
+            </a:fontRef>
+          </p:style>
+        </p:cxnSp>
+        <p:cxnSp>
+          <p:nvCxnSpPr>
+            <p:cNvPr id="114" name="Connector 29"/>
+            <p:cNvCxnSpPr/>
+            <p:nvPr/>
+          </p:nvCxnSpPr>
+          <p:spPr>
+            <a:xfrm>
+              <a:off x="5029200" y="2267711"/>
+              <a:ext cx="0" cy="109728"/>
+            </a:xfrm>
+            <a:prstGeom prst="line">
+              <a:avLst/>
+            </a:prstGeom>
+            <a:ln w="19050">
+              <a:solidFill>
+                <a:srgbClr val="000000"/>
+              </a:solidFill>
+            </a:ln>
+          </p:spPr>
+          <p:style>
+            <a:lnRef idx="2">
+              <a:schemeClr val="accent1"/>
+            </a:lnRef>
+            <a:fillRef idx="0">
+              <a:schemeClr val="accent1"/>
+            </a:fillRef>
+            <a:effectRef idx="1">
+              <a:schemeClr val="accent1"/>
+            </a:effectRef>
+            <a:fontRef idx="minor">
+              <a:schemeClr val="tx1"/>
+            </a:fontRef>
+          </p:style>
+        </p:cxnSp>
+        <p:sp>
+          <p:nvSpPr>
+            <p:cNvPr id="115" name="Rectangle 30"/>
+            <p:cNvSpPr/>
+            <p:nvPr/>
+          </p:nvSpPr>
+          <p:spPr>
+            <a:xfrm>
+              <a:off x="3771900" y="2377439"/>
+              <a:ext cx="685800" cy="274320"/>
+            </a:xfrm>
+            <a:prstGeom prst="rect">
+              <a:avLst/>
+            </a:prstGeom>
+            <a:solidFill>
+              <a:srgbClr val="FFFFFF"/>
+            </a:solidFill>
+            <a:ln w="19050">
+              <a:solidFill>
+                <a:srgbClr val="000000"/>
+              </a:solidFill>
+            </a:ln>
+          </p:spPr>
+          <p:style>
+            <a:lnRef idx="1">
+              <a:schemeClr val="accent1"/>
+            </a:lnRef>
+            <a:fillRef idx="3">
+              <a:schemeClr val="accent1"/>
+            </a:fillRef>
+            <a:effectRef idx="2">
+              <a:schemeClr val="accent1"/>
+            </a:effectRef>
+            <a:fontRef idx="minor">
+              <a:schemeClr val="lt1"/>
+            </a:fontRef>
+          </p:style>
+          <p:txBody>
+            <a:bodyPr rtlCol="false" anchor="ctr"/>
+            <a:lstStyle/>
+            <a:p>
+              <a:pPr algn="ctr">
+                <a:defRPr sz="900">
+                  <a:solidFill>
+                    <a:srgbClr val="000000"/>
+                  </a:solidFill>
+                  <a:latin typeface="Times New Roman"/>
+                </a:defRPr>
+              </a:pPr>
+              <a:r>
+                <a:rPr/>
+                <a:t>Sigmoid</a:t>
+              </a:r>
+              <a:endParaRPr/>
+            </a:p>
+          </p:txBody>
+        </p:sp>
+        <p:sp>
+          <p:nvSpPr>
+            <p:cNvPr id="116" name="Rectangle 31"/>
+            <p:cNvSpPr/>
+            <p:nvPr/>
+          </p:nvSpPr>
+          <p:spPr>
+            <a:xfrm>
+              <a:off x="4686300" y="2377439"/>
+              <a:ext cx="685800" cy="274320"/>
+            </a:xfrm>
+            <a:prstGeom prst="rect">
+              <a:avLst/>
+            </a:prstGeom>
+            <a:solidFill>
+              <a:srgbClr val="FFFFFF"/>
+            </a:solidFill>
+            <a:ln w="19050">
+              <a:solidFill>
+                <a:srgbClr val="000000"/>
+              </a:solidFill>
+            </a:ln>
+          </p:spPr>
+          <p:style>
+            <a:lnRef idx="1">
+              <a:schemeClr val="accent1"/>
+            </a:lnRef>
+            <a:fillRef idx="3">
+              <a:schemeClr val="accent1"/>
+            </a:fillRef>
+            <a:effectRef idx="2">
+              <a:schemeClr val="accent1"/>
+            </a:effectRef>
+            <a:fontRef idx="minor">
+              <a:schemeClr val="lt1"/>
+            </a:fontRef>
+          </p:style>
+          <p:txBody>
+            <a:bodyPr rtlCol="false" anchor="ctr"/>
+            <a:lstStyle/>
+            <a:p>
+              <a:pPr algn="ctr">
+                <a:defRPr sz="900">
+                  <a:solidFill>
+                    <a:srgbClr val="000000"/>
+                  </a:solidFill>
+                  <a:latin typeface="Times New Roman"/>
+                </a:defRPr>
+              </a:pPr>
+              <a:r>
+                <a:rPr/>
+                <a:t>Sigmoid</a:t>
+              </a:r>
+              <a:endParaRPr/>
+            </a:p>
+          </p:txBody>
+        </p:sp>
+        <p:cxnSp>
+          <p:nvCxnSpPr>
+            <p:cNvPr id="117" name="Connector 32"/>
+            <p:cNvCxnSpPr/>
+            <p:nvPr/>
+          </p:nvCxnSpPr>
+          <p:spPr>
+            <a:xfrm>
+              <a:off x="4114800" y="2651759"/>
+              <a:ext cx="0" cy="155448"/>
+            </a:xfrm>
+            <a:prstGeom prst="line">
+              <a:avLst/>
+            </a:prstGeom>
+            <a:ln w="19050">
+              <a:solidFill>
+                <a:srgbClr val="000000"/>
+              </a:solidFill>
+            </a:ln>
+          </p:spPr>
+          <p:style>
+            <a:lnRef idx="2">
+              <a:schemeClr val="accent1"/>
+            </a:lnRef>
+            <a:fillRef idx="0">
+              <a:schemeClr val="accent1"/>
+            </a:fillRef>
+            <a:effectRef idx="1">
+              <a:schemeClr val="accent1"/>
+            </a:effectRef>
+            <a:fontRef idx="minor">
+              <a:schemeClr val="tx1"/>
+            </a:fontRef>
+          </p:style>
+        </p:cxnSp>
+        <p:cxnSp>
+          <p:nvCxnSpPr>
+            <p:cNvPr id="118" name="Connector 33"/>
+            <p:cNvCxnSpPr/>
+            <p:nvPr/>
+          </p:nvCxnSpPr>
+          <p:spPr>
+            <a:xfrm>
+              <a:off x="5029200" y="2651759"/>
+              <a:ext cx="0" cy="155448"/>
+            </a:xfrm>
+            <a:prstGeom prst="line">
+              <a:avLst/>
+            </a:prstGeom>
+            <a:ln w="19050">
+              <a:solidFill>
+                <a:srgbClr val="000000"/>
+              </a:solidFill>
+            </a:ln>
+          </p:spPr>
+          <p:style>
+            <a:lnRef idx="2">
+              <a:schemeClr val="accent1"/>
+            </a:lnRef>
+            <a:fillRef idx="0">
+              <a:schemeClr val="accent1"/>
+            </a:fillRef>
+            <a:effectRef idx="1">
+              <a:schemeClr val="accent1"/>
+            </a:effectRef>
+            <a:fontRef idx="minor">
+              <a:schemeClr val="tx1"/>
+            </a:fontRef>
+          </p:style>
+        </p:cxnSp>
+        <p:cxnSp>
+          <p:nvCxnSpPr>
+            <p:cNvPr id="119" name="Connector 34"/>
+            <p:cNvCxnSpPr/>
+            <p:nvPr/>
+          </p:nvCxnSpPr>
+          <p:spPr>
+            <a:xfrm flipH="true">
+              <a:off x="3794760" y="2807207"/>
+              <a:ext cx="320040" cy="0"/>
+            </a:xfrm>
+            <a:prstGeom prst="line">
+              <a:avLst/>
+            </a:prstGeom>
+            <a:ln w="19050">
+              <a:solidFill>
+                <a:srgbClr val="000000"/>
+              </a:solidFill>
+            </a:ln>
+          </p:spPr>
+          <p:style>
+            <a:lnRef idx="2">
+              <a:schemeClr val="accent1"/>
+            </a:lnRef>
+            <a:fillRef idx="0">
+              <a:schemeClr val="accent1"/>
+            </a:fillRef>
+            <a:effectRef idx="1">
+              <a:schemeClr val="accent1"/>
+            </a:effectRef>
+            <a:fontRef idx="minor">
+              <a:schemeClr val="tx1"/>
+            </a:fontRef>
+          </p:style>
+        </p:cxnSp>
+        <p:cxnSp>
+          <p:nvCxnSpPr>
+            <p:cNvPr id="120" name="Connector 35"/>
+            <p:cNvCxnSpPr/>
+            <p:nvPr/>
+          </p:nvCxnSpPr>
+          <p:spPr>
+            <a:xfrm>
+              <a:off x="5029200" y="2807207"/>
+              <a:ext cx="320040" cy="0"/>
+            </a:xfrm>
+            <a:prstGeom prst="line">
+              <a:avLst/>
+            </a:prstGeom>
+            <a:ln w="19050">
+              <a:solidFill>
+                <a:srgbClr val="000000"/>
+              </a:solidFill>
+            </a:ln>
+          </p:spPr>
+          <p:style>
+            <a:lnRef idx="2">
+              <a:schemeClr val="accent1"/>
+            </a:lnRef>
+            <a:fillRef idx="0">
+              <a:schemeClr val="accent1"/>
+            </a:fillRef>
+            <a:effectRef idx="1">
+              <a:schemeClr val="accent1"/>
+            </a:effectRef>
+            <a:fontRef idx="minor">
+              <a:schemeClr val="tx1"/>
+            </a:fontRef>
+          </p:style>
+        </p:cxnSp>
+        <p:sp>
+          <p:nvSpPr>
+            <p:cNvPr id="121" name="Rectangle 36"/>
+            <p:cNvSpPr/>
+            <p:nvPr/>
+          </p:nvSpPr>
+          <p:spPr>
+            <a:xfrm>
+              <a:off x="3794760" y="2807207"/>
+              <a:ext cx="1554480" cy="320040"/>
+            </a:xfrm>
+            <a:prstGeom prst="rect">
+              <a:avLst/>
+            </a:prstGeom>
+            <a:solidFill>
+              <a:srgbClr val="FFFFFF"/>
+            </a:solidFill>
+            <a:ln w="19050">
+              <a:solidFill>
+                <a:srgbClr val="000000"/>
+              </a:solidFill>
+            </a:ln>
+          </p:spPr>
+          <p:style>
+            <a:lnRef idx="1">
+              <a:schemeClr val="accent1"/>
+            </a:lnRef>
+            <a:fillRef idx="3">
+              <a:schemeClr val="accent1"/>
+            </a:fillRef>
+            <a:effectRef idx="2">
+              <a:schemeClr val="accent1"/>
+            </a:effectRef>
+            <a:fontRef idx="minor">
+              <a:schemeClr val="lt1"/>
+            </a:fontRef>
+          </p:style>
+          <p:txBody>
+            <a:bodyPr rtlCol="false" anchor="ctr"/>
+            <a:lstStyle/>
+            <a:p>
+              <a:pPr algn="ctr">
+                <a:defRPr sz="1000">
+                  <a:solidFill>
+                    <a:srgbClr val="000000"/>
+                  </a:solidFill>
+                  <a:latin typeface="Times New Roman"/>
+                </a:defRPr>
+              </a:pPr>
+              <a:r>
+                <a:rPr/>
+                <a:t>Re-weight</a:t>
+              </a:r>
+              <a:endParaRPr/>
+            </a:p>
+          </p:txBody>
+        </p:sp>
+        <p:cxnSp>
+          <p:nvCxnSpPr>
+            <p:cNvPr id="122" name="Connector 37"/>
+            <p:cNvCxnSpPr/>
+            <p:nvPr/>
+          </p:nvCxnSpPr>
+          <p:spPr>
+            <a:xfrm>
+              <a:off x="4572000" y="3127247"/>
+              <a:ext cx="0" cy="109728"/>
+            </a:xfrm>
+            <a:prstGeom prst="line">
+              <a:avLst/>
+            </a:prstGeom>
+            <a:ln w="19050">
+              <a:solidFill>
+                <a:srgbClr val="000000"/>
+              </a:solidFill>
+            </a:ln>
+          </p:spPr>
+          <p:style>
+            <a:lnRef idx="2">
+              <a:schemeClr val="accent1"/>
+            </a:lnRef>
+            <a:fillRef idx="0">
+              <a:schemeClr val="accent1"/>
+            </a:fillRef>
+            <a:effectRef idx="1">
+              <a:schemeClr val="accent1"/>
+            </a:effectRef>
+            <a:fontRef idx="minor">
+              <a:schemeClr val="tx1"/>
+            </a:fontRef>
+          </p:style>
+        </p:cxnSp>
+        <p:cxnSp>
+          <p:nvCxnSpPr>
+            <p:cNvPr id="123" name="Connector 38"/>
+            <p:cNvCxnSpPr/>
+            <p:nvPr/>
+          </p:nvCxnSpPr>
+          <p:spPr>
+            <a:xfrm>
+              <a:off x="3291840" y="640080"/>
+              <a:ext cx="0" cy="2711195"/>
+            </a:xfrm>
+            <a:prstGeom prst="line">
+              <a:avLst/>
+            </a:prstGeom>
+            <a:ln w="19050">
+              <a:solidFill>
+                <a:srgbClr val="000000"/>
+              </a:solidFill>
+            </a:ln>
+          </p:spPr>
+          <p:style>
+            <a:lnRef idx="2">
+              <a:schemeClr val="accent1"/>
+            </a:lnRef>
+            <a:fillRef idx="0">
+              <a:schemeClr val="accent1"/>
+            </a:fillRef>
+            <a:effectRef idx="1">
+              <a:schemeClr val="accent1"/>
+            </a:effectRef>
+            <a:fontRef idx="minor">
+              <a:schemeClr val="tx1"/>
+            </a:fontRef>
+          </p:style>
+        </p:cxnSp>
+        <p:cxnSp>
+          <p:nvCxnSpPr>
+            <p:cNvPr id="124" name="Connector 39"/>
+            <p:cNvCxnSpPr/>
+            <p:nvPr/>
+          </p:nvCxnSpPr>
+          <p:spPr>
+            <a:xfrm>
+              <a:off x="3291840" y="3351275"/>
+              <a:ext cx="1165860" cy="0"/>
+            </a:xfrm>
+            <a:prstGeom prst="line">
+              <a:avLst/>
+            </a:prstGeom>
+            <a:ln w="19050">
+              <a:solidFill>
+                <a:srgbClr val="000000"/>
+              </a:solidFill>
+            </a:ln>
+          </p:spPr>
+          <p:style>
+            <a:lnRef idx="2">
+              <a:schemeClr val="accent1"/>
+            </a:lnRef>
+            <a:fillRef idx="0">
+              <a:schemeClr val="accent1"/>
+            </a:fillRef>
+            <a:effectRef idx="1">
+              <a:schemeClr val="accent1"/>
+            </a:effectRef>
+            <a:fontRef idx="minor">
+              <a:schemeClr val="tx1"/>
+            </a:fontRef>
+          </p:style>
+        </p:cxnSp>
+        <p:sp>
+          <p:nvSpPr>
+            <p:cNvPr id="125" name="Oval 40"/>
+            <p:cNvSpPr/>
+            <p:nvPr/>
+          </p:nvSpPr>
+          <p:spPr>
+            <a:xfrm>
+              <a:off x="4457700" y="3236975"/>
+              <a:ext cx="228600" cy="228600"/>
+            </a:xfrm>
+            <a:prstGeom prst="ellipse">
+              <a:avLst/>
+            </a:prstGeom>
+            <a:solidFill>
+              <a:srgbClr val="FFFFFF"/>
+            </a:solidFill>
+            <a:ln w="19050">
+              <a:solidFill>
+                <a:srgbClr val="000000"/>
+              </a:solidFill>
+            </a:ln>
+          </p:spPr>
+          <p:style>
+            <a:lnRef idx="1">
+              <a:schemeClr val="accent1"/>
+            </a:lnRef>
+            <a:fillRef idx="3">
+              <a:schemeClr val="accent1"/>
+            </a:fillRef>
+            <a:effectRef idx="2">
+              <a:schemeClr val="accent1"/>
+            </a:effectRef>
+            <a:fontRef idx="minor">
+              <a:schemeClr val="lt1"/>
+            </a:fontRef>
+          </p:style>
+          <p:txBody>
+            <a:bodyPr rtlCol="false" anchor="ctr"/>
+            <a:lstStyle/>
+            <a:p>
+              <a:pPr algn="ctr">
+                <a:defRPr sz="1200" b="true">
+                  <a:solidFill>
+                    <a:srgbClr val="000000"/>
+                  </a:solidFill>
+                </a:defRPr>
+              </a:pPr>
+              <a:r>
+                <a:rPr/>
+                <a:t>+</a:t>
+              </a:r>
+              <a:endParaRPr/>
+            </a:p>
+          </p:txBody>
+        </p:sp>
+        <p:cxnSp>
+          <p:nvCxnSpPr>
+            <p:cNvPr id="126" name="Connector 41"/>
+            <p:cNvCxnSpPr/>
+            <p:nvPr/>
+          </p:nvCxnSpPr>
+          <p:spPr>
+            <a:xfrm rot="0" flipH="false" flipV="false">
+              <a:off x="4572000" y="3483864"/>
+              <a:ext cx="0" cy="109728"/>
+            </a:xfrm>
+            <a:prstGeom prst="line">
+              <a:avLst/>
+            </a:prstGeom>
+            <a:ln w="19050">
+              <a:solidFill>
+                <a:srgbClr val="000000"/>
+              </a:solidFill>
+            </a:ln>
+          </p:spPr>
+          <p:style>
+            <a:lnRef idx="2">
+              <a:schemeClr val="accent1"/>
+            </a:lnRef>
+            <a:fillRef idx="0">
+              <a:schemeClr val="accent1"/>
+            </a:fillRef>
+            <a:effectRef idx="1">
+              <a:schemeClr val="accent1"/>
+            </a:effectRef>
+            <a:fontRef idx="minor">
+              <a:schemeClr val="tx1"/>
+            </a:fontRef>
+          </p:style>
+        </p:cxnSp>
+        <p:cxnSp>
+          <p:nvCxnSpPr>
+            <p:cNvPr id="127" name="Connector 42"/>
+            <p:cNvCxnSpPr/>
+            <p:nvPr/>
+          </p:nvCxnSpPr>
+          <p:spPr>
+            <a:xfrm rot="0" flipH="false" flipV="false">
+              <a:off x="3291840" y="3593592"/>
+              <a:ext cx="1280160" cy="0"/>
+            </a:xfrm>
+            <a:prstGeom prst="line">
+              <a:avLst/>
+            </a:prstGeom>
+            <a:ln w="19050">
+              <a:solidFill>
+                <a:srgbClr val="000000"/>
+              </a:solidFill>
+            </a:ln>
+          </p:spPr>
+          <p:style>
+            <a:lnRef idx="2">
+              <a:schemeClr val="accent1"/>
+            </a:lnRef>
+            <a:fillRef idx="0">
+              <a:schemeClr val="accent1"/>
+            </a:fillRef>
+            <a:effectRef idx="1">
+              <a:schemeClr val="accent1"/>
+            </a:effectRef>
+            <a:fontRef idx="minor">
+              <a:schemeClr val="tx1"/>
+            </a:fontRef>
+          </p:style>
+        </p:cxnSp>
+        <p:cxnSp>
+          <p:nvCxnSpPr>
+            <p:cNvPr id="128" name="Connector 43"/>
+            <p:cNvCxnSpPr/>
+            <p:nvPr/>
+          </p:nvCxnSpPr>
+          <p:spPr>
+            <a:xfrm rot="0" flipH="false" flipV="false">
+              <a:off x="4572000" y="3593592"/>
+              <a:ext cx="0" cy="109728"/>
+            </a:xfrm>
+            <a:prstGeom prst="line">
+              <a:avLst/>
+            </a:prstGeom>
+            <a:ln w="19050">
+              <a:solidFill>
+                <a:srgbClr val="000000"/>
+              </a:solidFill>
+            </a:ln>
+          </p:spPr>
+          <p:style>
+            <a:lnRef idx="2">
+              <a:schemeClr val="accent1"/>
+            </a:lnRef>
+            <a:fillRef idx="0">
+              <a:schemeClr val="accent1"/>
+            </a:fillRef>
+            <a:effectRef idx="1">
+              <a:schemeClr val="accent1"/>
+            </a:effectRef>
+            <a:fontRef idx="minor">
+              <a:schemeClr val="tx1"/>
+            </a:fontRef>
+          </p:style>
+        </p:cxnSp>
+        <p:sp>
+          <p:nvSpPr>
+            <p:cNvPr id="129" name="Rectangle 44"/>
+            <p:cNvSpPr/>
+            <p:nvPr/>
+          </p:nvSpPr>
+          <p:spPr>
+            <a:xfrm rot="0" flipH="false" flipV="false">
+              <a:off x="3794760" y="3703320"/>
+              <a:ext cx="1554480" cy="480059"/>
+            </a:xfrm>
+            <a:prstGeom prst="rect">
+              <a:avLst/>
+            </a:prstGeom>
+            <a:solidFill>
+              <a:srgbClr val="FFFFFF"/>
+            </a:solidFill>
+            <a:ln w="19050">
+              <a:solidFill>
+                <a:srgbClr val="000000"/>
+              </a:solidFill>
+            </a:ln>
+          </p:spPr>
+          <p:style>
+            <a:lnRef idx="1">
+              <a:schemeClr val="accent1"/>
+            </a:lnRef>
+            <a:fillRef idx="3">
+              <a:schemeClr val="accent1"/>
+            </a:fillRef>
+            <a:effectRef idx="2">
+              <a:schemeClr val="accent1"/>
+            </a:effectRef>
+            <a:fontRef idx="minor">
+              <a:schemeClr val="lt1"/>
+            </a:fontRef>
+          </p:style>
+          <p:txBody>
+            <a:bodyPr rtlCol="false" anchor="ctr"/>
+            <a:lstStyle/>
+            <a:p>
+              <a:pPr algn="ctr">
+                <a:defRPr sz="900">
+                  <a:solidFill>
+                    <a:srgbClr val="000000">
+                      <a:alpha val="100000"/>
+                    </a:srgbClr>
+                  </a:solidFill>
+                  <a:latin typeface="Times New Roman"/>
+                  <a:ea typeface="宋体"/>
+                  <a:cs typeface="+mn-cs"/>
+                </a:defRPr>
+              </a:pPr>
+              <a:r>
+                <a:rPr lang="en-US"/>
+                <a:t>(</a:t>
+              </a:r>
+              <a:r>
+                <a:rPr/>
+                <a:t>3</a:t>
+              </a:r>
+              <a:r>
+                <a:rPr/>
+                <a:t>×</a:t>
+              </a:r>
+              <a:r>
+                <a:rPr/>
+                <a:t>3 Conv+BN+ReLU) </a:t>
+              </a:r>
+              <a:r>
+                <a:rPr/>
+                <a:t>×</a:t>
+              </a:r>
+              <a:r>
+                <a:rPr/>
+                <a:t>2</a:t>
+              </a:r>
+              <a:endParaRPr/>
+            </a:p>
+          </p:txBody>
+        </p:sp>
+        <p:cxnSp>
+          <p:nvCxnSpPr>
+            <p:cNvPr id="130" name="Connector 45"/>
+            <p:cNvCxnSpPr/>
+            <p:nvPr/>
+          </p:nvCxnSpPr>
+          <p:spPr>
+            <a:xfrm rot="0" flipH="false" flipV="false">
+              <a:off x="4572000" y="4183380"/>
+              <a:ext cx="0" cy="109728"/>
+            </a:xfrm>
+            <a:prstGeom prst="line">
+              <a:avLst/>
+            </a:prstGeom>
+            <a:ln w="19050">
+              <a:solidFill>
+                <a:srgbClr val="000000"/>
+              </a:solidFill>
+            </a:ln>
+          </p:spPr>
+          <p:style>
+            <a:lnRef idx="2">
+              <a:schemeClr val="accent1"/>
+            </a:lnRef>
+            <a:fillRef idx="0">
+              <a:schemeClr val="accent1"/>
+            </a:fillRef>
+            <a:effectRef idx="1">
+              <a:schemeClr val="accent1"/>
+            </a:effectRef>
+            <a:fontRef idx="minor">
+              <a:schemeClr val="tx1"/>
+            </a:fontRef>
+          </p:style>
+        </p:cxnSp>
+        <p:cxnSp>
+          <p:nvCxnSpPr>
+            <p:cNvPr id="131" name="Connector 46"/>
+            <p:cNvCxnSpPr/>
+            <p:nvPr/>
+          </p:nvCxnSpPr>
+          <p:spPr>
+            <a:xfrm rot="0" flipH="false" flipV="false">
+              <a:off x="3291840" y="3593592"/>
+              <a:ext cx="0" cy="813816"/>
+            </a:xfrm>
+            <a:prstGeom prst="line">
+              <a:avLst/>
+            </a:prstGeom>
+            <a:ln w="19050">
+              <a:solidFill>
+                <a:srgbClr val="000000"/>
+              </a:solidFill>
+            </a:ln>
+          </p:spPr>
+          <p:style>
+            <a:lnRef idx="2">
+              <a:schemeClr val="accent1"/>
+            </a:lnRef>
+            <a:fillRef idx="0">
+              <a:schemeClr val="accent1"/>
+            </a:fillRef>
+            <a:effectRef idx="1">
+              <a:schemeClr val="accent1"/>
+            </a:effectRef>
+            <a:fontRef idx="minor">
+              <a:schemeClr val="tx1"/>
+            </a:fontRef>
+          </p:style>
+        </p:cxnSp>
+        <p:cxnSp>
+          <p:nvCxnSpPr>
+            <p:cNvPr id="132" name="Connector 47"/>
+            <p:cNvCxnSpPr/>
+            <p:nvPr/>
+          </p:nvCxnSpPr>
+          <p:spPr>
+            <a:xfrm rot="0" flipH="false" flipV="false">
+              <a:off x="3291840" y="4407408"/>
+              <a:ext cx="1165860" cy="0"/>
+            </a:xfrm>
+            <a:prstGeom prst="line">
+              <a:avLst/>
+            </a:prstGeom>
+            <a:ln w="19050">
+              <a:solidFill>
+                <a:srgbClr val="000000"/>
+              </a:solidFill>
+            </a:ln>
+          </p:spPr>
+          <p:style>
+            <a:lnRef idx="2">
+              <a:schemeClr val="accent1"/>
+            </a:lnRef>
+            <a:fillRef idx="0">
+              <a:schemeClr val="accent1"/>
+            </a:fillRef>
+            <a:effectRef idx="1">
+              <a:schemeClr val="accent1"/>
+            </a:effectRef>
+            <a:fontRef idx="minor">
+              <a:schemeClr val="tx1"/>
+            </a:fontRef>
+          </p:style>
+        </p:cxnSp>
+        <p:sp>
+          <p:nvSpPr>
+            <p:cNvPr id="133" name="Oval 48"/>
+            <p:cNvSpPr/>
+            <p:nvPr/>
+          </p:nvSpPr>
+          <p:spPr>
+            <a:xfrm rot="0" flipH="false" flipV="false">
+              <a:off x="4457700" y="4293108"/>
+              <a:ext cx="228600" cy="228600"/>
+            </a:xfrm>
+            <a:prstGeom prst="ellipse">
+              <a:avLst/>
+            </a:prstGeom>
+            <a:solidFill>
+              <a:srgbClr val="FFFFFF"/>
+            </a:solidFill>
+            <a:ln w="19050">
+              <a:solidFill>
+                <a:srgbClr val="000000"/>
+              </a:solidFill>
+            </a:ln>
+          </p:spPr>
+          <p:style>
+            <a:lnRef idx="1">
+              <a:schemeClr val="accent1"/>
+            </a:lnRef>
+            <a:fillRef idx="3">
+              <a:schemeClr val="accent1"/>
+            </a:fillRef>
+            <a:effectRef idx="2">
+              <a:schemeClr val="accent1"/>
+            </a:effectRef>
+            <a:fontRef idx="minor">
+              <a:schemeClr val="lt1"/>
+            </a:fontRef>
+          </p:style>
+          <p:txBody>
+            <a:bodyPr rtlCol="false" anchor="ctr"/>
+            <a:lstStyle/>
+            <a:p>
+              <a:pPr algn="ctr">
+                <a:defRPr sz="1200" b="true">
+                  <a:solidFill>
+                    <a:srgbClr val="000000"/>
+                  </a:solidFill>
+                </a:defRPr>
+              </a:pPr>
+              <a:r>
+                <a:rPr/>
+                <a:t>+</a:t>
+              </a:r>
+              <a:endParaRPr/>
+            </a:p>
+          </p:txBody>
+        </p:sp>
+        <p:cxnSp>
+          <p:nvCxnSpPr>
+            <p:cNvPr id="134" name="Connector 49"/>
+            <p:cNvCxnSpPr/>
+            <p:nvPr/>
+          </p:nvCxnSpPr>
+          <p:spPr>
+            <a:xfrm rot="0" flipH="false" flipV="false">
+              <a:off x="4572000" y="4553711"/>
+              <a:ext cx="0" cy="109728"/>
+            </a:xfrm>
+            <a:prstGeom prst="line">
+              <a:avLst/>
+            </a:prstGeom>
+            <a:ln w="19050">
+              <a:solidFill>
+                <a:srgbClr val="000000"/>
+              </a:solidFill>
+            </a:ln>
+          </p:spPr>
+          <p:style>
+            <a:lnRef idx="2">
+              <a:schemeClr val="accent1"/>
+            </a:lnRef>
+            <a:fillRef idx="0">
+              <a:schemeClr val="accent1"/>
+            </a:fillRef>
+            <a:effectRef idx="1">
+              <a:schemeClr val="accent1"/>
+            </a:effectRef>
+            <a:fontRef idx="minor">
+              <a:schemeClr val="tx1"/>
+            </a:fontRef>
+          </p:style>
+        </p:cxnSp>
+        <p:cxnSp>
+          <p:nvCxnSpPr>
+            <p:cNvPr id="135" name="Connector 50"/>
+            <p:cNvCxnSpPr/>
+            <p:nvPr/>
+          </p:nvCxnSpPr>
+          <p:spPr>
+            <a:xfrm rot="0" flipH="false" flipV="false">
+              <a:off x="3291840" y="4663439"/>
+              <a:ext cx="1280160" cy="0"/>
+            </a:xfrm>
+            <a:prstGeom prst="line">
+              <a:avLst/>
+            </a:prstGeom>
+            <a:ln w="19050">
+              <a:solidFill>
+                <a:srgbClr val="000000"/>
+              </a:solidFill>
+            </a:ln>
+          </p:spPr>
+          <p:style>
+            <a:lnRef idx="2">
+              <a:schemeClr val="accent1"/>
+            </a:lnRef>
+            <a:fillRef idx="0">
+              <a:schemeClr val="accent1"/>
+            </a:fillRef>
+            <a:effectRef idx="1">
+              <a:schemeClr val="accent1"/>
+            </a:effectRef>
+            <a:fontRef idx="minor">
+              <a:schemeClr val="tx1"/>
+            </a:fontRef>
+          </p:style>
+        </p:cxnSp>
+        <p:cxnSp>
+          <p:nvCxnSpPr>
+            <p:cNvPr id="136" name="Connector 51"/>
+            <p:cNvCxnSpPr/>
+            <p:nvPr/>
+          </p:nvCxnSpPr>
+          <p:spPr>
+            <a:xfrm rot="0" flipH="false" flipV="false">
+              <a:off x="4572000" y="4663439"/>
+              <a:ext cx="0" cy="109728"/>
+            </a:xfrm>
+            <a:prstGeom prst="line">
+              <a:avLst/>
+            </a:prstGeom>
+            <a:ln w="19050">
+              <a:solidFill>
+                <a:srgbClr val="000000"/>
+              </a:solidFill>
+            </a:ln>
+          </p:spPr>
+          <p:style>
+            <a:lnRef idx="2">
+              <a:schemeClr val="accent1"/>
+            </a:lnRef>
+            <a:fillRef idx="0">
+              <a:schemeClr val="accent1"/>
+            </a:fillRef>
+            <a:effectRef idx="1">
+              <a:schemeClr val="accent1"/>
+            </a:effectRef>
+            <a:fontRef idx="minor">
+              <a:schemeClr val="tx1"/>
+            </a:fontRef>
+          </p:style>
+        </p:cxnSp>
+        <p:sp>
+          <p:nvSpPr>
+            <p:cNvPr id="137" name="Rectangle 52"/>
+            <p:cNvSpPr/>
+            <p:nvPr/>
+          </p:nvSpPr>
+          <p:spPr>
+            <a:xfrm rot="0" flipH="false" flipV="false">
+              <a:off x="3794760" y="4773167"/>
+              <a:ext cx="1554480" cy="320040"/>
+            </a:xfrm>
+            <a:prstGeom prst="rect">
+              <a:avLst/>
+            </a:prstGeom>
+            <a:solidFill>
+              <a:srgbClr val="FFFFFF"/>
+            </a:solidFill>
+            <a:ln w="19050">
+              <a:solidFill>
+                <a:srgbClr val="000000"/>
+              </a:solidFill>
+            </a:ln>
+          </p:spPr>
+          <p:style>
+            <a:lnRef idx="1">
+              <a:schemeClr val="accent1"/>
+            </a:lnRef>
+            <a:fillRef idx="3">
+              <a:schemeClr val="accent1"/>
+            </a:fillRef>
+            <a:effectRef idx="2">
+              <a:schemeClr val="accent1"/>
+            </a:effectRef>
+            <a:fontRef idx="minor">
+              <a:schemeClr val="lt1"/>
+            </a:fontRef>
+          </p:style>
+          <p:txBody>
+            <a:bodyPr rtlCol="false" anchor="ctr"/>
+            <a:lstStyle/>
+            <a:p>
+              <a:pPr algn="ctr">
+                <a:defRPr sz="1000">
+                  <a:solidFill>
+                    <a:srgbClr val="000000"/>
+                  </a:solidFill>
+                  <a:latin typeface="Times New Roman"/>
+                </a:defRPr>
+              </a:pPr>
+              <a:r>
+                <a:rPr/>
+                <a:t>Global Avg Pool</a:t>
+              </a:r>
+              <a:endParaRPr/>
+            </a:p>
+          </p:txBody>
+        </p:sp>
+        <p:sp>
+          <p:nvSpPr>
+            <p:cNvPr id="138" name="TextBox 53"/>
+            <p:cNvSpPr txBox="true"/>
+            <p:nvPr/>
+          </p:nvSpPr>
+          <p:spPr>
+            <a:xfrm rot="0" flipH="false" flipV="false">
+              <a:off x="5440679" y="4800600"/>
+              <a:ext cx="1371600" cy="228600"/>
+            </a:xfrm>
+            <a:prstGeom prst="rect">
+              <a:avLst/>
+            </a:prstGeom>
+            <a:noFill/>
+          </p:spPr>
+          <p:txBody>
+            <a:bodyPr wrap="none">
+              <a:spAutoFit/>
+            </a:bodyPr>
+            <a:lstStyle/>
+            <a:p>
+              <a:pPr>
+                <a:defRPr sz="900" i="true">
+                  <a:solidFill>
+                    <a:srgbClr val="505050"/>
+                  </a:solidFill>
+                  <a:latin typeface="Times New Roman"/>
+                </a:defRPr>
+              </a:pPr>
+              <a:r>
+                <a:rPr/>
+                <a:t>1×1×C</a:t>
+              </a:r>
+              <a:endParaRPr/>
+            </a:p>
+          </p:txBody>
+        </p:sp>
+        <p:cxnSp>
+          <p:nvCxnSpPr>
+            <p:cNvPr id="139" name="Connector 54"/>
+            <p:cNvCxnSpPr/>
+            <p:nvPr/>
+          </p:nvCxnSpPr>
+          <p:spPr>
+            <a:xfrm rot="0" flipH="false" flipV="false">
+              <a:off x="4572000" y="5093207"/>
+              <a:ext cx="0" cy="82296"/>
+            </a:xfrm>
+            <a:prstGeom prst="line">
+              <a:avLst/>
+            </a:prstGeom>
+            <a:ln w="19050">
+              <a:solidFill>
+                <a:srgbClr val="000000"/>
+              </a:solidFill>
+            </a:ln>
+          </p:spPr>
+          <p:style>
+            <a:lnRef idx="2">
+              <a:schemeClr val="accent1"/>
+            </a:lnRef>
+            <a:fillRef idx="0">
+              <a:schemeClr val="accent1"/>
+            </a:fillRef>
+            <a:effectRef idx="1">
+              <a:schemeClr val="accent1"/>
+            </a:effectRef>
+            <a:fontRef idx="minor">
+              <a:schemeClr val="tx1"/>
+            </a:fontRef>
+          </p:style>
+        </p:cxnSp>
+        <p:cxnSp>
+          <p:nvCxnSpPr>
+            <p:cNvPr id="140" name="Connector 55"/>
+            <p:cNvCxnSpPr/>
+            <p:nvPr/>
+          </p:nvCxnSpPr>
+          <p:spPr>
+            <a:xfrm rot="0" flipH="false" flipV="false">
+              <a:off x="3639312" y="5175503"/>
+              <a:ext cx="1865376" cy="0"/>
+            </a:xfrm>
+            <a:prstGeom prst="line">
+              <a:avLst/>
+            </a:prstGeom>
+            <a:ln w="19050">
+              <a:solidFill>
+                <a:srgbClr val="000000"/>
+              </a:solidFill>
+            </a:ln>
+          </p:spPr>
+          <p:style>
+            <a:lnRef idx="2">
+              <a:schemeClr val="accent1"/>
+            </a:lnRef>
+            <a:fillRef idx="0">
+              <a:schemeClr val="accent1"/>
+            </a:fillRef>
+            <a:effectRef idx="1">
+              <a:schemeClr val="accent1"/>
+            </a:effectRef>
+            <a:fontRef idx="minor">
+              <a:schemeClr val="tx1"/>
+            </a:fontRef>
+          </p:style>
+        </p:cxnSp>
+        <p:cxnSp>
+          <p:nvCxnSpPr>
+            <p:cNvPr id="141" name="Connector 56"/>
+            <p:cNvCxnSpPr/>
+            <p:nvPr/>
+          </p:nvCxnSpPr>
+          <p:spPr>
+            <a:xfrm rot="0" flipH="false" flipV="false">
+              <a:off x="3639312" y="5175503"/>
+              <a:ext cx="0" cy="27432"/>
+            </a:xfrm>
+            <a:prstGeom prst="line">
+              <a:avLst/>
+            </a:prstGeom>
+            <a:ln w="19050">
+              <a:solidFill>
+                <a:srgbClr val="000000"/>
+              </a:solidFill>
+            </a:ln>
+          </p:spPr>
+          <p:style>
+            <a:lnRef idx="2">
+              <a:schemeClr val="accent1"/>
+            </a:lnRef>
+            <a:fillRef idx="0">
+              <a:schemeClr val="accent1"/>
+            </a:fillRef>
+            <a:effectRef idx="1">
+              <a:schemeClr val="accent1"/>
+            </a:effectRef>
+            <a:fontRef idx="minor">
+              <a:schemeClr val="tx1"/>
+            </a:fontRef>
+          </p:style>
+        </p:cxnSp>
+        <p:sp>
+          <p:nvSpPr>
+            <p:cNvPr id="142" name="Rectangle 57"/>
+            <p:cNvSpPr/>
+            <p:nvPr/>
+          </p:nvSpPr>
+          <p:spPr>
+            <a:xfrm rot="0" flipH="false" flipV="false">
+              <a:off x="3364992" y="5202935"/>
+              <a:ext cx="548640" cy="274320"/>
+            </a:xfrm>
+            <a:prstGeom prst="rect">
+              <a:avLst/>
+            </a:prstGeom>
+            <a:solidFill>
+              <a:srgbClr val="FFFFFF"/>
+            </a:solidFill>
+            <a:ln w="19050">
+              <a:solidFill>
+                <a:srgbClr val="000000"/>
+              </a:solidFill>
+            </a:ln>
+          </p:spPr>
+          <p:style>
+            <a:lnRef idx="1">
+              <a:schemeClr val="accent1"/>
+            </a:lnRef>
+            <a:fillRef idx="3">
+              <a:schemeClr val="accent1"/>
+            </a:fillRef>
+            <a:effectRef idx="2">
+              <a:schemeClr val="accent1"/>
+            </a:effectRef>
+            <a:fontRef idx="minor">
+              <a:schemeClr val="lt1"/>
+            </a:fontRef>
+          </p:style>
+          <p:txBody>
+            <a:bodyPr rtlCol="false" anchor="ctr"/>
+            <a:lstStyle/>
+            <a:p>
+              <a:pPr algn="ctr">
+                <a:defRPr sz="700">
+                  <a:solidFill>
+                    <a:srgbClr val="000000"/>
+                  </a:solidFill>
+                  <a:latin typeface="Times New Roman"/>
+                </a:defRPr>
+              </a:pPr>
+              <a:r>
+                <a:rPr/>
+                <a:t>FC+ReLU</a:t>
+              </a:r>
+              <a:endParaRPr/>
+            </a:p>
+          </p:txBody>
+        </p:sp>
+        <p:cxnSp>
+          <p:nvCxnSpPr>
+            <p:cNvPr id="143" name="Connector 58"/>
+            <p:cNvCxnSpPr/>
+            <p:nvPr/>
+          </p:nvCxnSpPr>
+          <p:spPr>
+            <a:xfrm rot="0" flipH="false" flipV="false">
+              <a:off x="3639312" y="5477255"/>
+              <a:ext cx="0" cy="73152"/>
+            </a:xfrm>
+            <a:prstGeom prst="line">
+              <a:avLst/>
+            </a:prstGeom>
+            <a:ln w="19050">
+              <a:solidFill>
+                <a:srgbClr val="000000"/>
+              </a:solidFill>
+            </a:ln>
+          </p:spPr>
+          <p:style>
+            <a:lnRef idx="2">
+              <a:schemeClr val="accent1"/>
+            </a:lnRef>
+            <a:fillRef idx="0">
+              <a:schemeClr val="accent1"/>
+            </a:fillRef>
+            <a:effectRef idx="1">
+              <a:schemeClr val="accent1"/>
+            </a:effectRef>
+            <a:fontRef idx="minor">
+              <a:schemeClr val="tx1"/>
+            </a:fontRef>
+          </p:style>
+        </p:cxnSp>
+        <p:cxnSp>
+          <p:nvCxnSpPr>
+            <p:cNvPr id="144" name="Connector 59"/>
+            <p:cNvCxnSpPr/>
+            <p:nvPr/>
+          </p:nvCxnSpPr>
+          <p:spPr>
+            <a:xfrm rot="0" flipH="false" flipV="false">
+              <a:off x="4261104" y="5175503"/>
+              <a:ext cx="0" cy="27432"/>
+            </a:xfrm>
+            <a:prstGeom prst="line">
+              <a:avLst/>
+            </a:prstGeom>
+            <a:ln w="19050">
+              <a:solidFill>
+                <a:srgbClr val="000000"/>
+              </a:solidFill>
+            </a:ln>
+          </p:spPr>
+          <p:style>
+            <a:lnRef idx="2">
+              <a:schemeClr val="accent1"/>
+            </a:lnRef>
+            <a:fillRef idx="0">
+              <a:schemeClr val="accent1"/>
+            </a:fillRef>
+            <a:effectRef idx="1">
+              <a:schemeClr val="accent1"/>
+            </a:effectRef>
+            <a:fontRef idx="minor">
+              <a:schemeClr val="tx1"/>
+            </a:fontRef>
+          </p:style>
+        </p:cxnSp>
+        <p:sp>
+          <p:nvSpPr>
+            <p:cNvPr id="145" name="Rectangle 60"/>
+            <p:cNvSpPr/>
+            <p:nvPr/>
+          </p:nvSpPr>
+          <p:spPr>
+            <a:xfrm rot="0" flipH="false" flipV="false">
+              <a:off x="3986784" y="5202935"/>
+              <a:ext cx="548640" cy="274320"/>
+            </a:xfrm>
+            <a:prstGeom prst="rect">
+              <a:avLst/>
+            </a:prstGeom>
+            <a:solidFill>
+              <a:srgbClr val="FFFFFF"/>
+            </a:solidFill>
+            <a:ln w="19050">
+              <a:solidFill>
+                <a:srgbClr val="000000"/>
+              </a:solidFill>
+            </a:ln>
+          </p:spPr>
+          <p:style>
+            <a:lnRef idx="1">
+              <a:schemeClr val="accent1"/>
+            </a:lnRef>
+            <a:fillRef idx="3">
+              <a:schemeClr val="accent1"/>
+            </a:fillRef>
+            <a:effectRef idx="2">
+              <a:schemeClr val="accent1"/>
+            </a:effectRef>
+            <a:fontRef idx="minor">
+              <a:schemeClr val="lt1"/>
+            </a:fontRef>
+          </p:style>
+          <p:txBody>
+            <a:bodyPr rtlCol="false" anchor="ctr"/>
+            <a:lstStyle/>
+            <a:p>
+              <a:pPr algn="ctr">
+                <a:defRPr sz="700">
+                  <a:solidFill>
+                    <a:srgbClr val="000000"/>
+                  </a:solidFill>
+                  <a:latin typeface="Times New Roman"/>
+                </a:defRPr>
+              </a:pPr>
+              <a:r>
+                <a:rPr/>
+                <a:t>FC+ReLU</a:t>
+              </a:r>
+              <a:endParaRPr/>
+            </a:p>
+          </p:txBody>
+        </p:sp>
+        <p:cxnSp>
+          <p:nvCxnSpPr>
+            <p:cNvPr id="146" name="Connector 61"/>
+            <p:cNvCxnSpPr/>
+            <p:nvPr/>
+          </p:nvCxnSpPr>
+          <p:spPr>
+            <a:xfrm rot="0" flipH="false" flipV="false">
+              <a:off x="4261104" y="5477255"/>
+              <a:ext cx="0" cy="73152"/>
+            </a:xfrm>
+            <a:prstGeom prst="line">
+              <a:avLst/>
+            </a:prstGeom>
+            <a:ln w="19050">
+              <a:solidFill>
+                <a:srgbClr val="000000"/>
+              </a:solidFill>
+            </a:ln>
+          </p:spPr>
+          <p:style>
+            <a:lnRef idx="2">
+              <a:schemeClr val="accent1"/>
+            </a:lnRef>
+            <a:fillRef idx="0">
+              <a:schemeClr val="accent1"/>
+            </a:fillRef>
+            <a:effectRef idx="1">
+              <a:schemeClr val="accent1"/>
+            </a:effectRef>
+            <a:fontRef idx="minor">
+              <a:schemeClr val="tx1"/>
+            </a:fontRef>
+          </p:style>
+        </p:cxnSp>
+        <p:cxnSp>
+          <p:nvCxnSpPr>
+            <p:cNvPr id="147" name="Connector 62"/>
+            <p:cNvCxnSpPr/>
+            <p:nvPr/>
+          </p:nvCxnSpPr>
+          <p:spPr>
+            <a:xfrm rot="0" flipH="false" flipV="false">
+              <a:off x="4882896" y="5175503"/>
+              <a:ext cx="0" cy="27432"/>
+            </a:xfrm>
+            <a:prstGeom prst="line">
+              <a:avLst/>
+            </a:prstGeom>
+            <a:ln w="19050">
+              <a:solidFill>
+                <a:srgbClr val="000000"/>
+              </a:solidFill>
+            </a:ln>
+          </p:spPr>
+          <p:style>
+            <a:lnRef idx="2">
+              <a:schemeClr val="accent1"/>
+            </a:lnRef>
+            <a:fillRef idx="0">
+              <a:schemeClr val="accent1"/>
+            </a:fillRef>
+            <a:effectRef idx="1">
+              <a:schemeClr val="accent1"/>
+            </a:effectRef>
+            <a:fontRef idx="minor">
+              <a:schemeClr val="tx1"/>
+            </a:fontRef>
+          </p:style>
+        </p:cxnSp>
+        <p:sp>
+          <p:nvSpPr>
+            <p:cNvPr id="148" name="Rectangle 63"/>
+            <p:cNvSpPr/>
+            <p:nvPr/>
+          </p:nvSpPr>
+          <p:spPr>
+            <a:xfrm rot="0" flipH="false" flipV="false">
+              <a:off x="4608576" y="5202935"/>
+              <a:ext cx="548640" cy="274320"/>
+            </a:xfrm>
+            <a:prstGeom prst="rect">
+              <a:avLst/>
+            </a:prstGeom>
+            <a:solidFill>
+              <a:srgbClr val="FFFFFF"/>
+            </a:solidFill>
+            <a:ln w="19050">
+              <a:solidFill>
+                <a:srgbClr val="000000"/>
+              </a:solidFill>
+            </a:ln>
+          </p:spPr>
+          <p:style>
+            <a:lnRef idx="1">
+              <a:schemeClr val="accent1"/>
+            </a:lnRef>
+            <a:fillRef idx="3">
+              <a:schemeClr val="accent1"/>
+            </a:fillRef>
+            <a:effectRef idx="2">
+              <a:schemeClr val="accent1"/>
+            </a:effectRef>
+            <a:fontRef idx="minor">
+              <a:schemeClr val="lt1"/>
+            </a:fontRef>
+          </p:style>
+          <p:txBody>
+            <a:bodyPr rtlCol="false" anchor="ctr"/>
+            <a:lstStyle/>
+            <a:p>
+              <a:pPr algn="ctr">
+                <a:defRPr sz="700">
+                  <a:solidFill>
+                    <a:srgbClr val="000000"/>
+                  </a:solidFill>
+                  <a:latin typeface="Times New Roman"/>
+                </a:defRPr>
+              </a:pPr>
+              <a:r>
+                <a:rPr/>
+                <a:t>FC+ReLU</a:t>
+              </a:r>
+              <a:endParaRPr/>
+            </a:p>
+          </p:txBody>
+        </p:sp>
+        <p:cxnSp>
+          <p:nvCxnSpPr>
+            <p:cNvPr id="149" name="Connector 64"/>
+            <p:cNvCxnSpPr/>
+            <p:nvPr/>
+          </p:nvCxnSpPr>
+          <p:spPr>
+            <a:xfrm rot="0" flipH="false" flipV="false">
+              <a:off x="4882896" y="5477255"/>
+              <a:ext cx="0" cy="73152"/>
+            </a:xfrm>
+            <a:prstGeom prst="line">
+              <a:avLst/>
+            </a:prstGeom>
+            <a:ln w="19050">
+              <a:solidFill>
+                <a:srgbClr val="000000"/>
+              </a:solidFill>
+            </a:ln>
+          </p:spPr>
+          <p:style>
+            <a:lnRef idx="2">
+              <a:schemeClr val="accent1"/>
+            </a:lnRef>
+            <a:fillRef idx="0">
+              <a:schemeClr val="accent1"/>
+            </a:fillRef>
+            <a:effectRef idx="1">
+              <a:schemeClr val="accent1"/>
+            </a:effectRef>
+            <a:fontRef idx="minor">
+              <a:schemeClr val="tx1"/>
+            </a:fontRef>
+          </p:style>
+        </p:cxnSp>
+        <p:cxnSp>
+          <p:nvCxnSpPr>
+            <p:cNvPr id="150" name="Connector 65"/>
+            <p:cNvCxnSpPr/>
+            <p:nvPr/>
+          </p:nvCxnSpPr>
+          <p:spPr>
+            <a:xfrm rot="0" flipH="false" flipV="false">
+              <a:off x="5504688" y="5175503"/>
+              <a:ext cx="0" cy="27432"/>
+            </a:xfrm>
+            <a:prstGeom prst="line">
+              <a:avLst/>
+            </a:prstGeom>
+            <a:ln w="19050">
+              <a:solidFill>
+                <a:srgbClr val="000000"/>
+              </a:solidFill>
+            </a:ln>
+          </p:spPr>
+          <p:style>
+            <a:lnRef idx="2">
+              <a:schemeClr val="accent1"/>
+            </a:lnRef>
+            <a:fillRef idx="0">
+              <a:schemeClr val="accent1"/>
+            </a:fillRef>
+            <a:effectRef idx="1">
+              <a:schemeClr val="accent1"/>
+            </a:effectRef>
+            <a:fontRef idx="minor">
+              <a:schemeClr val="tx1"/>
+            </a:fontRef>
+          </p:style>
+        </p:cxnSp>
+        <p:sp>
+          <p:nvSpPr>
+            <p:cNvPr id="151" name="Rectangle 66"/>
+            <p:cNvSpPr/>
+            <p:nvPr/>
+          </p:nvSpPr>
+          <p:spPr>
+            <a:xfrm rot="0" flipH="false" flipV="false">
+              <a:off x="5230368" y="5202935"/>
+              <a:ext cx="548640" cy="274320"/>
+            </a:xfrm>
+            <a:prstGeom prst="rect">
+              <a:avLst/>
+            </a:prstGeom>
+            <a:solidFill>
+              <a:srgbClr val="FFFFFF"/>
+            </a:solidFill>
+            <a:ln w="19050">
+              <a:solidFill>
+                <a:srgbClr val="000000"/>
+              </a:solidFill>
+            </a:ln>
+          </p:spPr>
+          <p:style>
+            <a:lnRef idx="1">
+              <a:schemeClr val="accent1"/>
+            </a:lnRef>
+            <a:fillRef idx="3">
+              <a:schemeClr val="accent1"/>
+            </a:fillRef>
+            <a:effectRef idx="2">
+              <a:schemeClr val="accent1"/>
+            </a:effectRef>
+            <a:fontRef idx="minor">
+              <a:schemeClr val="lt1"/>
+            </a:fontRef>
+          </p:style>
+          <p:txBody>
+            <a:bodyPr rtlCol="false" anchor="ctr"/>
+            <a:lstStyle/>
+            <a:p>
+              <a:pPr algn="ctr">
+                <a:defRPr sz="700">
+                  <a:solidFill>
+                    <a:srgbClr val="000000"/>
+                  </a:solidFill>
+                  <a:latin typeface="Times New Roman"/>
+                </a:defRPr>
+              </a:pPr>
+              <a:r>
+                <a:rPr/>
+                <a:t>FC+ReLU</a:t>
+              </a:r>
+              <a:endParaRPr/>
+            </a:p>
+          </p:txBody>
+        </p:sp>
+        <p:cxnSp>
+          <p:nvCxnSpPr>
+            <p:cNvPr id="152" name="Connector 67"/>
+            <p:cNvCxnSpPr/>
+            <p:nvPr/>
+          </p:nvCxnSpPr>
+          <p:spPr>
+            <a:xfrm rot="0" flipH="false" flipV="false">
+              <a:off x="5504688" y="5477255"/>
+              <a:ext cx="0" cy="73152"/>
+            </a:xfrm>
+            <a:prstGeom prst="line">
+              <a:avLst/>
+            </a:prstGeom>
+            <a:ln w="19050">
+              <a:solidFill>
+                <a:srgbClr val="000000"/>
+              </a:solidFill>
+            </a:ln>
+          </p:spPr>
+          <p:style>
+            <a:lnRef idx="2">
+              <a:schemeClr val="accent1"/>
+            </a:lnRef>
+            <a:fillRef idx="0">
+              <a:schemeClr val="accent1"/>
+            </a:fillRef>
+            <a:effectRef idx="1">
+              <a:schemeClr val="accent1"/>
+            </a:effectRef>
+            <a:fontRef idx="minor">
+              <a:schemeClr val="tx1"/>
+            </a:fontRef>
+          </p:style>
+        </p:cxnSp>
+        <p:sp>
+          <p:nvSpPr>
+            <p:cNvPr id="153" name="TextBox 68"/>
+            <p:cNvSpPr txBox="true"/>
+            <p:nvPr/>
+          </p:nvSpPr>
+          <p:spPr>
+            <a:xfrm rot="0" flipH="false" flipV="false">
+              <a:off x="5824728" y="5221223"/>
+              <a:ext cx="1371600" cy="228600"/>
+            </a:xfrm>
+            <a:prstGeom prst="rect">
+              <a:avLst/>
+            </a:prstGeom>
+            <a:noFill/>
+          </p:spPr>
+          <p:txBody>
+            <a:bodyPr wrap="none">
+              <a:spAutoFit/>
+            </a:bodyPr>
+            <a:lstStyle/>
+            <a:p>
+              <a:pPr>
+                <a:defRPr sz="800" i="true">
+                  <a:solidFill>
+                    <a:srgbClr val="505050"/>
+                  </a:solidFill>
+                  <a:latin typeface="Times New Roman"/>
+                </a:defRPr>
+              </a:pPr>
+              <a:r>
+                <a:rPr/>
+                <a:t>1×1×C/r ×4</a:t>
+              </a:r>
+              <a:endParaRPr/>
+            </a:p>
+          </p:txBody>
+        </p:sp>
+        <p:cxnSp>
+          <p:nvCxnSpPr>
+            <p:cNvPr id="154" name="Connector 69"/>
+            <p:cNvCxnSpPr/>
+            <p:nvPr/>
+          </p:nvCxnSpPr>
+          <p:spPr>
+            <a:xfrm rot="0" flipH="false" flipV="false">
+              <a:off x="3639312" y="5550407"/>
+              <a:ext cx="1865376" cy="0"/>
+            </a:xfrm>
+            <a:prstGeom prst="line">
+              <a:avLst/>
+            </a:prstGeom>
+            <a:ln w="19050">
+              <a:solidFill>
+                <a:srgbClr val="000000"/>
+              </a:solidFill>
+            </a:ln>
+          </p:spPr>
+          <p:style>
+            <a:lnRef idx="2">
+              <a:schemeClr val="accent1"/>
+            </a:lnRef>
+            <a:fillRef idx="0">
+              <a:schemeClr val="accent1"/>
+            </a:fillRef>
+            <a:effectRef idx="1">
+              <a:schemeClr val="accent1"/>
+            </a:effectRef>
+            <a:fontRef idx="minor">
+              <a:schemeClr val="tx1"/>
+            </a:fontRef>
+          </p:style>
+        </p:cxnSp>
+        <p:cxnSp>
+          <p:nvCxnSpPr>
+            <p:cNvPr id="155" name="Connector 70"/>
+            <p:cNvCxnSpPr/>
+            <p:nvPr/>
+          </p:nvCxnSpPr>
+          <p:spPr>
+            <a:xfrm rot="0" flipH="false" flipV="false">
+              <a:off x="4572000" y="5550407"/>
+              <a:ext cx="0" cy="45720"/>
+            </a:xfrm>
+            <a:prstGeom prst="line">
+              <a:avLst/>
+            </a:prstGeom>
+            <a:ln w="19050">
+              <a:solidFill>
+                <a:srgbClr val="000000"/>
+              </a:solidFill>
+            </a:ln>
+          </p:spPr>
+          <p:style>
+            <a:lnRef idx="2">
+              <a:schemeClr val="accent1"/>
+            </a:lnRef>
+            <a:fillRef idx="0">
+              <a:schemeClr val="accent1"/>
+            </a:fillRef>
+            <a:effectRef idx="1">
+              <a:schemeClr val="accent1"/>
+            </a:effectRef>
+            <a:fontRef idx="minor">
+              <a:schemeClr val="tx1"/>
+            </a:fontRef>
+          </p:style>
+        </p:cxnSp>
+        <p:sp>
+          <p:nvSpPr>
+            <p:cNvPr id="156" name="Rectangle 71"/>
+            <p:cNvSpPr/>
+            <p:nvPr/>
+          </p:nvSpPr>
+          <p:spPr>
+            <a:xfrm rot="0" flipH="false" flipV="false">
+              <a:off x="4114800" y="5596127"/>
+              <a:ext cx="914400" cy="274320"/>
+            </a:xfrm>
+            <a:prstGeom prst="rect">
+              <a:avLst/>
+            </a:prstGeom>
+            <a:solidFill>
+              <a:srgbClr val="FFFFFF"/>
+            </a:solidFill>
+            <a:ln w="19050">
+              <a:solidFill>
+                <a:srgbClr val="000000"/>
+              </a:solidFill>
+            </a:ln>
+          </p:spPr>
+          <p:style>
+            <a:lnRef idx="1">
+              <a:schemeClr val="accent1"/>
+            </a:lnRef>
+            <a:fillRef idx="3">
+              <a:schemeClr val="accent1"/>
+            </a:fillRef>
+            <a:effectRef idx="2">
+              <a:schemeClr val="accent1"/>
+            </a:effectRef>
+            <a:fontRef idx="minor">
+              <a:schemeClr val="lt1"/>
+            </a:fontRef>
+          </p:style>
+          <p:txBody>
+            <a:bodyPr rtlCol="false" anchor="ctr"/>
+            <a:lstStyle/>
+            <a:p>
+              <a:pPr algn="ctr">
+                <a:defRPr sz="900">
+                  <a:solidFill>
+                    <a:srgbClr val="000000"/>
+                  </a:solidFill>
+                  <a:latin typeface="Times New Roman"/>
+                </a:defRPr>
+              </a:pPr>
+              <a:r>
+                <a:rPr/>
+                <a:t>Concat</a:t>
+              </a:r>
+              <a:endParaRPr/>
+            </a:p>
+          </p:txBody>
+        </p:sp>
+        <p:cxnSp>
+          <p:nvCxnSpPr>
+            <p:cNvPr id="157" name="Connector 72"/>
+            <p:cNvCxnSpPr/>
+            <p:nvPr/>
+          </p:nvCxnSpPr>
+          <p:spPr>
+            <a:xfrm rot="0" flipH="false" flipV="false">
+              <a:off x="4572000" y="5870447"/>
+              <a:ext cx="0" cy="109728"/>
+            </a:xfrm>
+            <a:prstGeom prst="line">
+              <a:avLst/>
+            </a:prstGeom>
+            <a:ln w="19050">
+              <a:solidFill>
+                <a:srgbClr val="000000"/>
+              </a:solidFill>
+            </a:ln>
+          </p:spPr>
+          <p:style>
+            <a:lnRef idx="2">
+              <a:schemeClr val="accent1"/>
+            </a:lnRef>
+            <a:fillRef idx="0">
+              <a:schemeClr val="accent1"/>
+            </a:fillRef>
+            <a:effectRef idx="1">
+              <a:schemeClr val="accent1"/>
+            </a:effectRef>
+            <a:fontRef idx="minor">
+              <a:schemeClr val="tx1"/>
+            </a:fontRef>
+          </p:style>
+        </p:cxnSp>
+        <p:sp>
+          <p:nvSpPr>
+            <p:cNvPr id="158" name="Rectangle 73"/>
+            <p:cNvSpPr/>
+            <p:nvPr/>
+          </p:nvSpPr>
+          <p:spPr>
+            <a:xfrm rot="0" flipH="false" flipV="false">
+              <a:off x="3794760" y="5980175"/>
+              <a:ext cx="1554480" cy="320040"/>
+            </a:xfrm>
+            <a:prstGeom prst="rect">
+              <a:avLst/>
+            </a:prstGeom>
+            <a:solidFill>
+              <a:srgbClr val="FFFFFF"/>
+            </a:solidFill>
+            <a:ln w="19050">
+              <a:solidFill>
+                <a:srgbClr val="000000"/>
+              </a:solidFill>
+            </a:ln>
+          </p:spPr>
+          <p:style>
+            <a:lnRef idx="1">
+              <a:schemeClr val="accent1"/>
+            </a:lnRef>
+            <a:fillRef idx="3">
+              <a:schemeClr val="accent1"/>
+            </a:fillRef>
+            <a:effectRef idx="2">
+              <a:schemeClr val="accent1"/>
+            </a:effectRef>
+            <a:fontRef idx="minor">
+              <a:schemeClr val="lt1"/>
+            </a:fontRef>
+          </p:style>
+          <p:txBody>
+            <a:bodyPr rtlCol="false" anchor="ctr"/>
+            <a:lstStyle/>
+            <a:p>
+              <a:pPr algn="ctr">
+                <a:defRPr sz="1000">
+                  <a:solidFill>
+                    <a:srgbClr val="000000"/>
+                  </a:solidFill>
+                  <a:latin typeface="Times New Roman"/>
+                </a:defRPr>
+              </a:pPr>
+              <a:r>
+                <a:rPr/>
+                <a:t>FC + Sigmoid</a:t>
+              </a:r>
+              <a:endParaRPr/>
+            </a:p>
+          </p:txBody>
+        </p:sp>
+        <p:sp>
+          <p:nvSpPr>
+            <p:cNvPr id="159" name="TextBox 74"/>
+            <p:cNvSpPr txBox="true"/>
+            <p:nvPr/>
+          </p:nvSpPr>
+          <p:spPr>
+            <a:xfrm rot="0" flipH="false" flipV="false">
+              <a:off x="5440679" y="6007607"/>
+              <a:ext cx="1371600" cy="228600"/>
+            </a:xfrm>
+            <a:prstGeom prst="rect">
+              <a:avLst/>
+            </a:prstGeom>
+            <a:noFill/>
+          </p:spPr>
+          <p:txBody>
+            <a:bodyPr wrap="none">
+              <a:spAutoFit/>
+            </a:bodyPr>
+            <a:lstStyle/>
+            <a:p>
+              <a:pPr>
+                <a:defRPr sz="900" i="true">
+                  <a:solidFill>
+                    <a:srgbClr val="505050"/>
+                  </a:solidFill>
+                  <a:latin typeface="Times New Roman"/>
+                </a:defRPr>
+              </a:pPr>
+              <a:r>
+                <a:rPr/>
+                <a:t>1×1×C</a:t>
+              </a:r>
+              <a:endParaRPr/>
+            </a:p>
+          </p:txBody>
+        </p:sp>
+        <p:cxnSp>
+          <p:nvCxnSpPr>
+            <p:cNvPr id="160" name="Connector 75"/>
+            <p:cNvCxnSpPr/>
+            <p:nvPr/>
+          </p:nvCxnSpPr>
+          <p:spPr>
+            <a:xfrm rot="0" flipH="false" flipV="false">
+              <a:off x="4572000" y="6300215"/>
+              <a:ext cx="0" cy="109728"/>
+            </a:xfrm>
+            <a:prstGeom prst="line">
+              <a:avLst/>
+            </a:prstGeom>
+            <a:ln w="19050">
+              <a:solidFill>
+                <a:srgbClr val="000000"/>
+              </a:solidFill>
+            </a:ln>
+          </p:spPr>
+          <p:style>
+            <a:lnRef idx="2">
+              <a:schemeClr val="accent1"/>
+            </a:lnRef>
+            <a:fillRef idx="0">
+              <a:schemeClr val="accent1"/>
+            </a:fillRef>
+            <a:effectRef idx="1">
+              <a:schemeClr val="accent1"/>
+            </a:effectRef>
+            <a:fontRef idx="minor">
+              <a:schemeClr val="tx1"/>
+            </a:fontRef>
+          </p:style>
+        </p:cxnSp>
+        <p:cxnSp>
+          <p:nvCxnSpPr>
+            <p:cNvPr id="161" name="Connector 76"/>
+            <p:cNvCxnSpPr/>
+            <p:nvPr/>
+          </p:nvCxnSpPr>
+          <p:spPr>
+            <a:xfrm rot="0" flipH="false" flipV="false">
+              <a:off x="3291840" y="4663439"/>
+              <a:ext cx="0" cy="1860804"/>
+            </a:xfrm>
+            <a:prstGeom prst="line">
+              <a:avLst/>
+            </a:prstGeom>
+            <a:ln w="19050">
+              <a:solidFill>
+                <a:srgbClr val="000000"/>
+              </a:solidFill>
+            </a:ln>
+          </p:spPr>
+          <p:style>
+            <a:lnRef idx="2">
+              <a:schemeClr val="accent1"/>
+            </a:lnRef>
+            <a:fillRef idx="0">
+              <a:schemeClr val="accent1"/>
+            </a:fillRef>
+            <a:effectRef idx="1">
+              <a:schemeClr val="accent1"/>
+            </a:effectRef>
+            <a:fontRef idx="minor">
+              <a:schemeClr val="tx1"/>
+            </a:fontRef>
+          </p:style>
+        </p:cxnSp>
+        <p:cxnSp>
+          <p:nvCxnSpPr>
+            <p:cNvPr id="162" name="Connector 77"/>
+            <p:cNvCxnSpPr/>
+            <p:nvPr/>
+          </p:nvCxnSpPr>
+          <p:spPr>
+            <a:xfrm rot="0" flipH="false" flipV="false">
+              <a:off x="3291840" y="6524243"/>
+              <a:ext cx="1165860" cy="0"/>
+            </a:xfrm>
+            <a:prstGeom prst="line">
+              <a:avLst/>
+            </a:prstGeom>
+            <a:ln w="19050">
+              <a:solidFill>
+                <a:srgbClr val="000000"/>
+              </a:solidFill>
+            </a:ln>
+          </p:spPr>
+          <p:style>
+            <a:lnRef idx="2">
+              <a:schemeClr val="accent1"/>
+            </a:lnRef>
+            <a:fillRef idx="0">
+              <a:schemeClr val="accent1"/>
+            </a:fillRef>
+            <a:effectRef idx="1">
+              <a:schemeClr val="accent1"/>
+            </a:effectRef>
+            <a:fontRef idx="minor">
+              <a:schemeClr val="tx1"/>
+            </a:fontRef>
+          </p:style>
+        </p:cxnSp>
+        <p:sp>
+          <p:nvSpPr>
+            <p:cNvPr id="163" name="Oval 78"/>
+            <p:cNvSpPr/>
+            <p:nvPr/>
+          </p:nvSpPr>
+          <p:spPr>
+            <a:xfrm rot="0" flipH="false" flipV="false">
+              <a:off x="4457700" y="6409943"/>
+              <a:ext cx="228600" cy="228600"/>
+            </a:xfrm>
+            <a:prstGeom prst="ellipse">
+              <a:avLst/>
+            </a:prstGeom>
+            <a:solidFill>
+              <a:srgbClr val="FFFFFF"/>
+            </a:solidFill>
+            <a:ln w="19050">
+              <a:solidFill>
+                <a:srgbClr val="000000"/>
+              </a:solidFill>
+            </a:ln>
+          </p:spPr>
+          <p:style>
+            <a:lnRef idx="1">
+              <a:schemeClr val="accent1"/>
+            </a:lnRef>
+            <a:fillRef idx="3">
+              <a:schemeClr val="accent1"/>
+            </a:fillRef>
+            <a:effectRef idx="2">
+              <a:schemeClr val="accent1"/>
+            </a:effectRef>
+            <a:fontRef idx="minor">
+              <a:schemeClr val="lt1"/>
+            </a:fontRef>
+          </p:style>
+          <p:txBody>
+            <a:bodyPr rtlCol="false" anchor="ctr"/>
+            <a:lstStyle/>
+            <a:p>
+              <a:pPr algn="ctr">
+                <a:defRPr sz="1200" b="true">
+                  <a:solidFill>
+                    <a:srgbClr val="000000"/>
+                  </a:solidFill>
+                </a:defRPr>
+              </a:pPr>
+              <a:r>
+                <a:rPr/>
+                <a:t>×</a:t>
+              </a:r>
+              <a:endParaRPr/>
+            </a:p>
+          </p:txBody>
+        </p:sp>
+        <p:sp>
+          <p:nvSpPr>
+            <p:cNvPr id="164" name="TextBox 79"/>
+            <p:cNvSpPr txBox="true"/>
+            <p:nvPr/>
+          </p:nvSpPr>
+          <p:spPr>
+            <a:xfrm rot="0" flipH="false" flipV="false">
+              <a:off x="4759452" y="6428231"/>
+              <a:ext cx="1371600" cy="228600"/>
+            </a:xfrm>
+            <a:prstGeom prst="rect">
+              <a:avLst/>
+            </a:prstGeom>
+            <a:noFill/>
+          </p:spPr>
+          <p:txBody>
+            <a:bodyPr wrap="none">
+              <a:spAutoFit/>
+            </a:bodyPr>
+            <a:lstStyle/>
+            <a:p>
+              <a:pPr>
+                <a:defRPr sz="1000" i="false">
+                  <a:solidFill>
+                    <a:srgbClr val="505050"/>
+                  </a:solidFill>
+                  <a:latin typeface="Times New Roman"/>
+                </a:defRPr>
+              </a:pPr>
+              <a:r>
+                <a:rPr/>
+                <a:t>Scale</a:t>
+              </a:r>
+              <a:endParaRPr/>
+            </a:p>
+          </p:txBody>
+        </p:sp>
+        <p:sp>
+          <p:nvSpPr>
+            <p:cNvPr id="165" name=""/>
+            <p:cNvSpPr/>
+            <p:nvPr/>
+          </p:nvSpPr>
+          <p:spPr>
+            <a:xfrm rot="0">
+              <a:off x="2982872" y="240974"/>
+              <a:ext cx="3126153" cy="3282461"/>
+            </a:xfrm>
+            <a:prstGeom prst="roundRect">
+              <a:avLst/>
+            </a:prstGeom>
+            <a:noFill/>
+            <a:ln w="12700">
+              <a:solidFill>
+                <a:srgbClr val="5C5C5C">
+                  <a:alpha val="100000"/>
+                </a:srgbClr>
+              </a:solidFill>
+              <a:prstDash val="sysDash"/>
+              <a:miter lim="800000"/>
+            </a:ln>
+          </p:spPr>
+          <p:txBody>
+            <a:bodyPr anchor="ctr"/>
+            <a:p>
+              <a:pPr algn="ctr"/>
+              <a:endParaRPr/>
+            </a:p>
+          </p:txBody>
+        </p:sp>
+        <p:sp>
+          <p:nvSpPr>
+            <p:cNvPr id="166" name=""/>
+            <p:cNvSpPr txBox="true"/>
+            <p:nvPr/>
+          </p:nvSpPr>
+          <p:spPr>
+            <a:xfrm rot="0" flipH="false" flipV="false">
+              <a:off x="4942840" y="274320"/>
+              <a:ext cx="863600" cy="273050"/>
+            </a:xfrm>
+            <a:prstGeom prst="rect">
+              <a:avLst/>
+            </a:prstGeom>
+            <a:ln w="6350">
+              <a:prstDash val="solid"/>
+            </a:ln>
+          </p:spPr>
+          <p:txBody>
+            <a:bodyPr wrap="square">
+              <a:spAutoFit/>
+            </a:bodyPr>
+            <a:lstStyle/>
+            <a:p>
+              <a:pPr/>
+              <a:r>
+                <a:rPr lang="zh-CN" sz="1200"/>
+                <a:t>坐标注意力</a:t>
+              </a:r>
+              <a:endParaRPr/>
+            </a:p>
+          </p:txBody>
+        </p:sp>
+        <p:sp>
+          <p:nvSpPr>
+            <p:cNvPr id="167" name=""/>
+            <p:cNvSpPr/>
+            <p:nvPr/>
+          </p:nvSpPr>
+          <p:spPr>
+            <a:xfrm rot="0" flipH="false" flipV="false">
+              <a:off x="3004247" y="4590289"/>
+              <a:ext cx="3785173" cy="2181793"/>
+            </a:xfrm>
+            <a:prstGeom prst="roundRect">
+              <a:avLst/>
+            </a:prstGeom>
+            <a:noFill/>
+            <a:ln w="12700">
+              <a:solidFill>
+                <a:srgbClr val="5C5C5C">
+                  <a:alpha val="100000"/>
+                </a:srgbClr>
+              </a:solidFill>
+              <a:prstDash val="sysDash"/>
+              <a:miter lim="800000"/>
+            </a:ln>
+          </p:spPr>
+          <p:txBody>
+            <a:bodyPr anchor="ctr"/>
+            <a:p>
+              <a:pPr algn="ctr"/>
+              <a:endParaRPr/>
+            </a:p>
+          </p:txBody>
+        </p:sp>
+      </p:grpSp>
+      <p:sp>
+        <p:nvSpPr>
+          <p:cNvPr id="168" name=""/>
+          <p:cNvSpPr txBox="true"/>
+          <p:nvPr/>
+        </p:nvSpPr>
+        <p:spPr>
+          <a:xfrm rot="0" flipH="false" flipV="false">
+            <a:off x="6193598" y="4539168"/>
+            <a:ext cx="342900" cy="393700"/>
+          </a:xfrm>
+          <a:prstGeom prst="rect">
+            <a:avLst/>
+          </a:prstGeom>
+          <a:ln w="12700">
+            <a:prstDash val="solid"/>
+          </a:ln>
+        </p:spPr>
+        <p:txBody>
+          <a:bodyPr wrap="none">
+            <a:spAutoFit/>
+          </a:bodyPr>
+          <a:p>
+            <a:pPr/>
+            <a:r>
+              <a:rPr lang="en-US" sz="1000"/>
+              <a:t>SE</a:t>
+            </a:r>
+            <a:endParaRPr/>
+          </a:p>
+          <a:p>
+            <a:pPr/>
+            <a:endParaRPr lang="en-US" sz="1000"/>
           </a:p>
         </p:txBody>
       </p:sp>
@@ -6491,7 +10014,7 @@
         <a:solidFill>
           <a:schemeClr val="phClr"/>
         </a:solidFill>
-        <a:gradFill rotWithShape="1">
+        <a:gradFill rotWithShape="true">
           <a:gsLst>
             <a:gs pos="0">
               <a:schemeClr val="phClr">
@@ -6512,9 +10035,9 @@
               </a:schemeClr>
             </a:gs>
           </a:gsLst>
-          <a:lin ang="16200000" scaled="1"/>
+          <a:lin ang="16200000" scaled="true"/>
         </a:gradFill>
-        <a:gradFill rotWithShape="1">
+        <a:gradFill rotWithShape="true">
           <a:gsLst>
             <a:gs pos="0">
               <a:schemeClr val="phClr">
@@ -6531,7 +10054,7 @@
               </a:schemeClr>
             </a:gs>
           </a:gsLst>
-          <a:lin ang="16200000" scaled="0"/>
+          <a:lin ang="16200000" scaled="false"/>
         </a:gradFill>
       </a:fillStyleLst>
       <a:lnStyleLst>
@@ -6560,7 +10083,7 @@
       <a:effectStyleLst>
         <a:effectStyle>
           <a:effectLst>
-            <a:outerShdw blurRad="40000" dist="20000" dir="5400000" rotWithShape="0">
+            <a:outerShdw blurRad="40000" dist="20000" dir="5400000" rotWithShape="false">
               <a:srgbClr val="000000">
                 <a:alpha val="38000"/>
               </a:srgbClr>
@@ -6569,7 +10092,7 @@
         </a:effectStyle>
         <a:effectStyle>
           <a:effectLst>
-            <a:outerShdw blurRad="40000" dist="23000" dir="5400000" rotWithShape="0">
+            <a:outerShdw blurRad="40000" dist="23000" dir="5400000" rotWithShape="false">
               <a:srgbClr val="000000">
                 <a:alpha val="35000"/>
               </a:srgbClr>
@@ -6578,7 +10101,7 @@
         </a:effectStyle>
         <a:effectStyle>
           <a:effectLst>
-            <a:outerShdw blurRad="40000" dist="23000" dir="5400000" rotWithShape="0">
+            <a:outerShdw blurRad="40000" dist="23000" dir="5400000" rotWithShape="false">
               <a:srgbClr val="000000">
                 <a:alpha val="35000"/>
               </a:srgbClr>
@@ -6601,7 +10124,7 @@
         <a:solidFill>
           <a:schemeClr val="phClr"/>
         </a:solidFill>
-        <a:gradFill rotWithShape="1">
+        <a:gradFill rotWithShape="true">
           <a:gsLst>
             <a:gs pos="0">
               <a:schemeClr val="phClr">
@@ -6627,7 +10150,7 @@
             <a:fillToRect l="50000" t="-80000" r="50000" b="180000"/>
           </a:path>
         </a:gradFill>
-        <a:gradFill rotWithShape="1">
+        <a:gradFill rotWithShape="true">
           <a:gsLst>
             <a:gs pos="0">
               <a:schemeClr val="phClr">
@@ -6649,46 +10172,5 @@
       </a:bgFillStyleLst>
     </a:fmtScheme>
   </a:themeElements>
-  <a:objectDefaults>
-    <a:spDef>
-      <a:spPr/>
-      <a:bodyPr/>
-      <a:lstStyle/>
-      <a:style>
-        <a:lnRef idx="1">
-          <a:schemeClr val="accent1"/>
-        </a:lnRef>
-        <a:fillRef idx="3">
-          <a:schemeClr val="accent1"/>
-        </a:fillRef>
-        <a:effectRef idx="2">
-          <a:schemeClr val="accent1"/>
-        </a:effectRef>
-        <a:fontRef idx="minor">
-          <a:schemeClr val="lt1"/>
-        </a:fontRef>
-      </a:style>
-    </a:spDef>
-    <a:lnDef>
-      <a:spPr/>
-      <a:bodyPr/>
-      <a:lstStyle/>
-      <a:style>
-        <a:lnRef idx="2">
-          <a:schemeClr val="accent1"/>
-        </a:lnRef>
-        <a:fillRef idx="0">
-          <a:schemeClr val="accent1"/>
-        </a:fillRef>
-        <a:effectRef idx="1">
-          <a:schemeClr val="accent1"/>
-        </a:effectRef>
-        <a:fontRef idx="minor">
-          <a:schemeClr val="tx1"/>
-        </a:fontRef>
-      </a:style>
-    </a:lnDef>
-  </a:objectDefaults>
-  <a:extraClrSchemeLst/>
 </a:theme>
 </file>
--- a/figure/cp4/sae_diagram/fig4-1_sae_module.pptx
+++ b/figure/cp4/sae_diagram/fig4-1_sae_module.pptx
@@ -1,12 +1,11 @@
 
 <file path=ppt/presentation.xml><?xml version="1.0" encoding="utf-8"?>
-<p:presentation xmlns:a="http://schemas.openxmlformats.org/drawingml/2006/main" xmlns:r="http://schemas.openxmlformats.org/officeDocument/2006/relationships" xmlns:p="http://schemas.openxmlformats.org/presentationml/2006/main" firstSlideNum="1">
+<p:presentation xmlns:a="http://schemas.openxmlformats.org/drawingml/2006/main" xmlns:r="http://schemas.openxmlformats.org/officeDocument/2006/relationships" xmlns:p="http://schemas.openxmlformats.org/presentationml/2006/main" saveSubsetFonts="1" autoCompressPictures="0">
   <p:sldMasterIdLst>
-    <p:sldMasterId id="2147483648" r:id="rId0"/>
+    <p:sldMasterId id="2147483648" r:id="rId1"/>
   </p:sldMasterIdLst>
   <p:sldIdLst>
-    <p:sldId id="256" r:id="rId1"/>
-    <p:sldId id="257" r:id="rId2"/>
+    <p:sldId id="256" r:id="rId7"/>
   </p:sldIdLst>
   <p:sldSz cx="9144000" cy="6858000" type="screen4x3"/>
   <p:notesSz cx="6858000" cy="9144000"/>
@@ -14,7 +13,7 @@
     <a:defPPr>
       <a:defRPr lang="en-US"/>
     </a:defPPr>
-    <a:lvl1pPr marL="0" algn="l" defTabSz="457200" rtl="false" eaLnBrk="true" latinLnBrk="false" hangingPunct="true">
+    <a:lvl1pPr marL="0" algn="l" defTabSz="457200" rtl="0" eaLnBrk="1" latinLnBrk="0" hangingPunct="1">
       <a:defRPr sz="1800" kern="1200">
         <a:solidFill>
           <a:schemeClr val="tx1"/>
@@ -24,7 +23,7 @@
         <a:cs typeface="+mn-cs"/>
       </a:defRPr>
     </a:lvl1pPr>
-    <a:lvl2pPr marL="457200" algn="l" defTabSz="457200" rtl="false" eaLnBrk="true" latinLnBrk="false" hangingPunct="true">
+    <a:lvl2pPr marL="457200" algn="l" defTabSz="457200" rtl="0" eaLnBrk="1" latinLnBrk="0" hangingPunct="1">
       <a:defRPr sz="1800" kern="1200">
         <a:solidFill>
           <a:schemeClr val="tx1"/>
@@ -34,7 +33,7 @@
         <a:cs typeface="+mn-cs"/>
       </a:defRPr>
     </a:lvl2pPr>
-    <a:lvl3pPr marL="914400" algn="l" defTabSz="457200" rtl="false" eaLnBrk="true" latinLnBrk="false" hangingPunct="true">
+    <a:lvl3pPr marL="914400" algn="l" defTabSz="457200" rtl="0" eaLnBrk="1" latinLnBrk="0" hangingPunct="1">
       <a:defRPr sz="1800" kern="1200">
         <a:solidFill>
           <a:schemeClr val="tx1"/>
@@ -44,7 +43,7 @@
         <a:cs typeface="+mn-cs"/>
       </a:defRPr>
     </a:lvl3pPr>
-    <a:lvl4pPr marL="1371600" algn="l" defTabSz="457200" rtl="false" eaLnBrk="true" latinLnBrk="false" hangingPunct="true">
+    <a:lvl4pPr marL="1371600" algn="l" defTabSz="457200" rtl="0" eaLnBrk="1" latinLnBrk="0" hangingPunct="1">
       <a:defRPr sz="1800" kern="1200">
         <a:solidFill>
           <a:schemeClr val="tx1"/>
@@ -54,7 +53,7 @@
         <a:cs typeface="+mn-cs"/>
       </a:defRPr>
     </a:lvl4pPr>
-    <a:lvl5pPr marL="1828800" algn="l" defTabSz="457200" rtl="false" eaLnBrk="true" latinLnBrk="false" hangingPunct="true">
+    <a:lvl5pPr marL="1828800" algn="l" defTabSz="457200" rtl="0" eaLnBrk="1" latinLnBrk="0" hangingPunct="1">
       <a:defRPr sz="1800" kern="1200">
         <a:solidFill>
           <a:schemeClr val="tx1"/>
@@ -64,7 +63,7 @@
         <a:cs typeface="+mn-cs"/>
       </a:defRPr>
     </a:lvl5pPr>
-    <a:lvl6pPr marL="2286000" algn="l" defTabSz="457200" rtl="false" eaLnBrk="true" latinLnBrk="false" hangingPunct="true">
+    <a:lvl6pPr marL="2286000" algn="l" defTabSz="457200" rtl="0" eaLnBrk="1" latinLnBrk="0" hangingPunct="1">
       <a:defRPr sz="1800" kern="1200">
         <a:solidFill>
           <a:schemeClr val="tx1"/>
@@ -74,7 +73,7 @@
         <a:cs typeface="+mn-cs"/>
       </a:defRPr>
     </a:lvl6pPr>
-    <a:lvl7pPr marL="2743200" algn="l" defTabSz="457200" rtl="false" eaLnBrk="true" latinLnBrk="false" hangingPunct="true">
+    <a:lvl7pPr marL="2743200" algn="l" defTabSz="457200" rtl="0" eaLnBrk="1" latinLnBrk="0" hangingPunct="1">
       <a:defRPr sz="1800" kern="1200">
         <a:solidFill>
           <a:schemeClr val="tx1"/>
@@ -84,7 +83,7 @@
         <a:cs typeface="+mn-cs"/>
       </a:defRPr>
     </a:lvl7pPr>
-    <a:lvl8pPr marL="3200400" algn="l" defTabSz="457200" rtl="false" eaLnBrk="true" latinLnBrk="false" hangingPunct="true">
+    <a:lvl8pPr marL="3200400" algn="l" defTabSz="457200" rtl="0" eaLnBrk="1" latinLnBrk="0" hangingPunct="1">
       <a:defRPr sz="1800" kern="1200">
         <a:solidFill>
           <a:schemeClr val="tx1"/>
@@ -94,7 +93,7 @@
         <a:cs typeface="+mn-cs"/>
       </a:defRPr>
     </a:lvl8pPr>
-    <a:lvl9pPr marL="3657600" algn="l" defTabSz="457200" rtl="false" eaLnBrk="true" latinLnBrk="false" hangingPunct="true">
+    <a:lvl9pPr marL="3657600" algn="l" defTabSz="457200" rtl="0" eaLnBrk="1" latinLnBrk="0" hangingPunct="1">
       <a:defRPr sz="1800" kern="1200">
         <a:solidFill>
           <a:schemeClr val="tx1"/>
@@ -109,7 +108,7 @@
 </file>
 
 <file path=ppt/slideLayouts/slideLayout1.xml><?xml version="1.0" encoding="utf-8"?>
-<p:sldLayout xmlns:a="http://schemas.openxmlformats.org/drawingml/2006/main" xmlns:p="http://schemas.openxmlformats.org/presentationml/2006/main" type="title">
+<p:sldLayout xmlns:a="http://schemas.openxmlformats.org/drawingml/2006/main" xmlns:r="http://schemas.openxmlformats.org/officeDocument/2006/relationships" xmlns:p="http://schemas.openxmlformats.org/presentationml/2006/main" type="title" preserve="1">
   <p:cSld name="Title Slide">
     <p:spTree>
       <p:nvGrpSpPr>
@@ -129,7 +128,7 @@
         <p:nvSpPr>
           <p:cNvPr id="2" name="Title 1"/>
           <p:cNvSpPr>
-            <a:spLocks noGrp="true"/>
+            <a:spLocks noGrp="1"/>
           </p:cNvSpPr>
           <p:nvPr>
             <p:ph type="ctrTitle"/>
@@ -145,9 +144,8 @@
           <a:bodyPr/>
           <a:lstStyle/>
           <a:p>
-            <a:pPr/>
-            <a:r>
-              <a:rPr lang="en-US" smtClean="false"/>
+            <a:r>
+              <a:rPr lang="en-US" smtClean="0"/>
               <a:t>Click to edit Master title style</a:t>
             </a:r>
             <a:endParaRPr lang="en-US"/>
@@ -158,7 +156,7 @@
         <p:nvSpPr>
           <p:cNvPr id="3" name="Subtitle 2"/>
           <p:cNvSpPr>
-            <a:spLocks noGrp="true"/>
+            <a:spLocks noGrp="1"/>
           </p:cNvSpPr>
           <p:nvPr>
             <p:ph type="subTitle" idx="1"/>
@@ -265,9 +263,8 @@
             </a:lvl9pPr>
           </a:lstStyle>
           <a:p>
-            <a:pPr/>
-            <a:r>
-              <a:rPr lang="en-US" smtClean="false"/>
+            <a:r>
+              <a:rPr lang="en-US" smtClean="0"/>
               <a:t>Click to edit Master subtitle style</a:t>
             </a:r>
             <a:endParaRPr lang="en-US"/>
@@ -278,7 +275,7 @@
         <p:nvSpPr>
           <p:cNvPr id="4" name="Date Placeholder 3"/>
           <p:cNvSpPr>
-            <a:spLocks noGrp="true"/>
+            <a:spLocks noGrp="1"/>
           </p:cNvSpPr>
           <p:nvPr>
             <p:ph type="dt" sz="half" idx="10"/>
@@ -289,9 +286,8 @@
           <a:bodyPr/>
           <a:lstStyle/>
           <a:p>
-            <a:pPr/>
             <a:fld id="{5BCAD085-E8A6-8845-BD4E-CB4CCA059FC4}" type="datetimeFigureOut">
-              <a:rPr lang="en-US" smtClean="false"/>
+              <a:rPr lang="en-US" smtClean="0"/>
               <a:t>1/27/13</a:t>
             </a:fld>
             <a:endParaRPr lang="en-US"/>
@@ -302,7 +298,7 @@
         <p:nvSpPr>
           <p:cNvPr id="5" name="Footer Placeholder 4"/>
           <p:cNvSpPr>
-            <a:spLocks noGrp="true"/>
+            <a:spLocks noGrp="1"/>
           </p:cNvSpPr>
           <p:nvPr>
             <p:ph type="ftr" sz="quarter" idx="11"/>
@@ -313,7 +309,6 @@
           <a:bodyPr/>
           <a:lstStyle/>
           <a:p>
-            <a:pPr/>
             <a:endParaRPr lang="en-US"/>
           </a:p>
         </p:txBody>
@@ -322,7 +317,7 @@
         <p:nvSpPr>
           <p:cNvPr id="6" name="Slide Number Placeholder 5"/>
           <p:cNvSpPr>
-            <a:spLocks noGrp="true"/>
+            <a:spLocks noGrp="1"/>
           </p:cNvSpPr>
           <p:nvPr>
             <p:ph type="sldNum" sz="quarter" idx="12"/>
@@ -333,9 +328,8 @@
           <a:bodyPr/>
           <a:lstStyle/>
           <a:p>
-            <a:pPr/>
             <a:fld id="{C1FF6DA9-008F-8B48-92A6-B652298478BF}" type="slidenum">
-              <a:rPr lang="en-US" smtClean="false"/>
+              <a:rPr lang="en-US" smtClean="0"/>
               <a:t>‹#›</a:t>
             </a:fld>
             <a:endParaRPr lang="en-US"/>
@@ -343,6 +337,11 @@
         </p:txBody>
       </p:sp>
     </p:spTree>
+    <p:extLst>
+      <p:ext uri="{BB962C8B-B14F-4D97-AF65-F5344CB8AC3E}">
+        <p14:creationId xmlns:p14="http://schemas.microsoft.com/office/powerpoint/2010/main" val="3168075583"/>
+      </p:ext>
+    </p:extLst>
   </p:cSld>
   <p:clrMapOvr>
     <a:masterClrMapping/>
@@ -351,11 +350,11 @@
 </file>
 
 <file path=ppt/slideLayouts/slideLayout10.xml><?xml version="1.0" encoding="utf-8"?>
-<p:sldLayout xmlns:a="http://schemas.openxmlformats.org/drawingml/2006/main" xmlns:p="http://schemas.openxmlformats.org/presentationml/2006/main" type="vertTx">
+<p:sldLayout xmlns:a="http://schemas.openxmlformats.org/drawingml/2006/main" xmlns:r="http://schemas.openxmlformats.org/officeDocument/2006/relationships" xmlns:p="http://schemas.openxmlformats.org/presentationml/2006/main" type="vertTx" preserve="1">
   <p:cSld name="Title and Vertical Text">
     <p:spTree>
       <p:nvGrpSpPr>
-        <p:cNvPr id="64" name=""/>
+        <p:cNvPr id="1" name=""/>
         <p:cNvGrpSpPr/>
         <p:nvPr/>
       </p:nvGrpSpPr>
@@ -369,9 +368,9 @@
       </p:grpSpPr>
       <p:sp>
         <p:nvSpPr>
-          <p:cNvPr id="65" name="Title 1"/>
+          <p:cNvPr id="2" name="Title 1"/>
           <p:cNvSpPr>
-            <a:spLocks noGrp="true"/>
+            <a:spLocks noGrp="1"/>
           </p:cNvSpPr>
           <p:nvPr>
             <p:ph type="title"/>
@@ -382,9 +381,8 @@
           <a:bodyPr/>
           <a:lstStyle/>
           <a:p>
-            <a:pPr/>
-            <a:r>
-              <a:rPr lang="en-US" smtClean="false"/>
+            <a:r>
+              <a:rPr lang="en-US" smtClean="0"/>
               <a:t>Click to edit Master title style</a:t>
             </a:r>
             <a:endParaRPr lang="en-US"/>
@@ -393,9 +391,9 @@
       </p:sp>
       <p:sp>
         <p:nvSpPr>
-          <p:cNvPr id="66" name="Vertical Text Placeholder 2"/>
+          <p:cNvPr id="3" name="Vertical Text Placeholder 2"/>
           <p:cNvSpPr>
-            <a:spLocks noGrp="true"/>
+            <a:spLocks noGrp="1"/>
           </p:cNvSpPr>
           <p:nvPr>
             <p:ph type="body" orient="vert" idx="1"/>
@@ -408,39 +406,35 @@
           <a:p>
             <a:pPr lvl="0"/>
             <a:r>
-              <a:rPr lang="en-US" smtClean="false"/>
+              <a:rPr lang="en-US" smtClean="0"/>
               <a:t>Click to edit Master text styles</a:t>
             </a:r>
-            <a:endParaRPr/>
           </a:p>
           <a:p>
             <a:pPr lvl="1"/>
             <a:r>
-              <a:rPr lang="en-US" smtClean="false"/>
+              <a:rPr lang="en-US" smtClean="0"/>
               <a:t>Second level</a:t>
             </a:r>
-            <a:endParaRPr/>
           </a:p>
           <a:p>
             <a:pPr lvl="2"/>
             <a:r>
-              <a:rPr lang="en-US" smtClean="false"/>
+              <a:rPr lang="en-US" smtClean="0"/>
               <a:t>Third level</a:t>
             </a:r>
-            <a:endParaRPr/>
           </a:p>
           <a:p>
             <a:pPr lvl="3"/>
             <a:r>
-              <a:rPr lang="en-US" smtClean="false"/>
+              <a:rPr lang="en-US" smtClean="0"/>
               <a:t>Fourth level</a:t>
             </a:r>
-            <a:endParaRPr/>
           </a:p>
           <a:p>
             <a:pPr lvl="4"/>
             <a:r>
-              <a:rPr lang="en-US" smtClean="false"/>
+              <a:rPr lang="en-US" smtClean="0"/>
               <a:t>Fifth level</a:t>
             </a:r>
             <a:endParaRPr lang="en-US"/>
@@ -449,9 +443,9 @@
       </p:sp>
       <p:sp>
         <p:nvSpPr>
-          <p:cNvPr id="67" name="Date Placeholder 3"/>
+          <p:cNvPr id="4" name="Date Placeholder 3"/>
           <p:cNvSpPr>
-            <a:spLocks noGrp="true"/>
+            <a:spLocks noGrp="1"/>
           </p:cNvSpPr>
           <p:nvPr>
             <p:ph type="dt" sz="half" idx="10"/>
@@ -462,9 +456,8 @@
           <a:bodyPr/>
           <a:lstStyle/>
           <a:p>
-            <a:pPr/>
             <a:fld id="{5BCAD085-E8A6-8845-BD4E-CB4CCA059FC4}" type="datetimeFigureOut">
-              <a:rPr lang="en-US" smtClean="false"/>
+              <a:rPr lang="en-US" smtClean="0"/>
               <a:t>1/27/13</a:t>
             </a:fld>
             <a:endParaRPr lang="en-US"/>
@@ -473,9 +466,9 @@
       </p:sp>
       <p:sp>
         <p:nvSpPr>
-          <p:cNvPr id="68" name="Footer Placeholder 4"/>
+          <p:cNvPr id="5" name="Footer Placeholder 4"/>
           <p:cNvSpPr>
-            <a:spLocks noGrp="true"/>
+            <a:spLocks noGrp="1"/>
           </p:cNvSpPr>
           <p:nvPr>
             <p:ph type="ftr" sz="quarter" idx="11"/>
@@ -486,16 +479,15 @@
           <a:bodyPr/>
           <a:lstStyle/>
           <a:p>
-            <a:pPr/>
             <a:endParaRPr lang="en-US"/>
           </a:p>
         </p:txBody>
       </p:sp>
       <p:sp>
         <p:nvSpPr>
-          <p:cNvPr id="69" name="Slide Number Placeholder 5"/>
+          <p:cNvPr id="6" name="Slide Number Placeholder 5"/>
           <p:cNvSpPr>
-            <a:spLocks noGrp="true"/>
+            <a:spLocks noGrp="1"/>
           </p:cNvSpPr>
           <p:nvPr>
             <p:ph type="sldNum" sz="quarter" idx="12"/>
@@ -506,9 +498,8 @@
           <a:bodyPr/>
           <a:lstStyle/>
           <a:p>
-            <a:pPr/>
             <a:fld id="{C1FF6DA9-008F-8B48-92A6-B652298478BF}" type="slidenum">
-              <a:rPr lang="en-US" smtClean="false"/>
+              <a:rPr lang="en-US" smtClean="0"/>
               <a:t>‹#›</a:t>
             </a:fld>
             <a:endParaRPr lang="en-US"/>
@@ -516,6 +507,11 @@
         </p:txBody>
       </p:sp>
     </p:spTree>
+    <p:extLst>
+      <p:ext uri="{BB962C8B-B14F-4D97-AF65-F5344CB8AC3E}">
+        <p14:creationId xmlns:p14="http://schemas.microsoft.com/office/powerpoint/2010/main" val="2910927964"/>
+      </p:ext>
+    </p:extLst>
   </p:cSld>
   <p:clrMapOvr>
     <a:masterClrMapping/>
@@ -524,11 +520,11 @@
 </file>
 
 <file path=ppt/slideLayouts/slideLayout11.xml><?xml version="1.0" encoding="utf-8"?>
-<p:sldLayout xmlns:a="http://schemas.openxmlformats.org/drawingml/2006/main" xmlns:p="http://schemas.openxmlformats.org/presentationml/2006/main" type="vertTitleAndTx">
+<p:sldLayout xmlns:a="http://schemas.openxmlformats.org/drawingml/2006/main" xmlns:r="http://schemas.openxmlformats.org/officeDocument/2006/relationships" xmlns:p="http://schemas.openxmlformats.org/presentationml/2006/main" type="vertTitleAndTx" preserve="1">
   <p:cSld name="Vertical Title and Text">
     <p:spTree>
       <p:nvGrpSpPr>
-        <p:cNvPr id="13" name=""/>
+        <p:cNvPr id="1" name=""/>
         <p:cNvGrpSpPr/>
         <p:nvPr/>
       </p:nvGrpSpPr>
@@ -542,9 +538,9 @@
       </p:grpSpPr>
       <p:sp>
         <p:nvSpPr>
-          <p:cNvPr id="14" name="Vertical Title 1"/>
+          <p:cNvPr id="2" name="Vertical Title 1"/>
           <p:cNvSpPr>
-            <a:spLocks noGrp="true"/>
+            <a:spLocks noGrp="1"/>
           </p:cNvSpPr>
           <p:nvPr>
             <p:ph type="title" orient="vert"/>
@@ -560,9 +556,8 @@
           <a:bodyPr vert="eaVert"/>
           <a:lstStyle/>
           <a:p>
-            <a:pPr/>
-            <a:r>
-              <a:rPr lang="en-US" smtClean="false"/>
+            <a:r>
+              <a:rPr lang="en-US" smtClean="0"/>
               <a:t>Click to edit Master title style</a:t>
             </a:r>
             <a:endParaRPr lang="en-US"/>
@@ -571,9 +566,9 @@
       </p:sp>
       <p:sp>
         <p:nvSpPr>
-          <p:cNvPr id="15" name="Vertical Text Placeholder 2"/>
+          <p:cNvPr id="3" name="Vertical Text Placeholder 2"/>
           <p:cNvSpPr>
-            <a:spLocks noGrp="true"/>
+            <a:spLocks noGrp="1"/>
           </p:cNvSpPr>
           <p:nvPr>
             <p:ph type="body" orient="vert" idx="1"/>
@@ -591,39 +586,35 @@
           <a:p>
             <a:pPr lvl="0"/>
             <a:r>
-              <a:rPr lang="en-US" smtClean="false"/>
+              <a:rPr lang="en-US" smtClean="0"/>
               <a:t>Click to edit Master text styles</a:t>
             </a:r>
-            <a:endParaRPr/>
           </a:p>
           <a:p>
             <a:pPr lvl="1"/>
             <a:r>
-              <a:rPr lang="en-US" smtClean="false"/>
+              <a:rPr lang="en-US" smtClean="0"/>
               <a:t>Second level</a:t>
             </a:r>
-            <a:endParaRPr/>
           </a:p>
           <a:p>
             <a:pPr lvl="2"/>
             <a:r>
-              <a:rPr lang="en-US" smtClean="false"/>
+              <a:rPr lang="en-US" smtClean="0"/>
               <a:t>Third level</a:t>
             </a:r>
-            <a:endParaRPr/>
           </a:p>
           <a:p>
             <a:pPr lvl="3"/>
             <a:r>
-              <a:rPr lang="en-US" smtClean="false"/>
+              <a:rPr lang="en-US" smtClean="0"/>
               <a:t>Fourth level</a:t>
             </a:r>
-            <a:endParaRPr/>
           </a:p>
           <a:p>
             <a:pPr lvl="4"/>
             <a:r>
-              <a:rPr lang="en-US" smtClean="false"/>
+              <a:rPr lang="en-US" smtClean="0"/>
               <a:t>Fifth level</a:t>
             </a:r>
             <a:endParaRPr lang="en-US"/>
@@ -632,9 +623,9 @@
       </p:sp>
       <p:sp>
         <p:nvSpPr>
-          <p:cNvPr id="16" name="Date Placeholder 3"/>
+          <p:cNvPr id="4" name="Date Placeholder 3"/>
           <p:cNvSpPr>
-            <a:spLocks noGrp="true"/>
+            <a:spLocks noGrp="1"/>
           </p:cNvSpPr>
           <p:nvPr>
             <p:ph type="dt" sz="half" idx="10"/>
@@ -645,9 +636,8 @@
           <a:bodyPr/>
           <a:lstStyle/>
           <a:p>
-            <a:pPr/>
             <a:fld id="{5BCAD085-E8A6-8845-BD4E-CB4CCA059FC4}" type="datetimeFigureOut">
-              <a:rPr lang="en-US" smtClean="false"/>
+              <a:rPr lang="en-US" smtClean="0"/>
               <a:t>1/27/13</a:t>
             </a:fld>
             <a:endParaRPr lang="en-US"/>
@@ -656,9 +646,9 @@
       </p:sp>
       <p:sp>
         <p:nvSpPr>
-          <p:cNvPr id="17" name="Footer Placeholder 4"/>
+          <p:cNvPr id="5" name="Footer Placeholder 4"/>
           <p:cNvSpPr>
-            <a:spLocks noGrp="true"/>
+            <a:spLocks noGrp="1"/>
           </p:cNvSpPr>
           <p:nvPr>
             <p:ph type="ftr" sz="quarter" idx="11"/>
@@ -669,16 +659,15 @@
           <a:bodyPr/>
           <a:lstStyle/>
           <a:p>
-            <a:pPr/>
             <a:endParaRPr lang="en-US"/>
           </a:p>
         </p:txBody>
       </p:sp>
       <p:sp>
         <p:nvSpPr>
-          <p:cNvPr id="18" name="Slide Number Placeholder 5"/>
+          <p:cNvPr id="6" name="Slide Number Placeholder 5"/>
           <p:cNvSpPr>
-            <a:spLocks noGrp="true"/>
+            <a:spLocks noGrp="1"/>
           </p:cNvSpPr>
           <p:nvPr>
             <p:ph type="sldNum" sz="quarter" idx="12"/>
@@ -689,9 +678,8 @@
           <a:bodyPr/>
           <a:lstStyle/>
           <a:p>
-            <a:pPr/>
             <a:fld id="{C1FF6DA9-008F-8B48-92A6-B652298478BF}" type="slidenum">
-              <a:rPr lang="en-US" smtClean="false"/>
+              <a:rPr lang="en-US" smtClean="0"/>
               <a:t>‹#›</a:t>
             </a:fld>
             <a:endParaRPr lang="en-US"/>
@@ -699,6 +687,11 @@
         </p:txBody>
       </p:sp>
     </p:spTree>
+    <p:extLst>
+      <p:ext uri="{BB962C8B-B14F-4D97-AF65-F5344CB8AC3E}">
+        <p14:creationId xmlns:p14="http://schemas.microsoft.com/office/powerpoint/2010/main" val="3612223792"/>
+      </p:ext>
+    </p:extLst>
   </p:cSld>
   <p:clrMapOvr>
     <a:masterClrMapping/>
@@ -707,11 +700,11 @@
 </file>
 
 <file path=ppt/slideLayouts/slideLayout2.xml><?xml version="1.0" encoding="utf-8"?>
-<p:sldLayout xmlns:a="http://schemas.openxmlformats.org/drawingml/2006/main" xmlns:p="http://schemas.openxmlformats.org/presentationml/2006/main" type="obj">
+<p:sldLayout xmlns:a="http://schemas.openxmlformats.org/drawingml/2006/main" xmlns:r="http://schemas.openxmlformats.org/officeDocument/2006/relationships" xmlns:p="http://schemas.openxmlformats.org/presentationml/2006/main" type="obj" preserve="1">
   <p:cSld name="Title and Content">
     <p:spTree>
       <p:nvGrpSpPr>
-        <p:cNvPr id="7" name=""/>
+        <p:cNvPr id="1" name=""/>
         <p:cNvGrpSpPr/>
         <p:nvPr/>
       </p:nvGrpSpPr>
@@ -725,9 +718,9 @@
       </p:grpSpPr>
       <p:sp>
         <p:nvSpPr>
-          <p:cNvPr id="8" name="Title 1"/>
+          <p:cNvPr id="2" name="Title 1"/>
           <p:cNvSpPr>
-            <a:spLocks noGrp="true"/>
+            <a:spLocks noGrp="1"/>
           </p:cNvSpPr>
           <p:nvPr>
             <p:ph type="title"/>
@@ -738,9 +731,8 @@
           <a:bodyPr/>
           <a:lstStyle/>
           <a:p>
-            <a:pPr/>
-            <a:r>
-              <a:rPr lang="en-US" smtClean="false"/>
+            <a:r>
+              <a:rPr lang="en-US" smtClean="0"/>
               <a:t>Click to edit Master title style</a:t>
             </a:r>
             <a:endParaRPr lang="en-US"/>
@@ -749,9 +741,9 @@
       </p:sp>
       <p:sp>
         <p:nvSpPr>
-          <p:cNvPr id="9" name="Content Placeholder 2"/>
+          <p:cNvPr id="3" name="Content Placeholder 2"/>
           <p:cNvSpPr>
-            <a:spLocks noGrp="true"/>
+            <a:spLocks noGrp="1"/>
           </p:cNvSpPr>
           <p:nvPr>
             <p:ph idx="1"/>
@@ -764,39 +756,35 @@
           <a:p>
             <a:pPr lvl="0"/>
             <a:r>
-              <a:rPr lang="en-US" smtClean="false"/>
+              <a:rPr lang="en-US" smtClean="0"/>
               <a:t>Click to edit Master text styles</a:t>
             </a:r>
-            <a:endParaRPr/>
           </a:p>
           <a:p>
             <a:pPr lvl="1"/>
             <a:r>
-              <a:rPr lang="en-US" smtClean="false"/>
+              <a:rPr lang="en-US" smtClean="0"/>
               <a:t>Second level</a:t>
             </a:r>
-            <a:endParaRPr/>
           </a:p>
           <a:p>
             <a:pPr lvl="2"/>
             <a:r>
-              <a:rPr lang="en-US" smtClean="false"/>
+              <a:rPr lang="en-US" smtClean="0"/>
               <a:t>Third level</a:t>
             </a:r>
-            <a:endParaRPr/>
           </a:p>
           <a:p>
             <a:pPr lvl="3"/>
             <a:r>
-              <a:rPr lang="en-US" smtClean="false"/>
+              <a:rPr lang="en-US" smtClean="0"/>
               <a:t>Fourth level</a:t>
             </a:r>
-            <a:endParaRPr/>
           </a:p>
           <a:p>
             <a:pPr lvl="4"/>
             <a:r>
-              <a:rPr lang="en-US" smtClean="false"/>
+              <a:rPr lang="en-US" smtClean="0"/>
               <a:t>Fifth level</a:t>
             </a:r>
             <a:endParaRPr lang="en-US"/>
@@ -805,9 +793,9 @@
       </p:sp>
       <p:sp>
         <p:nvSpPr>
-          <p:cNvPr id="10" name="Date Placeholder 3"/>
+          <p:cNvPr id="4" name="Date Placeholder 3"/>
           <p:cNvSpPr>
-            <a:spLocks noGrp="true"/>
+            <a:spLocks noGrp="1"/>
           </p:cNvSpPr>
           <p:nvPr>
             <p:ph type="dt" sz="half" idx="10"/>
@@ -818,9 +806,8 @@
           <a:bodyPr/>
           <a:lstStyle/>
           <a:p>
-            <a:pPr/>
             <a:fld id="{5BCAD085-E8A6-8845-BD4E-CB4CCA059FC4}" type="datetimeFigureOut">
-              <a:rPr lang="en-US" smtClean="false"/>
+              <a:rPr lang="en-US" smtClean="0"/>
               <a:t>1/27/13</a:t>
             </a:fld>
             <a:endParaRPr lang="en-US"/>
@@ -829,9 +816,9 @@
       </p:sp>
       <p:sp>
         <p:nvSpPr>
-          <p:cNvPr id="11" name="Footer Placeholder 4"/>
+          <p:cNvPr id="5" name="Footer Placeholder 4"/>
           <p:cNvSpPr>
-            <a:spLocks noGrp="true"/>
+            <a:spLocks noGrp="1"/>
           </p:cNvSpPr>
           <p:nvPr>
             <p:ph type="ftr" sz="quarter" idx="11"/>
@@ -842,16 +829,15 @@
           <a:bodyPr/>
           <a:lstStyle/>
           <a:p>
-            <a:pPr/>
             <a:endParaRPr lang="en-US"/>
           </a:p>
         </p:txBody>
       </p:sp>
       <p:sp>
         <p:nvSpPr>
-          <p:cNvPr id="12" name="Slide Number Placeholder 5"/>
+          <p:cNvPr id="6" name="Slide Number Placeholder 5"/>
           <p:cNvSpPr>
-            <a:spLocks noGrp="true"/>
+            <a:spLocks noGrp="1"/>
           </p:cNvSpPr>
           <p:nvPr>
             <p:ph type="sldNum" sz="quarter" idx="12"/>
@@ -862,9 +848,8 @@
           <a:bodyPr/>
           <a:lstStyle/>
           <a:p>
-            <a:pPr/>
             <a:fld id="{C1FF6DA9-008F-8B48-92A6-B652298478BF}" type="slidenum">
-              <a:rPr lang="en-US" smtClean="false"/>
+              <a:rPr lang="en-US" smtClean="0"/>
               <a:t>‹#›</a:t>
             </a:fld>
             <a:endParaRPr lang="en-US"/>
@@ -872,6 +857,11 @@
         </p:txBody>
       </p:sp>
     </p:spTree>
+    <p:extLst>
+      <p:ext uri="{BB962C8B-B14F-4D97-AF65-F5344CB8AC3E}">
+        <p14:creationId xmlns:p14="http://schemas.microsoft.com/office/powerpoint/2010/main" val="2614314258"/>
+      </p:ext>
+    </p:extLst>
   </p:cSld>
   <p:clrMapOvr>
     <a:masterClrMapping/>
@@ -880,11 +870,11 @@
 </file>
 
 <file path=ppt/slideLayouts/slideLayout3.xml><?xml version="1.0" encoding="utf-8"?>
-<p:sldLayout xmlns:a="http://schemas.openxmlformats.org/drawingml/2006/main" xmlns:p="http://schemas.openxmlformats.org/presentationml/2006/main" type="secHead">
+<p:sldLayout xmlns:a="http://schemas.openxmlformats.org/drawingml/2006/main" xmlns:r="http://schemas.openxmlformats.org/officeDocument/2006/relationships" xmlns:p="http://schemas.openxmlformats.org/presentationml/2006/main" type="secHead" preserve="1">
   <p:cSld name="Section Header">
     <p:spTree>
       <p:nvGrpSpPr>
-        <p:cNvPr id="19" name=""/>
+        <p:cNvPr id="1" name=""/>
         <p:cNvGrpSpPr/>
         <p:nvPr/>
       </p:nvGrpSpPr>
@@ -898,9 +888,9 @@
       </p:grpSpPr>
       <p:sp>
         <p:nvSpPr>
-          <p:cNvPr id="20" name="Title 1"/>
+          <p:cNvPr id="2" name="Title 1"/>
           <p:cNvSpPr>
-            <a:spLocks noGrp="true"/>
+            <a:spLocks noGrp="1"/>
           </p:cNvSpPr>
           <p:nvPr>
             <p:ph type="title"/>
@@ -916,13 +906,12 @@
           <a:bodyPr anchor="t"/>
           <a:lstStyle>
             <a:lvl1pPr algn="l">
-              <a:defRPr sz="4000" b="true" cap="all"/>
+              <a:defRPr sz="4000" b="1" cap="all"/>
             </a:lvl1pPr>
           </a:lstStyle>
           <a:p>
-            <a:pPr/>
-            <a:r>
-              <a:rPr lang="en-US" smtClean="false"/>
+            <a:r>
+              <a:rPr lang="en-US" smtClean="0"/>
               <a:t>Click to edit Master title style</a:t>
             </a:r>
             <a:endParaRPr lang="en-US"/>
@@ -931,9 +920,9 @@
       </p:sp>
       <p:sp>
         <p:nvSpPr>
-          <p:cNvPr id="21" name="Text Placeholder 2"/>
+          <p:cNvPr id="3" name="Text Placeholder 2"/>
           <p:cNvSpPr>
-            <a:spLocks noGrp="true"/>
+            <a:spLocks noGrp="1"/>
           </p:cNvSpPr>
           <p:nvPr>
             <p:ph type="body" idx="1"/>
@@ -1042,18 +1031,17 @@
           <a:p>
             <a:pPr lvl="0"/>
             <a:r>
-              <a:rPr lang="en-US" smtClean="false"/>
+              <a:rPr lang="en-US" smtClean="0"/>
               <a:t>Click to edit Master text styles</a:t>
             </a:r>
-            <a:endParaRPr/>
-          </a:p>
-        </p:txBody>
-      </p:sp>
-      <p:sp>
-        <p:nvSpPr>
-          <p:cNvPr id="22" name="Date Placeholder 3"/>
+          </a:p>
+        </p:txBody>
+      </p:sp>
+      <p:sp>
+        <p:nvSpPr>
+          <p:cNvPr id="4" name="Date Placeholder 3"/>
           <p:cNvSpPr>
-            <a:spLocks noGrp="true"/>
+            <a:spLocks noGrp="1"/>
           </p:cNvSpPr>
           <p:nvPr>
             <p:ph type="dt" sz="half" idx="10"/>
@@ -1064,9 +1052,8 @@
           <a:bodyPr/>
           <a:lstStyle/>
           <a:p>
-            <a:pPr/>
             <a:fld id="{5BCAD085-E8A6-8845-BD4E-CB4CCA059FC4}" type="datetimeFigureOut">
-              <a:rPr lang="en-US" smtClean="false"/>
+              <a:rPr lang="en-US" smtClean="0"/>
               <a:t>1/27/13</a:t>
             </a:fld>
             <a:endParaRPr lang="en-US"/>
@@ -1075,9 +1062,9 @@
       </p:sp>
       <p:sp>
         <p:nvSpPr>
-          <p:cNvPr id="23" name="Footer Placeholder 4"/>
+          <p:cNvPr id="5" name="Footer Placeholder 4"/>
           <p:cNvSpPr>
-            <a:spLocks noGrp="true"/>
+            <a:spLocks noGrp="1"/>
           </p:cNvSpPr>
           <p:nvPr>
             <p:ph type="ftr" sz="quarter" idx="11"/>
@@ -1088,16 +1075,15 @@
           <a:bodyPr/>
           <a:lstStyle/>
           <a:p>
-            <a:pPr/>
             <a:endParaRPr lang="en-US"/>
           </a:p>
         </p:txBody>
       </p:sp>
       <p:sp>
         <p:nvSpPr>
-          <p:cNvPr id="24" name="Slide Number Placeholder 5"/>
+          <p:cNvPr id="6" name="Slide Number Placeholder 5"/>
           <p:cNvSpPr>
-            <a:spLocks noGrp="true"/>
+            <a:spLocks noGrp="1"/>
           </p:cNvSpPr>
           <p:nvPr>
             <p:ph type="sldNum" sz="quarter" idx="12"/>
@@ -1108,9 +1094,8 @@
           <a:bodyPr/>
           <a:lstStyle/>
           <a:p>
-            <a:pPr/>
             <a:fld id="{C1FF6DA9-008F-8B48-92A6-B652298478BF}" type="slidenum">
-              <a:rPr lang="en-US" smtClean="false"/>
+              <a:rPr lang="en-US" smtClean="0"/>
               <a:t>‹#›</a:t>
             </a:fld>
             <a:endParaRPr lang="en-US"/>
@@ -1118,6 +1103,11 @@
         </p:txBody>
       </p:sp>
     </p:spTree>
+    <p:extLst>
+      <p:ext uri="{BB962C8B-B14F-4D97-AF65-F5344CB8AC3E}">
+        <p14:creationId xmlns:p14="http://schemas.microsoft.com/office/powerpoint/2010/main" val="960648375"/>
+      </p:ext>
+    </p:extLst>
   </p:cSld>
   <p:clrMapOvr>
     <a:masterClrMapping/>
@@ -1126,11 +1116,11 @@
 </file>
 
 <file path=ppt/slideLayouts/slideLayout4.xml><?xml version="1.0" encoding="utf-8"?>
-<p:sldLayout xmlns:a="http://schemas.openxmlformats.org/drawingml/2006/main" xmlns:p="http://schemas.openxmlformats.org/presentationml/2006/main" type="twoObj">
+<p:sldLayout xmlns:a="http://schemas.openxmlformats.org/drawingml/2006/main" xmlns:r="http://schemas.openxmlformats.org/officeDocument/2006/relationships" xmlns:p="http://schemas.openxmlformats.org/presentationml/2006/main" type="twoObj" preserve="1">
   <p:cSld name="Two Content">
     <p:spTree>
       <p:nvGrpSpPr>
-        <p:cNvPr id="25" name=""/>
+        <p:cNvPr id="1" name=""/>
         <p:cNvGrpSpPr/>
         <p:nvPr/>
       </p:nvGrpSpPr>
@@ -1144,9 +1134,9 @@
       </p:grpSpPr>
       <p:sp>
         <p:nvSpPr>
-          <p:cNvPr id="26" name="Title 1"/>
+          <p:cNvPr id="2" name="Title 1"/>
           <p:cNvSpPr>
-            <a:spLocks noGrp="true"/>
+            <a:spLocks noGrp="1"/>
           </p:cNvSpPr>
           <p:nvPr>
             <p:ph type="title"/>
@@ -1157,9 +1147,8 @@
           <a:bodyPr/>
           <a:lstStyle/>
           <a:p>
-            <a:pPr/>
-            <a:r>
-              <a:rPr lang="en-US" smtClean="false"/>
+            <a:r>
+              <a:rPr lang="en-US" smtClean="0"/>
               <a:t>Click to edit Master title style</a:t>
             </a:r>
             <a:endParaRPr lang="en-US"/>
@@ -1168,9 +1157,9 @@
       </p:sp>
       <p:sp>
         <p:nvSpPr>
-          <p:cNvPr id="27" name="Content Placeholder 2"/>
+          <p:cNvPr id="3" name="Content Placeholder 2"/>
           <p:cNvSpPr>
-            <a:spLocks noGrp="true"/>
+            <a:spLocks noGrp="1"/>
           </p:cNvSpPr>
           <p:nvPr>
             <p:ph sz="half" idx="1"/>
@@ -1216,39 +1205,35 @@
           <a:p>
             <a:pPr lvl="0"/>
             <a:r>
-              <a:rPr lang="en-US" smtClean="false"/>
+              <a:rPr lang="en-US" smtClean="0"/>
               <a:t>Click to edit Master text styles</a:t>
             </a:r>
-            <a:endParaRPr/>
           </a:p>
           <a:p>
             <a:pPr lvl="1"/>
             <a:r>
-              <a:rPr lang="en-US" smtClean="false"/>
+              <a:rPr lang="en-US" smtClean="0"/>
               <a:t>Second level</a:t>
             </a:r>
-            <a:endParaRPr/>
           </a:p>
           <a:p>
             <a:pPr lvl="2"/>
             <a:r>
-              <a:rPr lang="en-US" smtClean="false"/>
+              <a:rPr lang="en-US" smtClean="0"/>
               <a:t>Third level</a:t>
             </a:r>
-            <a:endParaRPr/>
           </a:p>
           <a:p>
             <a:pPr lvl="3"/>
             <a:r>
-              <a:rPr lang="en-US" smtClean="false"/>
+              <a:rPr lang="en-US" smtClean="0"/>
               <a:t>Fourth level</a:t>
             </a:r>
-            <a:endParaRPr/>
           </a:p>
           <a:p>
             <a:pPr lvl="4"/>
             <a:r>
-              <a:rPr lang="en-US" smtClean="false"/>
+              <a:rPr lang="en-US" smtClean="0"/>
               <a:t>Fifth level</a:t>
             </a:r>
             <a:endParaRPr lang="en-US"/>
@@ -1257,9 +1242,9 @@
       </p:sp>
       <p:sp>
         <p:nvSpPr>
-          <p:cNvPr id="28" name="Content Placeholder 3"/>
+          <p:cNvPr id="4" name="Content Placeholder 3"/>
           <p:cNvSpPr>
-            <a:spLocks noGrp="true"/>
+            <a:spLocks noGrp="1"/>
           </p:cNvSpPr>
           <p:nvPr>
             <p:ph sz="half" idx="2"/>
@@ -1305,39 +1290,35 @@
           <a:p>
             <a:pPr lvl="0"/>
             <a:r>
-              <a:rPr lang="en-US" smtClean="false"/>
+              <a:rPr lang="en-US" smtClean="0"/>
               <a:t>Click to edit Master text styles</a:t>
             </a:r>
-            <a:endParaRPr/>
           </a:p>
           <a:p>
             <a:pPr lvl="1"/>
             <a:r>
-              <a:rPr lang="en-US" smtClean="false"/>
+              <a:rPr lang="en-US" smtClean="0"/>
               <a:t>Second level</a:t>
             </a:r>
-            <a:endParaRPr/>
           </a:p>
           <a:p>
             <a:pPr lvl="2"/>
             <a:r>
-              <a:rPr lang="en-US" smtClean="false"/>
+              <a:rPr lang="en-US" smtClean="0"/>
               <a:t>Third level</a:t>
             </a:r>
-            <a:endParaRPr/>
           </a:p>
           <a:p>
             <a:pPr lvl="3"/>
             <a:r>
-              <a:rPr lang="en-US" smtClean="false"/>
+              <a:rPr lang="en-US" smtClean="0"/>
               <a:t>Fourth level</a:t>
             </a:r>
-            <a:endParaRPr/>
           </a:p>
           <a:p>
             <a:pPr lvl="4"/>
             <a:r>
-              <a:rPr lang="en-US" smtClean="false"/>
+              <a:rPr lang="en-US" smtClean="0"/>
               <a:t>Fifth level</a:t>
             </a:r>
             <a:endParaRPr lang="en-US"/>
@@ -1346,9 +1327,9 @@
       </p:sp>
       <p:sp>
         <p:nvSpPr>
-          <p:cNvPr id="29" name="Date Placeholder 4"/>
+          <p:cNvPr id="5" name="Date Placeholder 4"/>
           <p:cNvSpPr>
-            <a:spLocks noGrp="true"/>
+            <a:spLocks noGrp="1"/>
           </p:cNvSpPr>
           <p:nvPr>
             <p:ph type="dt" sz="half" idx="10"/>
@@ -1359,9 +1340,8 @@
           <a:bodyPr/>
           <a:lstStyle/>
           <a:p>
-            <a:pPr/>
             <a:fld id="{5BCAD085-E8A6-8845-BD4E-CB4CCA059FC4}" type="datetimeFigureOut">
-              <a:rPr lang="en-US" smtClean="false"/>
+              <a:rPr lang="en-US" smtClean="0"/>
               <a:t>1/27/13</a:t>
             </a:fld>
             <a:endParaRPr lang="en-US"/>
@@ -1370,9 +1350,9 @@
       </p:sp>
       <p:sp>
         <p:nvSpPr>
-          <p:cNvPr id="30" name="Footer Placeholder 5"/>
+          <p:cNvPr id="6" name="Footer Placeholder 5"/>
           <p:cNvSpPr>
-            <a:spLocks noGrp="true"/>
+            <a:spLocks noGrp="1"/>
           </p:cNvSpPr>
           <p:nvPr>
             <p:ph type="ftr" sz="quarter" idx="11"/>
@@ -1383,16 +1363,15 @@
           <a:bodyPr/>
           <a:lstStyle/>
           <a:p>
-            <a:pPr/>
             <a:endParaRPr lang="en-US"/>
           </a:p>
         </p:txBody>
       </p:sp>
       <p:sp>
         <p:nvSpPr>
-          <p:cNvPr id="31" name="Slide Number Placeholder 6"/>
+          <p:cNvPr id="7" name="Slide Number Placeholder 6"/>
           <p:cNvSpPr>
-            <a:spLocks noGrp="true"/>
+            <a:spLocks noGrp="1"/>
           </p:cNvSpPr>
           <p:nvPr>
             <p:ph type="sldNum" sz="quarter" idx="12"/>
@@ -1403,9 +1382,8 @@
           <a:bodyPr/>
           <a:lstStyle/>
           <a:p>
-            <a:pPr/>
             <a:fld id="{C1FF6DA9-008F-8B48-92A6-B652298478BF}" type="slidenum">
-              <a:rPr lang="en-US" smtClean="false"/>
+              <a:rPr lang="en-US" smtClean="0"/>
               <a:t>‹#›</a:t>
             </a:fld>
             <a:endParaRPr lang="en-US"/>
@@ -1413,6 +1391,11 @@
         </p:txBody>
       </p:sp>
     </p:spTree>
+    <p:extLst>
+      <p:ext uri="{BB962C8B-B14F-4D97-AF65-F5344CB8AC3E}">
+        <p14:creationId xmlns:p14="http://schemas.microsoft.com/office/powerpoint/2010/main" val="2782244947"/>
+      </p:ext>
+    </p:extLst>
   </p:cSld>
   <p:clrMapOvr>
     <a:masterClrMapping/>
@@ -1421,11 +1404,11 @@
 </file>
 
 <file path=ppt/slideLayouts/slideLayout5.xml><?xml version="1.0" encoding="utf-8"?>
-<p:sldLayout xmlns:a="http://schemas.openxmlformats.org/drawingml/2006/main" xmlns:p="http://schemas.openxmlformats.org/presentationml/2006/main" type="twoTxTwoObj">
+<p:sldLayout xmlns:a="http://schemas.openxmlformats.org/drawingml/2006/main" xmlns:r="http://schemas.openxmlformats.org/officeDocument/2006/relationships" xmlns:p="http://schemas.openxmlformats.org/presentationml/2006/main" type="twoTxTwoObj" preserve="1">
   <p:cSld name="Comparison">
     <p:spTree>
       <p:nvGrpSpPr>
-        <p:cNvPr id="32" name=""/>
+        <p:cNvPr id="1" name=""/>
         <p:cNvGrpSpPr/>
         <p:nvPr/>
       </p:nvGrpSpPr>
@@ -1439,9 +1422,9 @@
       </p:grpSpPr>
       <p:sp>
         <p:nvSpPr>
-          <p:cNvPr id="33" name="Title 1"/>
+          <p:cNvPr id="2" name="Title 1"/>
           <p:cNvSpPr>
-            <a:spLocks noGrp="true"/>
+            <a:spLocks noGrp="1"/>
           </p:cNvSpPr>
           <p:nvPr>
             <p:ph type="title"/>
@@ -1456,9 +1439,8 @@
             </a:lvl1pPr>
           </a:lstStyle>
           <a:p>
-            <a:pPr/>
-            <a:r>
-              <a:rPr lang="en-US" smtClean="false"/>
+            <a:r>
+              <a:rPr lang="en-US" smtClean="0"/>
               <a:t>Click to edit Master title style</a:t>
             </a:r>
             <a:endParaRPr lang="en-US"/>
@@ -1467,9 +1449,9 @@
       </p:sp>
       <p:sp>
         <p:nvSpPr>
-          <p:cNvPr id="34" name="Text Placeholder 2"/>
+          <p:cNvPr id="3" name="Text Placeholder 2"/>
           <p:cNvSpPr>
-            <a:spLocks noGrp="true"/>
+            <a:spLocks noGrp="1"/>
           </p:cNvSpPr>
           <p:nvPr>
             <p:ph type="body" idx="1"/>
@@ -1486,56 +1468,55 @@
           <a:lstStyle>
             <a:lvl1pPr marL="0" indent="0">
               <a:buNone/>
-              <a:defRPr sz="2400" b="true"/>
+              <a:defRPr sz="2400" b="1"/>
             </a:lvl1pPr>
             <a:lvl2pPr marL="457200" indent="0">
               <a:buNone/>
-              <a:defRPr sz="2000" b="true"/>
+              <a:defRPr sz="2000" b="1"/>
             </a:lvl2pPr>
             <a:lvl3pPr marL="914400" indent="0">
               <a:buNone/>
-              <a:defRPr sz="1800" b="true"/>
+              <a:defRPr sz="1800" b="1"/>
             </a:lvl3pPr>
             <a:lvl4pPr marL="1371600" indent="0">
               <a:buNone/>
-              <a:defRPr sz="1600" b="true"/>
+              <a:defRPr sz="1600" b="1"/>
             </a:lvl4pPr>
             <a:lvl5pPr marL="1828800" indent="0">
               <a:buNone/>
-              <a:defRPr sz="1600" b="true"/>
+              <a:defRPr sz="1600" b="1"/>
             </a:lvl5pPr>
             <a:lvl6pPr marL="2286000" indent="0">
               <a:buNone/>
-              <a:defRPr sz="1600" b="true"/>
+              <a:defRPr sz="1600" b="1"/>
             </a:lvl6pPr>
             <a:lvl7pPr marL="2743200" indent="0">
               <a:buNone/>
-              <a:defRPr sz="1600" b="true"/>
+              <a:defRPr sz="1600" b="1"/>
             </a:lvl7pPr>
             <a:lvl8pPr marL="3200400" indent="0">
               <a:buNone/>
-              <a:defRPr sz="1600" b="true"/>
+              <a:defRPr sz="1600" b="1"/>
             </a:lvl8pPr>
             <a:lvl9pPr marL="3657600" indent="0">
               <a:buNone/>
-              <a:defRPr sz="1600" b="true"/>
+              <a:defRPr sz="1600" b="1"/>
             </a:lvl9pPr>
           </a:lstStyle>
           <a:p>
             <a:pPr lvl="0"/>
             <a:r>
-              <a:rPr lang="en-US" smtClean="false"/>
+              <a:rPr lang="en-US" smtClean="0"/>
               <a:t>Click to edit Master text styles</a:t>
             </a:r>
-            <a:endParaRPr/>
-          </a:p>
-        </p:txBody>
-      </p:sp>
-      <p:sp>
-        <p:nvSpPr>
-          <p:cNvPr id="35" name="Content Placeholder 3"/>
+          </a:p>
+        </p:txBody>
+      </p:sp>
+      <p:sp>
+        <p:nvSpPr>
+          <p:cNvPr id="4" name="Content Placeholder 3"/>
           <p:cNvSpPr>
-            <a:spLocks noGrp="true"/>
+            <a:spLocks noGrp="1"/>
           </p:cNvSpPr>
           <p:nvPr>
             <p:ph sz="half" idx="2"/>
@@ -1581,39 +1562,35 @@
           <a:p>
             <a:pPr lvl="0"/>
             <a:r>
-              <a:rPr lang="en-US" smtClean="false"/>
+              <a:rPr lang="en-US" smtClean="0"/>
               <a:t>Click to edit Master text styles</a:t>
             </a:r>
-            <a:endParaRPr/>
           </a:p>
           <a:p>
             <a:pPr lvl="1"/>
             <a:r>
-              <a:rPr lang="en-US" smtClean="false"/>
+              <a:rPr lang="en-US" smtClean="0"/>
               <a:t>Second level</a:t>
             </a:r>
-            <a:endParaRPr/>
           </a:p>
           <a:p>
             <a:pPr lvl="2"/>
             <a:r>
-              <a:rPr lang="en-US" smtClean="false"/>
+              <a:rPr lang="en-US" smtClean="0"/>
               <a:t>Third level</a:t>
             </a:r>
-            <a:endParaRPr/>
           </a:p>
           <a:p>
             <a:pPr lvl="3"/>
             <a:r>
-              <a:rPr lang="en-US" smtClean="false"/>
+              <a:rPr lang="en-US" smtClean="0"/>
               <a:t>Fourth level</a:t>
             </a:r>
-            <a:endParaRPr/>
           </a:p>
           <a:p>
             <a:pPr lvl="4"/>
             <a:r>
-              <a:rPr lang="en-US" smtClean="false"/>
+              <a:rPr lang="en-US" smtClean="0"/>
               <a:t>Fifth level</a:t>
             </a:r>
             <a:endParaRPr lang="en-US"/>
@@ -1622,9 +1599,9 @@
       </p:sp>
       <p:sp>
         <p:nvSpPr>
-          <p:cNvPr id="36" name="Text Placeholder 4"/>
+          <p:cNvPr id="5" name="Text Placeholder 4"/>
           <p:cNvSpPr>
-            <a:spLocks noGrp="true"/>
+            <a:spLocks noGrp="1"/>
           </p:cNvSpPr>
           <p:nvPr>
             <p:ph type="body" sz="quarter" idx="3"/>
@@ -1641,56 +1618,55 @@
           <a:lstStyle>
             <a:lvl1pPr marL="0" indent="0">
               <a:buNone/>
-              <a:defRPr sz="2400" b="true"/>
+              <a:defRPr sz="2400" b="1"/>
             </a:lvl1pPr>
             <a:lvl2pPr marL="457200" indent="0">
               <a:buNone/>
-              <a:defRPr sz="2000" b="true"/>
+              <a:defRPr sz="2000" b="1"/>
             </a:lvl2pPr>
             <a:lvl3pPr marL="914400" indent="0">
               <a:buNone/>
-              <a:defRPr sz="1800" b="true"/>
+              <a:defRPr sz="1800" b="1"/>
             </a:lvl3pPr>
             <a:lvl4pPr marL="1371600" indent="0">
               <a:buNone/>
-              <a:defRPr sz="1600" b="true"/>
+              <a:defRPr sz="1600" b="1"/>
             </a:lvl4pPr>
             <a:lvl5pPr marL="1828800" indent="0">
               <a:buNone/>
-              <a:defRPr sz="1600" b="true"/>
+              <a:defRPr sz="1600" b="1"/>
             </a:lvl5pPr>
             <a:lvl6pPr marL="2286000" indent="0">
               <a:buNone/>
-              <a:defRPr sz="1600" b="true"/>
+              <a:defRPr sz="1600" b="1"/>
             </a:lvl6pPr>
             <a:lvl7pPr marL="2743200" indent="0">
               <a:buNone/>
-              <a:defRPr sz="1600" b="true"/>
+              <a:defRPr sz="1600" b="1"/>
             </a:lvl7pPr>
             <a:lvl8pPr marL="3200400" indent="0">
               <a:buNone/>
-              <a:defRPr sz="1600" b="true"/>
+              <a:defRPr sz="1600" b="1"/>
             </a:lvl8pPr>
             <a:lvl9pPr marL="3657600" indent="0">
               <a:buNone/>
-              <a:defRPr sz="1600" b="true"/>
+              <a:defRPr sz="1600" b="1"/>
             </a:lvl9pPr>
           </a:lstStyle>
           <a:p>
             <a:pPr lvl="0"/>
             <a:r>
-              <a:rPr lang="en-US" smtClean="false"/>
+              <a:rPr lang="en-US" smtClean="0"/>
               <a:t>Click to edit Master text styles</a:t>
             </a:r>
-            <a:endParaRPr/>
-          </a:p>
-        </p:txBody>
-      </p:sp>
-      <p:sp>
-        <p:nvSpPr>
-          <p:cNvPr id="37" name="Content Placeholder 5"/>
+          </a:p>
+        </p:txBody>
+      </p:sp>
+      <p:sp>
+        <p:nvSpPr>
+          <p:cNvPr id="6" name="Content Placeholder 5"/>
           <p:cNvSpPr>
-            <a:spLocks noGrp="true"/>
+            <a:spLocks noGrp="1"/>
           </p:cNvSpPr>
           <p:nvPr>
             <p:ph sz="quarter" idx="4"/>
@@ -1736,39 +1712,35 @@
           <a:p>
             <a:pPr lvl="0"/>
             <a:r>
-              <a:rPr lang="en-US" smtClean="false"/>
+              <a:rPr lang="en-US" smtClean="0"/>
               <a:t>Click to edit Master text styles</a:t>
             </a:r>
-            <a:endParaRPr/>
           </a:p>
           <a:p>
             <a:pPr lvl="1"/>
             <a:r>
-              <a:rPr lang="en-US" smtClean="false"/>
+              <a:rPr lang="en-US" smtClean="0"/>
               <a:t>Second level</a:t>
             </a:r>
-            <a:endParaRPr/>
           </a:p>
           <a:p>
             <a:pPr lvl="2"/>
             <a:r>
-              <a:rPr lang="en-US" smtClean="false"/>
+              <a:rPr lang="en-US" smtClean="0"/>
               <a:t>Third level</a:t>
             </a:r>
-            <a:endParaRPr/>
           </a:p>
           <a:p>
             <a:pPr lvl="3"/>
             <a:r>
-              <a:rPr lang="en-US" smtClean="false"/>
+              <a:rPr lang="en-US" smtClean="0"/>
               <a:t>Fourth level</a:t>
             </a:r>
-            <a:endParaRPr/>
           </a:p>
           <a:p>
             <a:pPr lvl="4"/>
             <a:r>
-              <a:rPr lang="en-US" smtClean="false"/>
+              <a:rPr lang="en-US" smtClean="0"/>
               <a:t>Fifth level</a:t>
             </a:r>
             <a:endParaRPr lang="en-US"/>
@@ -1777,9 +1749,9 @@
       </p:sp>
       <p:sp>
         <p:nvSpPr>
-          <p:cNvPr id="38" name="Date Placeholder 6"/>
+          <p:cNvPr id="7" name="Date Placeholder 6"/>
           <p:cNvSpPr>
-            <a:spLocks noGrp="true"/>
+            <a:spLocks noGrp="1"/>
           </p:cNvSpPr>
           <p:nvPr>
             <p:ph type="dt" sz="half" idx="10"/>
@@ -1790,9 +1762,8 @@
           <a:bodyPr/>
           <a:lstStyle/>
           <a:p>
-            <a:pPr/>
             <a:fld id="{5BCAD085-E8A6-8845-BD4E-CB4CCA059FC4}" type="datetimeFigureOut">
-              <a:rPr lang="en-US" smtClean="false"/>
+              <a:rPr lang="en-US" smtClean="0"/>
               <a:t>1/27/13</a:t>
             </a:fld>
             <a:endParaRPr lang="en-US"/>
@@ -1801,9 +1772,9 @@
       </p:sp>
       <p:sp>
         <p:nvSpPr>
-          <p:cNvPr id="39" name="Footer Placeholder 7"/>
+          <p:cNvPr id="8" name="Footer Placeholder 7"/>
           <p:cNvSpPr>
-            <a:spLocks noGrp="true"/>
+            <a:spLocks noGrp="1"/>
           </p:cNvSpPr>
           <p:nvPr>
             <p:ph type="ftr" sz="quarter" idx="11"/>
@@ -1814,16 +1785,15 @@
           <a:bodyPr/>
           <a:lstStyle/>
           <a:p>
-            <a:pPr/>
             <a:endParaRPr lang="en-US"/>
           </a:p>
         </p:txBody>
       </p:sp>
       <p:sp>
         <p:nvSpPr>
-          <p:cNvPr id="40" name="Slide Number Placeholder 8"/>
+          <p:cNvPr id="9" name="Slide Number Placeholder 8"/>
           <p:cNvSpPr>
-            <a:spLocks noGrp="true"/>
+            <a:spLocks noGrp="1"/>
           </p:cNvSpPr>
           <p:nvPr>
             <p:ph type="sldNum" sz="quarter" idx="12"/>
@@ -1834,9 +1804,8 @@
           <a:bodyPr/>
           <a:lstStyle/>
           <a:p>
-            <a:pPr/>
             <a:fld id="{C1FF6DA9-008F-8B48-92A6-B652298478BF}" type="slidenum">
-              <a:rPr lang="en-US" smtClean="false"/>
+              <a:rPr lang="en-US" smtClean="0"/>
               <a:t>‹#›</a:t>
             </a:fld>
             <a:endParaRPr lang="en-US"/>
@@ -1844,6 +1813,11 @@
         </p:txBody>
       </p:sp>
     </p:spTree>
+    <p:extLst>
+      <p:ext uri="{BB962C8B-B14F-4D97-AF65-F5344CB8AC3E}">
+        <p14:creationId xmlns:p14="http://schemas.microsoft.com/office/powerpoint/2010/main" val="990158736"/>
+      </p:ext>
+    </p:extLst>
   </p:cSld>
   <p:clrMapOvr>
     <a:masterClrMapping/>
@@ -1852,11 +1826,11 @@
 </file>
 
 <file path=ppt/slideLayouts/slideLayout6.xml><?xml version="1.0" encoding="utf-8"?>
-<p:sldLayout xmlns:a="http://schemas.openxmlformats.org/drawingml/2006/main" xmlns:p="http://schemas.openxmlformats.org/presentationml/2006/main" type="titleOnly">
+<p:sldLayout xmlns:a="http://schemas.openxmlformats.org/drawingml/2006/main" xmlns:r="http://schemas.openxmlformats.org/officeDocument/2006/relationships" xmlns:p="http://schemas.openxmlformats.org/presentationml/2006/main" type="titleOnly" preserve="1">
   <p:cSld name="Title Only">
     <p:spTree>
       <p:nvGrpSpPr>
-        <p:cNvPr id="41" name=""/>
+        <p:cNvPr id="1" name=""/>
         <p:cNvGrpSpPr/>
         <p:nvPr/>
       </p:nvGrpSpPr>
@@ -1870,9 +1844,9 @@
       </p:grpSpPr>
       <p:sp>
         <p:nvSpPr>
-          <p:cNvPr id="42" name="Title 1"/>
+          <p:cNvPr id="2" name="Title 1"/>
           <p:cNvSpPr>
-            <a:spLocks noGrp="true"/>
+            <a:spLocks noGrp="1"/>
           </p:cNvSpPr>
           <p:nvPr>
             <p:ph type="title"/>
@@ -1883,9 +1857,8 @@
           <a:bodyPr/>
           <a:lstStyle/>
           <a:p>
-            <a:pPr/>
-            <a:r>
-              <a:rPr lang="en-US" smtClean="false"/>
+            <a:r>
+              <a:rPr lang="en-US" smtClean="0"/>
               <a:t>Click to edit Master title style</a:t>
             </a:r>
             <a:endParaRPr lang="en-US"/>
@@ -1894,9 +1867,9 @@
       </p:sp>
       <p:sp>
         <p:nvSpPr>
-          <p:cNvPr id="43" name="Date Placeholder 2"/>
+          <p:cNvPr id="3" name="Date Placeholder 2"/>
           <p:cNvSpPr>
-            <a:spLocks noGrp="true"/>
+            <a:spLocks noGrp="1"/>
           </p:cNvSpPr>
           <p:nvPr>
             <p:ph type="dt" sz="half" idx="10"/>
@@ -1907,9 +1880,8 @@
           <a:bodyPr/>
           <a:lstStyle/>
           <a:p>
-            <a:pPr/>
             <a:fld id="{5BCAD085-E8A6-8845-BD4E-CB4CCA059FC4}" type="datetimeFigureOut">
-              <a:rPr lang="en-US" smtClean="false"/>
+              <a:rPr lang="en-US" smtClean="0"/>
               <a:t>1/27/13</a:t>
             </a:fld>
             <a:endParaRPr lang="en-US"/>
@@ -1918,9 +1890,9 @@
       </p:sp>
       <p:sp>
         <p:nvSpPr>
-          <p:cNvPr id="44" name="Footer Placeholder 3"/>
+          <p:cNvPr id="4" name="Footer Placeholder 3"/>
           <p:cNvSpPr>
-            <a:spLocks noGrp="true"/>
+            <a:spLocks noGrp="1"/>
           </p:cNvSpPr>
           <p:nvPr>
             <p:ph type="ftr" sz="quarter" idx="11"/>
@@ -1931,16 +1903,15 @@
           <a:bodyPr/>
           <a:lstStyle/>
           <a:p>
-            <a:pPr/>
             <a:endParaRPr lang="en-US"/>
           </a:p>
         </p:txBody>
       </p:sp>
       <p:sp>
         <p:nvSpPr>
-          <p:cNvPr id="45" name="Slide Number Placeholder 4"/>
+          <p:cNvPr id="5" name="Slide Number Placeholder 4"/>
           <p:cNvSpPr>
-            <a:spLocks noGrp="true"/>
+            <a:spLocks noGrp="1"/>
           </p:cNvSpPr>
           <p:nvPr>
             <p:ph type="sldNum" sz="quarter" idx="12"/>
@@ -1951,9 +1922,8 @@
           <a:bodyPr/>
           <a:lstStyle/>
           <a:p>
-            <a:pPr/>
             <a:fld id="{C1FF6DA9-008F-8B48-92A6-B652298478BF}" type="slidenum">
-              <a:rPr lang="en-US" smtClean="false"/>
+              <a:rPr lang="en-US" smtClean="0"/>
               <a:t>‹#›</a:t>
             </a:fld>
             <a:endParaRPr lang="en-US"/>
@@ -1961,6 +1931,11 @@
         </p:txBody>
       </p:sp>
     </p:spTree>
+    <p:extLst>
+      <p:ext uri="{BB962C8B-B14F-4D97-AF65-F5344CB8AC3E}">
+        <p14:creationId xmlns:p14="http://schemas.microsoft.com/office/powerpoint/2010/main" val="727027711"/>
+      </p:ext>
+    </p:extLst>
   </p:cSld>
   <p:clrMapOvr>
     <a:masterClrMapping/>
@@ -1969,11 +1944,11 @@
 </file>
 
 <file path=ppt/slideLayouts/slideLayout7.xml><?xml version="1.0" encoding="utf-8"?>
-<p:sldLayout xmlns:a="http://schemas.openxmlformats.org/drawingml/2006/main" xmlns:p="http://schemas.openxmlformats.org/presentationml/2006/main" type="blank">
+<p:sldLayout xmlns:a="http://schemas.openxmlformats.org/drawingml/2006/main" xmlns:r="http://schemas.openxmlformats.org/officeDocument/2006/relationships" xmlns:p="http://schemas.openxmlformats.org/presentationml/2006/main" type="blank" preserve="1">
   <p:cSld name="Blank">
     <p:spTree>
       <p:nvGrpSpPr>
-        <p:cNvPr id="46" name=""/>
+        <p:cNvPr id="1" name=""/>
         <p:cNvGrpSpPr/>
         <p:nvPr/>
       </p:nvGrpSpPr>
@@ -1987,9 +1962,9 @@
       </p:grpSpPr>
       <p:sp>
         <p:nvSpPr>
-          <p:cNvPr id="47" name="Date Placeholder 1"/>
+          <p:cNvPr id="2" name="Date Placeholder 1"/>
           <p:cNvSpPr>
-            <a:spLocks noGrp="true"/>
+            <a:spLocks noGrp="1"/>
           </p:cNvSpPr>
           <p:nvPr>
             <p:ph type="dt" sz="half" idx="10"/>
@@ -2000,9 +1975,8 @@
           <a:bodyPr/>
           <a:lstStyle/>
           <a:p>
-            <a:pPr/>
             <a:fld id="{5BCAD085-E8A6-8845-BD4E-CB4CCA059FC4}" type="datetimeFigureOut">
-              <a:rPr lang="en-US" smtClean="false"/>
+              <a:rPr lang="en-US" smtClean="0"/>
               <a:t>1/27/13</a:t>
             </a:fld>
             <a:endParaRPr lang="en-US"/>
@@ -2011,9 +1985,9 @@
       </p:sp>
       <p:sp>
         <p:nvSpPr>
-          <p:cNvPr id="48" name="Footer Placeholder 2"/>
+          <p:cNvPr id="3" name="Footer Placeholder 2"/>
           <p:cNvSpPr>
-            <a:spLocks noGrp="true"/>
+            <a:spLocks noGrp="1"/>
           </p:cNvSpPr>
           <p:nvPr>
             <p:ph type="ftr" sz="quarter" idx="11"/>
@@ -2024,16 +1998,15 @@
           <a:bodyPr/>
           <a:lstStyle/>
           <a:p>
-            <a:pPr/>
             <a:endParaRPr lang="en-US"/>
           </a:p>
         </p:txBody>
       </p:sp>
       <p:sp>
         <p:nvSpPr>
-          <p:cNvPr id="49" name="Slide Number Placeholder 3"/>
+          <p:cNvPr id="4" name="Slide Number Placeholder 3"/>
           <p:cNvSpPr>
-            <a:spLocks noGrp="true"/>
+            <a:spLocks noGrp="1"/>
           </p:cNvSpPr>
           <p:nvPr>
             <p:ph type="sldNum" sz="quarter" idx="12"/>
@@ -2044,9 +2017,8 @@
           <a:bodyPr/>
           <a:lstStyle/>
           <a:p>
-            <a:pPr/>
             <a:fld id="{C1FF6DA9-008F-8B48-92A6-B652298478BF}" type="slidenum">
-              <a:rPr lang="en-US" smtClean="false"/>
+              <a:rPr lang="en-US" smtClean="0"/>
               <a:t>‹#›</a:t>
             </a:fld>
             <a:endParaRPr lang="en-US"/>
@@ -2054,6 +2026,11 @@
         </p:txBody>
       </p:sp>
     </p:spTree>
+    <p:extLst>
+      <p:ext uri="{BB962C8B-B14F-4D97-AF65-F5344CB8AC3E}">
+        <p14:creationId xmlns:p14="http://schemas.microsoft.com/office/powerpoint/2010/main" val="1212999818"/>
+      </p:ext>
+    </p:extLst>
   </p:cSld>
   <p:clrMapOvr>
     <a:masterClrMapping/>
@@ -2062,11 +2039,11 @@
 </file>
 
 <file path=ppt/slideLayouts/slideLayout8.xml><?xml version="1.0" encoding="utf-8"?>
-<p:sldLayout xmlns:a="http://schemas.openxmlformats.org/drawingml/2006/main" xmlns:p="http://schemas.openxmlformats.org/presentationml/2006/main" type="objTx">
+<p:sldLayout xmlns:a="http://schemas.openxmlformats.org/drawingml/2006/main" xmlns:r="http://schemas.openxmlformats.org/officeDocument/2006/relationships" xmlns:p="http://schemas.openxmlformats.org/presentationml/2006/main" type="objTx" preserve="1">
   <p:cSld name="Content with Caption">
     <p:spTree>
       <p:nvGrpSpPr>
-        <p:cNvPr id="50" name=""/>
+        <p:cNvPr id="1" name=""/>
         <p:cNvGrpSpPr/>
         <p:nvPr/>
       </p:nvGrpSpPr>
@@ -2080,9 +2057,9 @@
       </p:grpSpPr>
       <p:sp>
         <p:nvSpPr>
-          <p:cNvPr id="51" name="Title 1"/>
+          <p:cNvPr id="2" name="Title 1"/>
           <p:cNvSpPr>
-            <a:spLocks noGrp="true"/>
+            <a:spLocks noGrp="1"/>
           </p:cNvSpPr>
           <p:nvPr>
             <p:ph type="title"/>
@@ -2098,13 +2075,12 @@
           <a:bodyPr anchor="b"/>
           <a:lstStyle>
             <a:lvl1pPr algn="l">
-              <a:defRPr sz="2000" b="true"/>
+              <a:defRPr sz="2000" b="1"/>
             </a:lvl1pPr>
           </a:lstStyle>
           <a:p>
-            <a:pPr/>
-            <a:r>
-              <a:rPr lang="en-US" smtClean="false"/>
+            <a:r>
+              <a:rPr lang="en-US" smtClean="0"/>
               <a:t>Click to edit Master title style</a:t>
             </a:r>
             <a:endParaRPr lang="en-US"/>
@@ -2113,9 +2089,9 @@
       </p:sp>
       <p:sp>
         <p:nvSpPr>
-          <p:cNvPr id="52" name="Content Placeholder 2"/>
+          <p:cNvPr id="3" name="Content Placeholder 2"/>
           <p:cNvSpPr>
-            <a:spLocks noGrp="true"/>
+            <a:spLocks noGrp="1"/>
           </p:cNvSpPr>
           <p:nvPr>
             <p:ph idx="1"/>
@@ -2161,39 +2137,35 @@
           <a:p>
             <a:pPr lvl="0"/>
             <a:r>
-              <a:rPr lang="en-US" smtClean="false"/>
+              <a:rPr lang="en-US" smtClean="0"/>
               <a:t>Click to edit Master text styles</a:t>
             </a:r>
-            <a:endParaRPr/>
           </a:p>
           <a:p>
             <a:pPr lvl="1"/>
             <a:r>
-              <a:rPr lang="en-US" smtClean="false"/>
+              <a:rPr lang="en-US" smtClean="0"/>
               <a:t>Second level</a:t>
             </a:r>
-            <a:endParaRPr/>
           </a:p>
           <a:p>
             <a:pPr lvl="2"/>
             <a:r>
-              <a:rPr lang="en-US" smtClean="false"/>
+              <a:rPr lang="en-US" smtClean="0"/>
               <a:t>Third level</a:t>
             </a:r>
-            <a:endParaRPr/>
           </a:p>
           <a:p>
             <a:pPr lvl="3"/>
             <a:r>
-              <a:rPr lang="en-US" smtClean="false"/>
+              <a:rPr lang="en-US" smtClean="0"/>
               <a:t>Fourth level</a:t>
             </a:r>
-            <a:endParaRPr/>
           </a:p>
           <a:p>
             <a:pPr lvl="4"/>
             <a:r>
-              <a:rPr lang="en-US" smtClean="false"/>
+              <a:rPr lang="en-US" smtClean="0"/>
               <a:t>Fifth level</a:t>
             </a:r>
             <a:endParaRPr lang="en-US"/>
@@ -2202,9 +2174,9 @@
       </p:sp>
       <p:sp>
         <p:nvSpPr>
-          <p:cNvPr id="53" name="Text Placeholder 3"/>
+          <p:cNvPr id="4" name="Text Placeholder 3"/>
           <p:cNvSpPr>
-            <a:spLocks noGrp="true"/>
+            <a:spLocks noGrp="1"/>
           </p:cNvSpPr>
           <p:nvPr>
             <p:ph type="body" sz="half" idx="2"/>
@@ -2259,18 +2231,17 @@
           <a:p>
             <a:pPr lvl="0"/>
             <a:r>
-              <a:rPr lang="en-US" smtClean="false"/>
+              <a:rPr lang="en-US" smtClean="0"/>
               <a:t>Click to edit Master text styles</a:t>
             </a:r>
-            <a:endParaRPr/>
-          </a:p>
-        </p:txBody>
-      </p:sp>
-      <p:sp>
-        <p:nvSpPr>
-          <p:cNvPr id="54" name="Date Placeholder 4"/>
+          </a:p>
+        </p:txBody>
+      </p:sp>
+      <p:sp>
+        <p:nvSpPr>
+          <p:cNvPr id="5" name="Date Placeholder 4"/>
           <p:cNvSpPr>
-            <a:spLocks noGrp="true"/>
+            <a:spLocks noGrp="1"/>
           </p:cNvSpPr>
           <p:nvPr>
             <p:ph type="dt" sz="half" idx="10"/>
@@ -2281,9 +2252,8 @@
           <a:bodyPr/>
           <a:lstStyle/>
           <a:p>
-            <a:pPr/>
             <a:fld id="{5BCAD085-E8A6-8845-BD4E-CB4CCA059FC4}" type="datetimeFigureOut">
-              <a:rPr lang="en-US" smtClean="false"/>
+              <a:rPr lang="en-US" smtClean="0"/>
               <a:t>1/27/13</a:t>
             </a:fld>
             <a:endParaRPr lang="en-US"/>
@@ -2292,9 +2262,9 @@
       </p:sp>
       <p:sp>
         <p:nvSpPr>
-          <p:cNvPr id="55" name="Footer Placeholder 5"/>
+          <p:cNvPr id="6" name="Footer Placeholder 5"/>
           <p:cNvSpPr>
-            <a:spLocks noGrp="true"/>
+            <a:spLocks noGrp="1"/>
           </p:cNvSpPr>
           <p:nvPr>
             <p:ph type="ftr" sz="quarter" idx="11"/>
@@ -2305,16 +2275,15 @@
           <a:bodyPr/>
           <a:lstStyle/>
           <a:p>
-            <a:pPr/>
             <a:endParaRPr lang="en-US"/>
           </a:p>
         </p:txBody>
       </p:sp>
       <p:sp>
         <p:nvSpPr>
-          <p:cNvPr id="56" name="Slide Number Placeholder 6"/>
+          <p:cNvPr id="7" name="Slide Number Placeholder 6"/>
           <p:cNvSpPr>
-            <a:spLocks noGrp="true"/>
+            <a:spLocks noGrp="1"/>
           </p:cNvSpPr>
           <p:nvPr>
             <p:ph type="sldNum" sz="quarter" idx="12"/>
@@ -2325,9 +2294,8 @@
           <a:bodyPr/>
           <a:lstStyle/>
           <a:p>
-            <a:pPr/>
             <a:fld id="{C1FF6DA9-008F-8B48-92A6-B652298478BF}" type="slidenum">
-              <a:rPr lang="en-US" smtClean="false"/>
+              <a:rPr lang="en-US" smtClean="0"/>
               <a:t>‹#›</a:t>
             </a:fld>
             <a:endParaRPr lang="en-US"/>
@@ -2335,6 +2303,11 @@
         </p:txBody>
       </p:sp>
     </p:spTree>
+    <p:extLst>
+      <p:ext uri="{BB962C8B-B14F-4D97-AF65-F5344CB8AC3E}">
+        <p14:creationId xmlns:p14="http://schemas.microsoft.com/office/powerpoint/2010/main" val="1840726560"/>
+      </p:ext>
+    </p:extLst>
   </p:cSld>
   <p:clrMapOvr>
     <a:masterClrMapping/>
@@ -2343,11 +2316,11 @@
 </file>
 
 <file path=ppt/slideLayouts/slideLayout9.xml><?xml version="1.0" encoding="utf-8"?>
-<p:sldLayout xmlns:a="http://schemas.openxmlformats.org/drawingml/2006/main" xmlns:p="http://schemas.openxmlformats.org/presentationml/2006/main" type="picTx">
+<p:sldLayout xmlns:a="http://schemas.openxmlformats.org/drawingml/2006/main" xmlns:r="http://schemas.openxmlformats.org/officeDocument/2006/relationships" xmlns:p="http://schemas.openxmlformats.org/presentationml/2006/main" type="picTx" preserve="1">
   <p:cSld name="Picture with Caption">
     <p:spTree>
       <p:nvGrpSpPr>
-        <p:cNvPr id="57" name=""/>
+        <p:cNvPr id="1" name=""/>
         <p:cNvGrpSpPr/>
         <p:nvPr/>
       </p:nvGrpSpPr>
@@ -2361,9 +2334,9 @@
       </p:grpSpPr>
       <p:sp>
         <p:nvSpPr>
-          <p:cNvPr id="58" name="Title 1"/>
+          <p:cNvPr id="2" name="Title 1"/>
           <p:cNvSpPr>
-            <a:spLocks noGrp="true"/>
+            <a:spLocks noGrp="1"/>
           </p:cNvSpPr>
           <p:nvPr>
             <p:ph type="title"/>
@@ -2379,13 +2352,12 @@
           <a:bodyPr anchor="b"/>
           <a:lstStyle>
             <a:lvl1pPr algn="l">
-              <a:defRPr sz="2000" b="true"/>
+              <a:defRPr sz="2000" b="1"/>
             </a:lvl1pPr>
           </a:lstStyle>
           <a:p>
-            <a:pPr/>
-            <a:r>
-              <a:rPr lang="en-US" smtClean="false"/>
+            <a:r>
+              <a:rPr lang="en-US" smtClean="0"/>
               <a:t>Click to edit Master title style</a:t>
             </a:r>
             <a:endParaRPr lang="en-US"/>
@@ -2394,9 +2366,9 @@
       </p:sp>
       <p:sp>
         <p:nvSpPr>
-          <p:cNvPr id="59" name="Picture Placeholder 2"/>
+          <p:cNvPr id="3" name="Picture Placeholder 2"/>
           <p:cNvSpPr>
-            <a:spLocks noGrp="true"/>
+            <a:spLocks noGrp="1"/>
           </p:cNvSpPr>
           <p:nvPr>
             <p:ph type="pic" idx="1"/>
@@ -2449,16 +2421,15 @@
             </a:lvl9pPr>
           </a:lstStyle>
           <a:p>
-            <a:pPr/>
             <a:endParaRPr lang="en-US"/>
           </a:p>
         </p:txBody>
       </p:sp>
       <p:sp>
         <p:nvSpPr>
-          <p:cNvPr id="60" name="Text Placeholder 3"/>
+          <p:cNvPr id="4" name="Text Placeholder 3"/>
           <p:cNvSpPr>
-            <a:spLocks noGrp="true"/>
+            <a:spLocks noGrp="1"/>
           </p:cNvSpPr>
           <p:nvPr>
             <p:ph type="body" sz="half" idx="2"/>
@@ -2513,18 +2484,17 @@
           <a:p>
             <a:pPr lvl="0"/>
             <a:r>
-              <a:rPr lang="en-US" smtClean="false"/>
+              <a:rPr lang="en-US" smtClean="0"/>
               <a:t>Click to edit Master text styles</a:t>
             </a:r>
-            <a:endParaRPr/>
-          </a:p>
-        </p:txBody>
-      </p:sp>
-      <p:sp>
-        <p:nvSpPr>
-          <p:cNvPr id="61" name="Date Placeholder 4"/>
+          </a:p>
+        </p:txBody>
+      </p:sp>
+      <p:sp>
+        <p:nvSpPr>
+          <p:cNvPr id="5" name="Date Placeholder 4"/>
           <p:cNvSpPr>
-            <a:spLocks noGrp="true"/>
+            <a:spLocks noGrp="1"/>
           </p:cNvSpPr>
           <p:nvPr>
             <p:ph type="dt" sz="half" idx="10"/>
@@ -2535,9 +2505,8 @@
           <a:bodyPr/>
           <a:lstStyle/>
           <a:p>
-            <a:pPr/>
             <a:fld id="{5BCAD085-E8A6-8845-BD4E-CB4CCA059FC4}" type="datetimeFigureOut">
-              <a:rPr lang="en-US" smtClean="false"/>
+              <a:rPr lang="en-US" smtClean="0"/>
               <a:t>1/27/13</a:t>
             </a:fld>
             <a:endParaRPr lang="en-US"/>
@@ -2546,9 +2515,9 @@
       </p:sp>
       <p:sp>
         <p:nvSpPr>
-          <p:cNvPr id="62" name="Footer Placeholder 5"/>
+          <p:cNvPr id="6" name="Footer Placeholder 5"/>
           <p:cNvSpPr>
-            <a:spLocks noGrp="true"/>
+            <a:spLocks noGrp="1"/>
           </p:cNvSpPr>
           <p:nvPr>
             <p:ph type="ftr" sz="quarter" idx="11"/>
@@ -2559,16 +2528,15 @@
           <a:bodyPr/>
           <a:lstStyle/>
           <a:p>
-            <a:pPr/>
             <a:endParaRPr lang="en-US"/>
           </a:p>
         </p:txBody>
       </p:sp>
       <p:sp>
         <p:nvSpPr>
-          <p:cNvPr id="63" name="Slide Number Placeholder 6"/>
+          <p:cNvPr id="7" name="Slide Number Placeholder 6"/>
           <p:cNvSpPr>
-            <a:spLocks noGrp="true"/>
+            <a:spLocks noGrp="1"/>
           </p:cNvSpPr>
           <p:nvPr>
             <p:ph type="sldNum" sz="quarter" idx="12"/>
@@ -2579,9 +2547,8 @@
           <a:bodyPr/>
           <a:lstStyle/>
           <a:p>
-            <a:pPr/>
             <a:fld id="{C1FF6DA9-008F-8B48-92A6-B652298478BF}" type="slidenum">
-              <a:rPr lang="en-US" smtClean="false"/>
+              <a:rPr lang="en-US" smtClean="0"/>
               <a:t>‹#›</a:t>
             </a:fld>
             <a:endParaRPr lang="en-US"/>
@@ -2589,6 +2556,11 @@
         </p:txBody>
       </p:sp>
     </p:spTree>
+    <p:extLst>
+      <p:ext uri="{BB962C8B-B14F-4D97-AF65-F5344CB8AC3E}">
+        <p14:creationId xmlns:p14="http://schemas.microsoft.com/office/powerpoint/2010/main" val="3889236939"/>
+      </p:ext>
+    </p:extLst>
   </p:cSld>
   <p:clrMapOvr>
     <a:masterClrMapping/>
@@ -2622,7 +2594,7 @@
         <p:nvSpPr>
           <p:cNvPr id="2" name="Title Placeholder 1"/>
           <p:cNvSpPr>
-            <a:spLocks noGrp="true"/>
+            <a:spLocks noGrp="1"/>
           </p:cNvSpPr>
           <p:nvPr>
             <p:ph type="title"/>
@@ -2638,14 +2610,13 @@
           </a:prstGeom>
         </p:spPr>
         <p:txBody>
-          <a:bodyPr vert="horz" lIns="91440" tIns="45720" rIns="91440" bIns="45720" rtlCol="false" anchor="ctr">
+          <a:bodyPr vert="horz" lIns="91440" tIns="45720" rIns="91440" bIns="45720" rtlCol="0" anchor="ctr">
             <a:normAutofit/>
           </a:bodyPr>
           <a:lstStyle/>
           <a:p>
-            <a:pPr/>
-            <a:r>
-              <a:rPr lang="en-US" smtClean="false"/>
+            <a:r>
+              <a:rPr lang="en-US" smtClean="0"/>
               <a:t>Click to edit Master title style</a:t>
             </a:r>
             <a:endParaRPr lang="en-US"/>
@@ -2656,7 +2627,7 @@
         <p:nvSpPr>
           <p:cNvPr id="3" name="Text Placeholder 2"/>
           <p:cNvSpPr>
-            <a:spLocks noGrp="true"/>
+            <a:spLocks noGrp="1"/>
           </p:cNvSpPr>
           <p:nvPr>
             <p:ph type="body" idx="1"/>
@@ -2672,46 +2643,42 @@
           </a:prstGeom>
         </p:spPr>
         <p:txBody>
-          <a:bodyPr vert="horz" lIns="91440" tIns="45720" rIns="91440" bIns="45720" rtlCol="false">
+          <a:bodyPr vert="horz" lIns="91440" tIns="45720" rIns="91440" bIns="45720" rtlCol="0">
             <a:normAutofit/>
           </a:bodyPr>
           <a:lstStyle/>
           <a:p>
             <a:pPr lvl="0"/>
             <a:r>
-              <a:rPr lang="en-US" smtClean="false"/>
+              <a:rPr lang="en-US" smtClean="0"/>
               <a:t>Click to edit Master text styles</a:t>
             </a:r>
-            <a:endParaRPr/>
           </a:p>
           <a:p>
             <a:pPr lvl="1"/>
             <a:r>
-              <a:rPr lang="en-US" smtClean="false"/>
+              <a:rPr lang="en-US" smtClean="0"/>
               <a:t>Second level</a:t>
             </a:r>
-            <a:endParaRPr/>
           </a:p>
           <a:p>
             <a:pPr lvl="2"/>
             <a:r>
-              <a:rPr lang="en-US" smtClean="false"/>
+              <a:rPr lang="en-US" smtClean="0"/>
               <a:t>Third level</a:t>
             </a:r>
-            <a:endParaRPr/>
           </a:p>
           <a:p>
             <a:pPr lvl="3"/>
             <a:r>
-              <a:rPr lang="en-US" smtClean="false"/>
+              <a:rPr lang="en-US" smtClean="0"/>
               <a:t>Fourth level</a:t>
             </a:r>
-            <a:endParaRPr/>
           </a:p>
           <a:p>
             <a:pPr lvl="4"/>
             <a:r>
-              <a:rPr lang="en-US" smtClean="false"/>
+              <a:rPr lang="en-US" smtClean="0"/>
               <a:t>Fifth level</a:t>
             </a:r>
             <a:endParaRPr lang="en-US"/>
@@ -2722,7 +2689,7 @@
         <p:nvSpPr>
           <p:cNvPr id="4" name="Date Placeholder 3"/>
           <p:cNvSpPr>
-            <a:spLocks noGrp="true"/>
+            <a:spLocks noGrp="1"/>
           </p:cNvSpPr>
           <p:nvPr>
             <p:ph type="dt" sz="half" idx="2"/>
@@ -2738,7 +2705,7 @@
           </a:prstGeom>
         </p:spPr>
         <p:txBody>
-          <a:bodyPr vert="horz" lIns="91440" tIns="45720" rIns="91440" bIns="45720" rtlCol="false" anchor="ctr"/>
+          <a:bodyPr vert="horz" lIns="91440" tIns="45720" rIns="91440" bIns="45720" rtlCol="0" anchor="ctr"/>
           <a:lstStyle>
             <a:lvl1pPr algn="l">
               <a:defRPr sz="1200">
@@ -2751,9 +2718,8 @@
             </a:lvl1pPr>
           </a:lstStyle>
           <a:p>
-            <a:pPr/>
             <a:fld id="{5BCAD085-E8A6-8845-BD4E-CB4CCA059FC4}" type="datetimeFigureOut">
-              <a:rPr lang="en-US" smtClean="false"/>
+              <a:rPr lang="en-US" smtClean="0"/>
               <a:t>1/27/13</a:t>
             </a:fld>
             <a:endParaRPr lang="en-US"/>
@@ -2764,7 +2730,7 @@
         <p:nvSpPr>
           <p:cNvPr id="5" name="Footer Placeholder 4"/>
           <p:cNvSpPr>
-            <a:spLocks noGrp="true"/>
+            <a:spLocks noGrp="1"/>
           </p:cNvSpPr>
           <p:nvPr>
             <p:ph type="ftr" sz="quarter" idx="3"/>
@@ -2780,7 +2746,7 @@
           </a:prstGeom>
         </p:spPr>
         <p:txBody>
-          <a:bodyPr vert="horz" lIns="91440" tIns="45720" rIns="91440" bIns="45720" rtlCol="false" anchor="ctr"/>
+          <a:bodyPr vert="horz" lIns="91440" tIns="45720" rIns="91440" bIns="45720" rtlCol="0" anchor="ctr"/>
           <a:lstStyle>
             <a:lvl1pPr algn="ctr">
               <a:defRPr sz="1200">
@@ -2793,7 +2759,6 @@
             </a:lvl1pPr>
           </a:lstStyle>
           <a:p>
-            <a:pPr/>
             <a:endParaRPr lang="en-US"/>
           </a:p>
         </p:txBody>
@@ -2802,7 +2767,7 @@
         <p:nvSpPr>
           <p:cNvPr id="6" name="Slide Number Placeholder 5"/>
           <p:cNvSpPr>
-            <a:spLocks noGrp="true"/>
+            <a:spLocks noGrp="1"/>
           </p:cNvSpPr>
           <p:nvPr>
             <p:ph type="sldNum" sz="quarter" idx="4"/>
@@ -2818,7 +2783,7 @@
           </a:prstGeom>
         </p:spPr>
         <p:txBody>
-          <a:bodyPr vert="horz" lIns="91440" tIns="45720" rIns="91440" bIns="45720" rtlCol="false" anchor="ctr"/>
+          <a:bodyPr vert="horz" lIns="91440" tIns="45720" rIns="91440" bIns="45720" rtlCol="0" anchor="ctr"/>
           <a:lstStyle>
             <a:lvl1pPr algn="r">
               <a:defRPr sz="1200">
@@ -2831,9 +2796,8 @@
             </a:lvl1pPr>
           </a:lstStyle>
           <a:p>
-            <a:pPr/>
             <a:fld id="{C1FF6DA9-008F-8B48-92A6-B652298478BF}" type="slidenum">
-              <a:rPr lang="en-US" smtClean="false"/>
+              <a:rPr lang="en-US" smtClean="0"/>
               <a:t>‹#›</a:t>
             </a:fld>
             <a:endParaRPr lang="en-US"/>
@@ -2841,26 +2805,31 @@
         </p:txBody>
       </p:sp>
     </p:spTree>
+    <p:extLst>
+      <p:ext uri="{BB962C8B-B14F-4D97-AF65-F5344CB8AC3E}">
+        <p14:creationId xmlns:p14="http://schemas.microsoft.com/office/powerpoint/2010/main" val="2209977519"/>
+      </p:ext>
+    </p:extLst>
   </p:cSld>
   <p:clrMap bg1="lt1" tx1="dk1" bg2="lt2" tx2="dk2" accent1="accent1" accent2="accent2" accent3="accent3" accent4="accent4" accent5="accent5" accent6="accent6" hlink="hlink" folHlink="folHlink"/>
   <p:sldLayoutIdLst>
-    <p:sldLayoutId id="2147483649" r:id="rId0"/>
-    <p:sldLayoutId id="2147483650" r:id="rId1"/>
-    <p:sldLayoutId id="2147483651" r:id="rId2"/>
-    <p:sldLayoutId id="2147483652" r:id="rId3"/>
-    <p:sldLayoutId id="2147483653" r:id="rId4"/>
-    <p:sldLayoutId id="2147483654" r:id="rId5"/>
-    <p:sldLayoutId id="2147483655" r:id="rId6"/>
-    <p:sldLayoutId id="2147483656" r:id="rId7"/>
-    <p:sldLayoutId id="2147483657" r:id="rId8"/>
-    <p:sldLayoutId id="2147483658" r:id="rId9"/>
-    <p:sldLayoutId id="2147483659" r:id="rId10"/>
+    <p:sldLayoutId id="2147483649" r:id="rId1"/>
+    <p:sldLayoutId id="2147483650" r:id="rId2"/>
+    <p:sldLayoutId id="2147483651" r:id="rId3"/>
+    <p:sldLayoutId id="2147483652" r:id="rId4"/>
+    <p:sldLayoutId id="2147483653" r:id="rId5"/>
+    <p:sldLayoutId id="2147483654" r:id="rId6"/>
+    <p:sldLayoutId id="2147483655" r:id="rId7"/>
+    <p:sldLayoutId id="2147483656" r:id="rId8"/>
+    <p:sldLayoutId id="2147483657" r:id="rId9"/>
+    <p:sldLayoutId id="2147483658" r:id="rId10"/>
+    <p:sldLayoutId id="2147483659" r:id="rId11"/>
   </p:sldLayoutIdLst>
   <p:txStyles>
     <p:titleStyle>
-      <a:lvl1pPr algn="ctr" defTabSz="457200" rtl="false" eaLnBrk="true" latinLnBrk="false" hangingPunct="true">
+      <a:lvl1pPr algn="ctr" defTabSz="457200" rtl="0" eaLnBrk="1" latinLnBrk="0" hangingPunct="1">
         <a:spcBef>
-          <a:spcPct val="1"/>
+          <a:spcPct val="0"/>
         </a:spcBef>
         <a:buNone/>
         <a:defRPr sz="4400" kern="1200">
@@ -2874,7 +2843,7 @@
       </a:lvl1pPr>
     </p:titleStyle>
     <p:bodyStyle>
-      <a:lvl1pPr marL="342900" indent="-342900" algn="l" defTabSz="457200" rtl="false" eaLnBrk="true" latinLnBrk="false" hangingPunct="true">
+      <a:lvl1pPr marL="342900" indent="-342900" algn="l" defTabSz="457200" rtl="0" eaLnBrk="1" latinLnBrk="0" hangingPunct="1">
         <a:spcBef>
           <a:spcPct val="20000"/>
         </a:spcBef>
@@ -2889,7 +2858,7 @@
           <a:cs typeface="+mn-cs"/>
         </a:defRPr>
       </a:lvl1pPr>
-      <a:lvl2pPr marL="742950" indent="-285750" algn="l" defTabSz="457200" rtl="false" eaLnBrk="true" latinLnBrk="false" hangingPunct="true">
+      <a:lvl2pPr marL="742950" indent="-285750" algn="l" defTabSz="457200" rtl="0" eaLnBrk="1" latinLnBrk="0" hangingPunct="1">
         <a:spcBef>
           <a:spcPct val="20000"/>
         </a:spcBef>
@@ -2904,7 +2873,7 @@
           <a:cs typeface="+mn-cs"/>
         </a:defRPr>
       </a:lvl2pPr>
-      <a:lvl3pPr marL="1143000" indent="-228600" algn="l" defTabSz="457200" rtl="false" eaLnBrk="true" latinLnBrk="false" hangingPunct="true">
+      <a:lvl3pPr marL="1143000" indent="-228600" algn="l" defTabSz="457200" rtl="0" eaLnBrk="1" latinLnBrk="0" hangingPunct="1">
         <a:spcBef>
           <a:spcPct val="20000"/>
         </a:spcBef>
@@ -2919,7 +2888,7 @@
           <a:cs typeface="+mn-cs"/>
         </a:defRPr>
       </a:lvl3pPr>
-      <a:lvl4pPr marL="1600200" indent="-228600" algn="l" defTabSz="457200" rtl="false" eaLnBrk="true" latinLnBrk="false" hangingPunct="true">
+      <a:lvl4pPr marL="1600200" indent="-228600" algn="l" defTabSz="457200" rtl="0" eaLnBrk="1" latinLnBrk="0" hangingPunct="1">
         <a:spcBef>
           <a:spcPct val="20000"/>
         </a:spcBef>
@@ -2934,7 +2903,7 @@
           <a:cs typeface="+mn-cs"/>
         </a:defRPr>
       </a:lvl4pPr>
-      <a:lvl5pPr marL="2057400" indent="-228600" algn="l" defTabSz="457200" rtl="false" eaLnBrk="true" latinLnBrk="false" hangingPunct="true">
+      <a:lvl5pPr marL="2057400" indent="-228600" algn="l" defTabSz="457200" rtl="0" eaLnBrk="1" latinLnBrk="0" hangingPunct="1">
         <a:spcBef>
           <a:spcPct val="20000"/>
         </a:spcBef>
@@ -2949,7 +2918,7 @@
           <a:cs typeface="+mn-cs"/>
         </a:defRPr>
       </a:lvl5pPr>
-      <a:lvl6pPr marL="2514600" indent="-228600" algn="l" defTabSz="457200" rtl="false" eaLnBrk="true" latinLnBrk="false" hangingPunct="true">
+      <a:lvl6pPr marL="2514600" indent="-228600" algn="l" defTabSz="457200" rtl="0" eaLnBrk="1" latinLnBrk="0" hangingPunct="1">
         <a:spcBef>
           <a:spcPct val="20000"/>
         </a:spcBef>
@@ -2964,7 +2933,7 @@
           <a:cs typeface="+mn-cs"/>
         </a:defRPr>
       </a:lvl6pPr>
-      <a:lvl7pPr marL="2971800" indent="-228600" algn="l" defTabSz="457200" rtl="false" eaLnBrk="true" latinLnBrk="false" hangingPunct="true">
+      <a:lvl7pPr marL="2971800" indent="-228600" algn="l" defTabSz="457200" rtl="0" eaLnBrk="1" latinLnBrk="0" hangingPunct="1">
         <a:spcBef>
           <a:spcPct val="20000"/>
         </a:spcBef>
@@ -2979,7 +2948,7 @@
           <a:cs typeface="+mn-cs"/>
         </a:defRPr>
       </a:lvl7pPr>
-      <a:lvl8pPr marL="3429000" indent="-228600" algn="l" defTabSz="457200" rtl="false" eaLnBrk="true" latinLnBrk="false" hangingPunct="true">
+      <a:lvl8pPr marL="3429000" indent="-228600" algn="l" defTabSz="457200" rtl="0" eaLnBrk="1" latinLnBrk="0" hangingPunct="1">
         <a:spcBef>
           <a:spcPct val="20000"/>
         </a:spcBef>
@@ -2994,7 +2963,7 @@
           <a:cs typeface="+mn-cs"/>
         </a:defRPr>
       </a:lvl8pPr>
-      <a:lvl9pPr marL="3886200" indent="-228600" algn="l" defTabSz="457200" rtl="false" eaLnBrk="true" latinLnBrk="false" hangingPunct="true">
+      <a:lvl9pPr marL="3886200" indent="-228600" algn="l" defTabSz="457200" rtl="0" eaLnBrk="1" latinLnBrk="0" hangingPunct="1">
         <a:spcBef>
           <a:spcPct val="20000"/>
         </a:spcBef>
@@ -3014,7 +2983,7 @@
       <a:defPPr>
         <a:defRPr lang="en-US"/>
       </a:defPPr>
-      <a:lvl1pPr marL="0" algn="l" defTabSz="457200" rtl="false" eaLnBrk="true" latinLnBrk="false" hangingPunct="true">
+      <a:lvl1pPr marL="0" algn="l" defTabSz="457200" rtl="0" eaLnBrk="1" latinLnBrk="0" hangingPunct="1">
         <a:defRPr sz="1800" kern="1200">
           <a:solidFill>
             <a:schemeClr val="tx1"/>
@@ -3024,7 +2993,7 @@
           <a:cs typeface="+mn-cs"/>
         </a:defRPr>
       </a:lvl1pPr>
-      <a:lvl2pPr marL="457200" algn="l" defTabSz="457200" rtl="false" eaLnBrk="true" latinLnBrk="false" hangingPunct="true">
+      <a:lvl2pPr marL="457200" algn="l" defTabSz="457200" rtl="0" eaLnBrk="1" latinLnBrk="0" hangingPunct="1">
         <a:defRPr sz="1800" kern="1200">
           <a:solidFill>
             <a:schemeClr val="tx1"/>
@@ -3034,7 +3003,7 @@
           <a:cs typeface="+mn-cs"/>
         </a:defRPr>
       </a:lvl2pPr>
-      <a:lvl3pPr marL="914400" algn="l" defTabSz="457200" rtl="false" eaLnBrk="true" latinLnBrk="false" hangingPunct="true">
+      <a:lvl3pPr marL="914400" algn="l" defTabSz="457200" rtl="0" eaLnBrk="1" latinLnBrk="0" hangingPunct="1">
         <a:defRPr sz="1800" kern="1200">
           <a:solidFill>
             <a:schemeClr val="tx1"/>
@@ -3044,7 +3013,7 @@
           <a:cs typeface="+mn-cs"/>
         </a:defRPr>
       </a:lvl3pPr>
-      <a:lvl4pPr marL="1371600" algn="l" defTabSz="457200" rtl="false" eaLnBrk="true" latinLnBrk="false" hangingPunct="true">
+      <a:lvl4pPr marL="1371600" algn="l" defTabSz="457200" rtl="0" eaLnBrk="1" latinLnBrk="0" hangingPunct="1">
         <a:defRPr sz="1800" kern="1200">
           <a:solidFill>
             <a:schemeClr val="tx1"/>
@@ -3054,7 +3023,7 @@
           <a:cs typeface="+mn-cs"/>
         </a:defRPr>
       </a:lvl4pPr>
-      <a:lvl5pPr marL="1828800" algn="l" defTabSz="457200" rtl="false" eaLnBrk="true" latinLnBrk="false" hangingPunct="true">
+      <a:lvl5pPr marL="1828800" algn="l" defTabSz="457200" rtl="0" eaLnBrk="1" latinLnBrk="0" hangingPunct="1">
         <a:defRPr sz="1800" kern="1200">
           <a:solidFill>
             <a:schemeClr val="tx1"/>
@@ -3064,7 +3033,7 @@
           <a:cs typeface="+mn-cs"/>
         </a:defRPr>
       </a:lvl5pPr>
-      <a:lvl6pPr marL="2286000" algn="l" defTabSz="457200" rtl="false" eaLnBrk="true" latinLnBrk="false" hangingPunct="true">
+      <a:lvl6pPr marL="2286000" algn="l" defTabSz="457200" rtl="0" eaLnBrk="1" latinLnBrk="0" hangingPunct="1">
         <a:defRPr sz="1800" kern="1200">
           <a:solidFill>
             <a:schemeClr val="tx1"/>
@@ -3074,7 +3043,7 @@
           <a:cs typeface="+mn-cs"/>
         </a:defRPr>
       </a:lvl6pPr>
-      <a:lvl7pPr marL="2743200" algn="l" defTabSz="457200" rtl="false" eaLnBrk="true" latinLnBrk="false" hangingPunct="true">
+      <a:lvl7pPr marL="2743200" algn="l" defTabSz="457200" rtl="0" eaLnBrk="1" latinLnBrk="0" hangingPunct="1">
         <a:defRPr sz="1800" kern="1200">
           <a:solidFill>
             <a:schemeClr val="tx1"/>
@@ -3084,7 +3053,7 @@
           <a:cs typeface="+mn-cs"/>
         </a:defRPr>
       </a:lvl7pPr>
-      <a:lvl8pPr marL="3200400" algn="l" defTabSz="457200" rtl="false" eaLnBrk="true" latinLnBrk="false" hangingPunct="true">
+      <a:lvl8pPr marL="3200400" algn="l" defTabSz="457200" rtl="0" eaLnBrk="1" latinLnBrk="0" hangingPunct="1">
         <a:defRPr sz="1800" kern="1200">
           <a:solidFill>
             <a:schemeClr val="tx1"/>
@@ -3094,7 +3063,7 @@
           <a:cs typeface="+mn-cs"/>
         </a:defRPr>
       </a:lvl8pPr>
-      <a:lvl9pPr marL="3657600" algn="l" defTabSz="457200" rtl="false" eaLnBrk="true" latinLnBrk="false" hangingPunct="true">
+      <a:lvl9pPr marL="3657600" algn="l" defTabSz="457200" rtl="0" eaLnBrk="1" latinLnBrk="0" hangingPunct="1">
         <a:defRPr sz="1800" kern="1200">
           <a:solidFill>
             <a:schemeClr val="tx1"/>
@@ -3110,7 +3079,7 @@
 </file>
 
 <file path=ppt/slides/slide1.xml><?xml version="1.0" encoding="utf-8"?>
-<p:sld xmlns:a="http://schemas.openxmlformats.org/drawingml/2006/main" xmlns:p="http://schemas.openxmlformats.org/presentationml/2006/main">
+<p:sld xmlns:a="http://schemas.openxmlformats.org/drawingml/2006/main" xmlns:p="http://schemas.openxmlformats.org/presentationml/2006/main" xmlns:r="http://schemas.openxmlformats.org/officeDocument/2006/relationships">
   <p:cSld>
     <p:spTree>
       <p:nvGrpSpPr>
@@ -3118,18 +3087,11 @@
         <p:cNvGrpSpPr/>
         <p:nvPr/>
       </p:nvGrpSpPr>
-      <p:grpSpPr>
-        <a:xfrm>
-          <a:off x="0" y="0"/>
-          <a:ext cx="0" cy="0"/>
-          <a:chOff x="0" y="0"/>
-          <a:chExt cx="0" cy="0"/>
-        </a:xfrm>
-      </p:grpSpPr>
+      <p:grpSpPr/>
       <p:sp>
         <p:nvSpPr>
           <p:cNvPr id="2" name="TextBox 1"/>
-          <p:cNvSpPr txBox="true"/>
+          <p:cNvSpPr txBox="1"/>
           <p:nvPr/>
         </p:nvSpPr>
         <p:spPr>
@@ -3149,7 +3111,7 @@
           <a:lstStyle/>
           <a:p>
             <a:pPr>
-              <a:defRPr sz="1200" i="false">
+              <a:defRPr sz="1200" i="0">
                 <a:solidFill>
                   <a:srgbClr val="505050"/>
                 </a:solidFill>
@@ -3157,10 +3119,8 @@
               </a:defRPr>
             </a:pPr>
             <a:r>
-              <a:rPr/>
               <a:t>X</a:t>
             </a:r>
-            <a:endParaRPr/>
           </a:p>
         </p:txBody>
       </p:sp>
@@ -3482,7 +3442,7 @@
           </a:fontRef>
         </p:style>
         <p:txBody>
-          <a:bodyPr rtlCol="false" anchor="ctr"/>
+          <a:bodyPr rtlCol="0" anchor="ctr"/>
           <a:lstStyle/>
           <a:p>
             <a:pPr algn="ctr">
@@ -3494,10 +3454,8 @@
               </a:defRPr>
             </a:pPr>
             <a:r>
-              <a:rPr/>
               <a:t>X Avg Pool</a:t>
             </a:r>
-            <a:endParaRPr/>
           </a:p>
         </p:txBody>
       </p:sp>
@@ -3539,7 +3497,7 @@
           </a:fontRef>
         </p:style>
         <p:txBody>
-          <a:bodyPr rtlCol="false" anchor="ctr"/>
+          <a:bodyPr rtlCol="0" anchor="ctr"/>
           <a:lstStyle/>
           <a:p>
             <a:pPr algn="ctr">
@@ -3551,17 +3509,15 @@
               </a:defRPr>
             </a:pPr>
             <a:r>
-              <a:rPr/>
               <a:t>Y Avg Pool</a:t>
             </a:r>
-            <a:endParaRPr/>
           </a:p>
         </p:txBody>
       </p:sp>
       <p:sp>
         <p:nvSpPr>
           <p:cNvPr id="13" name="TextBox 12"/>
-          <p:cNvSpPr txBox="true"/>
+          <p:cNvSpPr txBox="1"/>
           <p:nvPr/>
         </p:nvSpPr>
         <p:spPr>
@@ -3581,7 +3537,7 @@
           <a:lstStyle/>
           <a:p>
             <a:pPr>
-              <a:defRPr sz="800" i="true">
+              <a:defRPr sz="800" i="1">
                 <a:solidFill>
                   <a:srgbClr val="505050"/>
                 </a:solidFill>
@@ -3589,17 +3545,15 @@
               </a:defRPr>
             </a:pPr>
             <a:r>
-              <a:rPr/>
               <a:t>C×H×1</a:t>
             </a:r>
-            <a:endParaRPr/>
           </a:p>
         </p:txBody>
       </p:sp>
       <p:sp>
         <p:nvSpPr>
           <p:cNvPr id="14" name="TextBox 13"/>
-          <p:cNvSpPr txBox="true"/>
+          <p:cNvSpPr txBox="1"/>
           <p:nvPr/>
         </p:nvSpPr>
         <p:spPr>
@@ -3619,7 +3573,7 @@
           <a:lstStyle/>
           <a:p>
             <a:pPr>
-              <a:defRPr sz="800" i="true">
+              <a:defRPr sz="800" i="1">
                 <a:solidFill>
                   <a:srgbClr val="505050"/>
                 </a:solidFill>
@@ -3627,10 +3581,8 @@
               </a:defRPr>
             </a:pPr>
             <a:r>
-              <a:rPr/>
               <a:t>C×1×W</a:t>
             </a:r>
-            <a:endParaRPr/>
           </a:p>
         </p:txBody>
       </p:sp>
@@ -3812,7 +3764,7 @@
           </a:fontRef>
         </p:style>
         <p:txBody>
-          <a:bodyPr rtlCol="false" anchor="ctr"/>
+          <a:bodyPr rtlCol="0" anchor="ctr"/>
           <a:lstStyle/>
           <a:p>
             <a:pPr algn="ctr">
@@ -3824,10 +3776,8 @@
               </a:defRPr>
             </a:pPr>
             <a:r>
-              <a:rPr/>
               <a:t>Concat + Conv2d</a:t>
             </a:r>
-            <a:endParaRPr/>
           </a:p>
         </p:txBody>
       </p:sp>
@@ -3904,7 +3854,7 @@
           </a:fontRef>
         </p:style>
         <p:txBody>
-          <a:bodyPr rtlCol="false" anchor="ctr"/>
+          <a:bodyPr rtlCol="0" anchor="ctr"/>
           <a:lstStyle/>
           <a:p>
             <a:pPr algn="ctr">
@@ -3916,10 +3866,8 @@
               </a:defRPr>
             </a:pPr>
             <a:r>
-              <a:rPr/>
               <a:t>BatchNorm + Non-linear</a:t>
             </a:r>
-            <a:endParaRPr/>
           </a:p>
         </p:txBody>
       </p:sp>
@@ -3961,7 +3909,7 @@
       <p:sp>
         <p:nvSpPr>
           <p:cNvPr id="23" name="TextBox 22"/>
-          <p:cNvSpPr txBox="true"/>
+          <p:cNvSpPr txBox="1"/>
           <p:nvPr/>
         </p:nvSpPr>
         <p:spPr>
@@ -3981,7 +3929,7 @@
           <a:lstStyle/>
           <a:p>
             <a:pPr>
-              <a:defRPr sz="800" i="true">
+              <a:defRPr sz="800" i="1">
                 <a:solidFill>
                   <a:srgbClr val="505050"/>
                 </a:solidFill>
@@ -3989,10 +3937,8 @@
               </a:defRPr>
             </a:pPr>
             <a:r>
-              <a:rPr/>
               <a:t>split</a:t>
             </a:r>
-            <a:endParaRPr/>
           </a:p>
         </p:txBody>
       </p:sp>
@@ -4139,7 +4085,7 @@
           </a:fontRef>
         </p:style>
         <p:txBody>
-          <a:bodyPr rtlCol="false" anchor="ctr"/>
+          <a:bodyPr rtlCol="0" anchor="ctr"/>
           <a:lstStyle/>
           <a:p>
             <a:pPr algn="ctr">
@@ -4151,10 +4097,8 @@
               </a:defRPr>
             </a:pPr>
             <a:r>
-              <a:rPr/>
               <a:t>Conv2d</a:t>
             </a:r>
-            <a:endParaRPr/>
           </a:p>
         </p:txBody>
       </p:sp>
@@ -4196,7 +4140,7 @@
           </a:fontRef>
         </p:style>
         <p:txBody>
-          <a:bodyPr rtlCol="false" anchor="ctr"/>
+          <a:bodyPr rtlCol="0" anchor="ctr"/>
           <a:lstStyle/>
           <a:p>
             <a:pPr algn="ctr">
@@ -4208,10 +4152,8 @@
               </a:defRPr>
             </a:pPr>
             <a:r>
-              <a:rPr/>
               <a:t>Conv2d</a:t>
             </a:r>
-            <a:endParaRPr/>
           </a:p>
         </p:txBody>
       </p:sp>
@@ -4323,7 +4265,7 @@
           </a:fontRef>
         </p:style>
         <p:txBody>
-          <a:bodyPr rtlCol="false" anchor="ctr"/>
+          <a:bodyPr rtlCol="0" anchor="ctr"/>
           <a:lstStyle/>
           <a:p>
             <a:pPr algn="ctr">
@@ -4335,10 +4277,8 @@
               </a:defRPr>
             </a:pPr>
             <a:r>
-              <a:rPr/>
               <a:t>Sigmoid</a:t>
             </a:r>
-            <a:endParaRPr/>
           </a:p>
         </p:txBody>
       </p:sp>
@@ -4380,7 +4320,7 @@
           </a:fontRef>
         </p:style>
         <p:txBody>
-          <a:bodyPr rtlCol="false" anchor="ctr"/>
+          <a:bodyPr rtlCol="0" anchor="ctr"/>
           <a:lstStyle/>
           <a:p>
             <a:pPr algn="ctr">
@@ -4392,10 +4332,8 @@
               </a:defRPr>
             </a:pPr>
             <a:r>
-              <a:rPr/>
               <a:t>Sigmoid</a:t>
             </a:r>
-            <a:endParaRPr/>
           </a:p>
         </p:txBody>
       </p:sp>
@@ -4476,7 +4414,7 @@
           <p:nvPr/>
         </p:nvCxnSpPr>
         <p:spPr>
-          <a:xfrm flipH="true">
+          <a:xfrm flipH="1">
             <a:off x="3794760" y="2807207"/>
             <a:ext cx="320040" cy="0"/>
           </a:xfrm>
@@ -4577,7 +4515,7 @@
           </a:fontRef>
         </p:style>
         <p:txBody>
-          <a:bodyPr rtlCol="false" anchor="ctr"/>
+          <a:bodyPr rtlCol="0" anchor="ctr"/>
           <a:lstStyle/>
           <a:p>
             <a:pPr algn="ctr">
@@ -4589,10 +4527,8 @@
               </a:defRPr>
             </a:pPr>
             <a:r>
-              <a:rPr/>
               <a:t>Re-weight</a:t>
             </a:r>
-            <a:endParaRPr/>
           </a:p>
         </p:txBody>
       </p:sp>
@@ -4739,21 +4675,19 @@
           </a:fontRef>
         </p:style>
         <p:txBody>
-          <a:bodyPr rtlCol="false" anchor="ctr"/>
+          <a:bodyPr rtlCol="0" anchor="ctr"/>
           <a:lstStyle/>
           <a:p>
             <a:pPr algn="ctr">
-              <a:defRPr sz="1200" b="true">
+              <a:defRPr sz="1200" b="1">
                 <a:solidFill>
                   <a:srgbClr val="000000"/>
                 </a:solidFill>
               </a:defRPr>
             </a:pPr>
             <a:r>
-              <a:rPr/>
               <a:t>+</a:t>
             </a:r>
-            <a:endParaRPr/>
           </a:p>
         </p:txBody>
       </p:sp>
@@ -4900,7 +4834,7 @@
           </a:fontRef>
         </p:style>
         <p:txBody>
-          <a:bodyPr rtlCol="false" anchor="ctr"/>
+          <a:bodyPr rtlCol="0" anchor="ctr"/>
           <a:lstStyle/>
           <a:p>
             <a:pPr algn="ctr">
@@ -4912,10 +4846,8 @@
               </a:defRPr>
             </a:pPr>
             <a:r>
-              <a:rPr/>
               <a:t>3×3 Conv+BN+ReLU ×2</a:t>
             </a:r>
-            <a:endParaRPr/>
           </a:p>
         </p:txBody>
       </p:sp>
@@ -5062,21 +4994,19 @@
           </a:fontRef>
         </p:style>
         <p:txBody>
-          <a:bodyPr rtlCol="false" anchor="ctr"/>
+          <a:bodyPr rtlCol="0" anchor="ctr"/>
           <a:lstStyle/>
           <a:p>
             <a:pPr algn="ctr">
-              <a:defRPr sz="1200" b="true">
+              <a:defRPr sz="1200" b="1">
                 <a:solidFill>
                   <a:srgbClr val="000000"/>
                 </a:solidFill>
               </a:defRPr>
             </a:pPr>
             <a:r>
-              <a:rPr/>
               <a:t>+</a:t>
             </a:r>
-            <a:endParaRPr/>
           </a:p>
         </p:txBody>
       </p:sp>
@@ -5223,7 +5153,7 @@
           </a:fontRef>
         </p:style>
         <p:txBody>
-          <a:bodyPr rtlCol="false" anchor="ctr"/>
+          <a:bodyPr rtlCol="0" anchor="ctr"/>
           <a:lstStyle/>
           <a:p>
             <a:pPr algn="ctr">
@@ -5235,17 +5165,15 @@
               </a:defRPr>
             </a:pPr>
             <a:r>
-              <a:rPr/>
               <a:t>Global Avg Pool</a:t>
             </a:r>
-            <a:endParaRPr/>
           </a:p>
         </p:txBody>
       </p:sp>
       <p:sp>
         <p:nvSpPr>
           <p:cNvPr id="54" name="TextBox 53"/>
-          <p:cNvSpPr txBox="true"/>
+          <p:cNvSpPr txBox="1"/>
           <p:nvPr/>
         </p:nvSpPr>
         <p:spPr>
@@ -5265,7 +5193,7 @@
           <a:lstStyle/>
           <a:p>
             <a:pPr>
-              <a:defRPr sz="900" i="true">
+              <a:defRPr sz="900" i="1">
                 <a:solidFill>
                   <a:srgbClr val="505050"/>
                 </a:solidFill>
@@ -5273,10 +5201,8 @@
               </a:defRPr>
             </a:pPr>
             <a:r>
-              <a:rPr/>
               <a:t>1×1×C</a:t>
             </a:r>
-            <a:endParaRPr/>
           </a:p>
         </p:txBody>
       </p:sp>
@@ -5423,7 +5349,7 @@
           </a:fontRef>
         </p:style>
         <p:txBody>
-          <a:bodyPr rtlCol="false" anchor="ctr"/>
+          <a:bodyPr rtlCol="0" anchor="ctr"/>
           <a:lstStyle/>
           <a:p>
             <a:pPr algn="ctr">
@@ -5435,10 +5361,8 @@
               </a:defRPr>
             </a:pPr>
             <a:r>
-              <a:rPr/>
               <a:t>FC+ReLU</a:t>
             </a:r>
-            <a:endParaRPr/>
           </a:p>
         </p:txBody>
       </p:sp>
@@ -5550,7 +5474,7 @@
           </a:fontRef>
         </p:style>
         <p:txBody>
-          <a:bodyPr rtlCol="false" anchor="ctr"/>
+          <a:bodyPr rtlCol="0" anchor="ctr"/>
           <a:lstStyle/>
           <a:p>
             <a:pPr algn="ctr">
@@ -5562,10 +5486,8 @@
               </a:defRPr>
             </a:pPr>
             <a:r>
-              <a:rPr/>
               <a:t>FC+ReLU</a:t>
             </a:r>
-            <a:endParaRPr/>
           </a:p>
         </p:txBody>
       </p:sp>
@@ -5677,7 +5599,7 @@
           </a:fontRef>
         </p:style>
         <p:txBody>
-          <a:bodyPr rtlCol="false" anchor="ctr"/>
+          <a:bodyPr rtlCol="0" anchor="ctr"/>
           <a:lstStyle/>
           <a:p>
             <a:pPr algn="ctr">
@@ -5689,10 +5611,8 @@
               </a:defRPr>
             </a:pPr>
             <a:r>
-              <a:rPr/>
               <a:t>FC+ReLU</a:t>
             </a:r>
-            <a:endParaRPr/>
           </a:p>
         </p:txBody>
       </p:sp>
@@ -5804,7 +5724,7 @@
           </a:fontRef>
         </p:style>
         <p:txBody>
-          <a:bodyPr rtlCol="false" anchor="ctr"/>
+          <a:bodyPr rtlCol="0" anchor="ctr"/>
           <a:lstStyle/>
           <a:p>
             <a:pPr algn="ctr">
@@ -5816,10 +5736,8 @@
               </a:defRPr>
             </a:pPr>
             <a:r>
-              <a:rPr/>
               <a:t>FC+ReLU</a:t>
             </a:r>
-            <a:endParaRPr/>
           </a:p>
         </p:txBody>
       </p:sp>
@@ -5861,7 +5779,7 @@
       <p:sp>
         <p:nvSpPr>
           <p:cNvPr id="69" name="TextBox 68"/>
-          <p:cNvSpPr txBox="true"/>
+          <p:cNvSpPr txBox="1"/>
           <p:nvPr/>
         </p:nvSpPr>
         <p:spPr>
@@ -5881,7 +5799,7 @@
           <a:lstStyle/>
           <a:p>
             <a:pPr>
-              <a:defRPr sz="800" i="true">
+              <a:defRPr sz="800" i="1">
                 <a:solidFill>
                   <a:srgbClr val="505050"/>
                 </a:solidFill>
@@ -5889,10 +5807,8 @@
               </a:defRPr>
             </a:pPr>
             <a:r>
-              <a:rPr/>
               <a:t>1×1×C/r ×4</a:t>
             </a:r>
-            <a:endParaRPr/>
           </a:p>
         </p:txBody>
       </p:sp>
@@ -6004,7 +5920,7 @@
           </a:fontRef>
         </p:style>
         <p:txBody>
-          <a:bodyPr rtlCol="false" anchor="ctr"/>
+          <a:bodyPr rtlCol="0" anchor="ctr"/>
           <a:lstStyle/>
           <a:p>
             <a:pPr algn="ctr">
@@ -6016,10 +5932,8 @@
               </a:defRPr>
             </a:pPr>
             <a:r>
-              <a:rPr/>
               <a:t>Concat</a:t>
             </a:r>
-            <a:endParaRPr/>
           </a:p>
         </p:txBody>
       </p:sp>
@@ -6096,7 +6010,7 @@
           </a:fontRef>
         </p:style>
         <p:txBody>
-          <a:bodyPr rtlCol="false" anchor="ctr"/>
+          <a:bodyPr rtlCol="0" anchor="ctr"/>
           <a:lstStyle/>
           <a:p>
             <a:pPr algn="ctr">
@@ -6108,17 +6022,15 @@
               </a:defRPr>
             </a:pPr>
             <a:r>
-              <a:rPr/>
               <a:t>FC + Sigmoid</a:t>
             </a:r>
-            <a:endParaRPr/>
           </a:p>
         </p:txBody>
       </p:sp>
       <p:sp>
         <p:nvSpPr>
           <p:cNvPr id="75" name="TextBox 74"/>
-          <p:cNvSpPr txBox="true"/>
+          <p:cNvSpPr txBox="1"/>
           <p:nvPr/>
         </p:nvSpPr>
         <p:spPr>
@@ -6138,7 +6050,7 @@
           <a:lstStyle/>
           <a:p>
             <a:pPr>
-              <a:defRPr sz="900" i="true">
+              <a:defRPr sz="900" i="1">
                 <a:solidFill>
                   <a:srgbClr val="505050"/>
                 </a:solidFill>
@@ -6146,10 +6058,8 @@
               </a:defRPr>
             </a:pPr>
             <a:r>
-              <a:rPr/>
               <a:t>1×1×C</a:t>
             </a:r>
-            <a:endParaRPr/>
           </a:p>
         </p:txBody>
       </p:sp>
@@ -6296,28 +6206,26 @@
           </a:fontRef>
         </p:style>
         <p:txBody>
-          <a:bodyPr rtlCol="false" anchor="ctr"/>
+          <a:bodyPr rtlCol="0" anchor="ctr"/>
           <a:lstStyle/>
           <a:p>
             <a:pPr algn="ctr">
-              <a:defRPr sz="1200" b="true">
+              <a:defRPr sz="1200" b="1">
                 <a:solidFill>
                   <a:srgbClr val="000000"/>
                 </a:solidFill>
               </a:defRPr>
             </a:pPr>
             <a:r>
-              <a:rPr/>
               <a:t>×</a:t>
             </a:r>
-            <a:endParaRPr/>
           </a:p>
         </p:txBody>
       </p:sp>
       <p:sp>
         <p:nvSpPr>
           <p:cNvPr id="80" name="TextBox 79"/>
-          <p:cNvSpPr txBox="true"/>
+          <p:cNvSpPr txBox="1"/>
           <p:nvPr/>
         </p:nvSpPr>
         <p:spPr>
@@ -6337,7 +6245,7 @@
           <a:lstStyle/>
           <a:p>
             <a:pPr>
-              <a:defRPr sz="1000" i="false">
+              <a:defRPr sz="1000" i="0">
                 <a:solidFill>
                   <a:srgbClr val="505050"/>
                 </a:solidFill>
@@ -6345,10 +6253,8 @@
               </a:defRPr>
             </a:pPr>
             <a:r>
-              <a:rPr/>
               <a:t>Scale</a:t>
             </a:r>
-            <a:endParaRPr/>
           </a:p>
         </p:txBody>
       </p:sp>
@@ -6390,7 +6296,7 @@
       <p:sp>
         <p:nvSpPr>
           <p:cNvPr id="82" name="TextBox 81"/>
-          <p:cNvSpPr txBox="true"/>
+          <p:cNvSpPr txBox="1"/>
           <p:nvPr/>
         </p:nvSpPr>
         <p:spPr>
@@ -6410,7 +6316,7 @@
           <a:lstStyle/>
           <a:p>
             <a:pPr>
-              <a:defRPr sz="1200" i="false">
+              <a:defRPr sz="1200" i="0">
                 <a:solidFill>
                   <a:srgbClr val="505050"/>
                 </a:solidFill>
@@ -6418,17 +6324,15 @@
               </a:defRPr>
             </a:pPr>
             <a:r>
-              <a:rPr/>
               <a:t>X̃</a:t>
             </a:r>
-            <a:endParaRPr/>
           </a:p>
         </p:txBody>
       </p:sp>
       <p:sp>
         <p:nvSpPr>
           <p:cNvPr id="83" name="TextBox 82"/>
-          <p:cNvSpPr txBox="true"/>
+          <p:cNvSpPr txBox="1"/>
           <p:nvPr/>
         </p:nvSpPr>
         <p:spPr>
@@ -6448,7 +6352,7 @@
           <a:lstStyle/>
           <a:p>
             <a:pPr>
-              <a:defRPr sz="1200" i="false">
+              <a:defRPr sz="1200" i="0">
                 <a:solidFill>
                   <a:srgbClr val="505050"/>
                 </a:solidFill>
@@ -6456,3435 +6360,8 @@
               </a:defRPr>
             </a:pPr>
             <a:r>
-              <a:rPr/>
               <a:t>SAE Module</a:t>
             </a:r>
-            <a:endParaRPr/>
-          </a:p>
-        </p:txBody>
-      </p:sp>
-    </p:spTree>
-  </p:cSld>
-  <p:clrMapOvr>
-    <a:masterClrMapping/>
-  </p:clrMapOvr>
-</p:sld>
-</file>
-
-<file path=ppt/slides/slide2.xml><?xml version="1.0" encoding="utf-8"?>
-<p:sld xmlns:a="http://schemas.openxmlformats.org/drawingml/2006/main" xmlns:p="http://schemas.openxmlformats.org/presentationml/2006/main">
-  <p:cSld>
-    <p:spTree>
-      <p:nvGrpSpPr>
-        <p:cNvPr id="84" name=""/>
-        <p:cNvGrpSpPr/>
-        <p:nvPr/>
-      </p:nvGrpSpPr>
-      <p:grpSpPr>
-        <a:xfrm>
-          <a:off x="0" y="0"/>
-          <a:ext cx="0" cy="0"/>
-          <a:chOff x="0" y="0"/>
-          <a:chExt cx="0" cy="0"/>
-        </a:xfrm>
-      </p:grpSpPr>
-      <p:grpSp>
-        <p:nvGrpSpPr>
-          <p:cNvPr id="85" name=""/>
-          <p:cNvGrpSpPr/>
-          <p:nvPr/>
-        </p:nvGrpSpPr>
-        <p:grpSpPr>
-          <a:xfrm rot="0" flipH="false" flipV="false">
-            <a:off x="2878667" y="127625"/>
-            <a:ext cx="4213456" cy="6531108"/>
-            <a:chOff x="2982872" y="240974"/>
-            <a:chExt cx="4213456" cy="6531108"/>
-          </a:xfrm>
-        </p:grpSpPr>
-        <p:sp>
-          <p:nvSpPr>
-            <p:cNvPr id="86" name="TextBox 1"/>
-            <p:cNvSpPr txBox="true"/>
-            <p:nvPr/>
-          </p:nvSpPr>
-          <p:spPr>
-            <a:xfrm>
-              <a:off x="4434840" y="274320"/>
-              <a:ext cx="1371600" cy="228600"/>
-            </a:xfrm>
-            <a:prstGeom prst="rect">
-              <a:avLst/>
-            </a:prstGeom>
-            <a:noFill/>
-          </p:spPr>
-          <p:txBody>
-            <a:bodyPr wrap="none">
-              <a:spAutoFit/>
-            </a:bodyPr>
-            <a:lstStyle/>
-            <a:p>
-              <a:pPr>
-                <a:defRPr sz="1200" i="false">
-                  <a:solidFill>
-                    <a:srgbClr val="505050"/>
-                  </a:solidFill>
-                  <a:latin typeface="Times New Roman"/>
-                </a:defRPr>
-              </a:pPr>
-              <a:r>
-                <a:rPr/>
-                <a:t>X</a:t>
-              </a:r>
-              <a:endParaRPr/>
-            </a:p>
-          </p:txBody>
-        </p:sp>
-        <p:cxnSp>
-          <p:nvCxnSpPr>
-            <p:cNvPr id="87" name="Connector 2"/>
-            <p:cNvCxnSpPr/>
-            <p:nvPr/>
-          </p:nvCxnSpPr>
-          <p:spPr>
-            <a:xfrm>
-              <a:off x="4572000" y="530352"/>
-              <a:ext cx="0" cy="109728"/>
-            </a:xfrm>
-            <a:prstGeom prst="line">
-              <a:avLst/>
-            </a:prstGeom>
-            <a:ln w="19050">
-              <a:solidFill>
-                <a:srgbClr val="000000"/>
-              </a:solidFill>
-            </a:ln>
-          </p:spPr>
-          <p:style>
-            <a:lnRef idx="2">
-              <a:schemeClr val="accent1"/>
-            </a:lnRef>
-            <a:fillRef idx="0">
-              <a:schemeClr val="accent1"/>
-            </a:fillRef>
-            <a:effectRef idx="1">
-              <a:schemeClr val="accent1"/>
-            </a:effectRef>
-            <a:fontRef idx="minor">
-              <a:schemeClr val="tx1"/>
-            </a:fontRef>
-          </p:style>
-        </p:cxnSp>
-        <p:cxnSp>
-          <p:nvCxnSpPr>
-            <p:cNvPr id="88" name="Connector 3"/>
-            <p:cNvCxnSpPr/>
-            <p:nvPr/>
-          </p:nvCxnSpPr>
-          <p:spPr>
-            <a:xfrm>
-              <a:off x="3291840" y="640080"/>
-              <a:ext cx="1280160" cy="0"/>
-            </a:xfrm>
-            <a:prstGeom prst="line">
-              <a:avLst/>
-            </a:prstGeom>
-            <a:ln w="19050">
-              <a:solidFill>
-                <a:srgbClr val="000000"/>
-              </a:solidFill>
-            </a:ln>
-          </p:spPr>
-          <p:style>
-            <a:lnRef idx="2">
-              <a:schemeClr val="accent1"/>
-            </a:lnRef>
-            <a:fillRef idx="0">
-              <a:schemeClr val="accent1"/>
-            </a:fillRef>
-            <a:effectRef idx="1">
-              <a:schemeClr val="accent1"/>
-            </a:effectRef>
-            <a:fontRef idx="minor">
-              <a:schemeClr val="tx1"/>
-            </a:fontRef>
-          </p:style>
-        </p:cxnSp>
-        <p:cxnSp>
-          <p:nvCxnSpPr>
-            <p:cNvPr id="89" name="Connector 4"/>
-            <p:cNvCxnSpPr/>
-            <p:nvPr/>
-          </p:nvCxnSpPr>
-          <p:spPr>
-            <a:xfrm>
-              <a:off x="3291840" y="640080"/>
-              <a:ext cx="0" cy="0"/>
-            </a:xfrm>
-            <a:prstGeom prst="line">
-              <a:avLst/>
-            </a:prstGeom>
-            <a:ln w="19050">
-              <a:solidFill>
-                <a:srgbClr val="000000"/>
-              </a:solidFill>
-            </a:ln>
-          </p:spPr>
-          <p:style>
-            <a:lnRef idx="2">
-              <a:schemeClr val="accent1"/>
-            </a:lnRef>
-            <a:fillRef idx="0">
-              <a:schemeClr val="accent1"/>
-            </a:fillRef>
-            <a:effectRef idx="1">
-              <a:schemeClr val="accent1"/>
-            </a:effectRef>
-            <a:fontRef idx="minor">
-              <a:schemeClr val="tx1"/>
-            </a:fontRef>
-          </p:style>
-        </p:cxnSp>
-        <p:cxnSp>
-          <p:nvCxnSpPr>
-            <p:cNvPr id="90" name="Connector 5"/>
-            <p:cNvCxnSpPr/>
-            <p:nvPr/>
-          </p:nvCxnSpPr>
-          <p:spPr>
-            <a:xfrm>
-              <a:off x="4572000" y="640080"/>
-              <a:ext cx="0" cy="109728"/>
-            </a:xfrm>
-            <a:prstGeom prst="line">
-              <a:avLst/>
-            </a:prstGeom>
-            <a:ln w="19050">
-              <a:solidFill>
-                <a:srgbClr val="000000"/>
-              </a:solidFill>
-            </a:ln>
-          </p:spPr>
-          <p:style>
-            <a:lnRef idx="2">
-              <a:schemeClr val="accent1"/>
-            </a:lnRef>
-            <a:fillRef idx="0">
-              <a:schemeClr val="accent1"/>
-            </a:fillRef>
-            <a:effectRef idx="1">
-              <a:schemeClr val="accent1"/>
-            </a:effectRef>
-            <a:fontRef idx="minor">
-              <a:schemeClr val="tx1"/>
-            </a:fontRef>
-          </p:style>
-        </p:cxnSp>
-        <p:cxnSp>
-          <p:nvCxnSpPr>
-            <p:cNvPr id="91" name="Connector 6"/>
-            <p:cNvCxnSpPr/>
-            <p:nvPr/>
-          </p:nvCxnSpPr>
-          <p:spPr>
-            <a:xfrm>
-              <a:off x="4572000" y="722376"/>
-              <a:ext cx="0" cy="27432"/>
-            </a:xfrm>
-            <a:prstGeom prst="line">
-              <a:avLst/>
-            </a:prstGeom>
-            <a:ln w="19050">
-              <a:solidFill>
-                <a:srgbClr val="000000"/>
-              </a:solidFill>
-            </a:ln>
-          </p:spPr>
-          <p:style>
-            <a:lnRef idx="2">
-              <a:schemeClr val="accent1"/>
-            </a:lnRef>
-            <a:fillRef idx="0">
-              <a:schemeClr val="accent1"/>
-            </a:fillRef>
-            <a:effectRef idx="1">
-              <a:schemeClr val="accent1"/>
-            </a:effectRef>
-            <a:fontRef idx="minor">
-              <a:schemeClr val="tx1"/>
-            </a:fontRef>
-          </p:style>
-        </p:cxnSp>
-        <p:cxnSp>
-          <p:nvCxnSpPr>
-            <p:cNvPr id="92" name="Connector 7"/>
-            <p:cNvCxnSpPr/>
-            <p:nvPr/>
-          </p:nvCxnSpPr>
-          <p:spPr>
-            <a:xfrm>
-              <a:off x="4114800" y="722376"/>
-              <a:ext cx="914400" cy="0"/>
-            </a:xfrm>
-            <a:prstGeom prst="line">
-              <a:avLst/>
-            </a:prstGeom>
-            <a:ln w="19050">
-              <a:solidFill>
-                <a:srgbClr val="000000"/>
-              </a:solidFill>
-            </a:ln>
-          </p:spPr>
-          <p:style>
-            <a:lnRef idx="2">
-              <a:schemeClr val="accent1"/>
-            </a:lnRef>
-            <a:fillRef idx="0">
-              <a:schemeClr val="accent1"/>
-            </a:fillRef>
-            <a:effectRef idx="1">
-              <a:schemeClr val="accent1"/>
-            </a:effectRef>
-            <a:fontRef idx="minor">
-              <a:schemeClr val="tx1"/>
-            </a:fontRef>
-          </p:style>
-        </p:cxnSp>
-        <p:cxnSp>
-          <p:nvCxnSpPr>
-            <p:cNvPr id="93" name="Connector 8"/>
-            <p:cNvCxnSpPr/>
-            <p:nvPr/>
-          </p:nvCxnSpPr>
-          <p:spPr>
-            <a:xfrm>
-              <a:off x="4114800" y="722376"/>
-              <a:ext cx="0" cy="27432"/>
-            </a:xfrm>
-            <a:prstGeom prst="line">
-              <a:avLst/>
-            </a:prstGeom>
-            <a:ln w="19050">
-              <a:solidFill>
-                <a:srgbClr val="000000"/>
-              </a:solidFill>
-            </a:ln>
-          </p:spPr>
-          <p:style>
-            <a:lnRef idx="2">
-              <a:schemeClr val="accent1"/>
-            </a:lnRef>
-            <a:fillRef idx="0">
-              <a:schemeClr val="accent1"/>
-            </a:fillRef>
-            <a:effectRef idx="1">
-              <a:schemeClr val="accent1"/>
-            </a:effectRef>
-            <a:fontRef idx="minor">
-              <a:schemeClr val="tx1"/>
-            </a:fontRef>
-          </p:style>
-        </p:cxnSp>
-        <p:cxnSp>
-          <p:nvCxnSpPr>
-            <p:cNvPr id="94" name="Connector 9"/>
-            <p:cNvCxnSpPr/>
-            <p:nvPr/>
-          </p:nvCxnSpPr>
-          <p:spPr>
-            <a:xfrm>
-              <a:off x="5029200" y="722376"/>
-              <a:ext cx="0" cy="27432"/>
-            </a:xfrm>
-            <a:prstGeom prst="line">
-              <a:avLst/>
-            </a:prstGeom>
-            <a:ln w="19050">
-              <a:solidFill>
-                <a:srgbClr val="000000"/>
-              </a:solidFill>
-            </a:ln>
-          </p:spPr>
-          <p:style>
-            <a:lnRef idx="2">
-              <a:schemeClr val="accent1"/>
-            </a:lnRef>
-            <a:fillRef idx="0">
-              <a:schemeClr val="accent1"/>
-            </a:fillRef>
-            <a:effectRef idx="1">
-              <a:schemeClr val="accent1"/>
-            </a:effectRef>
-            <a:fontRef idx="minor">
-              <a:schemeClr val="tx1"/>
-            </a:fontRef>
-          </p:style>
-        </p:cxnSp>
-        <p:sp>
-          <p:nvSpPr>
-            <p:cNvPr id="95" name="Rectangle 10"/>
-            <p:cNvSpPr/>
-            <p:nvPr/>
-          </p:nvSpPr>
-          <p:spPr>
-            <a:xfrm>
-              <a:off x="3771900" y="749808"/>
-              <a:ext cx="685800" cy="274320"/>
-            </a:xfrm>
-            <a:prstGeom prst="rect">
-              <a:avLst/>
-            </a:prstGeom>
-            <a:solidFill>
-              <a:srgbClr val="FFFFFF"/>
-            </a:solidFill>
-            <a:ln w="19050">
-              <a:solidFill>
-                <a:srgbClr val="000000"/>
-              </a:solidFill>
-            </a:ln>
-          </p:spPr>
-          <p:style>
-            <a:lnRef idx="1">
-              <a:schemeClr val="accent1"/>
-            </a:lnRef>
-            <a:fillRef idx="3">
-              <a:schemeClr val="accent1"/>
-            </a:fillRef>
-            <a:effectRef idx="2">
-              <a:schemeClr val="accent1"/>
-            </a:effectRef>
-            <a:fontRef idx="minor">
-              <a:schemeClr val="lt1"/>
-            </a:fontRef>
-          </p:style>
-          <p:txBody>
-            <a:bodyPr rtlCol="false" anchor="ctr"/>
-            <a:lstStyle/>
-            <a:p>
-              <a:pPr algn="ctr">
-                <a:defRPr sz="800">
-                  <a:solidFill>
-                    <a:srgbClr val="000000"/>
-                  </a:solidFill>
-                  <a:latin typeface="Times New Roman"/>
-                </a:defRPr>
-              </a:pPr>
-              <a:r>
-                <a:rPr/>
-                <a:t>X Avg Pool</a:t>
-              </a:r>
-              <a:endParaRPr/>
-            </a:p>
-          </p:txBody>
-        </p:sp>
-        <p:sp>
-          <p:nvSpPr>
-            <p:cNvPr id="96" name="Rectangle 11"/>
-            <p:cNvSpPr/>
-            <p:nvPr/>
-          </p:nvSpPr>
-          <p:spPr>
-            <a:xfrm>
-              <a:off x="4686300" y="749808"/>
-              <a:ext cx="685800" cy="274320"/>
-            </a:xfrm>
-            <a:prstGeom prst="rect">
-              <a:avLst/>
-            </a:prstGeom>
-            <a:solidFill>
-              <a:srgbClr val="FFFFFF"/>
-            </a:solidFill>
-            <a:ln w="19050">
-              <a:solidFill>
-                <a:srgbClr val="000000"/>
-              </a:solidFill>
-            </a:ln>
-          </p:spPr>
-          <p:style>
-            <a:lnRef idx="1">
-              <a:schemeClr val="accent1"/>
-            </a:lnRef>
-            <a:fillRef idx="3">
-              <a:schemeClr val="accent1"/>
-            </a:fillRef>
-            <a:effectRef idx="2">
-              <a:schemeClr val="accent1"/>
-            </a:effectRef>
-            <a:fontRef idx="minor">
-              <a:schemeClr val="lt1"/>
-            </a:fontRef>
-          </p:style>
-          <p:txBody>
-            <a:bodyPr rtlCol="false" anchor="ctr"/>
-            <a:lstStyle/>
-            <a:p>
-              <a:pPr algn="ctr">
-                <a:defRPr sz="800">
-                  <a:solidFill>
-                    <a:srgbClr val="000000"/>
-                  </a:solidFill>
-                  <a:latin typeface="Times New Roman"/>
-                </a:defRPr>
-              </a:pPr>
-              <a:r>
-                <a:rPr/>
-                <a:t>Y Avg Pool</a:t>
-              </a:r>
-              <a:endParaRPr/>
-            </a:p>
-          </p:txBody>
-        </p:sp>
-        <p:sp>
-          <p:nvSpPr>
-            <p:cNvPr id="97" name="TextBox 12"/>
-            <p:cNvSpPr txBox="true"/>
-            <p:nvPr/>
-          </p:nvSpPr>
-          <p:spPr>
-            <a:xfrm>
-              <a:off x="3086100" y="768096"/>
-              <a:ext cx="1371600" cy="228600"/>
-            </a:xfrm>
-            <a:prstGeom prst="rect">
-              <a:avLst/>
-            </a:prstGeom>
-            <a:noFill/>
-          </p:spPr>
-          <p:txBody>
-            <a:bodyPr wrap="none">
-              <a:spAutoFit/>
-            </a:bodyPr>
-            <a:lstStyle/>
-            <a:p>
-              <a:pPr>
-                <a:defRPr sz="800" i="true">
-                  <a:solidFill>
-                    <a:srgbClr val="505050"/>
-                  </a:solidFill>
-                  <a:latin typeface="Times New Roman"/>
-                </a:defRPr>
-              </a:pPr>
-              <a:r>
-                <a:rPr/>
-                <a:t>C×H×1</a:t>
-              </a:r>
-              <a:endParaRPr/>
-            </a:p>
-          </p:txBody>
-        </p:sp>
-        <p:sp>
-          <p:nvSpPr>
-            <p:cNvPr id="98" name="TextBox 13"/>
-            <p:cNvSpPr txBox="true"/>
-            <p:nvPr/>
-          </p:nvSpPr>
-          <p:spPr>
-            <a:xfrm>
-              <a:off x="5417820" y="768096"/>
-              <a:ext cx="1371600" cy="228600"/>
-            </a:xfrm>
-            <a:prstGeom prst="rect">
-              <a:avLst/>
-            </a:prstGeom>
-            <a:noFill/>
-          </p:spPr>
-          <p:txBody>
-            <a:bodyPr wrap="none">
-              <a:spAutoFit/>
-            </a:bodyPr>
-            <a:lstStyle/>
-            <a:p>
-              <a:pPr>
-                <a:defRPr sz="800" i="true">
-                  <a:solidFill>
-                    <a:srgbClr val="505050"/>
-                  </a:solidFill>
-                  <a:latin typeface="Times New Roman"/>
-                </a:defRPr>
-              </a:pPr>
-              <a:r>
-                <a:rPr/>
-                <a:t>C×1×W</a:t>
-              </a:r>
-              <a:endParaRPr/>
-            </a:p>
-          </p:txBody>
-        </p:sp>
-        <p:cxnSp>
-          <p:nvCxnSpPr>
-            <p:cNvPr id="99" name="Connector 14"/>
-            <p:cNvCxnSpPr/>
-            <p:nvPr/>
-          </p:nvCxnSpPr>
-          <p:spPr>
-            <a:xfrm>
-              <a:off x="4114800" y="1024128"/>
-              <a:ext cx="0" cy="82296"/>
-            </a:xfrm>
-            <a:prstGeom prst="line">
-              <a:avLst/>
-            </a:prstGeom>
-            <a:ln w="19050">
-              <a:solidFill>
-                <a:srgbClr val="000000"/>
-              </a:solidFill>
-            </a:ln>
-          </p:spPr>
-          <p:style>
-            <a:lnRef idx="2">
-              <a:schemeClr val="accent1"/>
-            </a:lnRef>
-            <a:fillRef idx="0">
-              <a:schemeClr val="accent1"/>
-            </a:fillRef>
-            <a:effectRef idx="1">
-              <a:schemeClr val="accent1"/>
-            </a:effectRef>
-            <a:fontRef idx="minor">
-              <a:schemeClr val="tx1"/>
-            </a:fontRef>
-          </p:style>
-        </p:cxnSp>
-        <p:cxnSp>
-          <p:nvCxnSpPr>
-            <p:cNvPr id="100" name="Connector 15"/>
-            <p:cNvCxnSpPr/>
-            <p:nvPr/>
-          </p:nvCxnSpPr>
-          <p:spPr>
-            <a:xfrm>
-              <a:off x="5029200" y="1024128"/>
-              <a:ext cx="0" cy="82296"/>
-            </a:xfrm>
-            <a:prstGeom prst="line">
-              <a:avLst/>
-            </a:prstGeom>
-            <a:ln w="19050">
-              <a:solidFill>
-                <a:srgbClr val="000000"/>
-              </a:solidFill>
-            </a:ln>
-          </p:spPr>
-          <p:style>
-            <a:lnRef idx="2">
-              <a:schemeClr val="accent1"/>
-            </a:lnRef>
-            <a:fillRef idx="0">
-              <a:schemeClr val="accent1"/>
-            </a:fillRef>
-            <a:effectRef idx="1">
-              <a:schemeClr val="accent1"/>
-            </a:effectRef>
-            <a:fontRef idx="minor">
-              <a:schemeClr val="tx1"/>
-            </a:fontRef>
-          </p:style>
-        </p:cxnSp>
-        <p:cxnSp>
-          <p:nvCxnSpPr>
-            <p:cNvPr id="101" name="Connector 16"/>
-            <p:cNvCxnSpPr/>
-            <p:nvPr/>
-          </p:nvCxnSpPr>
-          <p:spPr>
-            <a:xfrm>
-              <a:off x="4114800" y="1106424"/>
-              <a:ext cx="914400" cy="0"/>
-            </a:xfrm>
-            <a:prstGeom prst="line">
-              <a:avLst/>
-            </a:prstGeom>
-            <a:ln w="19050">
-              <a:solidFill>
-                <a:srgbClr val="000000"/>
-              </a:solidFill>
-            </a:ln>
-          </p:spPr>
-          <p:style>
-            <a:lnRef idx="2">
-              <a:schemeClr val="accent1"/>
-            </a:lnRef>
-            <a:fillRef idx="0">
-              <a:schemeClr val="accent1"/>
-            </a:fillRef>
-            <a:effectRef idx="1">
-              <a:schemeClr val="accent1"/>
-            </a:effectRef>
-            <a:fontRef idx="minor">
-              <a:schemeClr val="tx1"/>
-            </a:fontRef>
-          </p:style>
-        </p:cxnSp>
-        <p:cxnSp>
-          <p:nvCxnSpPr>
-            <p:cNvPr id="102" name="Connector 17"/>
-            <p:cNvCxnSpPr/>
-            <p:nvPr/>
-          </p:nvCxnSpPr>
-          <p:spPr>
-            <a:xfrm>
-              <a:off x="4572000" y="1106424"/>
-              <a:ext cx="0" cy="27432"/>
-            </a:xfrm>
-            <a:prstGeom prst="line">
-              <a:avLst/>
-            </a:prstGeom>
-            <a:ln w="19050">
-              <a:solidFill>
-                <a:srgbClr val="000000"/>
-              </a:solidFill>
-            </a:ln>
-          </p:spPr>
-          <p:style>
-            <a:lnRef idx="2">
-              <a:schemeClr val="accent1"/>
-            </a:lnRef>
-            <a:fillRef idx="0">
-              <a:schemeClr val="accent1"/>
-            </a:fillRef>
-            <a:effectRef idx="1">
-              <a:schemeClr val="accent1"/>
-            </a:effectRef>
-            <a:fontRef idx="minor">
-              <a:schemeClr val="tx1"/>
-            </a:fontRef>
-          </p:style>
-        </p:cxnSp>
-        <p:sp>
-          <p:nvSpPr>
-            <p:cNvPr id="103" name="Rectangle 18"/>
-            <p:cNvSpPr/>
-            <p:nvPr/>
-          </p:nvSpPr>
-          <p:spPr>
-            <a:xfrm>
-              <a:off x="3794760" y="1133856"/>
-              <a:ext cx="1554480" cy="320040"/>
-            </a:xfrm>
-            <a:prstGeom prst="rect">
-              <a:avLst/>
-            </a:prstGeom>
-            <a:solidFill>
-              <a:srgbClr val="FFFFFF"/>
-            </a:solidFill>
-            <a:ln w="19050">
-              <a:solidFill>
-                <a:srgbClr val="000000"/>
-              </a:solidFill>
-            </a:ln>
-          </p:spPr>
-          <p:style>
-            <a:lnRef idx="1">
-              <a:schemeClr val="accent1"/>
-            </a:lnRef>
-            <a:fillRef idx="3">
-              <a:schemeClr val="accent1"/>
-            </a:fillRef>
-            <a:effectRef idx="2">
-              <a:schemeClr val="accent1"/>
-            </a:effectRef>
-            <a:fontRef idx="minor">
-              <a:schemeClr val="lt1"/>
-            </a:fontRef>
-          </p:style>
-          <p:txBody>
-            <a:bodyPr rtlCol="false" anchor="ctr"/>
-            <a:lstStyle/>
-            <a:p>
-              <a:pPr algn="ctr">
-                <a:defRPr sz="1000">
-                  <a:solidFill>
-                    <a:srgbClr val="000000"/>
-                  </a:solidFill>
-                  <a:latin typeface="Times New Roman"/>
-                </a:defRPr>
-              </a:pPr>
-              <a:r>
-                <a:rPr/>
-                <a:t>Concat + Conv2d</a:t>
-              </a:r>
-              <a:endParaRPr/>
-            </a:p>
-          </p:txBody>
-        </p:sp>
-        <p:cxnSp>
-          <p:nvCxnSpPr>
-            <p:cNvPr id="104" name="Connector 19"/>
-            <p:cNvCxnSpPr/>
-            <p:nvPr/>
-          </p:nvCxnSpPr>
-          <p:spPr>
-            <a:xfrm>
-              <a:off x="4572000" y="1453895"/>
-              <a:ext cx="0" cy="109729"/>
-            </a:xfrm>
-            <a:prstGeom prst="line">
-              <a:avLst/>
-            </a:prstGeom>
-            <a:ln w="19050">
-              <a:solidFill>
-                <a:srgbClr val="000000"/>
-              </a:solidFill>
-            </a:ln>
-          </p:spPr>
-          <p:style>
-            <a:lnRef idx="2">
-              <a:schemeClr val="accent1"/>
-            </a:lnRef>
-            <a:fillRef idx="0">
-              <a:schemeClr val="accent1"/>
-            </a:fillRef>
-            <a:effectRef idx="1">
-              <a:schemeClr val="accent1"/>
-            </a:effectRef>
-            <a:fontRef idx="minor">
-              <a:schemeClr val="tx1"/>
-            </a:fontRef>
-          </p:style>
-        </p:cxnSp>
-        <p:sp>
-          <p:nvSpPr>
-            <p:cNvPr id="105" name="Rectangle 20"/>
-            <p:cNvSpPr/>
-            <p:nvPr/>
-          </p:nvSpPr>
-          <p:spPr>
-            <a:xfrm>
-              <a:off x="3794760" y="1563624"/>
-              <a:ext cx="1554480" cy="320040"/>
-            </a:xfrm>
-            <a:prstGeom prst="rect">
-              <a:avLst/>
-            </a:prstGeom>
-            <a:solidFill>
-              <a:srgbClr val="FFFFFF"/>
-            </a:solidFill>
-            <a:ln w="19050">
-              <a:solidFill>
-                <a:srgbClr val="000000"/>
-              </a:solidFill>
-            </a:ln>
-          </p:spPr>
-          <p:style>
-            <a:lnRef idx="1">
-              <a:schemeClr val="accent1"/>
-            </a:lnRef>
-            <a:fillRef idx="3">
-              <a:schemeClr val="accent1"/>
-            </a:fillRef>
-            <a:effectRef idx="2">
-              <a:schemeClr val="accent1"/>
-            </a:effectRef>
-            <a:fontRef idx="minor">
-              <a:schemeClr val="lt1"/>
-            </a:fontRef>
-          </p:style>
-          <p:txBody>
-            <a:bodyPr rtlCol="false" anchor="ctr"/>
-            <a:lstStyle/>
-            <a:p>
-              <a:pPr algn="ctr">
-                <a:defRPr sz="1000">
-                  <a:solidFill>
-                    <a:srgbClr val="000000"/>
-                  </a:solidFill>
-                  <a:latin typeface="Times New Roman"/>
-                </a:defRPr>
-              </a:pPr>
-              <a:r>
-                <a:rPr/>
-                <a:t>BatchNorm + Non-linear</a:t>
-              </a:r>
-              <a:endParaRPr/>
-            </a:p>
-          </p:txBody>
-        </p:sp>
-        <p:cxnSp>
-          <p:nvCxnSpPr>
-            <p:cNvPr id="106" name="Connector 21"/>
-            <p:cNvCxnSpPr/>
-            <p:nvPr/>
-          </p:nvCxnSpPr>
-          <p:spPr>
-            <a:xfrm>
-              <a:off x="4572000" y="1883663"/>
-              <a:ext cx="0" cy="82297"/>
-            </a:xfrm>
-            <a:prstGeom prst="line">
-              <a:avLst/>
-            </a:prstGeom>
-            <a:ln w="19050">
-              <a:solidFill>
-                <a:srgbClr val="000000"/>
-              </a:solidFill>
-            </a:ln>
-          </p:spPr>
-          <p:style>
-            <a:lnRef idx="2">
-              <a:schemeClr val="accent1"/>
-            </a:lnRef>
-            <a:fillRef idx="0">
-              <a:schemeClr val="accent1"/>
-            </a:fillRef>
-            <a:effectRef idx="1">
-              <a:schemeClr val="accent1"/>
-            </a:effectRef>
-            <a:fontRef idx="minor">
-              <a:schemeClr val="tx1"/>
-            </a:fontRef>
-          </p:style>
-        </p:cxnSp>
-        <p:sp>
-          <p:nvSpPr>
-            <p:cNvPr id="107" name="TextBox 22"/>
-            <p:cNvSpPr txBox="true"/>
-            <p:nvPr/>
-          </p:nvSpPr>
-          <p:spPr>
-            <a:xfrm rot="0" flipH="false" flipV="false">
-              <a:off x="4407408" y="1947672"/>
-              <a:ext cx="1371600" cy="228600"/>
-            </a:xfrm>
-            <a:prstGeom prst="rect">
-              <a:avLst/>
-            </a:prstGeom>
-            <a:noFill/>
-          </p:spPr>
-          <p:txBody>
-            <a:bodyPr wrap="none">
-              <a:spAutoFit/>
-            </a:bodyPr>
-            <a:lstStyle/>
-            <a:p>
-              <a:pPr>
-                <a:defRPr sz="800" i="true">
-                  <a:solidFill>
-                    <a:srgbClr val="505050"/>
-                  </a:solidFill>
-                  <a:latin typeface="Times New Roman"/>
-                </a:defRPr>
-              </a:pPr>
-              <a:r>
-                <a:rPr/>
-                <a:t>split</a:t>
-              </a:r>
-              <a:endParaRPr/>
-            </a:p>
-          </p:txBody>
-        </p:sp>
-        <p:cxnSp>
-          <p:nvCxnSpPr>
-            <p:cNvPr id="108" name="Connector 23"/>
-            <p:cNvCxnSpPr/>
-            <p:nvPr/>
-          </p:nvCxnSpPr>
-          <p:spPr>
-            <a:xfrm>
-              <a:off x="4114800" y="1965960"/>
-              <a:ext cx="914400" cy="0"/>
-            </a:xfrm>
-            <a:prstGeom prst="line">
-              <a:avLst/>
-            </a:prstGeom>
-            <a:ln w="19050">
-              <a:solidFill>
-                <a:srgbClr val="000000"/>
-              </a:solidFill>
-            </a:ln>
-          </p:spPr>
-          <p:style>
-            <a:lnRef idx="2">
-              <a:schemeClr val="accent1"/>
-            </a:lnRef>
-            <a:fillRef idx="0">
-              <a:schemeClr val="accent1"/>
-            </a:fillRef>
-            <a:effectRef idx="1">
-              <a:schemeClr val="accent1"/>
-            </a:effectRef>
-            <a:fontRef idx="minor">
-              <a:schemeClr val="tx1"/>
-            </a:fontRef>
-          </p:style>
-        </p:cxnSp>
-        <p:cxnSp>
-          <p:nvCxnSpPr>
-            <p:cNvPr id="109" name="Connector 24"/>
-            <p:cNvCxnSpPr/>
-            <p:nvPr/>
-          </p:nvCxnSpPr>
-          <p:spPr>
-            <a:xfrm>
-              <a:off x="4114800" y="1965960"/>
-              <a:ext cx="0" cy="27431"/>
-            </a:xfrm>
-            <a:prstGeom prst="line">
-              <a:avLst/>
-            </a:prstGeom>
-            <a:ln w="19050">
-              <a:solidFill>
-                <a:srgbClr val="000000"/>
-              </a:solidFill>
-            </a:ln>
-          </p:spPr>
-          <p:style>
-            <a:lnRef idx="2">
-              <a:schemeClr val="accent1"/>
-            </a:lnRef>
-            <a:fillRef idx="0">
-              <a:schemeClr val="accent1"/>
-            </a:fillRef>
-            <a:effectRef idx="1">
-              <a:schemeClr val="accent1"/>
-            </a:effectRef>
-            <a:fontRef idx="minor">
-              <a:schemeClr val="tx1"/>
-            </a:fontRef>
-          </p:style>
-        </p:cxnSp>
-        <p:cxnSp>
-          <p:nvCxnSpPr>
-            <p:cNvPr id="110" name="Connector 25"/>
-            <p:cNvCxnSpPr/>
-            <p:nvPr/>
-          </p:nvCxnSpPr>
-          <p:spPr>
-            <a:xfrm>
-              <a:off x="5029200" y="1965960"/>
-              <a:ext cx="0" cy="27431"/>
-            </a:xfrm>
-            <a:prstGeom prst="line">
-              <a:avLst/>
-            </a:prstGeom>
-            <a:ln w="19050">
-              <a:solidFill>
-                <a:srgbClr val="000000"/>
-              </a:solidFill>
-            </a:ln>
-          </p:spPr>
-          <p:style>
-            <a:lnRef idx="2">
-              <a:schemeClr val="accent1"/>
-            </a:lnRef>
-            <a:fillRef idx="0">
-              <a:schemeClr val="accent1"/>
-            </a:fillRef>
-            <a:effectRef idx="1">
-              <a:schemeClr val="accent1"/>
-            </a:effectRef>
-            <a:fontRef idx="minor">
-              <a:schemeClr val="tx1"/>
-            </a:fontRef>
-          </p:style>
-        </p:cxnSp>
-        <p:sp>
-          <p:nvSpPr>
-            <p:cNvPr id="111" name="Rectangle 26"/>
-            <p:cNvSpPr/>
-            <p:nvPr/>
-          </p:nvSpPr>
-          <p:spPr>
-            <a:xfrm>
-              <a:off x="3771900" y="1993391"/>
-              <a:ext cx="685800" cy="274320"/>
-            </a:xfrm>
-            <a:prstGeom prst="rect">
-              <a:avLst/>
-            </a:prstGeom>
-            <a:solidFill>
-              <a:srgbClr val="FFFFFF"/>
-            </a:solidFill>
-            <a:ln w="19050">
-              <a:solidFill>
-                <a:srgbClr val="000000"/>
-              </a:solidFill>
-            </a:ln>
-          </p:spPr>
-          <p:style>
-            <a:lnRef idx="1">
-              <a:schemeClr val="accent1"/>
-            </a:lnRef>
-            <a:fillRef idx="3">
-              <a:schemeClr val="accent1"/>
-            </a:fillRef>
-            <a:effectRef idx="2">
-              <a:schemeClr val="accent1"/>
-            </a:effectRef>
-            <a:fontRef idx="minor">
-              <a:schemeClr val="lt1"/>
-            </a:fontRef>
-          </p:style>
-          <p:txBody>
-            <a:bodyPr rtlCol="false" anchor="ctr"/>
-            <a:lstStyle/>
-            <a:p>
-              <a:pPr algn="ctr">
-                <a:defRPr sz="900">
-                  <a:solidFill>
-                    <a:srgbClr val="000000"/>
-                  </a:solidFill>
-                  <a:latin typeface="Times New Roman"/>
-                </a:defRPr>
-              </a:pPr>
-              <a:r>
-                <a:rPr/>
-                <a:t>Conv2d</a:t>
-              </a:r>
-              <a:endParaRPr/>
-            </a:p>
-          </p:txBody>
-        </p:sp>
-        <p:sp>
-          <p:nvSpPr>
-            <p:cNvPr id="112" name="Rectangle 27"/>
-            <p:cNvSpPr/>
-            <p:nvPr/>
-          </p:nvSpPr>
-          <p:spPr>
-            <a:xfrm>
-              <a:off x="4686300" y="1993391"/>
-              <a:ext cx="685800" cy="274320"/>
-            </a:xfrm>
-            <a:prstGeom prst="rect">
-              <a:avLst/>
-            </a:prstGeom>
-            <a:solidFill>
-              <a:srgbClr val="FFFFFF"/>
-            </a:solidFill>
-            <a:ln w="19050">
-              <a:solidFill>
-                <a:srgbClr val="000000"/>
-              </a:solidFill>
-            </a:ln>
-          </p:spPr>
-          <p:style>
-            <a:lnRef idx="1">
-              <a:schemeClr val="accent1"/>
-            </a:lnRef>
-            <a:fillRef idx="3">
-              <a:schemeClr val="accent1"/>
-            </a:fillRef>
-            <a:effectRef idx="2">
-              <a:schemeClr val="accent1"/>
-            </a:effectRef>
-            <a:fontRef idx="minor">
-              <a:schemeClr val="lt1"/>
-            </a:fontRef>
-          </p:style>
-          <p:txBody>
-            <a:bodyPr rtlCol="false" anchor="ctr"/>
-            <a:lstStyle/>
-            <a:p>
-              <a:pPr algn="ctr">
-                <a:defRPr sz="900">
-                  <a:solidFill>
-                    <a:srgbClr val="000000"/>
-                  </a:solidFill>
-                  <a:latin typeface="Times New Roman"/>
-                </a:defRPr>
-              </a:pPr>
-              <a:r>
-                <a:rPr/>
-                <a:t>Conv2d</a:t>
-              </a:r>
-              <a:endParaRPr/>
-            </a:p>
-          </p:txBody>
-        </p:sp>
-        <p:cxnSp>
-          <p:nvCxnSpPr>
-            <p:cNvPr id="113" name="Connector 28"/>
-            <p:cNvCxnSpPr/>
-            <p:nvPr/>
-          </p:nvCxnSpPr>
-          <p:spPr>
-            <a:xfrm>
-              <a:off x="4114800" y="2267711"/>
-              <a:ext cx="0" cy="109728"/>
-            </a:xfrm>
-            <a:prstGeom prst="line">
-              <a:avLst/>
-            </a:prstGeom>
-            <a:ln w="19050">
-              <a:solidFill>
-                <a:srgbClr val="000000"/>
-              </a:solidFill>
-            </a:ln>
-          </p:spPr>
-          <p:style>
-            <a:lnRef idx="2">
-              <a:schemeClr val="accent1"/>
-            </a:lnRef>
-            <a:fillRef idx="0">
-              <a:schemeClr val="accent1"/>
-            </a:fillRef>
-            <a:effectRef idx="1">
-              <a:schemeClr val="accent1"/>
-            </a:effectRef>
-            <a:fontRef idx="minor">
-              <a:schemeClr val="tx1"/>
-            </a:fontRef>
-          </p:style>
-        </p:cxnSp>
-        <p:cxnSp>
-          <p:nvCxnSpPr>
-            <p:cNvPr id="114" name="Connector 29"/>
-            <p:cNvCxnSpPr/>
-            <p:nvPr/>
-          </p:nvCxnSpPr>
-          <p:spPr>
-            <a:xfrm>
-              <a:off x="5029200" y="2267711"/>
-              <a:ext cx="0" cy="109728"/>
-            </a:xfrm>
-            <a:prstGeom prst="line">
-              <a:avLst/>
-            </a:prstGeom>
-            <a:ln w="19050">
-              <a:solidFill>
-                <a:srgbClr val="000000"/>
-              </a:solidFill>
-            </a:ln>
-          </p:spPr>
-          <p:style>
-            <a:lnRef idx="2">
-              <a:schemeClr val="accent1"/>
-            </a:lnRef>
-            <a:fillRef idx="0">
-              <a:schemeClr val="accent1"/>
-            </a:fillRef>
-            <a:effectRef idx="1">
-              <a:schemeClr val="accent1"/>
-            </a:effectRef>
-            <a:fontRef idx="minor">
-              <a:schemeClr val="tx1"/>
-            </a:fontRef>
-          </p:style>
-        </p:cxnSp>
-        <p:sp>
-          <p:nvSpPr>
-            <p:cNvPr id="115" name="Rectangle 30"/>
-            <p:cNvSpPr/>
-            <p:nvPr/>
-          </p:nvSpPr>
-          <p:spPr>
-            <a:xfrm>
-              <a:off x="3771900" y="2377439"/>
-              <a:ext cx="685800" cy="274320"/>
-            </a:xfrm>
-            <a:prstGeom prst="rect">
-              <a:avLst/>
-            </a:prstGeom>
-            <a:solidFill>
-              <a:srgbClr val="FFFFFF"/>
-            </a:solidFill>
-            <a:ln w="19050">
-              <a:solidFill>
-                <a:srgbClr val="000000"/>
-              </a:solidFill>
-            </a:ln>
-          </p:spPr>
-          <p:style>
-            <a:lnRef idx="1">
-              <a:schemeClr val="accent1"/>
-            </a:lnRef>
-            <a:fillRef idx="3">
-              <a:schemeClr val="accent1"/>
-            </a:fillRef>
-            <a:effectRef idx="2">
-              <a:schemeClr val="accent1"/>
-            </a:effectRef>
-            <a:fontRef idx="minor">
-              <a:schemeClr val="lt1"/>
-            </a:fontRef>
-          </p:style>
-          <p:txBody>
-            <a:bodyPr rtlCol="false" anchor="ctr"/>
-            <a:lstStyle/>
-            <a:p>
-              <a:pPr algn="ctr">
-                <a:defRPr sz="900">
-                  <a:solidFill>
-                    <a:srgbClr val="000000"/>
-                  </a:solidFill>
-                  <a:latin typeface="Times New Roman"/>
-                </a:defRPr>
-              </a:pPr>
-              <a:r>
-                <a:rPr/>
-                <a:t>Sigmoid</a:t>
-              </a:r>
-              <a:endParaRPr/>
-            </a:p>
-          </p:txBody>
-        </p:sp>
-        <p:sp>
-          <p:nvSpPr>
-            <p:cNvPr id="116" name="Rectangle 31"/>
-            <p:cNvSpPr/>
-            <p:nvPr/>
-          </p:nvSpPr>
-          <p:spPr>
-            <a:xfrm>
-              <a:off x="4686300" y="2377439"/>
-              <a:ext cx="685800" cy="274320"/>
-            </a:xfrm>
-            <a:prstGeom prst="rect">
-              <a:avLst/>
-            </a:prstGeom>
-            <a:solidFill>
-              <a:srgbClr val="FFFFFF"/>
-            </a:solidFill>
-            <a:ln w="19050">
-              <a:solidFill>
-                <a:srgbClr val="000000"/>
-              </a:solidFill>
-            </a:ln>
-          </p:spPr>
-          <p:style>
-            <a:lnRef idx="1">
-              <a:schemeClr val="accent1"/>
-            </a:lnRef>
-            <a:fillRef idx="3">
-              <a:schemeClr val="accent1"/>
-            </a:fillRef>
-            <a:effectRef idx="2">
-              <a:schemeClr val="accent1"/>
-            </a:effectRef>
-            <a:fontRef idx="minor">
-              <a:schemeClr val="lt1"/>
-            </a:fontRef>
-          </p:style>
-          <p:txBody>
-            <a:bodyPr rtlCol="false" anchor="ctr"/>
-            <a:lstStyle/>
-            <a:p>
-              <a:pPr algn="ctr">
-                <a:defRPr sz="900">
-                  <a:solidFill>
-                    <a:srgbClr val="000000"/>
-                  </a:solidFill>
-                  <a:latin typeface="Times New Roman"/>
-                </a:defRPr>
-              </a:pPr>
-              <a:r>
-                <a:rPr/>
-                <a:t>Sigmoid</a:t>
-              </a:r>
-              <a:endParaRPr/>
-            </a:p>
-          </p:txBody>
-        </p:sp>
-        <p:cxnSp>
-          <p:nvCxnSpPr>
-            <p:cNvPr id="117" name="Connector 32"/>
-            <p:cNvCxnSpPr/>
-            <p:nvPr/>
-          </p:nvCxnSpPr>
-          <p:spPr>
-            <a:xfrm>
-              <a:off x="4114800" y="2651759"/>
-              <a:ext cx="0" cy="155448"/>
-            </a:xfrm>
-            <a:prstGeom prst="line">
-              <a:avLst/>
-            </a:prstGeom>
-            <a:ln w="19050">
-              <a:solidFill>
-                <a:srgbClr val="000000"/>
-              </a:solidFill>
-            </a:ln>
-          </p:spPr>
-          <p:style>
-            <a:lnRef idx="2">
-              <a:schemeClr val="accent1"/>
-            </a:lnRef>
-            <a:fillRef idx="0">
-              <a:schemeClr val="accent1"/>
-            </a:fillRef>
-            <a:effectRef idx="1">
-              <a:schemeClr val="accent1"/>
-            </a:effectRef>
-            <a:fontRef idx="minor">
-              <a:schemeClr val="tx1"/>
-            </a:fontRef>
-          </p:style>
-        </p:cxnSp>
-        <p:cxnSp>
-          <p:nvCxnSpPr>
-            <p:cNvPr id="118" name="Connector 33"/>
-            <p:cNvCxnSpPr/>
-            <p:nvPr/>
-          </p:nvCxnSpPr>
-          <p:spPr>
-            <a:xfrm>
-              <a:off x="5029200" y="2651759"/>
-              <a:ext cx="0" cy="155448"/>
-            </a:xfrm>
-            <a:prstGeom prst="line">
-              <a:avLst/>
-            </a:prstGeom>
-            <a:ln w="19050">
-              <a:solidFill>
-                <a:srgbClr val="000000"/>
-              </a:solidFill>
-            </a:ln>
-          </p:spPr>
-          <p:style>
-            <a:lnRef idx="2">
-              <a:schemeClr val="accent1"/>
-            </a:lnRef>
-            <a:fillRef idx="0">
-              <a:schemeClr val="accent1"/>
-            </a:fillRef>
-            <a:effectRef idx="1">
-              <a:schemeClr val="accent1"/>
-            </a:effectRef>
-            <a:fontRef idx="minor">
-              <a:schemeClr val="tx1"/>
-            </a:fontRef>
-          </p:style>
-        </p:cxnSp>
-        <p:cxnSp>
-          <p:nvCxnSpPr>
-            <p:cNvPr id="119" name="Connector 34"/>
-            <p:cNvCxnSpPr/>
-            <p:nvPr/>
-          </p:nvCxnSpPr>
-          <p:spPr>
-            <a:xfrm flipH="true">
-              <a:off x="3794760" y="2807207"/>
-              <a:ext cx="320040" cy="0"/>
-            </a:xfrm>
-            <a:prstGeom prst="line">
-              <a:avLst/>
-            </a:prstGeom>
-            <a:ln w="19050">
-              <a:solidFill>
-                <a:srgbClr val="000000"/>
-              </a:solidFill>
-            </a:ln>
-          </p:spPr>
-          <p:style>
-            <a:lnRef idx="2">
-              <a:schemeClr val="accent1"/>
-            </a:lnRef>
-            <a:fillRef idx="0">
-              <a:schemeClr val="accent1"/>
-            </a:fillRef>
-            <a:effectRef idx="1">
-              <a:schemeClr val="accent1"/>
-            </a:effectRef>
-            <a:fontRef idx="minor">
-              <a:schemeClr val="tx1"/>
-            </a:fontRef>
-          </p:style>
-        </p:cxnSp>
-        <p:cxnSp>
-          <p:nvCxnSpPr>
-            <p:cNvPr id="120" name="Connector 35"/>
-            <p:cNvCxnSpPr/>
-            <p:nvPr/>
-          </p:nvCxnSpPr>
-          <p:spPr>
-            <a:xfrm>
-              <a:off x="5029200" y="2807207"/>
-              <a:ext cx="320040" cy="0"/>
-            </a:xfrm>
-            <a:prstGeom prst="line">
-              <a:avLst/>
-            </a:prstGeom>
-            <a:ln w="19050">
-              <a:solidFill>
-                <a:srgbClr val="000000"/>
-              </a:solidFill>
-            </a:ln>
-          </p:spPr>
-          <p:style>
-            <a:lnRef idx="2">
-              <a:schemeClr val="accent1"/>
-            </a:lnRef>
-            <a:fillRef idx="0">
-              <a:schemeClr val="accent1"/>
-            </a:fillRef>
-            <a:effectRef idx="1">
-              <a:schemeClr val="accent1"/>
-            </a:effectRef>
-            <a:fontRef idx="minor">
-              <a:schemeClr val="tx1"/>
-            </a:fontRef>
-          </p:style>
-        </p:cxnSp>
-        <p:sp>
-          <p:nvSpPr>
-            <p:cNvPr id="121" name="Rectangle 36"/>
-            <p:cNvSpPr/>
-            <p:nvPr/>
-          </p:nvSpPr>
-          <p:spPr>
-            <a:xfrm>
-              <a:off x="3794760" y="2807207"/>
-              <a:ext cx="1554480" cy="320040"/>
-            </a:xfrm>
-            <a:prstGeom prst="rect">
-              <a:avLst/>
-            </a:prstGeom>
-            <a:solidFill>
-              <a:srgbClr val="FFFFFF"/>
-            </a:solidFill>
-            <a:ln w="19050">
-              <a:solidFill>
-                <a:srgbClr val="000000"/>
-              </a:solidFill>
-            </a:ln>
-          </p:spPr>
-          <p:style>
-            <a:lnRef idx="1">
-              <a:schemeClr val="accent1"/>
-            </a:lnRef>
-            <a:fillRef idx="3">
-              <a:schemeClr val="accent1"/>
-            </a:fillRef>
-            <a:effectRef idx="2">
-              <a:schemeClr val="accent1"/>
-            </a:effectRef>
-            <a:fontRef idx="minor">
-              <a:schemeClr val="lt1"/>
-            </a:fontRef>
-          </p:style>
-          <p:txBody>
-            <a:bodyPr rtlCol="false" anchor="ctr"/>
-            <a:lstStyle/>
-            <a:p>
-              <a:pPr algn="ctr">
-                <a:defRPr sz="1000">
-                  <a:solidFill>
-                    <a:srgbClr val="000000"/>
-                  </a:solidFill>
-                  <a:latin typeface="Times New Roman"/>
-                </a:defRPr>
-              </a:pPr>
-              <a:r>
-                <a:rPr/>
-                <a:t>Re-weight</a:t>
-              </a:r>
-              <a:endParaRPr/>
-            </a:p>
-          </p:txBody>
-        </p:sp>
-        <p:cxnSp>
-          <p:nvCxnSpPr>
-            <p:cNvPr id="122" name="Connector 37"/>
-            <p:cNvCxnSpPr/>
-            <p:nvPr/>
-          </p:nvCxnSpPr>
-          <p:spPr>
-            <a:xfrm>
-              <a:off x="4572000" y="3127247"/>
-              <a:ext cx="0" cy="109728"/>
-            </a:xfrm>
-            <a:prstGeom prst="line">
-              <a:avLst/>
-            </a:prstGeom>
-            <a:ln w="19050">
-              <a:solidFill>
-                <a:srgbClr val="000000"/>
-              </a:solidFill>
-            </a:ln>
-          </p:spPr>
-          <p:style>
-            <a:lnRef idx="2">
-              <a:schemeClr val="accent1"/>
-            </a:lnRef>
-            <a:fillRef idx="0">
-              <a:schemeClr val="accent1"/>
-            </a:fillRef>
-            <a:effectRef idx="1">
-              <a:schemeClr val="accent1"/>
-            </a:effectRef>
-            <a:fontRef idx="minor">
-              <a:schemeClr val="tx1"/>
-            </a:fontRef>
-          </p:style>
-        </p:cxnSp>
-        <p:cxnSp>
-          <p:nvCxnSpPr>
-            <p:cNvPr id="123" name="Connector 38"/>
-            <p:cNvCxnSpPr/>
-            <p:nvPr/>
-          </p:nvCxnSpPr>
-          <p:spPr>
-            <a:xfrm>
-              <a:off x="3291840" y="640080"/>
-              <a:ext cx="0" cy="2711195"/>
-            </a:xfrm>
-            <a:prstGeom prst="line">
-              <a:avLst/>
-            </a:prstGeom>
-            <a:ln w="19050">
-              <a:solidFill>
-                <a:srgbClr val="000000"/>
-              </a:solidFill>
-            </a:ln>
-          </p:spPr>
-          <p:style>
-            <a:lnRef idx="2">
-              <a:schemeClr val="accent1"/>
-            </a:lnRef>
-            <a:fillRef idx="0">
-              <a:schemeClr val="accent1"/>
-            </a:fillRef>
-            <a:effectRef idx="1">
-              <a:schemeClr val="accent1"/>
-            </a:effectRef>
-            <a:fontRef idx="minor">
-              <a:schemeClr val="tx1"/>
-            </a:fontRef>
-          </p:style>
-        </p:cxnSp>
-        <p:cxnSp>
-          <p:nvCxnSpPr>
-            <p:cNvPr id="124" name="Connector 39"/>
-            <p:cNvCxnSpPr/>
-            <p:nvPr/>
-          </p:nvCxnSpPr>
-          <p:spPr>
-            <a:xfrm>
-              <a:off x="3291840" y="3351275"/>
-              <a:ext cx="1165860" cy="0"/>
-            </a:xfrm>
-            <a:prstGeom prst="line">
-              <a:avLst/>
-            </a:prstGeom>
-            <a:ln w="19050">
-              <a:solidFill>
-                <a:srgbClr val="000000"/>
-              </a:solidFill>
-            </a:ln>
-          </p:spPr>
-          <p:style>
-            <a:lnRef idx="2">
-              <a:schemeClr val="accent1"/>
-            </a:lnRef>
-            <a:fillRef idx="0">
-              <a:schemeClr val="accent1"/>
-            </a:fillRef>
-            <a:effectRef idx="1">
-              <a:schemeClr val="accent1"/>
-            </a:effectRef>
-            <a:fontRef idx="minor">
-              <a:schemeClr val="tx1"/>
-            </a:fontRef>
-          </p:style>
-        </p:cxnSp>
-        <p:sp>
-          <p:nvSpPr>
-            <p:cNvPr id="125" name="Oval 40"/>
-            <p:cNvSpPr/>
-            <p:nvPr/>
-          </p:nvSpPr>
-          <p:spPr>
-            <a:xfrm>
-              <a:off x="4457700" y="3236975"/>
-              <a:ext cx="228600" cy="228600"/>
-            </a:xfrm>
-            <a:prstGeom prst="ellipse">
-              <a:avLst/>
-            </a:prstGeom>
-            <a:solidFill>
-              <a:srgbClr val="FFFFFF"/>
-            </a:solidFill>
-            <a:ln w="19050">
-              <a:solidFill>
-                <a:srgbClr val="000000"/>
-              </a:solidFill>
-            </a:ln>
-          </p:spPr>
-          <p:style>
-            <a:lnRef idx="1">
-              <a:schemeClr val="accent1"/>
-            </a:lnRef>
-            <a:fillRef idx="3">
-              <a:schemeClr val="accent1"/>
-            </a:fillRef>
-            <a:effectRef idx="2">
-              <a:schemeClr val="accent1"/>
-            </a:effectRef>
-            <a:fontRef idx="minor">
-              <a:schemeClr val="lt1"/>
-            </a:fontRef>
-          </p:style>
-          <p:txBody>
-            <a:bodyPr rtlCol="false" anchor="ctr"/>
-            <a:lstStyle/>
-            <a:p>
-              <a:pPr algn="ctr">
-                <a:defRPr sz="1200" b="true">
-                  <a:solidFill>
-                    <a:srgbClr val="000000"/>
-                  </a:solidFill>
-                </a:defRPr>
-              </a:pPr>
-              <a:r>
-                <a:rPr/>
-                <a:t>+</a:t>
-              </a:r>
-              <a:endParaRPr/>
-            </a:p>
-          </p:txBody>
-        </p:sp>
-        <p:cxnSp>
-          <p:nvCxnSpPr>
-            <p:cNvPr id="126" name="Connector 41"/>
-            <p:cNvCxnSpPr/>
-            <p:nvPr/>
-          </p:nvCxnSpPr>
-          <p:spPr>
-            <a:xfrm rot="0" flipH="false" flipV="false">
-              <a:off x="4572000" y="3483864"/>
-              <a:ext cx="0" cy="109728"/>
-            </a:xfrm>
-            <a:prstGeom prst="line">
-              <a:avLst/>
-            </a:prstGeom>
-            <a:ln w="19050">
-              <a:solidFill>
-                <a:srgbClr val="000000"/>
-              </a:solidFill>
-            </a:ln>
-          </p:spPr>
-          <p:style>
-            <a:lnRef idx="2">
-              <a:schemeClr val="accent1"/>
-            </a:lnRef>
-            <a:fillRef idx="0">
-              <a:schemeClr val="accent1"/>
-            </a:fillRef>
-            <a:effectRef idx="1">
-              <a:schemeClr val="accent1"/>
-            </a:effectRef>
-            <a:fontRef idx="minor">
-              <a:schemeClr val="tx1"/>
-            </a:fontRef>
-          </p:style>
-        </p:cxnSp>
-        <p:cxnSp>
-          <p:nvCxnSpPr>
-            <p:cNvPr id="127" name="Connector 42"/>
-            <p:cNvCxnSpPr/>
-            <p:nvPr/>
-          </p:nvCxnSpPr>
-          <p:spPr>
-            <a:xfrm rot="0" flipH="false" flipV="false">
-              <a:off x="3291840" y="3593592"/>
-              <a:ext cx="1280160" cy="0"/>
-            </a:xfrm>
-            <a:prstGeom prst="line">
-              <a:avLst/>
-            </a:prstGeom>
-            <a:ln w="19050">
-              <a:solidFill>
-                <a:srgbClr val="000000"/>
-              </a:solidFill>
-            </a:ln>
-          </p:spPr>
-          <p:style>
-            <a:lnRef idx="2">
-              <a:schemeClr val="accent1"/>
-            </a:lnRef>
-            <a:fillRef idx="0">
-              <a:schemeClr val="accent1"/>
-            </a:fillRef>
-            <a:effectRef idx="1">
-              <a:schemeClr val="accent1"/>
-            </a:effectRef>
-            <a:fontRef idx="minor">
-              <a:schemeClr val="tx1"/>
-            </a:fontRef>
-          </p:style>
-        </p:cxnSp>
-        <p:cxnSp>
-          <p:nvCxnSpPr>
-            <p:cNvPr id="128" name="Connector 43"/>
-            <p:cNvCxnSpPr/>
-            <p:nvPr/>
-          </p:nvCxnSpPr>
-          <p:spPr>
-            <a:xfrm rot="0" flipH="false" flipV="false">
-              <a:off x="4572000" y="3593592"/>
-              <a:ext cx="0" cy="109728"/>
-            </a:xfrm>
-            <a:prstGeom prst="line">
-              <a:avLst/>
-            </a:prstGeom>
-            <a:ln w="19050">
-              <a:solidFill>
-                <a:srgbClr val="000000"/>
-              </a:solidFill>
-            </a:ln>
-          </p:spPr>
-          <p:style>
-            <a:lnRef idx="2">
-              <a:schemeClr val="accent1"/>
-            </a:lnRef>
-            <a:fillRef idx="0">
-              <a:schemeClr val="accent1"/>
-            </a:fillRef>
-            <a:effectRef idx="1">
-              <a:schemeClr val="accent1"/>
-            </a:effectRef>
-            <a:fontRef idx="minor">
-              <a:schemeClr val="tx1"/>
-            </a:fontRef>
-          </p:style>
-        </p:cxnSp>
-        <p:sp>
-          <p:nvSpPr>
-            <p:cNvPr id="129" name="Rectangle 44"/>
-            <p:cNvSpPr/>
-            <p:nvPr/>
-          </p:nvSpPr>
-          <p:spPr>
-            <a:xfrm rot="0" flipH="false" flipV="false">
-              <a:off x="3794760" y="3703320"/>
-              <a:ext cx="1554480" cy="480059"/>
-            </a:xfrm>
-            <a:prstGeom prst="rect">
-              <a:avLst/>
-            </a:prstGeom>
-            <a:solidFill>
-              <a:srgbClr val="FFFFFF"/>
-            </a:solidFill>
-            <a:ln w="19050">
-              <a:solidFill>
-                <a:srgbClr val="000000"/>
-              </a:solidFill>
-            </a:ln>
-          </p:spPr>
-          <p:style>
-            <a:lnRef idx="1">
-              <a:schemeClr val="accent1"/>
-            </a:lnRef>
-            <a:fillRef idx="3">
-              <a:schemeClr val="accent1"/>
-            </a:fillRef>
-            <a:effectRef idx="2">
-              <a:schemeClr val="accent1"/>
-            </a:effectRef>
-            <a:fontRef idx="minor">
-              <a:schemeClr val="lt1"/>
-            </a:fontRef>
-          </p:style>
-          <p:txBody>
-            <a:bodyPr rtlCol="false" anchor="ctr"/>
-            <a:lstStyle/>
-            <a:p>
-              <a:pPr algn="ctr">
-                <a:defRPr sz="900">
-                  <a:solidFill>
-                    <a:srgbClr val="000000">
-                      <a:alpha val="100000"/>
-                    </a:srgbClr>
-                  </a:solidFill>
-                  <a:latin typeface="Times New Roman"/>
-                  <a:ea typeface="宋体"/>
-                  <a:cs typeface="+mn-cs"/>
-                </a:defRPr>
-              </a:pPr>
-              <a:r>
-                <a:rPr lang="en-US"/>
-                <a:t>(</a:t>
-              </a:r>
-              <a:r>
-                <a:rPr/>
-                <a:t>3</a:t>
-              </a:r>
-              <a:r>
-                <a:rPr/>
-                <a:t>×</a:t>
-              </a:r>
-              <a:r>
-                <a:rPr/>
-                <a:t>3 Conv+BN+ReLU) </a:t>
-              </a:r>
-              <a:r>
-                <a:rPr/>
-                <a:t>×</a:t>
-              </a:r>
-              <a:r>
-                <a:rPr/>
-                <a:t>2</a:t>
-              </a:r>
-              <a:endParaRPr/>
-            </a:p>
-          </p:txBody>
-        </p:sp>
-        <p:cxnSp>
-          <p:nvCxnSpPr>
-            <p:cNvPr id="130" name="Connector 45"/>
-            <p:cNvCxnSpPr/>
-            <p:nvPr/>
-          </p:nvCxnSpPr>
-          <p:spPr>
-            <a:xfrm rot="0" flipH="false" flipV="false">
-              <a:off x="4572000" y="4183380"/>
-              <a:ext cx="0" cy="109728"/>
-            </a:xfrm>
-            <a:prstGeom prst="line">
-              <a:avLst/>
-            </a:prstGeom>
-            <a:ln w="19050">
-              <a:solidFill>
-                <a:srgbClr val="000000"/>
-              </a:solidFill>
-            </a:ln>
-          </p:spPr>
-          <p:style>
-            <a:lnRef idx="2">
-              <a:schemeClr val="accent1"/>
-            </a:lnRef>
-            <a:fillRef idx="0">
-              <a:schemeClr val="accent1"/>
-            </a:fillRef>
-            <a:effectRef idx="1">
-              <a:schemeClr val="accent1"/>
-            </a:effectRef>
-            <a:fontRef idx="minor">
-              <a:schemeClr val="tx1"/>
-            </a:fontRef>
-          </p:style>
-        </p:cxnSp>
-        <p:cxnSp>
-          <p:nvCxnSpPr>
-            <p:cNvPr id="131" name="Connector 46"/>
-            <p:cNvCxnSpPr/>
-            <p:nvPr/>
-          </p:nvCxnSpPr>
-          <p:spPr>
-            <a:xfrm rot="0" flipH="false" flipV="false">
-              <a:off x="3291840" y="3593592"/>
-              <a:ext cx="0" cy="813816"/>
-            </a:xfrm>
-            <a:prstGeom prst="line">
-              <a:avLst/>
-            </a:prstGeom>
-            <a:ln w="19050">
-              <a:solidFill>
-                <a:srgbClr val="000000"/>
-              </a:solidFill>
-            </a:ln>
-          </p:spPr>
-          <p:style>
-            <a:lnRef idx="2">
-              <a:schemeClr val="accent1"/>
-            </a:lnRef>
-            <a:fillRef idx="0">
-              <a:schemeClr val="accent1"/>
-            </a:fillRef>
-            <a:effectRef idx="1">
-              <a:schemeClr val="accent1"/>
-            </a:effectRef>
-            <a:fontRef idx="minor">
-              <a:schemeClr val="tx1"/>
-            </a:fontRef>
-          </p:style>
-        </p:cxnSp>
-        <p:cxnSp>
-          <p:nvCxnSpPr>
-            <p:cNvPr id="132" name="Connector 47"/>
-            <p:cNvCxnSpPr/>
-            <p:nvPr/>
-          </p:nvCxnSpPr>
-          <p:spPr>
-            <a:xfrm rot="0" flipH="false" flipV="false">
-              <a:off x="3291840" y="4407408"/>
-              <a:ext cx="1165860" cy="0"/>
-            </a:xfrm>
-            <a:prstGeom prst="line">
-              <a:avLst/>
-            </a:prstGeom>
-            <a:ln w="19050">
-              <a:solidFill>
-                <a:srgbClr val="000000"/>
-              </a:solidFill>
-            </a:ln>
-          </p:spPr>
-          <p:style>
-            <a:lnRef idx="2">
-              <a:schemeClr val="accent1"/>
-            </a:lnRef>
-            <a:fillRef idx="0">
-              <a:schemeClr val="accent1"/>
-            </a:fillRef>
-            <a:effectRef idx="1">
-              <a:schemeClr val="accent1"/>
-            </a:effectRef>
-            <a:fontRef idx="minor">
-              <a:schemeClr val="tx1"/>
-            </a:fontRef>
-          </p:style>
-        </p:cxnSp>
-        <p:sp>
-          <p:nvSpPr>
-            <p:cNvPr id="133" name="Oval 48"/>
-            <p:cNvSpPr/>
-            <p:nvPr/>
-          </p:nvSpPr>
-          <p:spPr>
-            <a:xfrm rot="0" flipH="false" flipV="false">
-              <a:off x="4457700" y="4293108"/>
-              <a:ext cx="228600" cy="228600"/>
-            </a:xfrm>
-            <a:prstGeom prst="ellipse">
-              <a:avLst/>
-            </a:prstGeom>
-            <a:solidFill>
-              <a:srgbClr val="FFFFFF"/>
-            </a:solidFill>
-            <a:ln w="19050">
-              <a:solidFill>
-                <a:srgbClr val="000000"/>
-              </a:solidFill>
-            </a:ln>
-          </p:spPr>
-          <p:style>
-            <a:lnRef idx="1">
-              <a:schemeClr val="accent1"/>
-            </a:lnRef>
-            <a:fillRef idx="3">
-              <a:schemeClr val="accent1"/>
-            </a:fillRef>
-            <a:effectRef idx="2">
-              <a:schemeClr val="accent1"/>
-            </a:effectRef>
-            <a:fontRef idx="minor">
-              <a:schemeClr val="lt1"/>
-            </a:fontRef>
-          </p:style>
-          <p:txBody>
-            <a:bodyPr rtlCol="false" anchor="ctr"/>
-            <a:lstStyle/>
-            <a:p>
-              <a:pPr algn="ctr">
-                <a:defRPr sz="1200" b="true">
-                  <a:solidFill>
-                    <a:srgbClr val="000000"/>
-                  </a:solidFill>
-                </a:defRPr>
-              </a:pPr>
-              <a:r>
-                <a:rPr/>
-                <a:t>+</a:t>
-              </a:r>
-              <a:endParaRPr/>
-            </a:p>
-          </p:txBody>
-        </p:sp>
-        <p:cxnSp>
-          <p:nvCxnSpPr>
-            <p:cNvPr id="134" name="Connector 49"/>
-            <p:cNvCxnSpPr/>
-            <p:nvPr/>
-          </p:nvCxnSpPr>
-          <p:spPr>
-            <a:xfrm rot="0" flipH="false" flipV="false">
-              <a:off x="4572000" y="4553711"/>
-              <a:ext cx="0" cy="109728"/>
-            </a:xfrm>
-            <a:prstGeom prst="line">
-              <a:avLst/>
-            </a:prstGeom>
-            <a:ln w="19050">
-              <a:solidFill>
-                <a:srgbClr val="000000"/>
-              </a:solidFill>
-            </a:ln>
-          </p:spPr>
-          <p:style>
-            <a:lnRef idx="2">
-              <a:schemeClr val="accent1"/>
-            </a:lnRef>
-            <a:fillRef idx="0">
-              <a:schemeClr val="accent1"/>
-            </a:fillRef>
-            <a:effectRef idx="1">
-              <a:schemeClr val="accent1"/>
-            </a:effectRef>
-            <a:fontRef idx="minor">
-              <a:schemeClr val="tx1"/>
-            </a:fontRef>
-          </p:style>
-        </p:cxnSp>
-        <p:cxnSp>
-          <p:nvCxnSpPr>
-            <p:cNvPr id="135" name="Connector 50"/>
-            <p:cNvCxnSpPr/>
-            <p:nvPr/>
-          </p:nvCxnSpPr>
-          <p:spPr>
-            <a:xfrm rot="0" flipH="false" flipV="false">
-              <a:off x="3291840" y="4663439"/>
-              <a:ext cx="1280160" cy="0"/>
-            </a:xfrm>
-            <a:prstGeom prst="line">
-              <a:avLst/>
-            </a:prstGeom>
-            <a:ln w="19050">
-              <a:solidFill>
-                <a:srgbClr val="000000"/>
-              </a:solidFill>
-            </a:ln>
-          </p:spPr>
-          <p:style>
-            <a:lnRef idx="2">
-              <a:schemeClr val="accent1"/>
-            </a:lnRef>
-            <a:fillRef idx="0">
-              <a:schemeClr val="accent1"/>
-            </a:fillRef>
-            <a:effectRef idx="1">
-              <a:schemeClr val="accent1"/>
-            </a:effectRef>
-            <a:fontRef idx="minor">
-              <a:schemeClr val="tx1"/>
-            </a:fontRef>
-          </p:style>
-        </p:cxnSp>
-        <p:cxnSp>
-          <p:nvCxnSpPr>
-            <p:cNvPr id="136" name="Connector 51"/>
-            <p:cNvCxnSpPr/>
-            <p:nvPr/>
-          </p:nvCxnSpPr>
-          <p:spPr>
-            <a:xfrm rot="0" flipH="false" flipV="false">
-              <a:off x="4572000" y="4663439"/>
-              <a:ext cx="0" cy="109728"/>
-            </a:xfrm>
-            <a:prstGeom prst="line">
-              <a:avLst/>
-            </a:prstGeom>
-            <a:ln w="19050">
-              <a:solidFill>
-                <a:srgbClr val="000000"/>
-              </a:solidFill>
-            </a:ln>
-          </p:spPr>
-          <p:style>
-            <a:lnRef idx="2">
-              <a:schemeClr val="accent1"/>
-            </a:lnRef>
-            <a:fillRef idx="0">
-              <a:schemeClr val="accent1"/>
-            </a:fillRef>
-            <a:effectRef idx="1">
-              <a:schemeClr val="accent1"/>
-            </a:effectRef>
-            <a:fontRef idx="minor">
-              <a:schemeClr val="tx1"/>
-            </a:fontRef>
-          </p:style>
-        </p:cxnSp>
-        <p:sp>
-          <p:nvSpPr>
-            <p:cNvPr id="137" name="Rectangle 52"/>
-            <p:cNvSpPr/>
-            <p:nvPr/>
-          </p:nvSpPr>
-          <p:spPr>
-            <a:xfrm rot="0" flipH="false" flipV="false">
-              <a:off x="3794760" y="4773167"/>
-              <a:ext cx="1554480" cy="320040"/>
-            </a:xfrm>
-            <a:prstGeom prst="rect">
-              <a:avLst/>
-            </a:prstGeom>
-            <a:solidFill>
-              <a:srgbClr val="FFFFFF"/>
-            </a:solidFill>
-            <a:ln w="19050">
-              <a:solidFill>
-                <a:srgbClr val="000000"/>
-              </a:solidFill>
-            </a:ln>
-          </p:spPr>
-          <p:style>
-            <a:lnRef idx="1">
-              <a:schemeClr val="accent1"/>
-            </a:lnRef>
-            <a:fillRef idx="3">
-              <a:schemeClr val="accent1"/>
-            </a:fillRef>
-            <a:effectRef idx="2">
-              <a:schemeClr val="accent1"/>
-            </a:effectRef>
-            <a:fontRef idx="minor">
-              <a:schemeClr val="lt1"/>
-            </a:fontRef>
-          </p:style>
-          <p:txBody>
-            <a:bodyPr rtlCol="false" anchor="ctr"/>
-            <a:lstStyle/>
-            <a:p>
-              <a:pPr algn="ctr">
-                <a:defRPr sz="1000">
-                  <a:solidFill>
-                    <a:srgbClr val="000000"/>
-                  </a:solidFill>
-                  <a:latin typeface="Times New Roman"/>
-                </a:defRPr>
-              </a:pPr>
-              <a:r>
-                <a:rPr/>
-                <a:t>Global Avg Pool</a:t>
-              </a:r>
-              <a:endParaRPr/>
-            </a:p>
-          </p:txBody>
-        </p:sp>
-        <p:sp>
-          <p:nvSpPr>
-            <p:cNvPr id="138" name="TextBox 53"/>
-            <p:cNvSpPr txBox="true"/>
-            <p:nvPr/>
-          </p:nvSpPr>
-          <p:spPr>
-            <a:xfrm rot="0" flipH="false" flipV="false">
-              <a:off x="5440679" y="4800600"/>
-              <a:ext cx="1371600" cy="228600"/>
-            </a:xfrm>
-            <a:prstGeom prst="rect">
-              <a:avLst/>
-            </a:prstGeom>
-            <a:noFill/>
-          </p:spPr>
-          <p:txBody>
-            <a:bodyPr wrap="none">
-              <a:spAutoFit/>
-            </a:bodyPr>
-            <a:lstStyle/>
-            <a:p>
-              <a:pPr>
-                <a:defRPr sz="900" i="true">
-                  <a:solidFill>
-                    <a:srgbClr val="505050"/>
-                  </a:solidFill>
-                  <a:latin typeface="Times New Roman"/>
-                </a:defRPr>
-              </a:pPr>
-              <a:r>
-                <a:rPr/>
-                <a:t>1×1×C</a:t>
-              </a:r>
-              <a:endParaRPr/>
-            </a:p>
-          </p:txBody>
-        </p:sp>
-        <p:cxnSp>
-          <p:nvCxnSpPr>
-            <p:cNvPr id="139" name="Connector 54"/>
-            <p:cNvCxnSpPr/>
-            <p:nvPr/>
-          </p:nvCxnSpPr>
-          <p:spPr>
-            <a:xfrm rot="0" flipH="false" flipV="false">
-              <a:off x="4572000" y="5093207"/>
-              <a:ext cx="0" cy="82296"/>
-            </a:xfrm>
-            <a:prstGeom prst="line">
-              <a:avLst/>
-            </a:prstGeom>
-            <a:ln w="19050">
-              <a:solidFill>
-                <a:srgbClr val="000000"/>
-              </a:solidFill>
-            </a:ln>
-          </p:spPr>
-          <p:style>
-            <a:lnRef idx="2">
-              <a:schemeClr val="accent1"/>
-            </a:lnRef>
-            <a:fillRef idx="0">
-              <a:schemeClr val="accent1"/>
-            </a:fillRef>
-            <a:effectRef idx="1">
-              <a:schemeClr val="accent1"/>
-            </a:effectRef>
-            <a:fontRef idx="minor">
-              <a:schemeClr val="tx1"/>
-            </a:fontRef>
-          </p:style>
-        </p:cxnSp>
-        <p:cxnSp>
-          <p:nvCxnSpPr>
-            <p:cNvPr id="140" name="Connector 55"/>
-            <p:cNvCxnSpPr/>
-            <p:nvPr/>
-          </p:nvCxnSpPr>
-          <p:spPr>
-            <a:xfrm rot="0" flipH="false" flipV="false">
-              <a:off x="3639312" y="5175503"/>
-              <a:ext cx="1865376" cy="0"/>
-            </a:xfrm>
-            <a:prstGeom prst="line">
-              <a:avLst/>
-            </a:prstGeom>
-            <a:ln w="19050">
-              <a:solidFill>
-                <a:srgbClr val="000000"/>
-              </a:solidFill>
-            </a:ln>
-          </p:spPr>
-          <p:style>
-            <a:lnRef idx="2">
-              <a:schemeClr val="accent1"/>
-            </a:lnRef>
-            <a:fillRef idx="0">
-              <a:schemeClr val="accent1"/>
-            </a:fillRef>
-            <a:effectRef idx="1">
-              <a:schemeClr val="accent1"/>
-            </a:effectRef>
-            <a:fontRef idx="minor">
-              <a:schemeClr val="tx1"/>
-            </a:fontRef>
-          </p:style>
-        </p:cxnSp>
-        <p:cxnSp>
-          <p:nvCxnSpPr>
-            <p:cNvPr id="141" name="Connector 56"/>
-            <p:cNvCxnSpPr/>
-            <p:nvPr/>
-          </p:nvCxnSpPr>
-          <p:spPr>
-            <a:xfrm rot="0" flipH="false" flipV="false">
-              <a:off x="3639312" y="5175503"/>
-              <a:ext cx="0" cy="27432"/>
-            </a:xfrm>
-            <a:prstGeom prst="line">
-              <a:avLst/>
-            </a:prstGeom>
-            <a:ln w="19050">
-              <a:solidFill>
-                <a:srgbClr val="000000"/>
-              </a:solidFill>
-            </a:ln>
-          </p:spPr>
-          <p:style>
-            <a:lnRef idx="2">
-              <a:schemeClr val="accent1"/>
-            </a:lnRef>
-            <a:fillRef idx="0">
-              <a:schemeClr val="accent1"/>
-            </a:fillRef>
-            <a:effectRef idx="1">
-              <a:schemeClr val="accent1"/>
-            </a:effectRef>
-            <a:fontRef idx="minor">
-              <a:schemeClr val="tx1"/>
-            </a:fontRef>
-          </p:style>
-        </p:cxnSp>
-        <p:sp>
-          <p:nvSpPr>
-            <p:cNvPr id="142" name="Rectangle 57"/>
-            <p:cNvSpPr/>
-            <p:nvPr/>
-          </p:nvSpPr>
-          <p:spPr>
-            <a:xfrm rot="0" flipH="false" flipV="false">
-              <a:off x="3364992" y="5202935"/>
-              <a:ext cx="548640" cy="274320"/>
-            </a:xfrm>
-            <a:prstGeom prst="rect">
-              <a:avLst/>
-            </a:prstGeom>
-            <a:solidFill>
-              <a:srgbClr val="FFFFFF"/>
-            </a:solidFill>
-            <a:ln w="19050">
-              <a:solidFill>
-                <a:srgbClr val="000000"/>
-              </a:solidFill>
-            </a:ln>
-          </p:spPr>
-          <p:style>
-            <a:lnRef idx="1">
-              <a:schemeClr val="accent1"/>
-            </a:lnRef>
-            <a:fillRef idx="3">
-              <a:schemeClr val="accent1"/>
-            </a:fillRef>
-            <a:effectRef idx="2">
-              <a:schemeClr val="accent1"/>
-            </a:effectRef>
-            <a:fontRef idx="minor">
-              <a:schemeClr val="lt1"/>
-            </a:fontRef>
-          </p:style>
-          <p:txBody>
-            <a:bodyPr rtlCol="false" anchor="ctr"/>
-            <a:lstStyle/>
-            <a:p>
-              <a:pPr algn="ctr">
-                <a:defRPr sz="700">
-                  <a:solidFill>
-                    <a:srgbClr val="000000"/>
-                  </a:solidFill>
-                  <a:latin typeface="Times New Roman"/>
-                </a:defRPr>
-              </a:pPr>
-              <a:r>
-                <a:rPr/>
-                <a:t>FC+ReLU</a:t>
-              </a:r>
-              <a:endParaRPr/>
-            </a:p>
-          </p:txBody>
-        </p:sp>
-        <p:cxnSp>
-          <p:nvCxnSpPr>
-            <p:cNvPr id="143" name="Connector 58"/>
-            <p:cNvCxnSpPr/>
-            <p:nvPr/>
-          </p:nvCxnSpPr>
-          <p:spPr>
-            <a:xfrm rot="0" flipH="false" flipV="false">
-              <a:off x="3639312" y="5477255"/>
-              <a:ext cx="0" cy="73152"/>
-            </a:xfrm>
-            <a:prstGeom prst="line">
-              <a:avLst/>
-            </a:prstGeom>
-            <a:ln w="19050">
-              <a:solidFill>
-                <a:srgbClr val="000000"/>
-              </a:solidFill>
-            </a:ln>
-          </p:spPr>
-          <p:style>
-            <a:lnRef idx="2">
-              <a:schemeClr val="accent1"/>
-            </a:lnRef>
-            <a:fillRef idx="0">
-              <a:schemeClr val="accent1"/>
-            </a:fillRef>
-            <a:effectRef idx="1">
-              <a:schemeClr val="accent1"/>
-            </a:effectRef>
-            <a:fontRef idx="minor">
-              <a:schemeClr val="tx1"/>
-            </a:fontRef>
-          </p:style>
-        </p:cxnSp>
-        <p:cxnSp>
-          <p:nvCxnSpPr>
-            <p:cNvPr id="144" name="Connector 59"/>
-            <p:cNvCxnSpPr/>
-            <p:nvPr/>
-          </p:nvCxnSpPr>
-          <p:spPr>
-            <a:xfrm rot="0" flipH="false" flipV="false">
-              <a:off x="4261104" y="5175503"/>
-              <a:ext cx="0" cy="27432"/>
-            </a:xfrm>
-            <a:prstGeom prst="line">
-              <a:avLst/>
-            </a:prstGeom>
-            <a:ln w="19050">
-              <a:solidFill>
-                <a:srgbClr val="000000"/>
-              </a:solidFill>
-            </a:ln>
-          </p:spPr>
-          <p:style>
-            <a:lnRef idx="2">
-              <a:schemeClr val="accent1"/>
-            </a:lnRef>
-            <a:fillRef idx="0">
-              <a:schemeClr val="accent1"/>
-            </a:fillRef>
-            <a:effectRef idx="1">
-              <a:schemeClr val="accent1"/>
-            </a:effectRef>
-            <a:fontRef idx="minor">
-              <a:schemeClr val="tx1"/>
-            </a:fontRef>
-          </p:style>
-        </p:cxnSp>
-        <p:sp>
-          <p:nvSpPr>
-            <p:cNvPr id="145" name="Rectangle 60"/>
-            <p:cNvSpPr/>
-            <p:nvPr/>
-          </p:nvSpPr>
-          <p:spPr>
-            <a:xfrm rot="0" flipH="false" flipV="false">
-              <a:off x="3986784" y="5202935"/>
-              <a:ext cx="548640" cy="274320"/>
-            </a:xfrm>
-            <a:prstGeom prst="rect">
-              <a:avLst/>
-            </a:prstGeom>
-            <a:solidFill>
-              <a:srgbClr val="FFFFFF"/>
-            </a:solidFill>
-            <a:ln w="19050">
-              <a:solidFill>
-                <a:srgbClr val="000000"/>
-              </a:solidFill>
-            </a:ln>
-          </p:spPr>
-          <p:style>
-            <a:lnRef idx="1">
-              <a:schemeClr val="accent1"/>
-            </a:lnRef>
-            <a:fillRef idx="3">
-              <a:schemeClr val="accent1"/>
-            </a:fillRef>
-            <a:effectRef idx="2">
-              <a:schemeClr val="accent1"/>
-            </a:effectRef>
-            <a:fontRef idx="minor">
-              <a:schemeClr val="lt1"/>
-            </a:fontRef>
-          </p:style>
-          <p:txBody>
-            <a:bodyPr rtlCol="false" anchor="ctr"/>
-            <a:lstStyle/>
-            <a:p>
-              <a:pPr algn="ctr">
-                <a:defRPr sz="700">
-                  <a:solidFill>
-                    <a:srgbClr val="000000"/>
-                  </a:solidFill>
-                  <a:latin typeface="Times New Roman"/>
-                </a:defRPr>
-              </a:pPr>
-              <a:r>
-                <a:rPr/>
-                <a:t>FC+ReLU</a:t>
-              </a:r>
-              <a:endParaRPr/>
-            </a:p>
-          </p:txBody>
-        </p:sp>
-        <p:cxnSp>
-          <p:nvCxnSpPr>
-            <p:cNvPr id="146" name="Connector 61"/>
-            <p:cNvCxnSpPr/>
-            <p:nvPr/>
-          </p:nvCxnSpPr>
-          <p:spPr>
-            <a:xfrm rot="0" flipH="false" flipV="false">
-              <a:off x="4261104" y="5477255"/>
-              <a:ext cx="0" cy="73152"/>
-            </a:xfrm>
-            <a:prstGeom prst="line">
-              <a:avLst/>
-            </a:prstGeom>
-            <a:ln w="19050">
-              <a:solidFill>
-                <a:srgbClr val="000000"/>
-              </a:solidFill>
-            </a:ln>
-          </p:spPr>
-          <p:style>
-            <a:lnRef idx="2">
-              <a:schemeClr val="accent1"/>
-            </a:lnRef>
-            <a:fillRef idx="0">
-              <a:schemeClr val="accent1"/>
-            </a:fillRef>
-            <a:effectRef idx="1">
-              <a:schemeClr val="accent1"/>
-            </a:effectRef>
-            <a:fontRef idx="minor">
-              <a:schemeClr val="tx1"/>
-            </a:fontRef>
-          </p:style>
-        </p:cxnSp>
-        <p:cxnSp>
-          <p:nvCxnSpPr>
-            <p:cNvPr id="147" name="Connector 62"/>
-            <p:cNvCxnSpPr/>
-            <p:nvPr/>
-          </p:nvCxnSpPr>
-          <p:spPr>
-            <a:xfrm rot="0" flipH="false" flipV="false">
-              <a:off x="4882896" y="5175503"/>
-              <a:ext cx="0" cy="27432"/>
-            </a:xfrm>
-            <a:prstGeom prst="line">
-              <a:avLst/>
-            </a:prstGeom>
-            <a:ln w="19050">
-              <a:solidFill>
-                <a:srgbClr val="000000"/>
-              </a:solidFill>
-            </a:ln>
-          </p:spPr>
-          <p:style>
-            <a:lnRef idx="2">
-              <a:schemeClr val="accent1"/>
-            </a:lnRef>
-            <a:fillRef idx="0">
-              <a:schemeClr val="accent1"/>
-            </a:fillRef>
-            <a:effectRef idx="1">
-              <a:schemeClr val="accent1"/>
-            </a:effectRef>
-            <a:fontRef idx="minor">
-              <a:schemeClr val="tx1"/>
-            </a:fontRef>
-          </p:style>
-        </p:cxnSp>
-        <p:sp>
-          <p:nvSpPr>
-            <p:cNvPr id="148" name="Rectangle 63"/>
-            <p:cNvSpPr/>
-            <p:nvPr/>
-          </p:nvSpPr>
-          <p:spPr>
-            <a:xfrm rot="0" flipH="false" flipV="false">
-              <a:off x="4608576" y="5202935"/>
-              <a:ext cx="548640" cy="274320"/>
-            </a:xfrm>
-            <a:prstGeom prst="rect">
-              <a:avLst/>
-            </a:prstGeom>
-            <a:solidFill>
-              <a:srgbClr val="FFFFFF"/>
-            </a:solidFill>
-            <a:ln w="19050">
-              <a:solidFill>
-                <a:srgbClr val="000000"/>
-              </a:solidFill>
-            </a:ln>
-          </p:spPr>
-          <p:style>
-            <a:lnRef idx="1">
-              <a:schemeClr val="accent1"/>
-            </a:lnRef>
-            <a:fillRef idx="3">
-              <a:schemeClr val="accent1"/>
-            </a:fillRef>
-            <a:effectRef idx="2">
-              <a:schemeClr val="accent1"/>
-            </a:effectRef>
-            <a:fontRef idx="minor">
-              <a:schemeClr val="lt1"/>
-            </a:fontRef>
-          </p:style>
-          <p:txBody>
-            <a:bodyPr rtlCol="false" anchor="ctr"/>
-            <a:lstStyle/>
-            <a:p>
-              <a:pPr algn="ctr">
-                <a:defRPr sz="700">
-                  <a:solidFill>
-                    <a:srgbClr val="000000"/>
-                  </a:solidFill>
-                  <a:latin typeface="Times New Roman"/>
-                </a:defRPr>
-              </a:pPr>
-              <a:r>
-                <a:rPr/>
-                <a:t>FC+ReLU</a:t>
-              </a:r>
-              <a:endParaRPr/>
-            </a:p>
-          </p:txBody>
-        </p:sp>
-        <p:cxnSp>
-          <p:nvCxnSpPr>
-            <p:cNvPr id="149" name="Connector 64"/>
-            <p:cNvCxnSpPr/>
-            <p:nvPr/>
-          </p:nvCxnSpPr>
-          <p:spPr>
-            <a:xfrm rot="0" flipH="false" flipV="false">
-              <a:off x="4882896" y="5477255"/>
-              <a:ext cx="0" cy="73152"/>
-            </a:xfrm>
-            <a:prstGeom prst="line">
-              <a:avLst/>
-            </a:prstGeom>
-            <a:ln w="19050">
-              <a:solidFill>
-                <a:srgbClr val="000000"/>
-              </a:solidFill>
-            </a:ln>
-          </p:spPr>
-          <p:style>
-            <a:lnRef idx="2">
-              <a:schemeClr val="accent1"/>
-            </a:lnRef>
-            <a:fillRef idx="0">
-              <a:schemeClr val="accent1"/>
-            </a:fillRef>
-            <a:effectRef idx="1">
-              <a:schemeClr val="accent1"/>
-            </a:effectRef>
-            <a:fontRef idx="minor">
-              <a:schemeClr val="tx1"/>
-            </a:fontRef>
-          </p:style>
-        </p:cxnSp>
-        <p:cxnSp>
-          <p:nvCxnSpPr>
-            <p:cNvPr id="150" name="Connector 65"/>
-            <p:cNvCxnSpPr/>
-            <p:nvPr/>
-          </p:nvCxnSpPr>
-          <p:spPr>
-            <a:xfrm rot="0" flipH="false" flipV="false">
-              <a:off x="5504688" y="5175503"/>
-              <a:ext cx="0" cy="27432"/>
-            </a:xfrm>
-            <a:prstGeom prst="line">
-              <a:avLst/>
-            </a:prstGeom>
-            <a:ln w="19050">
-              <a:solidFill>
-                <a:srgbClr val="000000"/>
-              </a:solidFill>
-            </a:ln>
-          </p:spPr>
-          <p:style>
-            <a:lnRef idx="2">
-              <a:schemeClr val="accent1"/>
-            </a:lnRef>
-            <a:fillRef idx="0">
-              <a:schemeClr val="accent1"/>
-            </a:fillRef>
-            <a:effectRef idx="1">
-              <a:schemeClr val="accent1"/>
-            </a:effectRef>
-            <a:fontRef idx="minor">
-              <a:schemeClr val="tx1"/>
-            </a:fontRef>
-          </p:style>
-        </p:cxnSp>
-        <p:sp>
-          <p:nvSpPr>
-            <p:cNvPr id="151" name="Rectangle 66"/>
-            <p:cNvSpPr/>
-            <p:nvPr/>
-          </p:nvSpPr>
-          <p:spPr>
-            <a:xfrm rot="0" flipH="false" flipV="false">
-              <a:off x="5230368" y="5202935"/>
-              <a:ext cx="548640" cy="274320"/>
-            </a:xfrm>
-            <a:prstGeom prst="rect">
-              <a:avLst/>
-            </a:prstGeom>
-            <a:solidFill>
-              <a:srgbClr val="FFFFFF"/>
-            </a:solidFill>
-            <a:ln w="19050">
-              <a:solidFill>
-                <a:srgbClr val="000000"/>
-              </a:solidFill>
-            </a:ln>
-          </p:spPr>
-          <p:style>
-            <a:lnRef idx="1">
-              <a:schemeClr val="accent1"/>
-            </a:lnRef>
-            <a:fillRef idx="3">
-              <a:schemeClr val="accent1"/>
-            </a:fillRef>
-            <a:effectRef idx="2">
-              <a:schemeClr val="accent1"/>
-            </a:effectRef>
-            <a:fontRef idx="minor">
-              <a:schemeClr val="lt1"/>
-            </a:fontRef>
-          </p:style>
-          <p:txBody>
-            <a:bodyPr rtlCol="false" anchor="ctr"/>
-            <a:lstStyle/>
-            <a:p>
-              <a:pPr algn="ctr">
-                <a:defRPr sz="700">
-                  <a:solidFill>
-                    <a:srgbClr val="000000"/>
-                  </a:solidFill>
-                  <a:latin typeface="Times New Roman"/>
-                </a:defRPr>
-              </a:pPr>
-              <a:r>
-                <a:rPr/>
-                <a:t>FC+ReLU</a:t>
-              </a:r>
-              <a:endParaRPr/>
-            </a:p>
-          </p:txBody>
-        </p:sp>
-        <p:cxnSp>
-          <p:nvCxnSpPr>
-            <p:cNvPr id="152" name="Connector 67"/>
-            <p:cNvCxnSpPr/>
-            <p:nvPr/>
-          </p:nvCxnSpPr>
-          <p:spPr>
-            <a:xfrm rot="0" flipH="false" flipV="false">
-              <a:off x="5504688" y="5477255"/>
-              <a:ext cx="0" cy="73152"/>
-            </a:xfrm>
-            <a:prstGeom prst="line">
-              <a:avLst/>
-            </a:prstGeom>
-            <a:ln w="19050">
-              <a:solidFill>
-                <a:srgbClr val="000000"/>
-              </a:solidFill>
-            </a:ln>
-          </p:spPr>
-          <p:style>
-            <a:lnRef idx="2">
-              <a:schemeClr val="accent1"/>
-            </a:lnRef>
-            <a:fillRef idx="0">
-              <a:schemeClr val="accent1"/>
-            </a:fillRef>
-            <a:effectRef idx="1">
-              <a:schemeClr val="accent1"/>
-            </a:effectRef>
-            <a:fontRef idx="minor">
-              <a:schemeClr val="tx1"/>
-            </a:fontRef>
-          </p:style>
-        </p:cxnSp>
-        <p:sp>
-          <p:nvSpPr>
-            <p:cNvPr id="153" name="TextBox 68"/>
-            <p:cNvSpPr txBox="true"/>
-            <p:nvPr/>
-          </p:nvSpPr>
-          <p:spPr>
-            <a:xfrm rot="0" flipH="false" flipV="false">
-              <a:off x="5824728" y="5221223"/>
-              <a:ext cx="1371600" cy="228600"/>
-            </a:xfrm>
-            <a:prstGeom prst="rect">
-              <a:avLst/>
-            </a:prstGeom>
-            <a:noFill/>
-          </p:spPr>
-          <p:txBody>
-            <a:bodyPr wrap="none">
-              <a:spAutoFit/>
-            </a:bodyPr>
-            <a:lstStyle/>
-            <a:p>
-              <a:pPr>
-                <a:defRPr sz="800" i="true">
-                  <a:solidFill>
-                    <a:srgbClr val="505050"/>
-                  </a:solidFill>
-                  <a:latin typeface="Times New Roman"/>
-                </a:defRPr>
-              </a:pPr>
-              <a:r>
-                <a:rPr/>
-                <a:t>1×1×C/r ×4</a:t>
-              </a:r>
-              <a:endParaRPr/>
-            </a:p>
-          </p:txBody>
-        </p:sp>
-        <p:cxnSp>
-          <p:nvCxnSpPr>
-            <p:cNvPr id="154" name="Connector 69"/>
-            <p:cNvCxnSpPr/>
-            <p:nvPr/>
-          </p:nvCxnSpPr>
-          <p:spPr>
-            <a:xfrm rot="0" flipH="false" flipV="false">
-              <a:off x="3639312" y="5550407"/>
-              <a:ext cx="1865376" cy="0"/>
-            </a:xfrm>
-            <a:prstGeom prst="line">
-              <a:avLst/>
-            </a:prstGeom>
-            <a:ln w="19050">
-              <a:solidFill>
-                <a:srgbClr val="000000"/>
-              </a:solidFill>
-            </a:ln>
-          </p:spPr>
-          <p:style>
-            <a:lnRef idx="2">
-              <a:schemeClr val="accent1"/>
-            </a:lnRef>
-            <a:fillRef idx="0">
-              <a:schemeClr val="accent1"/>
-            </a:fillRef>
-            <a:effectRef idx="1">
-              <a:schemeClr val="accent1"/>
-            </a:effectRef>
-            <a:fontRef idx="minor">
-              <a:schemeClr val="tx1"/>
-            </a:fontRef>
-          </p:style>
-        </p:cxnSp>
-        <p:cxnSp>
-          <p:nvCxnSpPr>
-            <p:cNvPr id="155" name="Connector 70"/>
-            <p:cNvCxnSpPr/>
-            <p:nvPr/>
-          </p:nvCxnSpPr>
-          <p:spPr>
-            <a:xfrm rot="0" flipH="false" flipV="false">
-              <a:off x="4572000" y="5550407"/>
-              <a:ext cx="0" cy="45720"/>
-            </a:xfrm>
-            <a:prstGeom prst="line">
-              <a:avLst/>
-            </a:prstGeom>
-            <a:ln w="19050">
-              <a:solidFill>
-                <a:srgbClr val="000000"/>
-              </a:solidFill>
-            </a:ln>
-          </p:spPr>
-          <p:style>
-            <a:lnRef idx="2">
-              <a:schemeClr val="accent1"/>
-            </a:lnRef>
-            <a:fillRef idx="0">
-              <a:schemeClr val="accent1"/>
-            </a:fillRef>
-            <a:effectRef idx="1">
-              <a:schemeClr val="accent1"/>
-            </a:effectRef>
-            <a:fontRef idx="minor">
-              <a:schemeClr val="tx1"/>
-            </a:fontRef>
-          </p:style>
-        </p:cxnSp>
-        <p:sp>
-          <p:nvSpPr>
-            <p:cNvPr id="156" name="Rectangle 71"/>
-            <p:cNvSpPr/>
-            <p:nvPr/>
-          </p:nvSpPr>
-          <p:spPr>
-            <a:xfrm rot="0" flipH="false" flipV="false">
-              <a:off x="4114800" y="5596127"/>
-              <a:ext cx="914400" cy="274320"/>
-            </a:xfrm>
-            <a:prstGeom prst="rect">
-              <a:avLst/>
-            </a:prstGeom>
-            <a:solidFill>
-              <a:srgbClr val="FFFFFF"/>
-            </a:solidFill>
-            <a:ln w="19050">
-              <a:solidFill>
-                <a:srgbClr val="000000"/>
-              </a:solidFill>
-            </a:ln>
-          </p:spPr>
-          <p:style>
-            <a:lnRef idx="1">
-              <a:schemeClr val="accent1"/>
-            </a:lnRef>
-            <a:fillRef idx="3">
-              <a:schemeClr val="accent1"/>
-            </a:fillRef>
-            <a:effectRef idx="2">
-              <a:schemeClr val="accent1"/>
-            </a:effectRef>
-            <a:fontRef idx="minor">
-              <a:schemeClr val="lt1"/>
-            </a:fontRef>
-          </p:style>
-          <p:txBody>
-            <a:bodyPr rtlCol="false" anchor="ctr"/>
-            <a:lstStyle/>
-            <a:p>
-              <a:pPr algn="ctr">
-                <a:defRPr sz="900">
-                  <a:solidFill>
-                    <a:srgbClr val="000000"/>
-                  </a:solidFill>
-                  <a:latin typeface="Times New Roman"/>
-                </a:defRPr>
-              </a:pPr>
-              <a:r>
-                <a:rPr/>
-                <a:t>Concat</a:t>
-              </a:r>
-              <a:endParaRPr/>
-            </a:p>
-          </p:txBody>
-        </p:sp>
-        <p:cxnSp>
-          <p:nvCxnSpPr>
-            <p:cNvPr id="157" name="Connector 72"/>
-            <p:cNvCxnSpPr/>
-            <p:nvPr/>
-          </p:nvCxnSpPr>
-          <p:spPr>
-            <a:xfrm rot="0" flipH="false" flipV="false">
-              <a:off x="4572000" y="5870447"/>
-              <a:ext cx="0" cy="109728"/>
-            </a:xfrm>
-            <a:prstGeom prst="line">
-              <a:avLst/>
-            </a:prstGeom>
-            <a:ln w="19050">
-              <a:solidFill>
-                <a:srgbClr val="000000"/>
-              </a:solidFill>
-            </a:ln>
-          </p:spPr>
-          <p:style>
-            <a:lnRef idx="2">
-              <a:schemeClr val="accent1"/>
-            </a:lnRef>
-            <a:fillRef idx="0">
-              <a:schemeClr val="accent1"/>
-            </a:fillRef>
-            <a:effectRef idx="1">
-              <a:schemeClr val="accent1"/>
-            </a:effectRef>
-            <a:fontRef idx="minor">
-              <a:schemeClr val="tx1"/>
-            </a:fontRef>
-          </p:style>
-        </p:cxnSp>
-        <p:sp>
-          <p:nvSpPr>
-            <p:cNvPr id="158" name="Rectangle 73"/>
-            <p:cNvSpPr/>
-            <p:nvPr/>
-          </p:nvSpPr>
-          <p:spPr>
-            <a:xfrm rot="0" flipH="false" flipV="false">
-              <a:off x="3794760" y="5980175"/>
-              <a:ext cx="1554480" cy="320040"/>
-            </a:xfrm>
-            <a:prstGeom prst="rect">
-              <a:avLst/>
-            </a:prstGeom>
-            <a:solidFill>
-              <a:srgbClr val="FFFFFF"/>
-            </a:solidFill>
-            <a:ln w="19050">
-              <a:solidFill>
-                <a:srgbClr val="000000"/>
-              </a:solidFill>
-            </a:ln>
-          </p:spPr>
-          <p:style>
-            <a:lnRef idx="1">
-              <a:schemeClr val="accent1"/>
-            </a:lnRef>
-            <a:fillRef idx="3">
-              <a:schemeClr val="accent1"/>
-            </a:fillRef>
-            <a:effectRef idx="2">
-              <a:schemeClr val="accent1"/>
-            </a:effectRef>
-            <a:fontRef idx="minor">
-              <a:schemeClr val="lt1"/>
-            </a:fontRef>
-          </p:style>
-          <p:txBody>
-            <a:bodyPr rtlCol="false" anchor="ctr"/>
-            <a:lstStyle/>
-            <a:p>
-              <a:pPr algn="ctr">
-                <a:defRPr sz="1000">
-                  <a:solidFill>
-                    <a:srgbClr val="000000"/>
-                  </a:solidFill>
-                  <a:latin typeface="Times New Roman"/>
-                </a:defRPr>
-              </a:pPr>
-              <a:r>
-                <a:rPr/>
-                <a:t>FC + Sigmoid</a:t>
-              </a:r>
-              <a:endParaRPr/>
-            </a:p>
-          </p:txBody>
-        </p:sp>
-        <p:sp>
-          <p:nvSpPr>
-            <p:cNvPr id="159" name="TextBox 74"/>
-            <p:cNvSpPr txBox="true"/>
-            <p:nvPr/>
-          </p:nvSpPr>
-          <p:spPr>
-            <a:xfrm rot="0" flipH="false" flipV="false">
-              <a:off x="5440679" y="6007607"/>
-              <a:ext cx="1371600" cy="228600"/>
-            </a:xfrm>
-            <a:prstGeom prst="rect">
-              <a:avLst/>
-            </a:prstGeom>
-            <a:noFill/>
-          </p:spPr>
-          <p:txBody>
-            <a:bodyPr wrap="none">
-              <a:spAutoFit/>
-            </a:bodyPr>
-            <a:lstStyle/>
-            <a:p>
-              <a:pPr>
-                <a:defRPr sz="900" i="true">
-                  <a:solidFill>
-                    <a:srgbClr val="505050"/>
-                  </a:solidFill>
-                  <a:latin typeface="Times New Roman"/>
-                </a:defRPr>
-              </a:pPr>
-              <a:r>
-                <a:rPr/>
-                <a:t>1×1×C</a:t>
-              </a:r>
-              <a:endParaRPr/>
-            </a:p>
-          </p:txBody>
-        </p:sp>
-        <p:cxnSp>
-          <p:nvCxnSpPr>
-            <p:cNvPr id="160" name="Connector 75"/>
-            <p:cNvCxnSpPr/>
-            <p:nvPr/>
-          </p:nvCxnSpPr>
-          <p:spPr>
-            <a:xfrm rot="0" flipH="false" flipV="false">
-              <a:off x="4572000" y="6300215"/>
-              <a:ext cx="0" cy="109728"/>
-            </a:xfrm>
-            <a:prstGeom prst="line">
-              <a:avLst/>
-            </a:prstGeom>
-            <a:ln w="19050">
-              <a:solidFill>
-                <a:srgbClr val="000000"/>
-              </a:solidFill>
-            </a:ln>
-          </p:spPr>
-          <p:style>
-            <a:lnRef idx="2">
-              <a:schemeClr val="accent1"/>
-            </a:lnRef>
-            <a:fillRef idx="0">
-              <a:schemeClr val="accent1"/>
-            </a:fillRef>
-            <a:effectRef idx="1">
-              <a:schemeClr val="accent1"/>
-            </a:effectRef>
-            <a:fontRef idx="minor">
-              <a:schemeClr val="tx1"/>
-            </a:fontRef>
-          </p:style>
-        </p:cxnSp>
-        <p:cxnSp>
-          <p:nvCxnSpPr>
-            <p:cNvPr id="161" name="Connector 76"/>
-            <p:cNvCxnSpPr/>
-            <p:nvPr/>
-          </p:nvCxnSpPr>
-          <p:spPr>
-            <a:xfrm rot="0" flipH="false" flipV="false">
-              <a:off x="3291840" y="4663439"/>
-              <a:ext cx="0" cy="1860804"/>
-            </a:xfrm>
-            <a:prstGeom prst="line">
-              <a:avLst/>
-            </a:prstGeom>
-            <a:ln w="19050">
-              <a:solidFill>
-                <a:srgbClr val="000000"/>
-              </a:solidFill>
-            </a:ln>
-          </p:spPr>
-          <p:style>
-            <a:lnRef idx="2">
-              <a:schemeClr val="accent1"/>
-            </a:lnRef>
-            <a:fillRef idx="0">
-              <a:schemeClr val="accent1"/>
-            </a:fillRef>
-            <a:effectRef idx="1">
-              <a:schemeClr val="accent1"/>
-            </a:effectRef>
-            <a:fontRef idx="minor">
-              <a:schemeClr val="tx1"/>
-            </a:fontRef>
-          </p:style>
-        </p:cxnSp>
-        <p:cxnSp>
-          <p:nvCxnSpPr>
-            <p:cNvPr id="162" name="Connector 77"/>
-            <p:cNvCxnSpPr/>
-            <p:nvPr/>
-          </p:nvCxnSpPr>
-          <p:spPr>
-            <a:xfrm rot="0" flipH="false" flipV="false">
-              <a:off x="3291840" y="6524243"/>
-              <a:ext cx="1165860" cy="0"/>
-            </a:xfrm>
-            <a:prstGeom prst="line">
-              <a:avLst/>
-            </a:prstGeom>
-            <a:ln w="19050">
-              <a:solidFill>
-                <a:srgbClr val="000000"/>
-              </a:solidFill>
-            </a:ln>
-          </p:spPr>
-          <p:style>
-            <a:lnRef idx="2">
-              <a:schemeClr val="accent1"/>
-            </a:lnRef>
-            <a:fillRef idx="0">
-              <a:schemeClr val="accent1"/>
-            </a:fillRef>
-            <a:effectRef idx="1">
-              <a:schemeClr val="accent1"/>
-            </a:effectRef>
-            <a:fontRef idx="minor">
-              <a:schemeClr val="tx1"/>
-            </a:fontRef>
-          </p:style>
-        </p:cxnSp>
-        <p:sp>
-          <p:nvSpPr>
-            <p:cNvPr id="163" name="Oval 78"/>
-            <p:cNvSpPr/>
-            <p:nvPr/>
-          </p:nvSpPr>
-          <p:spPr>
-            <a:xfrm rot="0" flipH="false" flipV="false">
-              <a:off x="4457700" y="6409943"/>
-              <a:ext cx="228600" cy="228600"/>
-            </a:xfrm>
-            <a:prstGeom prst="ellipse">
-              <a:avLst/>
-            </a:prstGeom>
-            <a:solidFill>
-              <a:srgbClr val="FFFFFF"/>
-            </a:solidFill>
-            <a:ln w="19050">
-              <a:solidFill>
-                <a:srgbClr val="000000"/>
-              </a:solidFill>
-            </a:ln>
-          </p:spPr>
-          <p:style>
-            <a:lnRef idx="1">
-              <a:schemeClr val="accent1"/>
-            </a:lnRef>
-            <a:fillRef idx="3">
-              <a:schemeClr val="accent1"/>
-            </a:fillRef>
-            <a:effectRef idx="2">
-              <a:schemeClr val="accent1"/>
-            </a:effectRef>
-            <a:fontRef idx="minor">
-              <a:schemeClr val="lt1"/>
-            </a:fontRef>
-          </p:style>
-          <p:txBody>
-            <a:bodyPr rtlCol="false" anchor="ctr"/>
-            <a:lstStyle/>
-            <a:p>
-              <a:pPr algn="ctr">
-                <a:defRPr sz="1200" b="true">
-                  <a:solidFill>
-                    <a:srgbClr val="000000"/>
-                  </a:solidFill>
-                </a:defRPr>
-              </a:pPr>
-              <a:r>
-                <a:rPr/>
-                <a:t>×</a:t>
-              </a:r>
-              <a:endParaRPr/>
-            </a:p>
-          </p:txBody>
-        </p:sp>
-        <p:sp>
-          <p:nvSpPr>
-            <p:cNvPr id="164" name="TextBox 79"/>
-            <p:cNvSpPr txBox="true"/>
-            <p:nvPr/>
-          </p:nvSpPr>
-          <p:spPr>
-            <a:xfrm rot="0" flipH="false" flipV="false">
-              <a:off x="4759452" y="6428231"/>
-              <a:ext cx="1371600" cy="228600"/>
-            </a:xfrm>
-            <a:prstGeom prst="rect">
-              <a:avLst/>
-            </a:prstGeom>
-            <a:noFill/>
-          </p:spPr>
-          <p:txBody>
-            <a:bodyPr wrap="none">
-              <a:spAutoFit/>
-            </a:bodyPr>
-            <a:lstStyle/>
-            <a:p>
-              <a:pPr>
-                <a:defRPr sz="1000" i="false">
-                  <a:solidFill>
-                    <a:srgbClr val="505050"/>
-                  </a:solidFill>
-                  <a:latin typeface="Times New Roman"/>
-                </a:defRPr>
-              </a:pPr>
-              <a:r>
-                <a:rPr/>
-                <a:t>Scale</a:t>
-              </a:r>
-              <a:endParaRPr/>
-            </a:p>
-          </p:txBody>
-        </p:sp>
-        <p:sp>
-          <p:nvSpPr>
-            <p:cNvPr id="165" name=""/>
-            <p:cNvSpPr/>
-            <p:nvPr/>
-          </p:nvSpPr>
-          <p:spPr>
-            <a:xfrm rot="0">
-              <a:off x="2982872" y="240974"/>
-              <a:ext cx="3126153" cy="3282461"/>
-            </a:xfrm>
-            <a:prstGeom prst="roundRect">
-              <a:avLst/>
-            </a:prstGeom>
-            <a:noFill/>
-            <a:ln w="12700">
-              <a:solidFill>
-                <a:srgbClr val="5C5C5C">
-                  <a:alpha val="100000"/>
-                </a:srgbClr>
-              </a:solidFill>
-              <a:prstDash val="sysDash"/>
-              <a:miter lim="800000"/>
-            </a:ln>
-          </p:spPr>
-          <p:txBody>
-            <a:bodyPr anchor="ctr"/>
-            <a:p>
-              <a:pPr algn="ctr"/>
-              <a:endParaRPr/>
-            </a:p>
-          </p:txBody>
-        </p:sp>
-        <p:sp>
-          <p:nvSpPr>
-            <p:cNvPr id="166" name=""/>
-            <p:cNvSpPr txBox="true"/>
-            <p:nvPr/>
-          </p:nvSpPr>
-          <p:spPr>
-            <a:xfrm rot="0" flipH="false" flipV="false">
-              <a:off x="4942840" y="274320"/>
-              <a:ext cx="863600" cy="273050"/>
-            </a:xfrm>
-            <a:prstGeom prst="rect">
-              <a:avLst/>
-            </a:prstGeom>
-            <a:ln w="6350">
-              <a:prstDash val="solid"/>
-            </a:ln>
-          </p:spPr>
-          <p:txBody>
-            <a:bodyPr wrap="square">
-              <a:spAutoFit/>
-            </a:bodyPr>
-            <a:lstStyle/>
-            <a:p>
-              <a:pPr/>
-              <a:r>
-                <a:rPr lang="zh-CN" sz="1200"/>
-                <a:t>坐标注意力</a:t>
-              </a:r>
-              <a:endParaRPr/>
-            </a:p>
-          </p:txBody>
-        </p:sp>
-        <p:sp>
-          <p:nvSpPr>
-            <p:cNvPr id="167" name=""/>
-            <p:cNvSpPr/>
-            <p:nvPr/>
-          </p:nvSpPr>
-          <p:spPr>
-            <a:xfrm rot="0" flipH="false" flipV="false">
-              <a:off x="3004247" y="4590289"/>
-              <a:ext cx="3785173" cy="2181793"/>
-            </a:xfrm>
-            <a:prstGeom prst="roundRect">
-              <a:avLst/>
-            </a:prstGeom>
-            <a:noFill/>
-            <a:ln w="12700">
-              <a:solidFill>
-                <a:srgbClr val="5C5C5C">
-                  <a:alpha val="100000"/>
-                </a:srgbClr>
-              </a:solidFill>
-              <a:prstDash val="sysDash"/>
-              <a:miter lim="800000"/>
-            </a:ln>
-          </p:spPr>
-          <p:txBody>
-            <a:bodyPr anchor="ctr"/>
-            <a:p>
-              <a:pPr algn="ctr"/>
-              <a:endParaRPr/>
-            </a:p>
-          </p:txBody>
-        </p:sp>
-      </p:grpSp>
-      <p:sp>
-        <p:nvSpPr>
-          <p:cNvPr id="168" name=""/>
-          <p:cNvSpPr txBox="true"/>
-          <p:nvPr/>
-        </p:nvSpPr>
-        <p:spPr>
-          <a:xfrm rot="0" flipH="false" flipV="false">
-            <a:off x="6193598" y="4539168"/>
-            <a:ext cx="342900" cy="393700"/>
-          </a:xfrm>
-          <a:prstGeom prst="rect">
-            <a:avLst/>
-          </a:prstGeom>
-          <a:ln w="12700">
-            <a:prstDash val="solid"/>
-          </a:ln>
-        </p:spPr>
-        <p:txBody>
-          <a:bodyPr wrap="none">
-            <a:spAutoFit/>
-          </a:bodyPr>
-          <a:p>
-            <a:pPr/>
-            <a:r>
-              <a:rPr lang="en-US" sz="1000"/>
-              <a:t>SE</a:t>
-            </a:r>
-            <a:endParaRPr/>
-          </a:p>
-          <a:p>
-            <a:pPr/>
-            <a:endParaRPr lang="en-US" sz="1000"/>
           </a:p>
         </p:txBody>
       </p:sp>
@@ -10014,7 +6491,7 @@
         <a:solidFill>
           <a:schemeClr val="phClr"/>
         </a:solidFill>
-        <a:gradFill rotWithShape="true">
+        <a:gradFill rotWithShape="1">
           <a:gsLst>
             <a:gs pos="0">
               <a:schemeClr val="phClr">
@@ -10035,9 +6512,9 @@
               </a:schemeClr>
             </a:gs>
           </a:gsLst>
-          <a:lin ang="16200000" scaled="true"/>
+          <a:lin ang="16200000" scaled="1"/>
         </a:gradFill>
-        <a:gradFill rotWithShape="true">
+        <a:gradFill rotWithShape="1">
           <a:gsLst>
             <a:gs pos="0">
               <a:schemeClr val="phClr">
@@ -10054,7 +6531,7 @@
               </a:schemeClr>
             </a:gs>
           </a:gsLst>
-          <a:lin ang="16200000" scaled="false"/>
+          <a:lin ang="16200000" scaled="0"/>
         </a:gradFill>
       </a:fillStyleLst>
       <a:lnStyleLst>
@@ -10083,7 +6560,7 @@
       <a:effectStyleLst>
         <a:effectStyle>
           <a:effectLst>
-            <a:outerShdw blurRad="40000" dist="20000" dir="5400000" rotWithShape="false">
+            <a:outerShdw blurRad="40000" dist="20000" dir="5400000" rotWithShape="0">
               <a:srgbClr val="000000">
                 <a:alpha val="38000"/>
               </a:srgbClr>
@@ -10092,7 +6569,7 @@
         </a:effectStyle>
         <a:effectStyle>
           <a:effectLst>
-            <a:outerShdw blurRad="40000" dist="23000" dir="5400000" rotWithShape="false">
+            <a:outerShdw blurRad="40000" dist="23000" dir="5400000" rotWithShape="0">
               <a:srgbClr val="000000">
                 <a:alpha val="35000"/>
               </a:srgbClr>
@@ -10101,7 +6578,7 @@
         </a:effectStyle>
         <a:effectStyle>
           <a:effectLst>
-            <a:outerShdw blurRad="40000" dist="23000" dir="5400000" rotWithShape="false">
+            <a:outerShdw blurRad="40000" dist="23000" dir="5400000" rotWithShape="0">
               <a:srgbClr val="000000">
                 <a:alpha val="35000"/>
               </a:srgbClr>
@@ -10124,7 +6601,7 @@
         <a:solidFill>
           <a:schemeClr val="phClr"/>
         </a:solidFill>
-        <a:gradFill rotWithShape="true">
+        <a:gradFill rotWithShape="1">
           <a:gsLst>
             <a:gs pos="0">
               <a:schemeClr val="phClr">
@@ -10150,7 +6627,7 @@
             <a:fillToRect l="50000" t="-80000" r="50000" b="180000"/>
           </a:path>
         </a:gradFill>
-        <a:gradFill rotWithShape="true">
+        <a:gradFill rotWithShape="1">
           <a:gsLst>
             <a:gs pos="0">
               <a:schemeClr val="phClr">
@@ -10172,5 +6649,46 @@
       </a:bgFillStyleLst>
     </a:fmtScheme>
   </a:themeElements>
+  <a:objectDefaults>
+    <a:spDef>
+      <a:spPr/>
+      <a:bodyPr/>
+      <a:lstStyle/>
+      <a:style>
+        <a:lnRef idx="1">
+          <a:schemeClr val="accent1"/>
+        </a:lnRef>
+        <a:fillRef idx="3">
+          <a:schemeClr val="accent1"/>
+        </a:fillRef>
+        <a:effectRef idx="2">
+          <a:schemeClr val="accent1"/>
+        </a:effectRef>
+        <a:fontRef idx="minor">
+          <a:schemeClr val="lt1"/>
+        </a:fontRef>
+      </a:style>
+    </a:spDef>
+    <a:lnDef>
+      <a:spPr/>
+      <a:bodyPr/>
+      <a:lstStyle/>
+      <a:style>
+        <a:lnRef idx="2">
+          <a:schemeClr val="accent1"/>
+        </a:lnRef>
+        <a:fillRef idx="0">
+          <a:schemeClr val="accent1"/>
+        </a:fillRef>
+        <a:effectRef idx="1">
+          <a:schemeClr val="accent1"/>
+        </a:effectRef>
+        <a:fontRef idx="minor">
+          <a:schemeClr val="tx1"/>
+        </a:fontRef>
+      </a:style>
+    </a:lnDef>
+  </a:objectDefaults>
+  <a:extraClrSchemeLst/>
 </a:theme>
 </file>